--- a/templates/presentation_template_en.pptx
+++ b/templates/presentation_template_en.pptx
@@ -1,53 +1,53 @@
 
 <file path=ppt/presentation.xml><?xml version="1.0" encoding="utf-8"?>
-<p:presentation xmlns:a="http://schemas.openxmlformats.org/drawingml/2006/main" xmlns:r="http://schemas.openxmlformats.org/officeDocument/2006/relationships" xmlns:mc="http://schemas.openxmlformats.org/markup-compatibility/2006" xmlns:mv="urn:schemas-microsoft-com:mac:vml" xmlns:p="http://schemas.openxmlformats.org/presentationml/2006/main" xmlns:c="http://schemas.openxmlformats.org/drawingml/2006/chart" xmlns:dgm="http://schemas.openxmlformats.org/drawingml/2006/diagram" xmlns:o="urn:schemas-microsoft-com:office:office" xmlns:v="urn:schemas-microsoft-com:vml" xmlns:pvml="urn:schemas-microsoft-com:office:powerpoint" xmlns:com="http://schemas.openxmlformats.org/drawingml/2006/compatibility" xmlns:p14="http://schemas.microsoft.com/office/powerpoint/2010/main" xmlns:p15="http://schemas.microsoft.com/office/powerpoint/2012/main" xmlns:ahyp="http://schemas.microsoft.com/office/drawing/2018/hyperlinkcolor" autoCompressPictures="0" embedTrueTypeFonts="1" strictFirstAndLastChars="0" saveSubsetFonts="1">
+<p:presentation xmlns:a="http://schemas.openxmlformats.org/drawingml/2006/main" xmlns:r="http://schemas.openxmlformats.org/officeDocument/2006/relationships" xmlns:p="http://schemas.openxmlformats.org/presentationml/2006/main" strictFirstAndLastChars="0" embedTrueTypeFonts="1" saveSubsetFonts="1" autoCompressPictures="0">
   <p:sldMasterIdLst>
-    <p:sldMasterId id="2147483660" r:id="rId4"/>
+    <p:sldMasterId id="2147483660" r:id="rId1"/>
   </p:sldMasterIdLst>
   <p:notesMasterIdLst>
-    <p:notesMasterId r:id="rId5"/>
+    <p:notesMasterId r:id="rId14"/>
   </p:notesMasterIdLst>
   <p:sldIdLst>
-    <p:sldId id="256" r:id="rId6"/>
-    <p:sldId id="257" r:id="rId7"/>
-    <p:sldId id="258" r:id="rId8"/>
-    <p:sldId id="259" r:id="rId9"/>
-    <p:sldId id="260" r:id="rId10"/>
-    <p:sldId id="261" r:id="rId11"/>
-    <p:sldId id="262" r:id="rId12"/>
-    <p:sldId id="263" r:id="rId13"/>
-    <p:sldId id="264" r:id="rId14"/>
-    <p:sldId id="265" r:id="rId15"/>
-    <p:sldId id="266" r:id="rId16"/>
-    <p:sldId id="267" r:id="rId17"/>
+    <p:sldId id="256" r:id="rId2"/>
+    <p:sldId id="257" r:id="rId3"/>
+    <p:sldId id="258" r:id="rId4"/>
+    <p:sldId id="259" r:id="rId5"/>
+    <p:sldId id="260" r:id="rId6"/>
+    <p:sldId id="261" r:id="rId7"/>
+    <p:sldId id="262" r:id="rId8"/>
+    <p:sldId id="263" r:id="rId9"/>
+    <p:sldId id="264" r:id="rId10"/>
+    <p:sldId id="265" r:id="rId11"/>
+    <p:sldId id="266" r:id="rId12"/>
+    <p:sldId id="267" r:id="rId13"/>
   </p:sldIdLst>
-  <p:sldSz cy="5143500" cx="9144000"/>
+  <p:sldSz cx="9144000" cy="5143500" type="screen16x9"/>
   <p:notesSz cx="6858000" cy="9144000"/>
   <p:embeddedFontLst>
     <p:embeddedFont>
-      <p:font typeface="Montserrat"/>
-      <p:regular r:id="rId18"/>
-      <p:bold r:id="rId19"/>
-      <p:italic r:id="rId20"/>
-      <p:boldItalic r:id="rId21"/>
+      <p:font typeface="Montserrat" pitchFamily="2" charset="77"/>
+      <p:regular r:id="rId15"/>
+      <p:bold r:id="rId16"/>
+      <p:italic r:id="rId17"/>
+      <p:boldItalic r:id="rId18"/>
     </p:embeddedFont>
     <p:embeddedFont>
-      <p:font typeface="Sora ExtraLight"/>
+      <p:font typeface="Sora" pitchFamily="2" charset="0"/>
+      <p:regular r:id="rId19"/>
+      <p:bold r:id="rId20"/>
+    </p:embeddedFont>
+    <p:embeddedFont>
+      <p:font typeface="Sora ExtraBold" pitchFamily="2" charset="0"/>
+      <p:bold r:id="rId21"/>
+    </p:embeddedFont>
+    <p:embeddedFont>
+      <p:font typeface="Sora ExtraLight" pitchFamily="2" charset="0"/>
       <p:regular r:id="rId22"/>
       <p:bold r:id="rId23"/>
     </p:embeddedFont>
-    <p:embeddedFont>
-      <p:font typeface="Sora ExtraBold"/>
-      <p:bold r:id="rId24"/>
-    </p:embeddedFont>
-    <p:embeddedFont>
-      <p:font typeface="Sora"/>
-      <p:regular r:id="rId25"/>
-      <p:bold r:id="rId26"/>
-    </p:embeddedFont>
   </p:embeddedFontLst>
   <p:defaultTextStyle>
-    <a:defPPr lvl="0" marR="0" rtl="0" algn="l">
+    <a:defPPr marR="0" lvl="0" algn="l" rtl="0">
       <a:lnSpc>
         <a:spcPct val="100000"/>
       </a:lnSpc>
@@ -58,7 +58,7 @@
         <a:spcPts val="0"/>
       </a:spcAft>
     </a:defPPr>
-    <a:lvl1pPr lvl="0" marR="0" rtl="0" algn="l">
+    <a:lvl1pPr marR="0" lvl="0" algn="l" rtl="0">
       <a:lnSpc>
         <a:spcPct val="100000"/>
       </a:lnSpc>
@@ -72,7 +72,7 @@
         <a:srgbClr val="000000"/>
       </a:buClr>
       <a:buFont typeface="Arial"/>
-      <a:defRPr b="0" i="0" sz="1400" u="none" cap="none" strike="noStrike">
+      <a:defRPr sz="1400" b="0" i="0" u="none" strike="noStrike" cap="none">
         <a:solidFill>
           <a:srgbClr val="000000"/>
         </a:solidFill>
@@ -82,7 +82,7 @@
         <a:sym typeface="Arial"/>
       </a:defRPr>
     </a:lvl1pPr>
-    <a:lvl2pPr lvl="1" marR="0" rtl="0" algn="l">
+    <a:lvl2pPr marR="0" lvl="1" algn="l" rtl="0">
       <a:lnSpc>
         <a:spcPct val="100000"/>
       </a:lnSpc>
@@ -96,7 +96,7 @@
         <a:srgbClr val="000000"/>
       </a:buClr>
       <a:buFont typeface="Arial"/>
-      <a:defRPr b="0" i="0" sz="1400" u="none" cap="none" strike="noStrike">
+      <a:defRPr sz="1400" b="0" i="0" u="none" strike="noStrike" cap="none">
         <a:solidFill>
           <a:srgbClr val="000000"/>
         </a:solidFill>
@@ -106,7 +106,7 @@
         <a:sym typeface="Arial"/>
       </a:defRPr>
     </a:lvl2pPr>
-    <a:lvl3pPr lvl="2" marR="0" rtl="0" algn="l">
+    <a:lvl3pPr marR="0" lvl="2" algn="l" rtl="0">
       <a:lnSpc>
         <a:spcPct val="100000"/>
       </a:lnSpc>
@@ -120,7 +120,7 @@
         <a:srgbClr val="000000"/>
       </a:buClr>
       <a:buFont typeface="Arial"/>
-      <a:defRPr b="0" i="0" sz="1400" u="none" cap="none" strike="noStrike">
+      <a:defRPr sz="1400" b="0" i="0" u="none" strike="noStrike" cap="none">
         <a:solidFill>
           <a:srgbClr val="000000"/>
         </a:solidFill>
@@ -130,7 +130,7 @@
         <a:sym typeface="Arial"/>
       </a:defRPr>
     </a:lvl3pPr>
-    <a:lvl4pPr lvl="3" marR="0" rtl="0" algn="l">
+    <a:lvl4pPr marR="0" lvl="3" algn="l" rtl="0">
       <a:lnSpc>
         <a:spcPct val="100000"/>
       </a:lnSpc>
@@ -144,7 +144,7 @@
         <a:srgbClr val="000000"/>
       </a:buClr>
       <a:buFont typeface="Arial"/>
-      <a:defRPr b="0" i="0" sz="1400" u="none" cap="none" strike="noStrike">
+      <a:defRPr sz="1400" b="0" i="0" u="none" strike="noStrike" cap="none">
         <a:solidFill>
           <a:srgbClr val="000000"/>
         </a:solidFill>
@@ -154,7 +154,7 @@
         <a:sym typeface="Arial"/>
       </a:defRPr>
     </a:lvl4pPr>
-    <a:lvl5pPr lvl="4" marR="0" rtl="0" algn="l">
+    <a:lvl5pPr marR="0" lvl="4" algn="l" rtl="0">
       <a:lnSpc>
         <a:spcPct val="100000"/>
       </a:lnSpc>
@@ -168,7 +168,7 @@
         <a:srgbClr val="000000"/>
       </a:buClr>
       <a:buFont typeface="Arial"/>
-      <a:defRPr b="0" i="0" sz="1400" u="none" cap="none" strike="noStrike">
+      <a:defRPr sz="1400" b="0" i="0" u="none" strike="noStrike" cap="none">
         <a:solidFill>
           <a:srgbClr val="000000"/>
         </a:solidFill>
@@ -178,7 +178,7 @@
         <a:sym typeface="Arial"/>
       </a:defRPr>
     </a:lvl5pPr>
-    <a:lvl6pPr lvl="5" marR="0" rtl="0" algn="l">
+    <a:lvl6pPr marR="0" lvl="5" algn="l" rtl="0">
       <a:lnSpc>
         <a:spcPct val="100000"/>
       </a:lnSpc>
@@ -192,7 +192,7 @@
         <a:srgbClr val="000000"/>
       </a:buClr>
       <a:buFont typeface="Arial"/>
-      <a:defRPr b="0" i="0" sz="1400" u="none" cap="none" strike="noStrike">
+      <a:defRPr sz="1400" b="0" i="0" u="none" strike="noStrike" cap="none">
         <a:solidFill>
           <a:srgbClr val="000000"/>
         </a:solidFill>
@@ -202,7 +202,7 @@
         <a:sym typeface="Arial"/>
       </a:defRPr>
     </a:lvl6pPr>
-    <a:lvl7pPr lvl="6" marR="0" rtl="0" algn="l">
+    <a:lvl7pPr marR="0" lvl="6" algn="l" rtl="0">
       <a:lnSpc>
         <a:spcPct val="100000"/>
       </a:lnSpc>
@@ -216,7 +216,7 @@
         <a:srgbClr val="000000"/>
       </a:buClr>
       <a:buFont typeface="Arial"/>
-      <a:defRPr b="0" i="0" sz="1400" u="none" cap="none" strike="noStrike">
+      <a:defRPr sz="1400" b="0" i="0" u="none" strike="noStrike" cap="none">
         <a:solidFill>
           <a:srgbClr val="000000"/>
         </a:solidFill>
@@ -226,7 +226,7 @@
         <a:sym typeface="Arial"/>
       </a:defRPr>
     </a:lvl7pPr>
-    <a:lvl8pPr lvl="7" marR="0" rtl="0" algn="l">
+    <a:lvl8pPr marR="0" lvl="7" algn="l" rtl="0">
       <a:lnSpc>
         <a:spcPct val="100000"/>
       </a:lnSpc>
@@ -240,7 +240,7 @@
         <a:srgbClr val="000000"/>
       </a:buClr>
       <a:buFont typeface="Arial"/>
-      <a:defRPr b="0" i="0" sz="1400" u="none" cap="none" strike="noStrike">
+      <a:defRPr sz="1400" b="0" i="0" u="none" strike="noStrike" cap="none">
         <a:solidFill>
           <a:srgbClr val="000000"/>
         </a:solidFill>
@@ -250,7 +250,7 @@
         <a:sym typeface="Arial"/>
       </a:defRPr>
     </a:lvl8pPr>
-    <a:lvl9pPr lvl="8" marR="0" rtl="0" algn="l">
+    <a:lvl9pPr marR="0" lvl="8" algn="l" rtl="0">
       <a:lnSpc>
         <a:spcPct val="100000"/>
       </a:lnSpc>
@@ -264,7 +264,7 @@
         <a:srgbClr val="000000"/>
       </a:buClr>
       <a:buFont typeface="Arial"/>
-      <a:defRPr b="0" i="0" sz="1400" u="none" cap="none" strike="noStrike">
+      <a:defRPr sz="1400" b="0" i="0" u="none" strike="noStrike" cap="none">
         <a:solidFill>
           <a:srgbClr val="000000"/>
         </a:solidFill>
@@ -277,7 +277,7 @@
   </p:defaultTextStyle>
   <p:extLst>
     <p:ext uri="{EFAFB233-063F-42B5-8137-9DF3F51BA10A}">
-      <p15:sldGuideLst>
+      <p15:sldGuideLst xmlns:p15="http://schemas.microsoft.com/office/powerpoint/2012/main">
         <p15:guide id="1" orient="horz" pos="1620">
           <p15:clr>
             <a:srgbClr val="747775"/>
@@ -295,11 +295,16 @@
 </file>
 
 <file path=ppt/notesMasters/notesMaster1.xml><?xml version="1.0" encoding="utf-8"?>
-<p:notesMaster xmlns:a="http://schemas.openxmlformats.org/drawingml/2006/main" xmlns:r="http://schemas.openxmlformats.org/officeDocument/2006/relationships" xmlns:mc="http://schemas.openxmlformats.org/markup-compatibility/2006" xmlns:mv="urn:schemas-microsoft-com:mac:vml" xmlns:p="http://schemas.openxmlformats.org/presentationml/2006/main" xmlns:c="http://schemas.openxmlformats.org/drawingml/2006/chart" xmlns:dgm="http://schemas.openxmlformats.org/drawingml/2006/diagram" xmlns:o="urn:schemas-microsoft-com:office:office" xmlns:v="urn:schemas-microsoft-com:vml" xmlns:pvml="urn:schemas-microsoft-com:office:powerpoint" xmlns:com="http://schemas.openxmlformats.org/drawingml/2006/compatibility" xmlns:p14="http://schemas.microsoft.com/office/powerpoint/2010/main" xmlns:p15="http://schemas.microsoft.com/office/powerpoint/2012/main" xmlns:ahyp="http://schemas.microsoft.com/office/drawing/2018/hyperlinkcolor">
+<p:notesMaster xmlns:a="http://schemas.openxmlformats.org/drawingml/2006/main" xmlns:r="http://schemas.openxmlformats.org/officeDocument/2006/relationships" xmlns:p="http://schemas.openxmlformats.org/presentationml/2006/main">
   <p:cSld>
+    <p:bg>
+      <p:bgRef idx="1001">
+        <a:schemeClr val="bg1"/>
+      </p:bgRef>
+    </p:bg>
     <p:spTree>
       <p:nvGrpSpPr>
-        <p:cNvPr id="2" name="Shape 2"/>
+        <p:cNvPr id="1" name="Shape 2"/>
         <p:cNvGrpSpPr/>
         <p:nvPr/>
       </p:nvGrpSpPr>
@@ -314,9 +319,11 @@
       <p:sp>
         <p:nvSpPr>
           <p:cNvPr id="3" name="Google Shape;3;n"/>
-          <p:cNvSpPr/>
+          <p:cNvSpPr>
+            <a:spLocks noGrp="1" noRot="1" noChangeAspect="1"/>
+          </p:cNvSpPr>
           <p:nvPr>
-            <p:ph idx="2" type="sldImg"/>
+            <p:ph type="sldImg" idx="2"/>
           </p:nvPr>
         </p:nvSpPr>
         <p:spPr>
@@ -325,9 +332,13 @@
             <a:ext cx="6096075" cy="3429000"/>
           </a:xfrm>
           <a:custGeom>
-            <a:rect b="b" l="l" r="r" t="t"/>
+            <a:avLst/>
+            <a:gdLst/>
+            <a:ahLst/>
+            <a:cxnLst/>
+            <a:rect l="l" t="t" r="r" b="b"/>
             <a:pathLst>
-              <a:path extrusionOk="0" h="120000" w="120000">
+              <a:path w="120000" h="120000" extrusionOk="0">
                 <a:moveTo>
                   <a:pt x="0" y="0"/>
                 </a:moveTo>
@@ -345,23 +356,25 @@
             </a:pathLst>
           </a:custGeom>
           <a:noFill/>
-          <a:ln cap="flat" cmpd="sng" w="9525">
+          <a:ln w="9525" cap="flat" cmpd="sng">
             <a:solidFill>
               <a:srgbClr val="000000"/>
             </a:solidFill>
             <a:prstDash val="solid"/>
             <a:round/>
-            <a:headEnd len="sm" w="sm" type="none"/>
-            <a:tailEnd len="sm" w="sm" type="none"/>
+            <a:headEnd type="none" w="sm" len="sm"/>
+            <a:tailEnd type="none" w="sm" len="sm"/>
           </a:ln>
         </p:spPr>
       </p:sp>
       <p:sp>
         <p:nvSpPr>
           <p:cNvPr id="4" name="Google Shape;4;n"/>
-          <p:cNvSpPr txBox="1"/>
+          <p:cNvSpPr txBox="1">
+            <a:spLocks noGrp="1"/>
+          </p:cNvSpPr>
           <p:nvPr>
-            <p:ph idx="1" type="body"/>
+            <p:ph type="body" idx="1"/>
           </p:nvPr>
         </p:nvSpPr>
         <p:spPr>
@@ -378,11 +391,11 @@
           </a:ln>
         </p:spPr>
         <p:txBody>
-          <a:bodyPr anchorCtr="0" anchor="t" bIns="91425" lIns="91425" spcFirstLastPara="1" rIns="91425" wrap="square" tIns="91425">
+          <a:bodyPr spcFirstLastPara="1" wrap="square" lIns="91425" tIns="91425" rIns="91425" bIns="91425" anchor="t" anchorCtr="0">
             <a:noAutofit/>
           </a:bodyPr>
           <a:lstStyle>
-            <a:lvl1pPr indent="-298450" lvl="0" marL="457200" marR="0" rtl="0" algn="l">
+            <a:lvl1pPr marL="457200" marR="0" lvl="0" indent="-298450" algn="l" rtl="0">
               <a:lnSpc>
                 <a:spcPct val="100000"/>
               </a:lnSpc>
@@ -398,7 +411,7 @@
               <a:buSzPts val="1100"/>
               <a:buFont typeface="Arial"/>
               <a:buChar char="●"/>
-              <a:defRPr b="0" i="0" sz="1100" u="none" cap="none" strike="noStrike">
+              <a:defRPr sz="1100" b="0" i="0" u="none" strike="noStrike" cap="none">
                 <a:solidFill>
                   <a:srgbClr val="000000"/>
                 </a:solidFill>
@@ -408,7 +421,7 @@
                 <a:sym typeface="Arial"/>
               </a:defRPr>
             </a:lvl1pPr>
-            <a:lvl2pPr indent="-298450" lvl="1" marL="914400" marR="0" rtl="0" algn="l">
+            <a:lvl2pPr marL="914400" marR="0" lvl="1" indent="-298450" algn="l" rtl="0">
               <a:lnSpc>
                 <a:spcPct val="100000"/>
               </a:lnSpc>
@@ -424,7 +437,7 @@
               <a:buSzPts val="1100"/>
               <a:buFont typeface="Arial"/>
               <a:buChar char="○"/>
-              <a:defRPr b="0" i="0" sz="1100" u="none" cap="none" strike="noStrike">
+              <a:defRPr sz="1100" b="0" i="0" u="none" strike="noStrike" cap="none">
                 <a:solidFill>
                   <a:srgbClr val="000000"/>
                 </a:solidFill>
@@ -434,7 +447,7 @@
                 <a:sym typeface="Arial"/>
               </a:defRPr>
             </a:lvl2pPr>
-            <a:lvl3pPr indent="-298450" lvl="2" marL="1371600" marR="0" rtl="0" algn="l">
+            <a:lvl3pPr marL="1371600" marR="0" lvl="2" indent="-298450" algn="l" rtl="0">
               <a:lnSpc>
                 <a:spcPct val="100000"/>
               </a:lnSpc>
@@ -450,7 +463,7 @@
               <a:buSzPts val="1100"/>
               <a:buFont typeface="Arial"/>
               <a:buChar char="■"/>
-              <a:defRPr b="0" i="0" sz="1100" u="none" cap="none" strike="noStrike">
+              <a:defRPr sz="1100" b="0" i="0" u="none" strike="noStrike" cap="none">
                 <a:solidFill>
                   <a:srgbClr val="000000"/>
                 </a:solidFill>
@@ -460,7 +473,7 @@
                 <a:sym typeface="Arial"/>
               </a:defRPr>
             </a:lvl3pPr>
-            <a:lvl4pPr indent="-298450" lvl="3" marL="1828800" marR="0" rtl="0" algn="l">
+            <a:lvl4pPr marL="1828800" marR="0" lvl="3" indent="-298450" algn="l" rtl="0">
               <a:lnSpc>
                 <a:spcPct val="100000"/>
               </a:lnSpc>
@@ -476,7 +489,7 @@
               <a:buSzPts val="1100"/>
               <a:buFont typeface="Arial"/>
               <a:buChar char="●"/>
-              <a:defRPr b="0" i="0" sz="1100" u="none" cap="none" strike="noStrike">
+              <a:defRPr sz="1100" b="0" i="0" u="none" strike="noStrike" cap="none">
                 <a:solidFill>
                   <a:srgbClr val="000000"/>
                 </a:solidFill>
@@ -486,7 +499,7 @@
                 <a:sym typeface="Arial"/>
               </a:defRPr>
             </a:lvl4pPr>
-            <a:lvl5pPr indent="-298450" lvl="4" marL="2286000" marR="0" rtl="0" algn="l">
+            <a:lvl5pPr marL="2286000" marR="0" lvl="4" indent="-298450" algn="l" rtl="0">
               <a:lnSpc>
                 <a:spcPct val="100000"/>
               </a:lnSpc>
@@ -502,7 +515,7 @@
               <a:buSzPts val="1100"/>
               <a:buFont typeface="Arial"/>
               <a:buChar char="○"/>
-              <a:defRPr b="0" i="0" sz="1100" u="none" cap="none" strike="noStrike">
+              <a:defRPr sz="1100" b="0" i="0" u="none" strike="noStrike" cap="none">
                 <a:solidFill>
                   <a:srgbClr val="000000"/>
                 </a:solidFill>
@@ -512,7 +525,7 @@
                 <a:sym typeface="Arial"/>
               </a:defRPr>
             </a:lvl5pPr>
-            <a:lvl6pPr indent="-298450" lvl="5" marL="2743200" marR="0" rtl="0" algn="l">
+            <a:lvl6pPr marL="2743200" marR="0" lvl="5" indent="-298450" algn="l" rtl="0">
               <a:lnSpc>
                 <a:spcPct val="100000"/>
               </a:lnSpc>
@@ -528,7 +541,7 @@
               <a:buSzPts val="1100"/>
               <a:buFont typeface="Arial"/>
               <a:buChar char="■"/>
-              <a:defRPr b="0" i="0" sz="1100" u="none" cap="none" strike="noStrike">
+              <a:defRPr sz="1100" b="0" i="0" u="none" strike="noStrike" cap="none">
                 <a:solidFill>
                   <a:srgbClr val="000000"/>
                 </a:solidFill>
@@ -538,7 +551,7 @@
                 <a:sym typeface="Arial"/>
               </a:defRPr>
             </a:lvl6pPr>
-            <a:lvl7pPr indent="-298450" lvl="6" marL="3200400" marR="0" rtl="0" algn="l">
+            <a:lvl7pPr marL="3200400" marR="0" lvl="6" indent="-298450" algn="l" rtl="0">
               <a:lnSpc>
                 <a:spcPct val="100000"/>
               </a:lnSpc>
@@ -554,7 +567,7 @@
               <a:buSzPts val="1100"/>
               <a:buFont typeface="Arial"/>
               <a:buChar char="●"/>
-              <a:defRPr b="0" i="0" sz="1100" u="none" cap="none" strike="noStrike">
+              <a:defRPr sz="1100" b="0" i="0" u="none" strike="noStrike" cap="none">
                 <a:solidFill>
                   <a:srgbClr val="000000"/>
                 </a:solidFill>
@@ -564,7 +577,7 @@
                 <a:sym typeface="Arial"/>
               </a:defRPr>
             </a:lvl7pPr>
-            <a:lvl8pPr indent="-298450" lvl="7" marL="3657600" marR="0" rtl="0" algn="l">
+            <a:lvl8pPr marL="3657600" marR="0" lvl="7" indent="-298450" algn="l" rtl="0">
               <a:lnSpc>
                 <a:spcPct val="100000"/>
               </a:lnSpc>
@@ -580,7 +593,7 @@
               <a:buSzPts val="1100"/>
               <a:buFont typeface="Arial"/>
               <a:buChar char="○"/>
-              <a:defRPr b="0" i="0" sz="1100" u="none" cap="none" strike="noStrike">
+              <a:defRPr sz="1100" b="0" i="0" u="none" strike="noStrike" cap="none">
                 <a:solidFill>
                   <a:srgbClr val="000000"/>
                 </a:solidFill>
@@ -590,7 +603,7 @@
                 <a:sym typeface="Arial"/>
               </a:defRPr>
             </a:lvl8pPr>
-            <a:lvl9pPr indent="-298450" lvl="8" marL="4114800" marR="0" rtl="0" algn="l">
+            <a:lvl9pPr marL="4114800" marR="0" lvl="8" indent="-298450" algn="l" rtl="0">
               <a:lnSpc>
                 <a:spcPct val="100000"/>
               </a:lnSpc>
@@ -606,7 +619,7 @@
               <a:buSzPts val="1100"/>
               <a:buFont typeface="Arial"/>
               <a:buChar char="■"/>
-              <a:defRPr b="0" i="0" sz="1100" u="none" cap="none" strike="noStrike">
+              <a:defRPr sz="1100" b="0" i="0" u="none" strike="noStrike" cap="none">
                 <a:solidFill>
                   <a:srgbClr val="000000"/>
                 </a:solidFill>
@@ -617,14 +630,16 @@
               </a:defRPr>
             </a:lvl9pPr>
           </a:lstStyle>
-          <a:p/>
+          <a:p>
+            <a:endParaRPr/>
+          </a:p>
         </p:txBody>
       </p:sp>
     </p:spTree>
   </p:cSld>
-  <p:clrMap accent1="accent1" accent2="accent2" accent3="accent3" accent4="accent4" accent5="accent5" accent6="accent6" bg1="lt1" bg2="dk2" tx1="dk1" tx2="lt2" folHlink="folHlink" hlink="hlink"/>
+  <p:clrMap bg1="lt1" tx1="dk1" bg2="dk2" tx2="lt2" accent1="accent1" accent2="accent2" accent3="accent3" accent4="accent4" accent5="accent5" accent6="accent6" hlink="hlink" folHlink="folHlink"/>
   <p:notesStyle>
-    <a:defPPr lvl="0" marR="0" rtl="0" algn="l">
+    <a:defPPr marR="0" lvl="0" algn="l" rtl="0">
       <a:lnSpc>
         <a:spcPct val="100000"/>
       </a:lnSpc>
@@ -635,7 +650,7 @@
         <a:spcPts val="0"/>
       </a:spcAft>
     </a:defPPr>
-    <a:lvl1pPr lvl="0" marR="0" rtl="0" algn="l">
+    <a:lvl1pPr marR="0" lvl="0" algn="l" rtl="0">
       <a:lnSpc>
         <a:spcPct val="100000"/>
       </a:lnSpc>
@@ -649,7 +664,7 @@
         <a:srgbClr val="000000"/>
       </a:buClr>
       <a:buFont typeface="Arial"/>
-      <a:defRPr b="0" i="0" sz="1400" u="none" cap="none" strike="noStrike">
+      <a:defRPr sz="1400" b="0" i="0" u="none" strike="noStrike" cap="none">
         <a:solidFill>
           <a:srgbClr val="000000"/>
         </a:solidFill>
@@ -659,7 +674,7 @@
         <a:sym typeface="Arial"/>
       </a:defRPr>
     </a:lvl1pPr>
-    <a:lvl2pPr lvl="1" marR="0" rtl="0" algn="l">
+    <a:lvl2pPr marR="0" lvl="1" algn="l" rtl="0">
       <a:lnSpc>
         <a:spcPct val="100000"/>
       </a:lnSpc>
@@ -673,7 +688,7 @@
         <a:srgbClr val="000000"/>
       </a:buClr>
       <a:buFont typeface="Arial"/>
-      <a:defRPr b="0" i="0" sz="1400" u="none" cap="none" strike="noStrike">
+      <a:defRPr sz="1400" b="0" i="0" u="none" strike="noStrike" cap="none">
         <a:solidFill>
           <a:srgbClr val="000000"/>
         </a:solidFill>
@@ -683,7 +698,7 @@
         <a:sym typeface="Arial"/>
       </a:defRPr>
     </a:lvl2pPr>
-    <a:lvl3pPr lvl="2" marR="0" rtl="0" algn="l">
+    <a:lvl3pPr marR="0" lvl="2" algn="l" rtl="0">
       <a:lnSpc>
         <a:spcPct val="100000"/>
       </a:lnSpc>
@@ -697,7 +712,7 @@
         <a:srgbClr val="000000"/>
       </a:buClr>
       <a:buFont typeface="Arial"/>
-      <a:defRPr b="0" i="0" sz="1400" u="none" cap="none" strike="noStrike">
+      <a:defRPr sz="1400" b="0" i="0" u="none" strike="noStrike" cap="none">
         <a:solidFill>
           <a:srgbClr val="000000"/>
         </a:solidFill>
@@ -707,7 +722,7 @@
         <a:sym typeface="Arial"/>
       </a:defRPr>
     </a:lvl3pPr>
-    <a:lvl4pPr lvl="3" marR="0" rtl="0" algn="l">
+    <a:lvl4pPr marR="0" lvl="3" algn="l" rtl="0">
       <a:lnSpc>
         <a:spcPct val="100000"/>
       </a:lnSpc>
@@ -721,7 +736,7 @@
         <a:srgbClr val="000000"/>
       </a:buClr>
       <a:buFont typeface="Arial"/>
-      <a:defRPr b="0" i="0" sz="1400" u="none" cap="none" strike="noStrike">
+      <a:defRPr sz="1400" b="0" i="0" u="none" strike="noStrike" cap="none">
         <a:solidFill>
           <a:srgbClr val="000000"/>
         </a:solidFill>
@@ -731,7 +746,7 @@
         <a:sym typeface="Arial"/>
       </a:defRPr>
     </a:lvl4pPr>
-    <a:lvl5pPr lvl="4" marR="0" rtl="0" algn="l">
+    <a:lvl5pPr marR="0" lvl="4" algn="l" rtl="0">
       <a:lnSpc>
         <a:spcPct val="100000"/>
       </a:lnSpc>
@@ -745,7 +760,7 @@
         <a:srgbClr val="000000"/>
       </a:buClr>
       <a:buFont typeface="Arial"/>
-      <a:defRPr b="0" i="0" sz="1400" u="none" cap="none" strike="noStrike">
+      <a:defRPr sz="1400" b="0" i="0" u="none" strike="noStrike" cap="none">
         <a:solidFill>
           <a:srgbClr val="000000"/>
         </a:solidFill>
@@ -755,7 +770,7 @@
         <a:sym typeface="Arial"/>
       </a:defRPr>
     </a:lvl5pPr>
-    <a:lvl6pPr lvl="5" marR="0" rtl="0" algn="l">
+    <a:lvl6pPr marR="0" lvl="5" algn="l" rtl="0">
       <a:lnSpc>
         <a:spcPct val="100000"/>
       </a:lnSpc>
@@ -769,7 +784,7 @@
         <a:srgbClr val="000000"/>
       </a:buClr>
       <a:buFont typeface="Arial"/>
-      <a:defRPr b="0" i="0" sz="1400" u="none" cap="none" strike="noStrike">
+      <a:defRPr sz="1400" b="0" i="0" u="none" strike="noStrike" cap="none">
         <a:solidFill>
           <a:srgbClr val="000000"/>
         </a:solidFill>
@@ -779,7 +794,7 @@
         <a:sym typeface="Arial"/>
       </a:defRPr>
     </a:lvl6pPr>
-    <a:lvl7pPr lvl="6" marR="0" rtl="0" algn="l">
+    <a:lvl7pPr marR="0" lvl="6" algn="l" rtl="0">
       <a:lnSpc>
         <a:spcPct val="100000"/>
       </a:lnSpc>
@@ -793,7 +808,7 @@
         <a:srgbClr val="000000"/>
       </a:buClr>
       <a:buFont typeface="Arial"/>
-      <a:defRPr b="0" i="0" sz="1400" u="none" cap="none" strike="noStrike">
+      <a:defRPr sz="1400" b="0" i="0" u="none" strike="noStrike" cap="none">
         <a:solidFill>
           <a:srgbClr val="000000"/>
         </a:solidFill>
@@ -803,7 +818,7 @@
         <a:sym typeface="Arial"/>
       </a:defRPr>
     </a:lvl7pPr>
-    <a:lvl8pPr lvl="7" marR="0" rtl="0" algn="l">
+    <a:lvl8pPr marR="0" lvl="7" algn="l" rtl="0">
       <a:lnSpc>
         <a:spcPct val="100000"/>
       </a:lnSpc>
@@ -817,7 +832,7 @@
         <a:srgbClr val="000000"/>
       </a:buClr>
       <a:buFont typeface="Arial"/>
-      <a:defRPr b="0" i="0" sz="1400" u="none" cap="none" strike="noStrike">
+      <a:defRPr sz="1400" b="0" i="0" u="none" strike="noStrike" cap="none">
         <a:solidFill>
           <a:srgbClr val="000000"/>
         </a:solidFill>
@@ -827,7 +842,7 @@
         <a:sym typeface="Arial"/>
       </a:defRPr>
     </a:lvl8pPr>
-    <a:lvl9pPr lvl="8" marR="0" rtl="0" algn="l">
+    <a:lvl9pPr marR="0" lvl="8" algn="l" rtl="0">
       <a:lnSpc>
         <a:spcPct val="100000"/>
       </a:lnSpc>
@@ -841,7 +856,7 @@
         <a:srgbClr val="000000"/>
       </a:buClr>
       <a:buFont typeface="Arial"/>
-      <a:defRPr b="0" i="0" sz="1400" u="none" cap="none" strike="noStrike">
+      <a:defRPr sz="1400" b="0" i="0" u="none" strike="noStrike" cap="none">
         <a:solidFill>
           <a:srgbClr val="000000"/>
         </a:solidFill>
@@ -856,11 +871,11 @@
 </file>
 
 <file path=ppt/notesSlides/notesSlide1.xml><?xml version="1.0" encoding="utf-8"?>
-<p:notes xmlns:a="http://schemas.openxmlformats.org/drawingml/2006/main" xmlns:r="http://schemas.openxmlformats.org/officeDocument/2006/relationships" xmlns:mc="http://schemas.openxmlformats.org/markup-compatibility/2006" xmlns:mv="urn:schemas-microsoft-com:mac:vml" xmlns:p="http://schemas.openxmlformats.org/presentationml/2006/main" xmlns:c="http://schemas.openxmlformats.org/drawingml/2006/chart" xmlns:dgm="http://schemas.openxmlformats.org/drawingml/2006/diagram" xmlns:o="urn:schemas-microsoft-com:office:office" xmlns:v="urn:schemas-microsoft-com:vml" xmlns:pvml="urn:schemas-microsoft-com:office:powerpoint" xmlns:com="http://schemas.openxmlformats.org/drawingml/2006/compatibility" xmlns:p14="http://schemas.microsoft.com/office/powerpoint/2010/main" xmlns:p15="http://schemas.microsoft.com/office/powerpoint/2012/main" xmlns:ahyp="http://schemas.microsoft.com/office/drawing/2018/hyperlinkcolor" showMasterPhAnim="0" showMasterSp="0">
+<p:notes xmlns:a="http://schemas.openxmlformats.org/drawingml/2006/main" xmlns:r="http://schemas.openxmlformats.org/officeDocument/2006/relationships" xmlns:p="http://schemas.openxmlformats.org/presentationml/2006/main" showMasterSp="0" showMasterPhAnim="0">
   <p:cSld>
     <p:spTree>
       <p:nvGrpSpPr>
-        <p:cNvPr id="52" name="Shape 52"/>
+        <p:cNvPr id="1" name="Shape 52"/>
         <p:cNvGrpSpPr/>
         <p:nvPr/>
       </p:nvGrpSpPr>
@@ -875,20 +890,26 @@
       <p:sp>
         <p:nvSpPr>
           <p:cNvPr id="53" name="Google Shape;53;p1:notes"/>
-          <p:cNvSpPr/>
+          <p:cNvSpPr>
+            <a:spLocks noGrp="1" noRot="1" noChangeAspect="1"/>
+          </p:cNvSpPr>
           <p:nvPr>
-            <p:ph idx="2" type="sldImg"/>
+            <p:ph type="sldImg" idx="2"/>
           </p:nvPr>
         </p:nvSpPr>
         <p:spPr>
           <a:xfrm>
-            <a:off x="381300" y="685800"/>
-            <a:ext cx="6096075" cy="3429000"/>
+            <a:off x="381000" y="685800"/>
+            <a:ext cx="6096000" cy="3429000"/>
           </a:xfrm>
           <a:custGeom>
-            <a:rect b="b" l="l" r="r" t="t"/>
+            <a:avLst/>
+            <a:gdLst/>
+            <a:ahLst/>
+            <a:cxnLst/>
+            <a:rect l="l" t="t" r="r" b="b"/>
             <a:pathLst>
-              <a:path extrusionOk="0" h="120000" w="120000">
+              <a:path w="120000" h="120000" extrusionOk="0">
                 <a:moveTo>
                   <a:pt x="0" y="0"/>
                 </a:moveTo>
@@ -906,23 +927,25 @@
             </a:pathLst>
           </a:custGeom>
           <a:noFill/>
-          <a:ln cap="flat" cmpd="sng" w="9525">
+          <a:ln w="9525" cap="flat" cmpd="sng">
             <a:solidFill>
               <a:srgbClr val="000000"/>
             </a:solidFill>
             <a:prstDash val="solid"/>
             <a:round/>
-            <a:headEnd len="sm" w="sm" type="none"/>
-            <a:tailEnd len="sm" w="sm" type="none"/>
+            <a:headEnd type="none" w="sm" len="sm"/>
+            <a:tailEnd type="none" w="sm" len="sm"/>
           </a:ln>
         </p:spPr>
       </p:sp>
       <p:sp>
         <p:nvSpPr>
           <p:cNvPr id="54" name="Google Shape;54;p1:notes"/>
-          <p:cNvSpPr txBox="1"/>
+          <p:cNvSpPr txBox="1">
+            <a:spLocks noGrp="1"/>
+          </p:cNvSpPr>
           <p:nvPr>
-            <p:ph idx="1" type="body"/>
+            <p:ph type="body" idx="1"/>
           </p:nvPr>
         </p:nvSpPr>
         <p:spPr>
@@ -939,12 +962,12 @@
           </a:ln>
         </p:spPr>
         <p:txBody>
-          <a:bodyPr anchorCtr="0" anchor="t" bIns="91425" lIns="91425" spcFirstLastPara="1" rIns="91425" wrap="square" tIns="91425">
+          <a:bodyPr spcFirstLastPara="1" wrap="square" lIns="91425" tIns="91425" rIns="91425" bIns="91425" anchor="t" anchorCtr="0">
             <a:noAutofit/>
           </a:bodyPr>
           <a:lstStyle/>
           <a:p>
-            <a:pPr indent="0" lvl="0" marL="0" rtl="0" algn="l">
+            <a:pPr marL="0" lvl="0" indent="0" algn="l" rtl="0">
               <a:lnSpc>
                 <a:spcPct val="100000"/>
               </a:lnSpc>
@@ -957,9 +980,6 @@
               <a:buSzPts val="1100"/>
               <a:buNone/>
             </a:pPr>
-            <a:r>
-              <a:t/>
-            </a:r>
             <a:endParaRPr/>
           </a:p>
         </p:txBody>
@@ -973,11 +993,11 @@
 </file>
 
 <file path=ppt/notesSlides/notesSlide10.xml><?xml version="1.0" encoding="utf-8"?>
-<p:notes xmlns:a="http://schemas.openxmlformats.org/drawingml/2006/main" xmlns:r="http://schemas.openxmlformats.org/officeDocument/2006/relationships" xmlns:mc="http://schemas.openxmlformats.org/markup-compatibility/2006" xmlns:mv="urn:schemas-microsoft-com:mac:vml" xmlns:p="http://schemas.openxmlformats.org/presentationml/2006/main" xmlns:c="http://schemas.openxmlformats.org/drawingml/2006/chart" xmlns:dgm="http://schemas.openxmlformats.org/drawingml/2006/diagram" xmlns:o="urn:schemas-microsoft-com:office:office" xmlns:v="urn:schemas-microsoft-com:vml" xmlns:pvml="urn:schemas-microsoft-com:office:powerpoint" xmlns:com="http://schemas.openxmlformats.org/drawingml/2006/compatibility" xmlns:p14="http://schemas.microsoft.com/office/powerpoint/2010/main" xmlns:p15="http://schemas.microsoft.com/office/powerpoint/2012/main" xmlns:ahyp="http://schemas.microsoft.com/office/drawing/2018/hyperlinkcolor" showMasterPhAnim="0" showMasterSp="0">
+<p:notes xmlns:a="http://schemas.openxmlformats.org/drawingml/2006/main" xmlns:r="http://schemas.openxmlformats.org/officeDocument/2006/relationships" xmlns:p="http://schemas.openxmlformats.org/presentationml/2006/main" showMasterSp="0" showMasterPhAnim="0">
   <p:cSld>
     <p:spTree>
       <p:nvGrpSpPr>
-        <p:cNvPr id="115" name="Shape 115"/>
+        <p:cNvPr id="1" name="Shape 115"/>
         <p:cNvGrpSpPr/>
         <p:nvPr/>
       </p:nvGrpSpPr>
@@ -992,9 +1012,11 @@
       <p:sp>
         <p:nvSpPr>
           <p:cNvPr id="116" name="Google Shape;116;p10:notes"/>
-          <p:cNvSpPr/>
+          <p:cNvSpPr>
+            <a:spLocks noGrp="1" noRot="1" noChangeAspect="1"/>
+          </p:cNvSpPr>
           <p:nvPr>
-            <p:ph idx="2" type="sldImg"/>
+            <p:ph type="sldImg" idx="2"/>
           </p:nvPr>
         </p:nvSpPr>
         <p:spPr>
@@ -1003,9 +1025,13 @@
             <a:ext cx="6096000" cy="3429000"/>
           </a:xfrm>
           <a:custGeom>
-            <a:rect b="b" l="l" r="r" t="t"/>
+            <a:avLst/>
+            <a:gdLst/>
+            <a:ahLst/>
+            <a:cxnLst/>
+            <a:rect l="l" t="t" r="r" b="b"/>
             <a:pathLst>
-              <a:path extrusionOk="0" h="120000" w="120000">
+              <a:path w="120000" h="120000" extrusionOk="0">
                 <a:moveTo>
                   <a:pt x="0" y="0"/>
                 </a:moveTo>
@@ -1023,23 +1049,25 @@
             </a:pathLst>
           </a:custGeom>
           <a:noFill/>
-          <a:ln cap="flat" cmpd="sng" w="9525">
+          <a:ln w="9525" cap="flat" cmpd="sng">
             <a:solidFill>
               <a:srgbClr val="000000"/>
             </a:solidFill>
             <a:prstDash val="solid"/>
             <a:round/>
-            <a:headEnd len="sm" w="sm" type="none"/>
-            <a:tailEnd len="sm" w="sm" type="none"/>
+            <a:headEnd type="none" w="sm" len="sm"/>
+            <a:tailEnd type="none" w="sm" len="sm"/>
           </a:ln>
         </p:spPr>
       </p:sp>
       <p:sp>
         <p:nvSpPr>
           <p:cNvPr id="117" name="Google Shape;117;p10:notes"/>
-          <p:cNvSpPr txBox="1"/>
+          <p:cNvSpPr txBox="1">
+            <a:spLocks noGrp="1"/>
+          </p:cNvSpPr>
           <p:nvPr>
-            <p:ph idx="1" type="body"/>
+            <p:ph type="body" idx="1"/>
           </p:nvPr>
         </p:nvSpPr>
         <p:spPr>
@@ -1056,12 +1084,12 @@
           </a:ln>
         </p:spPr>
         <p:txBody>
-          <a:bodyPr anchorCtr="0" anchor="t" bIns="91425" lIns="91425" spcFirstLastPara="1" rIns="91425" wrap="square" tIns="91425">
+          <a:bodyPr spcFirstLastPara="1" wrap="square" lIns="91425" tIns="91425" rIns="91425" bIns="91425" anchor="t" anchorCtr="0">
             <a:noAutofit/>
           </a:bodyPr>
           <a:lstStyle/>
           <a:p>
-            <a:pPr indent="0" lvl="0" marL="0" rtl="0" algn="l">
+            <a:pPr marL="0" lvl="0" indent="0" algn="l" rtl="0">
               <a:lnSpc>
                 <a:spcPct val="100000"/>
               </a:lnSpc>
@@ -1074,9 +1102,6 @@
               <a:buSzPts val="1100"/>
               <a:buNone/>
             </a:pPr>
-            <a:r>
-              <a:t/>
-            </a:r>
             <a:endParaRPr/>
           </a:p>
         </p:txBody>
@@ -1090,11 +1115,11 @@
 </file>
 
 <file path=ppt/notesSlides/notesSlide11.xml><?xml version="1.0" encoding="utf-8"?>
-<p:notes xmlns:a="http://schemas.openxmlformats.org/drawingml/2006/main" xmlns:r="http://schemas.openxmlformats.org/officeDocument/2006/relationships" xmlns:mc="http://schemas.openxmlformats.org/markup-compatibility/2006" xmlns:mv="urn:schemas-microsoft-com:mac:vml" xmlns:p="http://schemas.openxmlformats.org/presentationml/2006/main" xmlns:c="http://schemas.openxmlformats.org/drawingml/2006/chart" xmlns:dgm="http://schemas.openxmlformats.org/drawingml/2006/diagram" xmlns:o="urn:schemas-microsoft-com:office:office" xmlns:v="urn:schemas-microsoft-com:vml" xmlns:pvml="urn:schemas-microsoft-com:office:powerpoint" xmlns:com="http://schemas.openxmlformats.org/drawingml/2006/compatibility" xmlns:p14="http://schemas.microsoft.com/office/powerpoint/2010/main" xmlns:p15="http://schemas.microsoft.com/office/powerpoint/2012/main" xmlns:ahyp="http://schemas.microsoft.com/office/drawing/2018/hyperlinkcolor" showMasterPhAnim="0" showMasterSp="0">
+<p:notes xmlns:a="http://schemas.openxmlformats.org/drawingml/2006/main" xmlns:r="http://schemas.openxmlformats.org/officeDocument/2006/relationships" xmlns:p="http://schemas.openxmlformats.org/presentationml/2006/main" showMasterSp="0" showMasterPhAnim="0">
   <p:cSld>
     <p:spTree>
       <p:nvGrpSpPr>
-        <p:cNvPr id="121" name="Shape 121"/>
+        <p:cNvPr id="1" name="Shape 121"/>
         <p:cNvGrpSpPr/>
         <p:nvPr/>
       </p:nvGrpSpPr>
@@ -1109,9 +1134,11 @@
       <p:sp>
         <p:nvSpPr>
           <p:cNvPr id="122" name="Google Shape;122;p11:notes"/>
-          <p:cNvSpPr/>
+          <p:cNvSpPr>
+            <a:spLocks noGrp="1" noRot="1" noChangeAspect="1"/>
+          </p:cNvSpPr>
           <p:nvPr>
-            <p:ph idx="2" type="sldImg"/>
+            <p:ph type="sldImg" idx="2"/>
           </p:nvPr>
         </p:nvSpPr>
         <p:spPr>
@@ -1120,9 +1147,13 @@
             <a:ext cx="6096000" cy="3429000"/>
           </a:xfrm>
           <a:custGeom>
-            <a:rect b="b" l="l" r="r" t="t"/>
+            <a:avLst/>
+            <a:gdLst/>
+            <a:ahLst/>
+            <a:cxnLst/>
+            <a:rect l="l" t="t" r="r" b="b"/>
             <a:pathLst>
-              <a:path extrusionOk="0" h="120000" w="120000">
+              <a:path w="120000" h="120000" extrusionOk="0">
                 <a:moveTo>
                   <a:pt x="0" y="0"/>
                 </a:moveTo>
@@ -1140,23 +1171,25 @@
             </a:pathLst>
           </a:custGeom>
           <a:noFill/>
-          <a:ln cap="flat" cmpd="sng" w="9525">
+          <a:ln w="9525" cap="flat" cmpd="sng">
             <a:solidFill>
               <a:srgbClr val="000000"/>
             </a:solidFill>
             <a:prstDash val="solid"/>
             <a:round/>
-            <a:headEnd len="sm" w="sm" type="none"/>
-            <a:tailEnd len="sm" w="sm" type="none"/>
+            <a:headEnd type="none" w="sm" len="sm"/>
+            <a:tailEnd type="none" w="sm" len="sm"/>
           </a:ln>
         </p:spPr>
       </p:sp>
       <p:sp>
         <p:nvSpPr>
           <p:cNvPr id="123" name="Google Shape;123;p11:notes"/>
-          <p:cNvSpPr txBox="1"/>
+          <p:cNvSpPr txBox="1">
+            <a:spLocks noGrp="1"/>
+          </p:cNvSpPr>
           <p:nvPr>
-            <p:ph idx="1" type="body"/>
+            <p:ph type="body" idx="1"/>
           </p:nvPr>
         </p:nvSpPr>
         <p:spPr>
@@ -1173,12 +1206,12 @@
           </a:ln>
         </p:spPr>
         <p:txBody>
-          <a:bodyPr anchorCtr="0" anchor="t" bIns="91425" lIns="91425" spcFirstLastPara="1" rIns="91425" wrap="square" tIns="91425">
+          <a:bodyPr spcFirstLastPara="1" wrap="square" lIns="91425" tIns="91425" rIns="91425" bIns="91425" anchor="t" anchorCtr="0">
             <a:noAutofit/>
           </a:bodyPr>
           <a:lstStyle/>
           <a:p>
-            <a:pPr indent="0" lvl="0" marL="0" rtl="0" algn="l">
+            <a:pPr marL="0" lvl="0" indent="0" algn="l" rtl="0">
               <a:lnSpc>
                 <a:spcPct val="100000"/>
               </a:lnSpc>
@@ -1191,9 +1224,6 @@
               <a:buSzPts val="1100"/>
               <a:buNone/>
             </a:pPr>
-            <a:r>
-              <a:t/>
-            </a:r>
             <a:endParaRPr/>
           </a:p>
         </p:txBody>
@@ -1207,11 +1237,11 @@
 </file>
 
 <file path=ppt/notesSlides/notesSlide12.xml><?xml version="1.0" encoding="utf-8"?>
-<p:notes xmlns:a="http://schemas.openxmlformats.org/drawingml/2006/main" xmlns:r="http://schemas.openxmlformats.org/officeDocument/2006/relationships" xmlns:mc="http://schemas.openxmlformats.org/markup-compatibility/2006" xmlns:mv="urn:schemas-microsoft-com:mac:vml" xmlns:p="http://schemas.openxmlformats.org/presentationml/2006/main" xmlns:c="http://schemas.openxmlformats.org/drawingml/2006/chart" xmlns:dgm="http://schemas.openxmlformats.org/drawingml/2006/diagram" xmlns:o="urn:schemas-microsoft-com:office:office" xmlns:v="urn:schemas-microsoft-com:vml" xmlns:pvml="urn:schemas-microsoft-com:office:powerpoint" xmlns:com="http://schemas.openxmlformats.org/drawingml/2006/compatibility" xmlns:p14="http://schemas.microsoft.com/office/powerpoint/2010/main" xmlns:p15="http://schemas.microsoft.com/office/powerpoint/2012/main" xmlns:ahyp="http://schemas.microsoft.com/office/drawing/2018/hyperlinkcolor" showMasterPhAnim="0" showMasterSp="0">
+<p:notes xmlns:a="http://schemas.openxmlformats.org/drawingml/2006/main" xmlns:r="http://schemas.openxmlformats.org/officeDocument/2006/relationships" xmlns:p="http://schemas.openxmlformats.org/presentationml/2006/main" showMasterSp="0" showMasterPhAnim="0">
   <p:cSld>
     <p:spTree>
       <p:nvGrpSpPr>
-        <p:cNvPr id="129" name="Shape 129"/>
+        <p:cNvPr id="1" name="Shape 129"/>
         <p:cNvGrpSpPr/>
         <p:nvPr/>
       </p:nvGrpSpPr>
@@ -1226,9 +1256,11 @@
       <p:sp>
         <p:nvSpPr>
           <p:cNvPr id="130" name="Google Shape;130;p12:notes"/>
-          <p:cNvSpPr/>
+          <p:cNvSpPr>
+            <a:spLocks noGrp="1" noRot="1" noChangeAspect="1"/>
+          </p:cNvSpPr>
           <p:nvPr>
-            <p:ph idx="2" type="sldImg"/>
+            <p:ph type="sldImg" idx="2"/>
           </p:nvPr>
         </p:nvSpPr>
         <p:spPr>
@@ -1237,9 +1269,13 @@
             <a:ext cx="6096000" cy="3429000"/>
           </a:xfrm>
           <a:custGeom>
-            <a:rect b="b" l="l" r="r" t="t"/>
+            <a:avLst/>
+            <a:gdLst/>
+            <a:ahLst/>
+            <a:cxnLst/>
+            <a:rect l="l" t="t" r="r" b="b"/>
             <a:pathLst>
-              <a:path extrusionOk="0" h="120000" w="120000">
+              <a:path w="120000" h="120000" extrusionOk="0">
                 <a:moveTo>
                   <a:pt x="0" y="0"/>
                 </a:moveTo>
@@ -1257,23 +1293,25 @@
             </a:pathLst>
           </a:custGeom>
           <a:noFill/>
-          <a:ln cap="flat" cmpd="sng" w="9525">
+          <a:ln w="9525" cap="flat" cmpd="sng">
             <a:solidFill>
               <a:srgbClr val="000000"/>
             </a:solidFill>
             <a:prstDash val="solid"/>
             <a:round/>
-            <a:headEnd len="sm" w="sm" type="none"/>
-            <a:tailEnd len="sm" w="sm" type="none"/>
+            <a:headEnd type="none" w="sm" len="sm"/>
+            <a:tailEnd type="none" w="sm" len="sm"/>
           </a:ln>
         </p:spPr>
       </p:sp>
       <p:sp>
         <p:nvSpPr>
           <p:cNvPr id="131" name="Google Shape;131;p12:notes"/>
-          <p:cNvSpPr txBox="1"/>
+          <p:cNvSpPr txBox="1">
+            <a:spLocks noGrp="1"/>
+          </p:cNvSpPr>
           <p:nvPr>
-            <p:ph idx="1" type="body"/>
+            <p:ph type="body" idx="1"/>
           </p:nvPr>
         </p:nvSpPr>
         <p:spPr>
@@ -1290,12 +1328,12 @@
           </a:ln>
         </p:spPr>
         <p:txBody>
-          <a:bodyPr anchorCtr="0" anchor="t" bIns="91425" lIns="91425" spcFirstLastPara="1" rIns="91425" wrap="square" tIns="91425">
+          <a:bodyPr spcFirstLastPara="1" wrap="square" lIns="91425" tIns="91425" rIns="91425" bIns="91425" anchor="t" anchorCtr="0">
             <a:noAutofit/>
           </a:bodyPr>
           <a:lstStyle/>
           <a:p>
-            <a:pPr indent="0" lvl="0" marL="0" rtl="0" algn="l">
+            <a:pPr marL="0" lvl="0" indent="0" algn="l" rtl="0">
               <a:lnSpc>
                 <a:spcPct val="100000"/>
               </a:lnSpc>
@@ -1308,9 +1346,6 @@
               <a:buSzPts val="1100"/>
               <a:buNone/>
             </a:pPr>
-            <a:r>
-              <a:t/>
-            </a:r>
             <a:endParaRPr/>
           </a:p>
         </p:txBody>
@@ -1324,11 +1359,11 @@
 </file>
 
 <file path=ppt/notesSlides/notesSlide2.xml><?xml version="1.0" encoding="utf-8"?>
-<p:notes xmlns:a="http://schemas.openxmlformats.org/drawingml/2006/main" xmlns:r="http://schemas.openxmlformats.org/officeDocument/2006/relationships" xmlns:mc="http://schemas.openxmlformats.org/markup-compatibility/2006" xmlns:mv="urn:schemas-microsoft-com:mac:vml" xmlns:p="http://schemas.openxmlformats.org/presentationml/2006/main" xmlns:c="http://schemas.openxmlformats.org/drawingml/2006/chart" xmlns:dgm="http://schemas.openxmlformats.org/drawingml/2006/diagram" xmlns:o="urn:schemas-microsoft-com:office:office" xmlns:v="urn:schemas-microsoft-com:vml" xmlns:pvml="urn:schemas-microsoft-com:office:powerpoint" xmlns:com="http://schemas.openxmlformats.org/drawingml/2006/compatibility" xmlns:p14="http://schemas.microsoft.com/office/powerpoint/2010/main" xmlns:p15="http://schemas.microsoft.com/office/powerpoint/2012/main" xmlns:ahyp="http://schemas.microsoft.com/office/drawing/2018/hyperlinkcolor" showMasterPhAnim="0" showMasterSp="0">
+<p:notes xmlns:a="http://schemas.openxmlformats.org/drawingml/2006/main" xmlns:r="http://schemas.openxmlformats.org/officeDocument/2006/relationships" xmlns:p="http://schemas.openxmlformats.org/presentationml/2006/main" showMasterSp="0" showMasterPhAnim="0">
   <p:cSld>
     <p:spTree>
       <p:nvGrpSpPr>
-        <p:cNvPr id="59" name="Shape 59"/>
+        <p:cNvPr id="1" name="Shape 59"/>
         <p:cNvGrpSpPr/>
         <p:nvPr/>
       </p:nvGrpSpPr>
@@ -1343,9 +1378,11 @@
       <p:sp>
         <p:nvSpPr>
           <p:cNvPr id="60" name="Google Shape;60;p2:notes"/>
-          <p:cNvSpPr/>
+          <p:cNvSpPr>
+            <a:spLocks noGrp="1" noRot="1" noChangeAspect="1"/>
+          </p:cNvSpPr>
           <p:nvPr>
-            <p:ph idx="2" type="sldImg"/>
+            <p:ph type="sldImg" idx="2"/>
           </p:nvPr>
         </p:nvSpPr>
         <p:spPr>
@@ -1354,9 +1391,13 @@
             <a:ext cx="6096000" cy="3429000"/>
           </a:xfrm>
           <a:custGeom>
-            <a:rect b="b" l="l" r="r" t="t"/>
+            <a:avLst/>
+            <a:gdLst/>
+            <a:ahLst/>
+            <a:cxnLst/>
+            <a:rect l="l" t="t" r="r" b="b"/>
             <a:pathLst>
-              <a:path extrusionOk="0" h="120000" w="120000">
+              <a:path w="120000" h="120000" extrusionOk="0">
                 <a:moveTo>
                   <a:pt x="0" y="0"/>
                 </a:moveTo>
@@ -1374,23 +1415,25 @@
             </a:pathLst>
           </a:custGeom>
           <a:noFill/>
-          <a:ln cap="flat" cmpd="sng" w="9525">
+          <a:ln w="9525" cap="flat" cmpd="sng">
             <a:solidFill>
               <a:srgbClr val="000000"/>
             </a:solidFill>
             <a:prstDash val="solid"/>
             <a:round/>
-            <a:headEnd len="sm" w="sm" type="none"/>
-            <a:tailEnd len="sm" w="sm" type="none"/>
+            <a:headEnd type="none" w="sm" len="sm"/>
+            <a:tailEnd type="none" w="sm" len="sm"/>
           </a:ln>
         </p:spPr>
       </p:sp>
       <p:sp>
         <p:nvSpPr>
           <p:cNvPr id="61" name="Google Shape;61;p2:notes"/>
-          <p:cNvSpPr txBox="1"/>
+          <p:cNvSpPr txBox="1">
+            <a:spLocks noGrp="1"/>
+          </p:cNvSpPr>
           <p:nvPr>
-            <p:ph idx="1" type="body"/>
+            <p:ph type="body" idx="1"/>
           </p:nvPr>
         </p:nvSpPr>
         <p:spPr>
@@ -1407,12 +1450,12 @@
           </a:ln>
         </p:spPr>
         <p:txBody>
-          <a:bodyPr anchorCtr="0" anchor="t" bIns="91425" lIns="91425" spcFirstLastPara="1" rIns="91425" wrap="square" tIns="91425">
+          <a:bodyPr spcFirstLastPara="1" wrap="square" lIns="91425" tIns="91425" rIns="91425" bIns="91425" anchor="t" anchorCtr="0">
             <a:noAutofit/>
           </a:bodyPr>
           <a:lstStyle/>
           <a:p>
-            <a:pPr indent="0" lvl="0" marL="0" rtl="0" algn="l">
+            <a:pPr marL="0" lvl="0" indent="0" algn="l" rtl="0">
               <a:lnSpc>
                 <a:spcPct val="100000"/>
               </a:lnSpc>
@@ -1425,9 +1468,6 @@
               <a:buSzPts val="1100"/>
               <a:buNone/>
             </a:pPr>
-            <a:r>
-              <a:t/>
-            </a:r>
             <a:endParaRPr/>
           </a:p>
         </p:txBody>
@@ -1441,11 +1481,11 @@
 </file>
 
 <file path=ppt/notesSlides/notesSlide3.xml><?xml version="1.0" encoding="utf-8"?>
-<p:notes xmlns:a="http://schemas.openxmlformats.org/drawingml/2006/main" xmlns:r="http://schemas.openxmlformats.org/officeDocument/2006/relationships" xmlns:mc="http://schemas.openxmlformats.org/markup-compatibility/2006" xmlns:mv="urn:schemas-microsoft-com:mac:vml" xmlns:p="http://schemas.openxmlformats.org/presentationml/2006/main" xmlns:c="http://schemas.openxmlformats.org/drawingml/2006/chart" xmlns:dgm="http://schemas.openxmlformats.org/drawingml/2006/diagram" xmlns:o="urn:schemas-microsoft-com:office:office" xmlns:v="urn:schemas-microsoft-com:vml" xmlns:pvml="urn:schemas-microsoft-com:office:powerpoint" xmlns:com="http://schemas.openxmlformats.org/drawingml/2006/compatibility" xmlns:p14="http://schemas.microsoft.com/office/powerpoint/2010/main" xmlns:p15="http://schemas.microsoft.com/office/powerpoint/2012/main" xmlns:ahyp="http://schemas.microsoft.com/office/drawing/2018/hyperlinkcolor" showMasterPhAnim="0" showMasterSp="0">
+<p:notes xmlns:a="http://schemas.openxmlformats.org/drawingml/2006/main" xmlns:r="http://schemas.openxmlformats.org/officeDocument/2006/relationships" xmlns:p="http://schemas.openxmlformats.org/presentationml/2006/main" showMasterSp="0" showMasterPhAnim="0">
   <p:cSld>
     <p:spTree>
       <p:nvGrpSpPr>
-        <p:cNvPr id="65" name="Shape 65"/>
+        <p:cNvPr id="1" name="Shape 65"/>
         <p:cNvGrpSpPr/>
         <p:nvPr/>
       </p:nvGrpSpPr>
@@ -1460,9 +1500,11 @@
       <p:sp>
         <p:nvSpPr>
           <p:cNvPr id="66" name="Google Shape;66;p3:notes"/>
-          <p:cNvSpPr txBox="1"/>
+          <p:cNvSpPr txBox="1">
+            <a:spLocks noGrp="1"/>
+          </p:cNvSpPr>
           <p:nvPr>
-            <p:ph idx="1" type="body"/>
+            <p:ph type="body" idx="1"/>
           </p:nvPr>
         </p:nvSpPr>
         <p:spPr>
@@ -1479,12 +1521,12 @@
           </a:ln>
         </p:spPr>
         <p:txBody>
-          <a:bodyPr anchorCtr="0" anchor="t" bIns="91425" lIns="91425" spcFirstLastPara="1" rIns="91425" wrap="square" tIns="91425">
+          <a:bodyPr spcFirstLastPara="1" wrap="square" lIns="91425" tIns="91425" rIns="91425" bIns="91425" anchor="t" anchorCtr="0">
             <a:noAutofit/>
           </a:bodyPr>
           <a:lstStyle/>
           <a:p>
-            <a:pPr indent="0" lvl="0" marL="0" rtl="0" algn="l">
+            <a:pPr marL="0" lvl="0" indent="0" algn="l" rtl="0">
               <a:lnSpc>
                 <a:spcPct val="100000"/>
               </a:lnSpc>
@@ -1497,9 +1539,6 @@
               <a:buSzPts val="1100"/>
               <a:buNone/>
             </a:pPr>
-            <a:r>
-              <a:t/>
-            </a:r>
             <a:endParaRPr/>
           </a:p>
         </p:txBody>
@@ -1507,9 +1546,11 @@
       <p:sp>
         <p:nvSpPr>
           <p:cNvPr id="67" name="Google Shape;67;p3:notes"/>
-          <p:cNvSpPr/>
+          <p:cNvSpPr>
+            <a:spLocks noGrp="1" noRot="1" noChangeAspect="1"/>
+          </p:cNvSpPr>
           <p:nvPr>
-            <p:ph idx="2" type="sldImg"/>
+            <p:ph type="sldImg" idx="2"/>
           </p:nvPr>
         </p:nvSpPr>
         <p:spPr>
@@ -1518,9 +1559,13 @@
             <a:ext cx="6096000" cy="3429000"/>
           </a:xfrm>
           <a:custGeom>
-            <a:rect b="b" l="l" r="r" t="t"/>
+            <a:avLst/>
+            <a:gdLst/>
+            <a:ahLst/>
+            <a:cxnLst/>
+            <a:rect l="l" t="t" r="r" b="b"/>
             <a:pathLst>
-              <a:path extrusionOk="0" h="120000" w="120000">
+              <a:path w="120000" h="120000" extrusionOk="0">
                 <a:moveTo>
                   <a:pt x="0" y="0"/>
                 </a:moveTo>
@@ -1538,14 +1583,14 @@
             </a:pathLst>
           </a:custGeom>
           <a:noFill/>
-          <a:ln cap="flat" cmpd="sng" w="9525">
+          <a:ln w="9525" cap="flat" cmpd="sng">
             <a:solidFill>
               <a:srgbClr val="000000"/>
             </a:solidFill>
             <a:prstDash val="solid"/>
             <a:round/>
-            <a:headEnd len="sm" w="sm" type="none"/>
-            <a:tailEnd len="sm" w="sm" type="none"/>
+            <a:headEnd type="none" w="sm" len="sm"/>
+            <a:tailEnd type="none" w="sm" len="sm"/>
           </a:ln>
         </p:spPr>
       </p:sp>
@@ -1558,11 +1603,11 @@
 </file>
 
 <file path=ppt/notesSlides/notesSlide4.xml><?xml version="1.0" encoding="utf-8"?>
-<p:notes xmlns:a="http://schemas.openxmlformats.org/drawingml/2006/main" xmlns:r="http://schemas.openxmlformats.org/officeDocument/2006/relationships" xmlns:mc="http://schemas.openxmlformats.org/markup-compatibility/2006" xmlns:mv="urn:schemas-microsoft-com:mac:vml" xmlns:p="http://schemas.openxmlformats.org/presentationml/2006/main" xmlns:c="http://schemas.openxmlformats.org/drawingml/2006/chart" xmlns:dgm="http://schemas.openxmlformats.org/drawingml/2006/diagram" xmlns:o="urn:schemas-microsoft-com:office:office" xmlns:v="urn:schemas-microsoft-com:vml" xmlns:pvml="urn:schemas-microsoft-com:office:powerpoint" xmlns:com="http://schemas.openxmlformats.org/drawingml/2006/compatibility" xmlns:p14="http://schemas.microsoft.com/office/powerpoint/2010/main" xmlns:p15="http://schemas.microsoft.com/office/powerpoint/2012/main" xmlns:ahyp="http://schemas.microsoft.com/office/drawing/2018/hyperlinkcolor" showMasterPhAnim="0" showMasterSp="0">
+<p:notes xmlns:a="http://schemas.openxmlformats.org/drawingml/2006/main" xmlns:r="http://schemas.openxmlformats.org/officeDocument/2006/relationships" xmlns:p="http://schemas.openxmlformats.org/presentationml/2006/main" showMasterSp="0" showMasterPhAnim="0">
   <p:cSld>
     <p:spTree>
       <p:nvGrpSpPr>
-        <p:cNvPr id="73" name="Shape 73"/>
+        <p:cNvPr id="1" name="Shape 73"/>
         <p:cNvGrpSpPr/>
         <p:nvPr/>
       </p:nvGrpSpPr>
@@ -1577,9 +1622,11 @@
       <p:sp>
         <p:nvSpPr>
           <p:cNvPr id="74" name="Google Shape;74;p4:notes"/>
-          <p:cNvSpPr/>
+          <p:cNvSpPr>
+            <a:spLocks noGrp="1" noRot="1" noChangeAspect="1"/>
+          </p:cNvSpPr>
           <p:nvPr>
-            <p:ph idx="2" type="sldImg"/>
+            <p:ph type="sldImg" idx="2"/>
           </p:nvPr>
         </p:nvSpPr>
         <p:spPr>
@@ -1588,9 +1635,13 @@
             <a:ext cx="6096000" cy="3429000"/>
           </a:xfrm>
           <a:custGeom>
-            <a:rect b="b" l="l" r="r" t="t"/>
+            <a:avLst/>
+            <a:gdLst/>
+            <a:ahLst/>
+            <a:cxnLst/>
+            <a:rect l="l" t="t" r="r" b="b"/>
             <a:pathLst>
-              <a:path extrusionOk="0" h="120000" w="120000">
+              <a:path w="120000" h="120000" extrusionOk="0">
                 <a:moveTo>
                   <a:pt x="0" y="0"/>
                 </a:moveTo>
@@ -1608,23 +1659,25 @@
             </a:pathLst>
           </a:custGeom>
           <a:noFill/>
-          <a:ln cap="flat" cmpd="sng" w="9525">
+          <a:ln w="9525" cap="flat" cmpd="sng">
             <a:solidFill>
               <a:srgbClr val="000000"/>
             </a:solidFill>
             <a:prstDash val="solid"/>
             <a:round/>
-            <a:headEnd len="sm" w="sm" type="none"/>
-            <a:tailEnd len="sm" w="sm" type="none"/>
+            <a:headEnd type="none" w="sm" len="sm"/>
+            <a:tailEnd type="none" w="sm" len="sm"/>
           </a:ln>
         </p:spPr>
       </p:sp>
       <p:sp>
         <p:nvSpPr>
           <p:cNvPr id="75" name="Google Shape;75;p4:notes"/>
-          <p:cNvSpPr txBox="1"/>
+          <p:cNvSpPr txBox="1">
+            <a:spLocks noGrp="1"/>
+          </p:cNvSpPr>
           <p:nvPr>
-            <p:ph idx="1" type="body"/>
+            <p:ph type="body" idx="1"/>
           </p:nvPr>
         </p:nvSpPr>
         <p:spPr>
@@ -1641,12 +1694,12 @@
           </a:ln>
         </p:spPr>
         <p:txBody>
-          <a:bodyPr anchorCtr="0" anchor="t" bIns="91425" lIns="91425" spcFirstLastPara="1" rIns="91425" wrap="square" tIns="91425">
+          <a:bodyPr spcFirstLastPara="1" wrap="square" lIns="91425" tIns="91425" rIns="91425" bIns="91425" anchor="t" anchorCtr="0">
             <a:noAutofit/>
           </a:bodyPr>
           <a:lstStyle/>
           <a:p>
-            <a:pPr indent="0" lvl="0" marL="0" rtl="0" algn="l">
+            <a:pPr marL="0" lvl="0" indent="0" algn="l" rtl="0">
               <a:lnSpc>
                 <a:spcPct val="100000"/>
               </a:lnSpc>
@@ -1659,9 +1712,6 @@
               <a:buSzPts val="1100"/>
               <a:buNone/>
             </a:pPr>
-            <a:r>
-              <a:t/>
-            </a:r>
             <a:endParaRPr/>
           </a:p>
         </p:txBody>
@@ -1675,11 +1725,11 @@
 </file>
 
 <file path=ppt/notesSlides/notesSlide5.xml><?xml version="1.0" encoding="utf-8"?>
-<p:notes xmlns:a="http://schemas.openxmlformats.org/drawingml/2006/main" xmlns:r="http://schemas.openxmlformats.org/officeDocument/2006/relationships" xmlns:mc="http://schemas.openxmlformats.org/markup-compatibility/2006" xmlns:mv="urn:schemas-microsoft-com:mac:vml" xmlns:p="http://schemas.openxmlformats.org/presentationml/2006/main" xmlns:c="http://schemas.openxmlformats.org/drawingml/2006/chart" xmlns:dgm="http://schemas.openxmlformats.org/drawingml/2006/diagram" xmlns:o="urn:schemas-microsoft-com:office:office" xmlns:v="urn:schemas-microsoft-com:vml" xmlns:pvml="urn:schemas-microsoft-com:office:powerpoint" xmlns:com="http://schemas.openxmlformats.org/drawingml/2006/compatibility" xmlns:p14="http://schemas.microsoft.com/office/powerpoint/2010/main" xmlns:p15="http://schemas.microsoft.com/office/powerpoint/2012/main" xmlns:ahyp="http://schemas.microsoft.com/office/drawing/2018/hyperlinkcolor" showMasterPhAnim="0" showMasterSp="0">
+<p:notes xmlns:a="http://schemas.openxmlformats.org/drawingml/2006/main" xmlns:r="http://schemas.openxmlformats.org/officeDocument/2006/relationships" xmlns:p="http://schemas.openxmlformats.org/presentationml/2006/main" showMasterSp="0" showMasterPhAnim="0">
   <p:cSld>
     <p:spTree>
       <p:nvGrpSpPr>
-        <p:cNvPr id="79" name="Shape 79"/>
+        <p:cNvPr id="1" name="Shape 79"/>
         <p:cNvGrpSpPr/>
         <p:nvPr/>
       </p:nvGrpSpPr>
@@ -1694,9 +1744,11 @@
       <p:sp>
         <p:nvSpPr>
           <p:cNvPr id="80" name="Google Shape;80;p5:notes"/>
-          <p:cNvSpPr/>
+          <p:cNvSpPr>
+            <a:spLocks noGrp="1" noRot="1" noChangeAspect="1"/>
+          </p:cNvSpPr>
           <p:nvPr>
-            <p:ph idx="2" type="sldImg"/>
+            <p:ph type="sldImg" idx="2"/>
           </p:nvPr>
         </p:nvSpPr>
         <p:spPr>
@@ -1705,9 +1757,13 @@
             <a:ext cx="6096000" cy="3429000"/>
           </a:xfrm>
           <a:custGeom>
-            <a:rect b="b" l="l" r="r" t="t"/>
+            <a:avLst/>
+            <a:gdLst/>
+            <a:ahLst/>
+            <a:cxnLst/>
+            <a:rect l="l" t="t" r="r" b="b"/>
             <a:pathLst>
-              <a:path extrusionOk="0" h="120000" w="120000">
+              <a:path w="120000" h="120000" extrusionOk="0">
                 <a:moveTo>
                   <a:pt x="0" y="0"/>
                 </a:moveTo>
@@ -1725,23 +1781,25 @@
             </a:pathLst>
           </a:custGeom>
           <a:noFill/>
-          <a:ln cap="flat" cmpd="sng" w="9525">
+          <a:ln w="9525" cap="flat" cmpd="sng">
             <a:solidFill>
               <a:srgbClr val="000000"/>
             </a:solidFill>
             <a:prstDash val="solid"/>
             <a:round/>
-            <a:headEnd len="sm" w="sm" type="none"/>
-            <a:tailEnd len="sm" w="sm" type="none"/>
+            <a:headEnd type="none" w="sm" len="sm"/>
+            <a:tailEnd type="none" w="sm" len="sm"/>
           </a:ln>
         </p:spPr>
       </p:sp>
       <p:sp>
         <p:nvSpPr>
           <p:cNvPr id="81" name="Google Shape;81;p5:notes"/>
-          <p:cNvSpPr txBox="1"/>
+          <p:cNvSpPr txBox="1">
+            <a:spLocks noGrp="1"/>
+          </p:cNvSpPr>
           <p:nvPr>
-            <p:ph idx="1" type="body"/>
+            <p:ph type="body" idx="1"/>
           </p:nvPr>
         </p:nvSpPr>
         <p:spPr>
@@ -1758,12 +1816,12 @@
           </a:ln>
         </p:spPr>
         <p:txBody>
-          <a:bodyPr anchorCtr="0" anchor="t" bIns="91425" lIns="91425" spcFirstLastPara="1" rIns="91425" wrap="square" tIns="91425">
+          <a:bodyPr spcFirstLastPara="1" wrap="square" lIns="91425" tIns="91425" rIns="91425" bIns="91425" anchor="t" anchorCtr="0">
             <a:noAutofit/>
           </a:bodyPr>
           <a:lstStyle/>
           <a:p>
-            <a:pPr indent="0" lvl="0" marL="0" rtl="0" algn="l">
+            <a:pPr marL="0" lvl="0" indent="0" algn="l" rtl="0">
               <a:lnSpc>
                 <a:spcPct val="100000"/>
               </a:lnSpc>
@@ -1776,9 +1834,6 @@
               <a:buSzPts val="1100"/>
               <a:buNone/>
             </a:pPr>
-            <a:r>
-              <a:t/>
-            </a:r>
             <a:endParaRPr/>
           </a:p>
         </p:txBody>
@@ -1792,11 +1847,11 @@
 </file>
 
 <file path=ppt/notesSlides/notesSlide6.xml><?xml version="1.0" encoding="utf-8"?>
-<p:notes xmlns:a="http://schemas.openxmlformats.org/drawingml/2006/main" xmlns:r="http://schemas.openxmlformats.org/officeDocument/2006/relationships" xmlns:mc="http://schemas.openxmlformats.org/markup-compatibility/2006" xmlns:mv="urn:schemas-microsoft-com:mac:vml" xmlns:p="http://schemas.openxmlformats.org/presentationml/2006/main" xmlns:c="http://schemas.openxmlformats.org/drawingml/2006/chart" xmlns:dgm="http://schemas.openxmlformats.org/drawingml/2006/diagram" xmlns:o="urn:schemas-microsoft-com:office:office" xmlns:v="urn:schemas-microsoft-com:vml" xmlns:pvml="urn:schemas-microsoft-com:office:powerpoint" xmlns:com="http://schemas.openxmlformats.org/drawingml/2006/compatibility" xmlns:p14="http://schemas.microsoft.com/office/powerpoint/2010/main" xmlns:p15="http://schemas.microsoft.com/office/powerpoint/2012/main" xmlns:ahyp="http://schemas.microsoft.com/office/drawing/2018/hyperlinkcolor" showMasterPhAnim="0" showMasterSp="0">
+<p:notes xmlns:a="http://schemas.openxmlformats.org/drawingml/2006/main" xmlns:r="http://schemas.openxmlformats.org/officeDocument/2006/relationships" xmlns:p="http://schemas.openxmlformats.org/presentationml/2006/main" showMasterSp="0" showMasterPhAnim="0">
   <p:cSld>
     <p:spTree>
       <p:nvGrpSpPr>
-        <p:cNvPr id="87" name="Shape 87"/>
+        <p:cNvPr id="1" name="Shape 87"/>
         <p:cNvGrpSpPr/>
         <p:nvPr/>
       </p:nvGrpSpPr>
@@ -1811,9 +1866,11 @@
       <p:sp>
         <p:nvSpPr>
           <p:cNvPr id="88" name="Google Shape;88;p6:notes"/>
-          <p:cNvSpPr/>
+          <p:cNvSpPr>
+            <a:spLocks noGrp="1" noRot="1" noChangeAspect="1"/>
+          </p:cNvSpPr>
           <p:nvPr>
-            <p:ph idx="2" type="sldImg"/>
+            <p:ph type="sldImg" idx="2"/>
           </p:nvPr>
         </p:nvSpPr>
         <p:spPr>
@@ -1822,9 +1879,13 @@
             <a:ext cx="6096000" cy="3429000"/>
           </a:xfrm>
           <a:custGeom>
-            <a:rect b="b" l="l" r="r" t="t"/>
+            <a:avLst/>
+            <a:gdLst/>
+            <a:ahLst/>
+            <a:cxnLst/>
+            <a:rect l="l" t="t" r="r" b="b"/>
             <a:pathLst>
-              <a:path extrusionOk="0" h="120000" w="120000">
+              <a:path w="120000" h="120000" extrusionOk="0">
                 <a:moveTo>
                   <a:pt x="0" y="0"/>
                 </a:moveTo>
@@ -1842,23 +1903,25 @@
             </a:pathLst>
           </a:custGeom>
           <a:noFill/>
-          <a:ln cap="flat" cmpd="sng" w="9525">
+          <a:ln w="9525" cap="flat" cmpd="sng">
             <a:solidFill>
               <a:srgbClr val="000000"/>
             </a:solidFill>
             <a:prstDash val="solid"/>
             <a:round/>
-            <a:headEnd len="sm" w="sm" type="none"/>
-            <a:tailEnd len="sm" w="sm" type="none"/>
+            <a:headEnd type="none" w="sm" len="sm"/>
+            <a:tailEnd type="none" w="sm" len="sm"/>
           </a:ln>
         </p:spPr>
       </p:sp>
       <p:sp>
         <p:nvSpPr>
           <p:cNvPr id="89" name="Google Shape;89;p6:notes"/>
-          <p:cNvSpPr txBox="1"/>
+          <p:cNvSpPr txBox="1">
+            <a:spLocks noGrp="1"/>
+          </p:cNvSpPr>
           <p:nvPr>
-            <p:ph idx="1" type="body"/>
+            <p:ph type="body" idx="1"/>
           </p:nvPr>
         </p:nvSpPr>
         <p:spPr>
@@ -1875,12 +1938,12 @@
           </a:ln>
         </p:spPr>
         <p:txBody>
-          <a:bodyPr anchorCtr="0" anchor="t" bIns="91425" lIns="91425" spcFirstLastPara="1" rIns="91425" wrap="square" tIns="91425">
+          <a:bodyPr spcFirstLastPara="1" wrap="square" lIns="91425" tIns="91425" rIns="91425" bIns="91425" anchor="t" anchorCtr="0">
             <a:noAutofit/>
           </a:bodyPr>
           <a:lstStyle/>
           <a:p>
-            <a:pPr indent="0" lvl="0" marL="0" rtl="0" algn="l">
+            <a:pPr marL="0" lvl="0" indent="0" algn="l" rtl="0">
               <a:lnSpc>
                 <a:spcPct val="100000"/>
               </a:lnSpc>
@@ -1893,9 +1956,6 @@
               <a:buSzPts val="1100"/>
               <a:buNone/>
             </a:pPr>
-            <a:r>
-              <a:t/>
-            </a:r>
             <a:endParaRPr/>
           </a:p>
         </p:txBody>
@@ -1909,11 +1969,11 @@
 </file>
 
 <file path=ppt/notesSlides/notesSlide7.xml><?xml version="1.0" encoding="utf-8"?>
-<p:notes xmlns:a="http://schemas.openxmlformats.org/drawingml/2006/main" xmlns:r="http://schemas.openxmlformats.org/officeDocument/2006/relationships" xmlns:mc="http://schemas.openxmlformats.org/markup-compatibility/2006" xmlns:mv="urn:schemas-microsoft-com:mac:vml" xmlns:p="http://schemas.openxmlformats.org/presentationml/2006/main" xmlns:c="http://schemas.openxmlformats.org/drawingml/2006/chart" xmlns:dgm="http://schemas.openxmlformats.org/drawingml/2006/diagram" xmlns:o="urn:schemas-microsoft-com:office:office" xmlns:v="urn:schemas-microsoft-com:vml" xmlns:pvml="urn:schemas-microsoft-com:office:powerpoint" xmlns:com="http://schemas.openxmlformats.org/drawingml/2006/compatibility" xmlns:p14="http://schemas.microsoft.com/office/powerpoint/2010/main" xmlns:p15="http://schemas.microsoft.com/office/powerpoint/2012/main" xmlns:ahyp="http://schemas.microsoft.com/office/drawing/2018/hyperlinkcolor" showMasterPhAnim="0" showMasterSp="0">
+<p:notes xmlns:a="http://schemas.openxmlformats.org/drawingml/2006/main" xmlns:r="http://schemas.openxmlformats.org/officeDocument/2006/relationships" xmlns:p="http://schemas.openxmlformats.org/presentationml/2006/main" showMasterSp="0" showMasterPhAnim="0">
   <p:cSld>
     <p:spTree>
       <p:nvGrpSpPr>
-        <p:cNvPr id="93" name="Shape 93"/>
+        <p:cNvPr id="1" name="Shape 93"/>
         <p:cNvGrpSpPr/>
         <p:nvPr/>
       </p:nvGrpSpPr>
@@ -1928,9 +1988,11 @@
       <p:sp>
         <p:nvSpPr>
           <p:cNvPr id="94" name="Google Shape;94;p7:notes"/>
-          <p:cNvSpPr/>
+          <p:cNvSpPr>
+            <a:spLocks noGrp="1" noRot="1" noChangeAspect="1"/>
+          </p:cNvSpPr>
           <p:nvPr>
-            <p:ph idx="2" type="sldImg"/>
+            <p:ph type="sldImg" idx="2"/>
           </p:nvPr>
         </p:nvSpPr>
         <p:spPr>
@@ -1939,9 +2001,13 @@
             <a:ext cx="6096000" cy="3429000"/>
           </a:xfrm>
           <a:custGeom>
-            <a:rect b="b" l="l" r="r" t="t"/>
+            <a:avLst/>
+            <a:gdLst/>
+            <a:ahLst/>
+            <a:cxnLst/>
+            <a:rect l="l" t="t" r="r" b="b"/>
             <a:pathLst>
-              <a:path extrusionOk="0" h="120000" w="120000">
+              <a:path w="120000" h="120000" extrusionOk="0">
                 <a:moveTo>
                   <a:pt x="0" y="0"/>
                 </a:moveTo>
@@ -1959,23 +2025,25 @@
             </a:pathLst>
           </a:custGeom>
           <a:noFill/>
-          <a:ln cap="flat" cmpd="sng" w="9525">
+          <a:ln w="9525" cap="flat" cmpd="sng">
             <a:solidFill>
               <a:srgbClr val="000000"/>
             </a:solidFill>
             <a:prstDash val="solid"/>
             <a:round/>
-            <a:headEnd len="sm" w="sm" type="none"/>
-            <a:tailEnd len="sm" w="sm" type="none"/>
+            <a:headEnd type="none" w="sm" len="sm"/>
+            <a:tailEnd type="none" w="sm" len="sm"/>
           </a:ln>
         </p:spPr>
       </p:sp>
       <p:sp>
         <p:nvSpPr>
           <p:cNvPr id="95" name="Google Shape;95;p7:notes"/>
-          <p:cNvSpPr txBox="1"/>
+          <p:cNvSpPr txBox="1">
+            <a:spLocks noGrp="1"/>
+          </p:cNvSpPr>
           <p:nvPr>
-            <p:ph idx="1" type="body"/>
+            <p:ph type="body" idx="1"/>
           </p:nvPr>
         </p:nvSpPr>
         <p:spPr>
@@ -1992,12 +2060,12 @@
           </a:ln>
         </p:spPr>
         <p:txBody>
-          <a:bodyPr anchorCtr="0" anchor="t" bIns="91425" lIns="91425" spcFirstLastPara="1" rIns="91425" wrap="square" tIns="91425">
+          <a:bodyPr spcFirstLastPara="1" wrap="square" lIns="91425" tIns="91425" rIns="91425" bIns="91425" anchor="t" anchorCtr="0">
             <a:noAutofit/>
           </a:bodyPr>
           <a:lstStyle/>
           <a:p>
-            <a:pPr indent="0" lvl="0" marL="0" rtl="0" algn="l">
+            <a:pPr marL="0" lvl="0" indent="0" algn="l" rtl="0">
               <a:lnSpc>
                 <a:spcPct val="100000"/>
               </a:lnSpc>
@@ -2010,9 +2078,6 @@
               <a:buSzPts val="1100"/>
               <a:buNone/>
             </a:pPr>
-            <a:r>
-              <a:t/>
-            </a:r>
             <a:endParaRPr/>
           </a:p>
         </p:txBody>
@@ -2026,11 +2091,11 @@
 </file>
 
 <file path=ppt/notesSlides/notesSlide8.xml><?xml version="1.0" encoding="utf-8"?>
-<p:notes xmlns:a="http://schemas.openxmlformats.org/drawingml/2006/main" xmlns:r="http://schemas.openxmlformats.org/officeDocument/2006/relationships" xmlns:mc="http://schemas.openxmlformats.org/markup-compatibility/2006" xmlns:mv="urn:schemas-microsoft-com:mac:vml" xmlns:p="http://schemas.openxmlformats.org/presentationml/2006/main" xmlns:c="http://schemas.openxmlformats.org/drawingml/2006/chart" xmlns:dgm="http://schemas.openxmlformats.org/drawingml/2006/diagram" xmlns:o="urn:schemas-microsoft-com:office:office" xmlns:v="urn:schemas-microsoft-com:vml" xmlns:pvml="urn:schemas-microsoft-com:office:powerpoint" xmlns:com="http://schemas.openxmlformats.org/drawingml/2006/compatibility" xmlns:p14="http://schemas.microsoft.com/office/powerpoint/2010/main" xmlns:p15="http://schemas.microsoft.com/office/powerpoint/2012/main" xmlns:ahyp="http://schemas.microsoft.com/office/drawing/2018/hyperlinkcolor" showMasterPhAnim="0" showMasterSp="0">
+<p:notes xmlns:a="http://schemas.openxmlformats.org/drawingml/2006/main" xmlns:r="http://schemas.openxmlformats.org/officeDocument/2006/relationships" xmlns:p="http://schemas.openxmlformats.org/presentationml/2006/main" showMasterSp="0" showMasterPhAnim="0">
   <p:cSld>
     <p:spTree>
       <p:nvGrpSpPr>
-        <p:cNvPr id="101" name="Shape 101"/>
+        <p:cNvPr id="1" name="Shape 101"/>
         <p:cNvGrpSpPr/>
         <p:nvPr/>
       </p:nvGrpSpPr>
@@ -2045,9 +2110,11 @@
       <p:sp>
         <p:nvSpPr>
           <p:cNvPr id="102" name="Google Shape;102;p8:notes"/>
-          <p:cNvSpPr/>
+          <p:cNvSpPr>
+            <a:spLocks noGrp="1" noRot="1" noChangeAspect="1"/>
+          </p:cNvSpPr>
           <p:nvPr>
-            <p:ph idx="2" type="sldImg"/>
+            <p:ph type="sldImg" idx="2"/>
           </p:nvPr>
         </p:nvSpPr>
         <p:spPr>
@@ -2056,9 +2123,13 @@
             <a:ext cx="6096000" cy="3429000"/>
           </a:xfrm>
           <a:custGeom>
-            <a:rect b="b" l="l" r="r" t="t"/>
+            <a:avLst/>
+            <a:gdLst/>
+            <a:ahLst/>
+            <a:cxnLst/>
+            <a:rect l="l" t="t" r="r" b="b"/>
             <a:pathLst>
-              <a:path extrusionOk="0" h="120000" w="120000">
+              <a:path w="120000" h="120000" extrusionOk="0">
                 <a:moveTo>
                   <a:pt x="0" y="0"/>
                 </a:moveTo>
@@ -2076,23 +2147,25 @@
             </a:pathLst>
           </a:custGeom>
           <a:noFill/>
-          <a:ln cap="flat" cmpd="sng" w="9525">
+          <a:ln w="9525" cap="flat" cmpd="sng">
             <a:solidFill>
               <a:srgbClr val="000000"/>
             </a:solidFill>
             <a:prstDash val="solid"/>
             <a:round/>
-            <a:headEnd len="sm" w="sm" type="none"/>
-            <a:tailEnd len="sm" w="sm" type="none"/>
+            <a:headEnd type="none" w="sm" len="sm"/>
+            <a:tailEnd type="none" w="sm" len="sm"/>
           </a:ln>
         </p:spPr>
       </p:sp>
       <p:sp>
         <p:nvSpPr>
           <p:cNvPr id="103" name="Google Shape;103;p8:notes"/>
-          <p:cNvSpPr txBox="1"/>
+          <p:cNvSpPr txBox="1">
+            <a:spLocks noGrp="1"/>
+          </p:cNvSpPr>
           <p:nvPr>
-            <p:ph idx="1" type="body"/>
+            <p:ph type="body" idx="1"/>
           </p:nvPr>
         </p:nvSpPr>
         <p:spPr>
@@ -2109,12 +2182,12 @@
           </a:ln>
         </p:spPr>
         <p:txBody>
-          <a:bodyPr anchorCtr="0" anchor="t" bIns="91425" lIns="91425" spcFirstLastPara="1" rIns="91425" wrap="square" tIns="91425">
+          <a:bodyPr spcFirstLastPara="1" wrap="square" lIns="91425" tIns="91425" rIns="91425" bIns="91425" anchor="t" anchorCtr="0">
             <a:noAutofit/>
           </a:bodyPr>
           <a:lstStyle/>
           <a:p>
-            <a:pPr indent="0" lvl="0" marL="0" rtl="0" algn="l">
+            <a:pPr marL="0" lvl="0" indent="0" algn="l" rtl="0">
               <a:lnSpc>
                 <a:spcPct val="100000"/>
               </a:lnSpc>
@@ -2127,9 +2200,6 @@
               <a:buSzPts val="1100"/>
               <a:buNone/>
             </a:pPr>
-            <a:r>
-              <a:t/>
-            </a:r>
             <a:endParaRPr/>
           </a:p>
         </p:txBody>
@@ -2143,11 +2213,11 @@
 </file>
 
 <file path=ppt/notesSlides/notesSlide9.xml><?xml version="1.0" encoding="utf-8"?>
-<p:notes xmlns:a="http://schemas.openxmlformats.org/drawingml/2006/main" xmlns:r="http://schemas.openxmlformats.org/officeDocument/2006/relationships" xmlns:mc="http://schemas.openxmlformats.org/markup-compatibility/2006" xmlns:mv="urn:schemas-microsoft-com:mac:vml" xmlns:p="http://schemas.openxmlformats.org/presentationml/2006/main" xmlns:c="http://schemas.openxmlformats.org/drawingml/2006/chart" xmlns:dgm="http://schemas.openxmlformats.org/drawingml/2006/diagram" xmlns:o="urn:schemas-microsoft-com:office:office" xmlns:v="urn:schemas-microsoft-com:vml" xmlns:pvml="urn:schemas-microsoft-com:office:powerpoint" xmlns:com="http://schemas.openxmlformats.org/drawingml/2006/compatibility" xmlns:p14="http://schemas.microsoft.com/office/powerpoint/2010/main" xmlns:p15="http://schemas.microsoft.com/office/powerpoint/2012/main" xmlns:ahyp="http://schemas.microsoft.com/office/drawing/2018/hyperlinkcolor" showMasterPhAnim="0" showMasterSp="0">
+<p:notes xmlns:a="http://schemas.openxmlformats.org/drawingml/2006/main" xmlns:r="http://schemas.openxmlformats.org/officeDocument/2006/relationships" xmlns:p="http://schemas.openxmlformats.org/presentationml/2006/main" showMasterSp="0" showMasterPhAnim="0">
   <p:cSld>
     <p:spTree>
       <p:nvGrpSpPr>
-        <p:cNvPr id="107" name="Shape 107"/>
+        <p:cNvPr id="1" name="Shape 107"/>
         <p:cNvGrpSpPr/>
         <p:nvPr/>
       </p:nvGrpSpPr>
@@ -2162,9 +2232,11 @@
       <p:sp>
         <p:nvSpPr>
           <p:cNvPr id="108" name="Google Shape;108;p9:notes"/>
-          <p:cNvSpPr/>
+          <p:cNvSpPr>
+            <a:spLocks noGrp="1" noRot="1" noChangeAspect="1"/>
+          </p:cNvSpPr>
           <p:nvPr>
-            <p:ph idx="2" type="sldImg"/>
+            <p:ph type="sldImg" idx="2"/>
           </p:nvPr>
         </p:nvSpPr>
         <p:spPr>
@@ -2173,9 +2245,13 @@
             <a:ext cx="6096000" cy="3429000"/>
           </a:xfrm>
           <a:custGeom>
-            <a:rect b="b" l="l" r="r" t="t"/>
+            <a:avLst/>
+            <a:gdLst/>
+            <a:ahLst/>
+            <a:cxnLst/>
+            <a:rect l="l" t="t" r="r" b="b"/>
             <a:pathLst>
-              <a:path extrusionOk="0" h="120000" w="120000">
+              <a:path w="120000" h="120000" extrusionOk="0">
                 <a:moveTo>
                   <a:pt x="0" y="0"/>
                 </a:moveTo>
@@ -2193,23 +2269,25 @@
             </a:pathLst>
           </a:custGeom>
           <a:noFill/>
-          <a:ln cap="flat" cmpd="sng" w="9525">
+          <a:ln w="9525" cap="flat" cmpd="sng">
             <a:solidFill>
               <a:srgbClr val="000000"/>
             </a:solidFill>
             <a:prstDash val="solid"/>
             <a:round/>
-            <a:headEnd len="sm" w="sm" type="none"/>
-            <a:tailEnd len="sm" w="sm" type="none"/>
+            <a:headEnd type="none" w="sm" len="sm"/>
+            <a:tailEnd type="none" w="sm" len="sm"/>
           </a:ln>
         </p:spPr>
       </p:sp>
       <p:sp>
         <p:nvSpPr>
           <p:cNvPr id="109" name="Google Shape;109;p9:notes"/>
-          <p:cNvSpPr txBox="1"/>
+          <p:cNvSpPr txBox="1">
+            <a:spLocks noGrp="1"/>
+          </p:cNvSpPr>
           <p:nvPr>
-            <p:ph idx="1" type="body"/>
+            <p:ph type="body" idx="1"/>
           </p:nvPr>
         </p:nvSpPr>
         <p:spPr>
@@ -2226,12 +2304,12 @@
           </a:ln>
         </p:spPr>
         <p:txBody>
-          <a:bodyPr anchorCtr="0" anchor="t" bIns="91425" lIns="91425" spcFirstLastPara="1" rIns="91425" wrap="square" tIns="91425">
+          <a:bodyPr spcFirstLastPara="1" wrap="square" lIns="91425" tIns="91425" rIns="91425" bIns="91425" anchor="t" anchorCtr="0">
             <a:noAutofit/>
           </a:bodyPr>
           <a:lstStyle/>
           <a:p>
-            <a:pPr indent="0" lvl="0" marL="0" rtl="0" algn="l">
+            <a:pPr marL="0" lvl="0" indent="0" algn="l" rtl="0">
               <a:lnSpc>
                 <a:spcPct val="100000"/>
               </a:lnSpc>
@@ -2244,9 +2322,6 @@
               <a:buSzPts val="1100"/>
               <a:buNone/>
             </a:pPr>
-            <a:r>
-              <a:t/>
-            </a:r>
             <a:endParaRPr/>
           </a:p>
         </p:txBody>
@@ -2260,11 +2335,11 @@
 </file>
 
 <file path=ppt/slideLayouts/slideLayout1.xml><?xml version="1.0" encoding="utf-8"?>
-<p:sldLayout xmlns:a="http://schemas.openxmlformats.org/drawingml/2006/main" xmlns:r="http://schemas.openxmlformats.org/officeDocument/2006/relationships" xmlns:mc="http://schemas.openxmlformats.org/markup-compatibility/2006" xmlns:mv="urn:schemas-microsoft-com:mac:vml" xmlns:p="http://schemas.openxmlformats.org/presentationml/2006/main" xmlns:c="http://schemas.openxmlformats.org/drawingml/2006/chart" xmlns:dgm="http://schemas.openxmlformats.org/drawingml/2006/diagram" xmlns:o="urn:schemas-microsoft-com:office:office" xmlns:v="urn:schemas-microsoft-com:vml" xmlns:pvml="urn:schemas-microsoft-com:office:powerpoint" xmlns:com="http://schemas.openxmlformats.org/drawingml/2006/compatibility" xmlns:p14="http://schemas.microsoft.com/office/powerpoint/2010/main" xmlns:p15="http://schemas.microsoft.com/office/powerpoint/2012/main" xmlns:ahyp="http://schemas.microsoft.com/office/drawing/2018/hyperlinkcolor" matchingName="Title slide" type="title">
+<p:sldLayout xmlns:a="http://schemas.openxmlformats.org/drawingml/2006/main" xmlns:r="http://schemas.openxmlformats.org/officeDocument/2006/relationships" xmlns:p="http://schemas.openxmlformats.org/presentationml/2006/main" matchingName="Title slide" type="title">
   <p:cSld name="TITLE">
     <p:spTree>
       <p:nvGrpSpPr>
-        <p:cNvPr id="9" name="Shape 9"/>
+        <p:cNvPr id="1" name="Shape 9"/>
         <p:cNvGrpSpPr/>
         <p:nvPr/>
       </p:nvGrpSpPr>
@@ -2279,7 +2354,9 @@
       <p:sp>
         <p:nvSpPr>
           <p:cNvPr id="10" name="Google Shape;10;p2"/>
-          <p:cNvSpPr txBox="1"/>
+          <p:cNvSpPr txBox="1">
+            <a:spLocks noGrp="1"/>
+          </p:cNvSpPr>
           <p:nvPr>
             <p:ph type="ctrTitle"/>
           </p:nvPr>
@@ -2298,7 +2375,7 @@
           </a:ln>
         </p:spPr>
         <p:txBody>
-          <a:bodyPr anchorCtr="0" anchor="b" bIns="91425" lIns="91425" spcFirstLastPara="1" rIns="91425" wrap="square" tIns="91425">
+          <a:bodyPr spcFirstLastPara="1" wrap="square" lIns="91425" tIns="91425" rIns="91425" bIns="91425" anchor="b" anchorCtr="0">
             <a:normAutofit/>
           </a:bodyPr>
           <a:lstStyle>
@@ -2429,15 +2506,19 @@
               <a:defRPr sz="5200"/>
             </a:lvl9pPr>
           </a:lstStyle>
-          <a:p/>
+          <a:p>
+            <a:endParaRPr/>
+          </a:p>
         </p:txBody>
       </p:sp>
       <p:sp>
         <p:nvSpPr>
           <p:cNvPr id="11" name="Google Shape;11;p2"/>
-          <p:cNvSpPr txBox="1"/>
+          <p:cNvSpPr txBox="1">
+            <a:spLocks noGrp="1"/>
+          </p:cNvSpPr>
           <p:nvPr>
-            <p:ph idx="1" type="subTitle"/>
+            <p:ph type="subTitle" idx="1"/>
           </p:nvPr>
         </p:nvSpPr>
         <p:spPr>
@@ -2454,7 +2535,7 @@
           </a:ln>
         </p:spPr>
         <p:txBody>
-          <a:bodyPr anchorCtr="0" anchor="t" bIns="91425" lIns="91425" spcFirstLastPara="1" rIns="91425" wrap="square" tIns="91425">
+          <a:bodyPr spcFirstLastPara="1" wrap="square" lIns="91425" tIns="91425" rIns="91425" bIns="91425" anchor="t" anchorCtr="0">
             <a:normAutofit/>
           </a:bodyPr>
           <a:lstStyle>
@@ -2585,15 +2666,19 @@
               <a:defRPr sz="2800"/>
             </a:lvl9pPr>
           </a:lstStyle>
-          <a:p/>
+          <a:p>
+            <a:endParaRPr/>
+          </a:p>
         </p:txBody>
       </p:sp>
       <p:sp>
         <p:nvSpPr>
           <p:cNvPr id="12" name="Google Shape;12;p2"/>
-          <p:cNvSpPr txBox="1"/>
+          <p:cNvSpPr txBox="1">
+            <a:spLocks noGrp="1"/>
+          </p:cNvSpPr>
           <p:nvPr>
-            <p:ph idx="12" type="sldNum"/>
+            <p:ph type="sldNum" idx="12"/>
           </p:nvPr>
         </p:nvSpPr>
         <p:spPr>
@@ -2610,11 +2695,11 @@
           </a:ln>
         </p:spPr>
         <p:txBody>
-          <a:bodyPr anchorCtr="0" anchor="ctr" bIns="91425" lIns="91425" spcFirstLastPara="1" rIns="91425" wrap="square" tIns="91425">
+          <a:bodyPr spcFirstLastPara="1" wrap="square" lIns="91425" tIns="91425" rIns="91425" bIns="91425" anchor="ctr" anchorCtr="0">
             <a:normAutofit/>
           </a:bodyPr>
           <a:lstStyle>
-            <a:lvl1pPr indent="0" lvl="0" marL="0" marR="0" algn="r">
+            <a:lvl1pPr marL="0" marR="0" lvl="0" indent="0" algn="r">
               <a:lnSpc>
                 <a:spcPct val="100000"/>
               </a:lnSpc>
@@ -2630,7 +2715,7 @@
               <a:buSzPts val="1000"/>
               <a:buFont typeface="Arial"/>
               <a:buNone/>
-              <a:defRPr b="0" i="0" sz="1000" u="none" cap="none" strike="noStrike">
+              <a:defRPr sz="1000" b="0" i="0" u="none" strike="noStrike" cap="none">
                 <a:solidFill>
                   <a:schemeClr val="dk2"/>
                 </a:solidFill>
@@ -2640,7 +2725,7 @@
                 <a:sym typeface="Arial"/>
               </a:defRPr>
             </a:lvl1pPr>
-            <a:lvl2pPr indent="0" lvl="1" marL="0" marR="0" algn="r">
+            <a:lvl2pPr marL="0" marR="0" lvl="1" indent="0" algn="r">
               <a:lnSpc>
                 <a:spcPct val="100000"/>
               </a:lnSpc>
@@ -2656,7 +2741,7 @@
               <a:buSzPts val="1000"/>
               <a:buFont typeface="Arial"/>
               <a:buNone/>
-              <a:defRPr b="0" i="0" sz="1000" u="none" cap="none" strike="noStrike">
+              <a:defRPr sz="1000" b="0" i="0" u="none" strike="noStrike" cap="none">
                 <a:solidFill>
                   <a:schemeClr val="dk2"/>
                 </a:solidFill>
@@ -2666,7 +2751,7 @@
                 <a:sym typeface="Arial"/>
               </a:defRPr>
             </a:lvl2pPr>
-            <a:lvl3pPr indent="0" lvl="2" marL="0" marR="0" algn="r">
+            <a:lvl3pPr marL="0" marR="0" lvl="2" indent="0" algn="r">
               <a:lnSpc>
                 <a:spcPct val="100000"/>
               </a:lnSpc>
@@ -2682,7 +2767,7 @@
               <a:buSzPts val="1000"/>
               <a:buFont typeface="Arial"/>
               <a:buNone/>
-              <a:defRPr b="0" i="0" sz="1000" u="none" cap="none" strike="noStrike">
+              <a:defRPr sz="1000" b="0" i="0" u="none" strike="noStrike" cap="none">
                 <a:solidFill>
                   <a:schemeClr val="dk2"/>
                 </a:solidFill>
@@ -2692,7 +2777,7 @@
                 <a:sym typeface="Arial"/>
               </a:defRPr>
             </a:lvl3pPr>
-            <a:lvl4pPr indent="0" lvl="3" marL="0" marR="0" algn="r">
+            <a:lvl4pPr marL="0" marR="0" lvl="3" indent="0" algn="r">
               <a:lnSpc>
                 <a:spcPct val="100000"/>
               </a:lnSpc>
@@ -2708,7 +2793,7 @@
               <a:buSzPts val="1000"/>
               <a:buFont typeface="Arial"/>
               <a:buNone/>
-              <a:defRPr b="0" i="0" sz="1000" u="none" cap="none" strike="noStrike">
+              <a:defRPr sz="1000" b="0" i="0" u="none" strike="noStrike" cap="none">
                 <a:solidFill>
                   <a:schemeClr val="dk2"/>
                 </a:solidFill>
@@ -2718,7 +2803,7 @@
                 <a:sym typeface="Arial"/>
               </a:defRPr>
             </a:lvl4pPr>
-            <a:lvl5pPr indent="0" lvl="4" marL="0" marR="0" algn="r">
+            <a:lvl5pPr marL="0" marR="0" lvl="4" indent="0" algn="r">
               <a:lnSpc>
                 <a:spcPct val="100000"/>
               </a:lnSpc>
@@ -2734,7 +2819,7 @@
               <a:buSzPts val="1000"/>
               <a:buFont typeface="Arial"/>
               <a:buNone/>
-              <a:defRPr b="0" i="0" sz="1000" u="none" cap="none" strike="noStrike">
+              <a:defRPr sz="1000" b="0" i="0" u="none" strike="noStrike" cap="none">
                 <a:solidFill>
                   <a:schemeClr val="dk2"/>
                 </a:solidFill>
@@ -2744,7 +2829,7 @@
                 <a:sym typeface="Arial"/>
               </a:defRPr>
             </a:lvl5pPr>
-            <a:lvl6pPr indent="0" lvl="5" marL="0" marR="0" algn="r">
+            <a:lvl6pPr marL="0" marR="0" lvl="5" indent="0" algn="r">
               <a:lnSpc>
                 <a:spcPct val="100000"/>
               </a:lnSpc>
@@ -2760,7 +2845,7 @@
               <a:buSzPts val="1000"/>
               <a:buFont typeface="Arial"/>
               <a:buNone/>
-              <a:defRPr b="0" i="0" sz="1000" u="none" cap="none" strike="noStrike">
+              <a:defRPr sz="1000" b="0" i="0" u="none" strike="noStrike" cap="none">
                 <a:solidFill>
                   <a:schemeClr val="dk2"/>
                 </a:solidFill>
@@ -2770,7 +2855,7 @@
                 <a:sym typeface="Arial"/>
               </a:defRPr>
             </a:lvl6pPr>
-            <a:lvl7pPr indent="0" lvl="6" marL="0" marR="0" algn="r">
+            <a:lvl7pPr marL="0" marR="0" lvl="6" indent="0" algn="r">
               <a:lnSpc>
                 <a:spcPct val="100000"/>
               </a:lnSpc>
@@ -2786,7 +2871,7 @@
               <a:buSzPts val="1000"/>
               <a:buFont typeface="Arial"/>
               <a:buNone/>
-              <a:defRPr b="0" i="0" sz="1000" u="none" cap="none" strike="noStrike">
+              <a:defRPr sz="1000" b="0" i="0" u="none" strike="noStrike" cap="none">
                 <a:solidFill>
                   <a:schemeClr val="dk2"/>
                 </a:solidFill>
@@ -2796,7 +2881,7 @@
                 <a:sym typeface="Arial"/>
               </a:defRPr>
             </a:lvl7pPr>
-            <a:lvl8pPr indent="0" lvl="7" marL="0" marR="0" algn="r">
+            <a:lvl8pPr marL="0" marR="0" lvl="7" indent="0" algn="r">
               <a:lnSpc>
                 <a:spcPct val="100000"/>
               </a:lnSpc>
@@ -2812,7 +2897,7 @@
               <a:buSzPts val="1000"/>
               <a:buFont typeface="Arial"/>
               <a:buNone/>
-              <a:defRPr b="0" i="0" sz="1000" u="none" cap="none" strike="noStrike">
+              <a:defRPr sz="1000" b="0" i="0" u="none" strike="noStrike" cap="none">
                 <a:solidFill>
                   <a:schemeClr val="dk2"/>
                 </a:solidFill>
@@ -2822,7 +2907,7 @@
                 <a:sym typeface="Arial"/>
               </a:defRPr>
             </a:lvl8pPr>
-            <a:lvl9pPr indent="0" lvl="8" marL="0" marR="0" algn="r">
+            <a:lvl9pPr marL="0" marR="0" lvl="8" indent="0" algn="r">
               <a:lnSpc>
                 <a:spcPct val="100000"/>
               </a:lnSpc>
@@ -2838,7 +2923,7 @@
               <a:buSzPts val="1000"/>
               <a:buFont typeface="Arial"/>
               <a:buNone/>
-              <a:defRPr b="0" i="0" sz="1000" u="none" cap="none" strike="noStrike">
+              <a:defRPr sz="1000" b="0" i="0" u="none" strike="noStrike" cap="none">
                 <a:solidFill>
                   <a:schemeClr val="dk2"/>
                 </a:solidFill>
@@ -2850,7 +2935,7 @@
             </a:lvl9pPr>
           </a:lstStyle>
           <a:p>
-            <a:pPr indent="0" lvl="0" marL="0" rtl="0" algn="r">
+            <a:pPr marL="0" lvl="0" indent="0" algn="r" rtl="0">
               <a:spcBef>
                 <a:spcPts val="0"/>
               </a:spcBef>
@@ -2876,11 +2961,11 @@
 </file>
 
 <file path=ppt/slideLayouts/slideLayout10.xml><?xml version="1.0" encoding="utf-8"?>
-<p:sldLayout xmlns:a="http://schemas.openxmlformats.org/drawingml/2006/main" xmlns:r="http://schemas.openxmlformats.org/officeDocument/2006/relationships" xmlns:mc="http://schemas.openxmlformats.org/markup-compatibility/2006" xmlns:mv="urn:schemas-microsoft-com:mac:vml" xmlns:p="http://schemas.openxmlformats.org/presentationml/2006/main" xmlns:c="http://schemas.openxmlformats.org/drawingml/2006/chart" xmlns:dgm="http://schemas.openxmlformats.org/drawingml/2006/diagram" xmlns:o="urn:schemas-microsoft-com:office:office" xmlns:v="urn:schemas-microsoft-com:vml" xmlns:pvml="urn:schemas-microsoft-com:office:powerpoint" xmlns:com="http://schemas.openxmlformats.org/drawingml/2006/compatibility" xmlns:p14="http://schemas.microsoft.com/office/powerpoint/2010/main" xmlns:p15="http://schemas.microsoft.com/office/powerpoint/2012/main" xmlns:ahyp="http://schemas.microsoft.com/office/drawing/2018/hyperlinkcolor" matchingName="Caption">
+<p:sldLayout xmlns:a="http://schemas.openxmlformats.org/drawingml/2006/main" xmlns:r="http://schemas.openxmlformats.org/officeDocument/2006/relationships" xmlns:p="http://schemas.openxmlformats.org/presentationml/2006/main" matchingName="Caption">
   <p:cSld name="CAPTION_ONLY">
     <p:spTree>
       <p:nvGrpSpPr>
-        <p:cNvPr id="43" name="Shape 43"/>
+        <p:cNvPr id="1" name="Shape 43"/>
         <p:cNvGrpSpPr/>
         <p:nvPr/>
       </p:nvGrpSpPr>
@@ -2895,9 +2980,11 @@
       <p:sp>
         <p:nvSpPr>
           <p:cNvPr id="44" name="Google Shape;44;p11"/>
-          <p:cNvSpPr txBox="1"/>
+          <p:cNvSpPr txBox="1">
+            <a:spLocks noGrp="1"/>
+          </p:cNvSpPr>
           <p:nvPr>
-            <p:ph idx="1" type="body"/>
+            <p:ph type="body" idx="1"/>
           </p:nvPr>
         </p:nvSpPr>
         <p:spPr>
@@ -2914,11 +3001,11 @@
           </a:ln>
         </p:spPr>
         <p:txBody>
-          <a:bodyPr anchorCtr="0" anchor="ctr" bIns="91425" lIns="91425" spcFirstLastPara="1" rIns="91425" wrap="square" tIns="91425">
+          <a:bodyPr spcFirstLastPara="1" wrap="square" lIns="91425" tIns="91425" rIns="91425" bIns="91425" anchor="ctr" anchorCtr="0">
             <a:normAutofit/>
           </a:bodyPr>
           <a:lstStyle>
-            <a:lvl1pPr indent="-228600" lvl="0" marL="457200" algn="l">
+            <a:lvl1pPr marL="457200" lvl="0" indent="-228600" algn="l">
               <a:lnSpc>
                 <a:spcPct val="100000"/>
               </a:lnSpc>
@@ -2933,15 +3020,19 @@
               <a:defRPr/>
             </a:lvl1pPr>
           </a:lstStyle>
-          <a:p/>
+          <a:p>
+            <a:endParaRPr/>
+          </a:p>
         </p:txBody>
       </p:sp>
       <p:sp>
         <p:nvSpPr>
           <p:cNvPr id="45" name="Google Shape;45;p11"/>
-          <p:cNvSpPr txBox="1"/>
+          <p:cNvSpPr txBox="1">
+            <a:spLocks noGrp="1"/>
+          </p:cNvSpPr>
           <p:nvPr>
-            <p:ph idx="12" type="sldNum"/>
+            <p:ph type="sldNum" idx="12"/>
           </p:nvPr>
         </p:nvSpPr>
         <p:spPr>
@@ -2958,11 +3049,11 @@
           </a:ln>
         </p:spPr>
         <p:txBody>
-          <a:bodyPr anchorCtr="0" anchor="ctr" bIns="91425" lIns="91425" spcFirstLastPara="1" rIns="91425" wrap="square" tIns="91425">
+          <a:bodyPr spcFirstLastPara="1" wrap="square" lIns="91425" tIns="91425" rIns="91425" bIns="91425" anchor="ctr" anchorCtr="0">
             <a:normAutofit/>
           </a:bodyPr>
           <a:lstStyle>
-            <a:lvl1pPr indent="0" lvl="0" marL="0" marR="0" algn="r">
+            <a:lvl1pPr marL="0" marR="0" lvl="0" indent="0" algn="r">
               <a:lnSpc>
                 <a:spcPct val="100000"/>
               </a:lnSpc>
@@ -2978,7 +3069,7 @@
               <a:buSzPts val="1000"/>
               <a:buFont typeface="Arial"/>
               <a:buNone/>
-              <a:defRPr b="0" i="0" sz="1000" u="none" cap="none" strike="noStrike">
+              <a:defRPr sz="1000" b="0" i="0" u="none" strike="noStrike" cap="none">
                 <a:solidFill>
                   <a:schemeClr val="dk2"/>
                 </a:solidFill>
@@ -2988,7 +3079,7 @@
                 <a:sym typeface="Arial"/>
               </a:defRPr>
             </a:lvl1pPr>
-            <a:lvl2pPr indent="0" lvl="1" marL="0" marR="0" algn="r">
+            <a:lvl2pPr marL="0" marR="0" lvl="1" indent="0" algn="r">
               <a:lnSpc>
                 <a:spcPct val="100000"/>
               </a:lnSpc>
@@ -3004,7 +3095,7 @@
               <a:buSzPts val="1000"/>
               <a:buFont typeface="Arial"/>
               <a:buNone/>
-              <a:defRPr b="0" i="0" sz="1000" u="none" cap="none" strike="noStrike">
+              <a:defRPr sz="1000" b="0" i="0" u="none" strike="noStrike" cap="none">
                 <a:solidFill>
                   <a:schemeClr val="dk2"/>
                 </a:solidFill>
@@ -3014,7 +3105,7 @@
                 <a:sym typeface="Arial"/>
               </a:defRPr>
             </a:lvl2pPr>
-            <a:lvl3pPr indent="0" lvl="2" marL="0" marR="0" algn="r">
+            <a:lvl3pPr marL="0" marR="0" lvl="2" indent="0" algn="r">
               <a:lnSpc>
                 <a:spcPct val="100000"/>
               </a:lnSpc>
@@ -3030,7 +3121,7 @@
               <a:buSzPts val="1000"/>
               <a:buFont typeface="Arial"/>
               <a:buNone/>
-              <a:defRPr b="0" i="0" sz="1000" u="none" cap="none" strike="noStrike">
+              <a:defRPr sz="1000" b="0" i="0" u="none" strike="noStrike" cap="none">
                 <a:solidFill>
                   <a:schemeClr val="dk2"/>
                 </a:solidFill>
@@ -3040,7 +3131,7 @@
                 <a:sym typeface="Arial"/>
               </a:defRPr>
             </a:lvl3pPr>
-            <a:lvl4pPr indent="0" lvl="3" marL="0" marR="0" algn="r">
+            <a:lvl4pPr marL="0" marR="0" lvl="3" indent="0" algn="r">
               <a:lnSpc>
                 <a:spcPct val="100000"/>
               </a:lnSpc>
@@ -3056,7 +3147,7 @@
               <a:buSzPts val="1000"/>
               <a:buFont typeface="Arial"/>
               <a:buNone/>
-              <a:defRPr b="0" i="0" sz="1000" u="none" cap="none" strike="noStrike">
+              <a:defRPr sz="1000" b="0" i="0" u="none" strike="noStrike" cap="none">
                 <a:solidFill>
                   <a:schemeClr val="dk2"/>
                 </a:solidFill>
@@ -3066,7 +3157,7 @@
                 <a:sym typeface="Arial"/>
               </a:defRPr>
             </a:lvl4pPr>
-            <a:lvl5pPr indent="0" lvl="4" marL="0" marR="0" algn="r">
+            <a:lvl5pPr marL="0" marR="0" lvl="4" indent="0" algn="r">
               <a:lnSpc>
                 <a:spcPct val="100000"/>
               </a:lnSpc>
@@ -3082,7 +3173,7 @@
               <a:buSzPts val="1000"/>
               <a:buFont typeface="Arial"/>
               <a:buNone/>
-              <a:defRPr b="0" i="0" sz="1000" u="none" cap="none" strike="noStrike">
+              <a:defRPr sz="1000" b="0" i="0" u="none" strike="noStrike" cap="none">
                 <a:solidFill>
                   <a:schemeClr val="dk2"/>
                 </a:solidFill>
@@ -3092,7 +3183,7 @@
                 <a:sym typeface="Arial"/>
               </a:defRPr>
             </a:lvl5pPr>
-            <a:lvl6pPr indent="0" lvl="5" marL="0" marR="0" algn="r">
+            <a:lvl6pPr marL="0" marR="0" lvl="5" indent="0" algn="r">
               <a:lnSpc>
                 <a:spcPct val="100000"/>
               </a:lnSpc>
@@ -3108,7 +3199,7 @@
               <a:buSzPts val="1000"/>
               <a:buFont typeface="Arial"/>
               <a:buNone/>
-              <a:defRPr b="0" i="0" sz="1000" u="none" cap="none" strike="noStrike">
+              <a:defRPr sz="1000" b="0" i="0" u="none" strike="noStrike" cap="none">
                 <a:solidFill>
                   <a:schemeClr val="dk2"/>
                 </a:solidFill>
@@ -3118,7 +3209,7 @@
                 <a:sym typeface="Arial"/>
               </a:defRPr>
             </a:lvl6pPr>
-            <a:lvl7pPr indent="0" lvl="6" marL="0" marR="0" algn="r">
+            <a:lvl7pPr marL="0" marR="0" lvl="6" indent="0" algn="r">
               <a:lnSpc>
                 <a:spcPct val="100000"/>
               </a:lnSpc>
@@ -3134,7 +3225,7 @@
               <a:buSzPts val="1000"/>
               <a:buFont typeface="Arial"/>
               <a:buNone/>
-              <a:defRPr b="0" i="0" sz="1000" u="none" cap="none" strike="noStrike">
+              <a:defRPr sz="1000" b="0" i="0" u="none" strike="noStrike" cap="none">
                 <a:solidFill>
                   <a:schemeClr val="dk2"/>
                 </a:solidFill>
@@ -3144,7 +3235,7 @@
                 <a:sym typeface="Arial"/>
               </a:defRPr>
             </a:lvl7pPr>
-            <a:lvl8pPr indent="0" lvl="7" marL="0" marR="0" algn="r">
+            <a:lvl8pPr marL="0" marR="0" lvl="7" indent="0" algn="r">
               <a:lnSpc>
                 <a:spcPct val="100000"/>
               </a:lnSpc>
@@ -3160,7 +3251,7 @@
               <a:buSzPts val="1000"/>
               <a:buFont typeface="Arial"/>
               <a:buNone/>
-              <a:defRPr b="0" i="0" sz="1000" u="none" cap="none" strike="noStrike">
+              <a:defRPr sz="1000" b="0" i="0" u="none" strike="noStrike" cap="none">
                 <a:solidFill>
                   <a:schemeClr val="dk2"/>
                 </a:solidFill>
@@ -3170,7 +3261,7 @@
                 <a:sym typeface="Arial"/>
               </a:defRPr>
             </a:lvl8pPr>
-            <a:lvl9pPr indent="0" lvl="8" marL="0" marR="0" algn="r">
+            <a:lvl9pPr marL="0" marR="0" lvl="8" indent="0" algn="r">
               <a:lnSpc>
                 <a:spcPct val="100000"/>
               </a:lnSpc>
@@ -3186,7 +3277,7 @@
               <a:buSzPts val="1000"/>
               <a:buFont typeface="Arial"/>
               <a:buNone/>
-              <a:defRPr b="0" i="0" sz="1000" u="none" cap="none" strike="noStrike">
+              <a:defRPr sz="1000" b="0" i="0" u="none" strike="noStrike" cap="none">
                 <a:solidFill>
                   <a:schemeClr val="dk2"/>
                 </a:solidFill>
@@ -3198,7 +3289,7 @@
             </a:lvl9pPr>
           </a:lstStyle>
           <a:p>
-            <a:pPr indent="0" lvl="0" marL="0" rtl="0" algn="r">
+            <a:pPr marL="0" lvl="0" indent="0" algn="r" rtl="0">
               <a:spcBef>
                 <a:spcPts val="0"/>
               </a:spcBef>
@@ -3224,11 +3315,11 @@
 </file>
 
 <file path=ppt/slideLayouts/slideLayout11.xml><?xml version="1.0" encoding="utf-8"?>
-<p:sldLayout xmlns:a="http://schemas.openxmlformats.org/drawingml/2006/main" xmlns:r="http://schemas.openxmlformats.org/officeDocument/2006/relationships" xmlns:mc="http://schemas.openxmlformats.org/markup-compatibility/2006" xmlns:mv="urn:schemas-microsoft-com:mac:vml" xmlns:p="http://schemas.openxmlformats.org/presentationml/2006/main" xmlns:c="http://schemas.openxmlformats.org/drawingml/2006/chart" xmlns:dgm="http://schemas.openxmlformats.org/drawingml/2006/diagram" xmlns:o="urn:schemas-microsoft-com:office:office" xmlns:v="urn:schemas-microsoft-com:vml" xmlns:pvml="urn:schemas-microsoft-com:office:powerpoint" xmlns:com="http://schemas.openxmlformats.org/drawingml/2006/compatibility" xmlns:p14="http://schemas.microsoft.com/office/powerpoint/2010/main" xmlns:p15="http://schemas.microsoft.com/office/powerpoint/2012/main" xmlns:ahyp="http://schemas.microsoft.com/office/drawing/2018/hyperlinkcolor" matchingName="Big number">
+<p:sldLayout xmlns:a="http://schemas.openxmlformats.org/drawingml/2006/main" xmlns:r="http://schemas.openxmlformats.org/officeDocument/2006/relationships" xmlns:p="http://schemas.openxmlformats.org/presentationml/2006/main" matchingName="Big number">
   <p:cSld name="BIG_NUMBER">
     <p:spTree>
       <p:nvGrpSpPr>
-        <p:cNvPr id="46" name="Shape 46"/>
+        <p:cNvPr id="1" name="Shape 46"/>
         <p:cNvGrpSpPr/>
         <p:nvPr/>
       </p:nvGrpSpPr>
@@ -3243,9 +3334,11 @@
       <p:sp>
         <p:nvSpPr>
           <p:cNvPr id="47" name="Google Shape;47;p12"/>
-          <p:cNvSpPr txBox="1"/>
+          <p:cNvSpPr txBox="1">
+            <a:spLocks noGrp="1"/>
+          </p:cNvSpPr>
           <p:nvPr>
-            <p:ph hasCustomPrompt="1" type="title"/>
+            <p:ph type="title" hasCustomPrompt="1"/>
           </p:nvPr>
         </p:nvSpPr>
         <p:spPr>
@@ -3262,7 +3355,7 @@
           </a:ln>
         </p:spPr>
         <p:txBody>
-          <a:bodyPr anchorCtr="0" anchor="b" bIns="91425" lIns="91425" spcFirstLastPara="1" rIns="91425" wrap="square" tIns="91425">
+          <a:bodyPr spcFirstLastPara="1" wrap="square" lIns="91425" tIns="91425" rIns="91425" bIns="91425" anchor="b" anchorCtr="0">
             <a:normAutofit/>
           </a:bodyPr>
           <a:lstStyle>
@@ -3403,9 +3496,11 @@
       <p:sp>
         <p:nvSpPr>
           <p:cNvPr id="48" name="Google Shape;48;p12"/>
-          <p:cNvSpPr txBox="1"/>
+          <p:cNvSpPr txBox="1">
+            <a:spLocks noGrp="1"/>
+          </p:cNvSpPr>
           <p:nvPr>
-            <p:ph idx="1" type="body"/>
+            <p:ph type="body" idx="1"/>
           </p:nvPr>
         </p:nvSpPr>
         <p:spPr>
@@ -3422,11 +3517,11 @@
           </a:ln>
         </p:spPr>
         <p:txBody>
-          <a:bodyPr anchorCtr="0" anchor="t" bIns="91425" lIns="91425" spcFirstLastPara="1" rIns="91425" wrap="square" tIns="91425">
+          <a:bodyPr spcFirstLastPara="1" wrap="square" lIns="91425" tIns="91425" rIns="91425" bIns="91425" anchor="t" anchorCtr="0">
             <a:normAutofit/>
           </a:bodyPr>
           <a:lstStyle>
-            <a:lvl1pPr indent="-342900" lvl="0" marL="457200" algn="ctr">
+            <a:lvl1pPr marL="457200" lvl="0" indent="-342900" algn="ctr">
               <a:lnSpc>
                 <a:spcPct val="115000"/>
               </a:lnSpc>
@@ -3440,7 +3535,7 @@
               <a:buChar char="●"/>
               <a:defRPr/>
             </a:lvl1pPr>
-            <a:lvl2pPr indent="-317500" lvl="1" marL="914400" algn="ctr">
+            <a:lvl2pPr marL="914400" lvl="1" indent="-317500" algn="ctr">
               <a:lnSpc>
                 <a:spcPct val="115000"/>
               </a:lnSpc>
@@ -3454,7 +3549,7 @@
               <a:buChar char="○"/>
               <a:defRPr/>
             </a:lvl2pPr>
-            <a:lvl3pPr indent="-317500" lvl="2" marL="1371600" algn="ctr">
+            <a:lvl3pPr marL="1371600" lvl="2" indent="-317500" algn="ctr">
               <a:lnSpc>
                 <a:spcPct val="115000"/>
               </a:lnSpc>
@@ -3468,7 +3563,7 @@
               <a:buChar char="■"/>
               <a:defRPr/>
             </a:lvl3pPr>
-            <a:lvl4pPr indent="-317500" lvl="3" marL="1828800" algn="ctr">
+            <a:lvl4pPr marL="1828800" lvl="3" indent="-317500" algn="ctr">
               <a:lnSpc>
                 <a:spcPct val="115000"/>
               </a:lnSpc>
@@ -3482,7 +3577,7 @@
               <a:buChar char="●"/>
               <a:defRPr/>
             </a:lvl4pPr>
-            <a:lvl5pPr indent="-317500" lvl="4" marL="2286000" algn="ctr">
+            <a:lvl5pPr marL="2286000" lvl="4" indent="-317500" algn="ctr">
               <a:lnSpc>
                 <a:spcPct val="115000"/>
               </a:lnSpc>
@@ -3496,7 +3591,7 @@
               <a:buChar char="○"/>
               <a:defRPr/>
             </a:lvl5pPr>
-            <a:lvl6pPr indent="-317500" lvl="5" marL="2743200" algn="ctr">
+            <a:lvl6pPr marL="2743200" lvl="5" indent="-317500" algn="ctr">
               <a:lnSpc>
                 <a:spcPct val="115000"/>
               </a:lnSpc>
@@ -3510,7 +3605,7 @@
               <a:buChar char="■"/>
               <a:defRPr/>
             </a:lvl6pPr>
-            <a:lvl7pPr indent="-317500" lvl="6" marL="3200400" algn="ctr">
+            <a:lvl7pPr marL="3200400" lvl="6" indent="-317500" algn="ctr">
               <a:lnSpc>
                 <a:spcPct val="115000"/>
               </a:lnSpc>
@@ -3524,7 +3619,7 @@
               <a:buChar char="●"/>
               <a:defRPr/>
             </a:lvl7pPr>
-            <a:lvl8pPr indent="-317500" lvl="7" marL="3657600" algn="ctr">
+            <a:lvl8pPr marL="3657600" lvl="7" indent="-317500" algn="ctr">
               <a:lnSpc>
                 <a:spcPct val="115000"/>
               </a:lnSpc>
@@ -3538,7 +3633,7 @@
               <a:buChar char="○"/>
               <a:defRPr/>
             </a:lvl8pPr>
-            <a:lvl9pPr indent="-317500" lvl="8" marL="4114800" algn="ctr">
+            <a:lvl9pPr marL="4114800" lvl="8" indent="-317500" algn="ctr">
               <a:lnSpc>
                 <a:spcPct val="115000"/>
               </a:lnSpc>
@@ -3553,15 +3648,19 @@
               <a:defRPr/>
             </a:lvl9pPr>
           </a:lstStyle>
-          <a:p/>
+          <a:p>
+            <a:endParaRPr/>
+          </a:p>
         </p:txBody>
       </p:sp>
       <p:sp>
         <p:nvSpPr>
           <p:cNvPr id="49" name="Google Shape;49;p12"/>
-          <p:cNvSpPr txBox="1"/>
+          <p:cNvSpPr txBox="1">
+            <a:spLocks noGrp="1"/>
+          </p:cNvSpPr>
           <p:nvPr>
-            <p:ph idx="12" type="sldNum"/>
+            <p:ph type="sldNum" idx="12"/>
           </p:nvPr>
         </p:nvSpPr>
         <p:spPr>
@@ -3578,11 +3677,11 @@
           </a:ln>
         </p:spPr>
         <p:txBody>
-          <a:bodyPr anchorCtr="0" anchor="ctr" bIns="91425" lIns="91425" spcFirstLastPara="1" rIns="91425" wrap="square" tIns="91425">
+          <a:bodyPr spcFirstLastPara="1" wrap="square" lIns="91425" tIns="91425" rIns="91425" bIns="91425" anchor="ctr" anchorCtr="0">
             <a:normAutofit/>
           </a:bodyPr>
           <a:lstStyle>
-            <a:lvl1pPr indent="0" lvl="0" marL="0" marR="0" algn="r">
+            <a:lvl1pPr marL="0" marR="0" lvl="0" indent="0" algn="r">
               <a:lnSpc>
                 <a:spcPct val="100000"/>
               </a:lnSpc>
@@ -3598,7 +3697,7 @@
               <a:buSzPts val="1000"/>
               <a:buFont typeface="Arial"/>
               <a:buNone/>
-              <a:defRPr b="0" i="0" sz="1000" u="none" cap="none" strike="noStrike">
+              <a:defRPr sz="1000" b="0" i="0" u="none" strike="noStrike" cap="none">
                 <a:solidFill>
                   <a:schemeClr val="dk2"/>
                 </a:solidFill>
@@ -3608,7 +3707,7 @@
                 <a:sym typeface="Arial"/>
               </a:defRPr>
             </a:lvl1pPr>
-            <a:lvl2pPr indent="0" lvl="1" marL="0" marR="0" algn="r">
+            <a:lvl2pPr marL="0" marR="0" lvl="1" indent="0" algn="r">
               <a:lnSpc>
                 <a:spcPct val="100000"/>
               </a:lnSpc>
@@ -3624,7 +3723,7 @@
               <a:buSzPts val="1000"/>
               <a:buFont typeface="Arial"/>
               <a:buNone/>
-              <a:defRPr b="0" i="0" sz="1000" u="none" cap="none" strike="noStrike">
+              <a:defRPr sz="1000" b="0" i="0" u="none" strike="noStrike" cap="none">
                 <a:solidFill>
                   <a:schemeClr val="dk2"/>
                 </a:solidFill>
@@ -3634,7 +3733,7 @@
                 <a:sym typeface="Arial"/>
               </a:defRPr>
             </a:lvl2pPr>
-            <a:lvl3pPr indent="0" lvl="2" marL="0" marR="0" algn="r">
+            <a:lvl3pPr marL="0" marR="0" lvl="2" indent="0" algn="r">
               <a:lnSpc>
                 <a:spcPct val="100000"/>
               </a:lnSpc>
@@ -3650,7 +3749,7 @@
               <a:buSzPts val="1000"/>
               <a:buFont typeface="Arial"/>
               <a:buNone/>
-              <a:defRPr b="0" i="0" sz="1000" u="none" cap="none" strike="noStrike">
+              <a:defRPr sz="1000" b="0" i="0" u="none" strike="noStrike" cap="none">
                 <a:solidFill>
                   <a:schemeClr val="dk2"/>
                 </a:solidFill>
@@ -3660,7 +3759,7 @@
                 <a:sym typeface="Arial"/>
               </a:defRPr>
             </a:lvl3pPr>
-            <a:lvl4pPr indent="0" lvl="3" marL="0" marR="0" algn="r">
+            <a:lvl4pPr marL="0" marR="0" lvl="3" indent="0" algn="r">
               <a:lnSpc>
                 <a:spcPct val="100000"/>
               </a:lnSpc>
@@ -3676,7 +3775,7 @@
               <a:buSzPts val="1000"/>
               <a:buFont typeface="Arial"/>
               <a:buNone/>
-              <a:defRPr b="0" i="0" sz="1000" u="none" cap="none" strike="noStrike">
+              <a:defRPr sz="1000" b="0" i="0" u="none" strike="noStrike" cap="none">
                 <a:solidFill>
                   <a:schemeClr val="dk2"/>
                 </a:solidFill>
@@ -3686,7 +3785,7 @@
                 <a:sym typeface="Arial"/>
               </a:defRPr>
             </a:lvl4pPr>
-            <a:lvl5pPr indent="0" lvl="4" marL="0" marR="0" algn="r">
+            <a:lvl5pPr marL="0" marR="0" lvl="4" indent="0" algn="r">
               <a:lnSpc>
                 <a:spcPct val="100000"/>
               </a:lnSpc>
@@ -3702,7 +3801,7 @@
               <a:buSzPts val="1000"/>
               <a:buFont typeface="Arial"/>
               <a:buNone/>
-              <a:defRPr b="0" i="0" sz="1000" u="none" cap="none" strike="noStrike">
+              <a:defRPr sz="1000" b="0" i="0" u="none" strike="noStrike" cap="none">
                 <a:solidFill>
                   <a:schemeClr val="dk2"/>
                 </a:solidFill>
@@ -3712,7 +3811,7 @@
                 <a:sym typeface="Arial"/>
               </a:defRPr>
             </a:lvl5pPr>
-            <a:lvl6pPr indent="0" lvl="5" marL="0" marR="0" algn="r">
+            <a:lvl6pPr marL="0" marR="0" lvl="5" indent="0" algn="r">
               <a:lnSpc>
                 <a:spcPct val="100000"/>
               </a:lnSpc>
@@ -3728,7 +3827,7 @@
               <a:buSzPts val="1000"/>
               <a:buFont typeface="Arial"/>
               <a:buNone/>
-              <a:defRPr b="0" i="0" sz="1000" u="none" cap="none" strike="noStrike">
+              <a:defRPr sz="1000" b="0" i="0" u="none" strike="noStrike" cap="none">
                 <a:solidFill>
                   <a:schemeClr val="dk2"/>
                 </a:solidFill>
@@ -3738,7 +3837,7 @@
                 <a:sym typeface="Arial"/>
               </a:defRPr>
             </a:lvl6pPr>
-            <a:lvl7pPr indent="0" lvl="6" marL="0" marR="0" algn="r">
+            <a:lvl7pPr marL="0" marR="0" lvl="6" indent="0" algn="r">
               <a:lnSpc>
                 <a:spcPct val="100000"/>
               </a:lnSpc>
@@ -3754,7 +3853,7 @@
               <a:buSzPts val="1000"/>
               <a:buFont typeface="Arial"/>
               <a:buNone/>
-              <a:defRPr b="0" i="0" sz="1000" u="none" cap="none" strike="noStrike">
+              <a:defRPr sz="1000" b="0" i="0" u="none" strike="noStrike" cap="none">
                 <a:solidFill>
                   <a:schemeClr val="dk2"/>
                 </a:solidFill>
@@ -3764,7 +3863,7 @@
                 <a:sym typeface="Arial"/>
               </a:defRPr>
             </a:lvl7pPr>
-            <a:lvl8pPr indent="0" lvl="7" marL="0" marR="0" algn="r">
+            <a:lvl8pPr marL="0" marR="0" lvl="7" indent="0" algn="r">
               <a:lnSpc>
                 <a:spcPct val="100000"/>
               </a:lnSpc>
@@ -3780,7 +3879,7 @@
               <a:buSzPts val="1000"/>
               <a:buFont typeface="Arial"/>
               <a:buNone/>
-              <a:defRPr b="0" i="0" sz="1000" u="none" cap="none" strike="noStrike">
+              <a:defRPr sz="1000" b="0" i="0" u="none" strike="noStrike" cap="none">
                 <a:solidFill>
                   <a:schemeClr val="dk2"/>
                 </a:solidFill>
@@ -3790,7 +3889,7 @@
                 <a:sym typeface="Arial"/>
               </a:defRPr>
             </a:lvl8pPr>
-            <a:lvl9pPr indent="0" lvl="8" marL="0" marR="0" algn="r">
+            <a:lvl9pPr marL="0" marR="0" lvl="8" indent="0" algn="r">
               <a:lnSpc>
                 <a:spcPct val="100000"/>
               </a:lnSpc>
@@ -3806,7 +3905,7 @@
               <a:buSzPts val="1000"/>
               <a:buFont typeface="Arial"/>
               <a:buNone/>
-              <a:defRPr b="0" i="0" sz="1000" u="none" cap="none" strike="noStrike">
+              <a:defRPr sz="1000" b="0" i="0" u="none" strike="noStrike" cap="none">
                 <a:solidFill>
                   <a:schemeClr val="dk2"/>
                 </a:solidFill>
@@ -3818,7 +3917,7 @@
             </a:lvl9pPr>
           </a:lstStyle>
           <a:p>
-            <a:pPr indent="0" lvl="0" marL="0" rtl="0" algn="r">
+            <a:pPr marL="0" lvl="0" indent="0" algn="r" rtl="0">
               <a:spcBef>
                 <a:spcPts val="0"/>
               </a:spcBef>
@@ -3844,11 +3943,11 @@
 </file>
 
 <file path=ppt/slideLayouts/slideLayout12.xml><?xml version="1.0" encoding="utf-8"?>
-<p:sldLayout xmlns:a="http://schemas.openxmlformats.org/drawingml/2006/main" xmlns:r="http://schemas.openxmlformats.org/officeDocument/2006/relationships" xmlns:mc="http://schemas.openxmlformats.org/markup-compatibility/2006" xmlns:mv="urn:schemas-microsoft-com:mac:vml" xmlns:p="http://schemas.openxmlformats.org/presentationml/2006/main" xmlns:c="http://schemas.openxmlformats.org/drawingml/2006/chart" xmlns:dgm="http://schemas.openxmlformats.org/drawingml/2006/diagram" xmlns:o="urn:schemas-microsoft-com:office:office" xmlns:v="urn:schemas-microsoft-com:vml" xmlns:pvml="urn:schemas-microsoft-com:office:powerpoint" xmlns:com="http://schemas.openxmlformats.org/drawingml/2006/compatibility" xmlns:p14="http://schemas.microsoft.com/office/powerpoint/2010/main" xmlns:p15="http://schemas.microsoft.com/office/powerpoint/2012/main" xmlns:ahyp="http://schemas.microsoft.com/office/drawing/2018/hyperlinkcolor" matchingName="Blank" type="blank">
+<p:sldLayout xmlns:a="http://schemas.openxmlformats.org/drawingml/2006/main" xmlns:r="http://schemas.openxmlformats.org/officeDocument/2006/relationships" xmlns:p="http://schemas.openxmlformats.org/presentationml/2006/main" matchingName="Blank" type="blank">
   <p:cSld name="BLANK">
     <p:spTree>
       <p:nvGrpSpPr>
-        <p:cNvPr id="50" name="Shape 50"/>
+        <p:cNvPr id="1" name="Shape 50"/>
         <p:cNvGrpSpPr/>
         <p:nvPr/>
       </p:nvGrpSpPr>
@@ -3863,9 +3962,11 @@
       <p:sp>
         <p:nvSpPr>
           <p:cNvPr id="51" name="Google Shape;51;p13"/>
-          <p:cNvSpPr txBox="1"/>
+          <p:cNvSpPr txBox="1">
+            <a:spLocks noGrp="1"/>
+          </p:cNvSpPr>
           <p:nvPr>
-            <p:ph idx="12" type="sldNum"/>
+            <p:ph type="sldNum" idx="12"/>
           </p:nvPr>
         </p:nvSpPr>
         <p:spPr>
@@ -3882,11 +3983,11 @@
           </a:ln>
         </p:spPr>
         <p:txBody>
-          <a:bodyPr anchorCtr="0" anchor="ctr" bIns="91425" lIns="91425" spcFirstLastPara="1" rIns="91425" wrap="square" tIns="91425">
+          <a:bodyPr spcFirstLastPara="1" wrap="square" lIns="91425" tIns="91425" rIns="91425" bIns="91425" anchor="ctr" anchorCtr="0">
             <a:normAutofit/>
           </a:bodyPr>
           <a:lstStyle>
-            <a:lvl1pPr indent="0" lvl="0" marL="0" marR="0" algn="r">
+            <a:lvl1pPr marL="0" marR="0" lvl="0" indent="0" algn="r">
               <a:lnSpc>
                 <a:spcPct val="100000"/>
               </a:lnSpc>
@@ -3902,7 +4003,7 @@
               <a:buSzPts val="1000"/>
               <a:buFont typeface="Arial"/>
               <a:buNone/>
-              <a:defRPr b="0" i="0" sz="1000" u="none" cap="none" strike="noStrike">
+              <a:defRPr sz="1000" b="0" i="0" u="none" strike="noStrike" cap="none">
                 <a:solidFill>
                   <a:schemeClr val="dk2"/>
                 </a:solidFill>
@@ -3912,7 +4013,7 @@
                 <a:sym typeface="Arial"/>
               </a:defRPr>
             </a:lvl1pPr>
-            <a:lvl2pPr indent="0" lvl="1" marL="0" marR="0" algn="r">
+            <a:lvl2pPr marL="0" marR="0" lvl="1" indent="0" algn="r">
               <a:lnSpc>
                 <a:spcPct val="100000"/>
               </a:lnSpc>
@@ -3928,7 +4029,7 @@
               <a:buSzPts val="1000"/>
               <a:buFont typeface="Arial"/>
               <a:buNone/>
-              <a:defRPr b="0" i="0" sz="1000" u="none" cap="none" strike="noStrike">
+              <a:defRPr sz="1000" b="0" i="0" u="none" strike="noStrike" cap="none">
                 <a:solidFill>
                   <a:schemeClr val="dk2"/>
                 </a:solidFill>
@@ -3938,7 +4039,7 @@
                 <a:sym typeface="Arial"/>
               </a:defRPr>
             </a:lvl2pPr>
-            <a:lvl3pPr indent="0" lvl="2" marL="0" marR="0" algn="r">
+            <a:lvl3pPr marL="0" marR="0" lvl="2" indent="0" algn="r">
               <a:lnSpc>
                 <a:spcPct val="100000"/>
               </a:lnSpc>
@@ -3954,7 +4055,7 @@
               <a:buSzPts val="1000"/>
               <a:buFont typeface="Arial"/>
               <a:buNone/>
-              <a:defRPr b="0" i="0" sz="1000" u="none" cap="none" strike="noStrike">
+              <a:defRPr sz="1000" b="0" i="0" u="none" strike="noStrike" cap="none">
                 <a:solidFill>
                   <a:schemeClr val="dk2"/>
                 </a:solidFill>
@@ -3964,7 +4065,7 @@
                 <a:sym typeface="Arial"/>
               </a:defRPr>
             </a:lvl3pPr>
-            <a:lvl4pPr indent="0" lvl="3" marL="0" marR="0" algn="r">
+            <a:lvl4pPr marL="0" marR="0" lvl="3" indent="0" algn="r">
               <a:lnSpc>
                 <a:spcPct val="100000"/>
               </a:lnSpc>
@@ -3980,7 +4081,7 @@
               <a:buSzPts val="1000"/>
               <a:buFont typeface="Arial"/>
               <a:buNone/>
-              <a:defRPr b="0" i="0" sz="1000" u="none" cap="none" strike="noStrike">
+              <a:defRPr sz="1000" b="0" i="0" u="none" strike="noStrike" cap="none">
                 <a:solidFill>
                   <a:schemeClr val="dk2"/>
                 </a:solidFill>
@@ -3990,7 +4091,7 @@
                 <a:sym typeface="Arial"/>
               </a:defRPr>
             </a:lvl4pPr>
-            <a:lvl5pPr indent="0" lvl="4" marL="0" marR="0" algn="r">
+            <a:lvl5pPr marL="0" marR="0" lvl="4" indent="0" algn="r">
               <a:lnSpc>
                 <a:spcPct val="100000"/>
               </a:lnSpc>
@@ -4006,7 +4107,7 @@
               <a:buSzPts val="1000"/>
               <a:buFont typeface="Arial"/>
               <a:buNone/>
-              <a:defRPr b="0" i="0" sz="1000" u="none" cap="none" strike="noStrike">
+              <a:defRPr sz="1000" b="0" i="0" u="none" strike="noStrike" cap="none">
                 <a:solidFill>
                   <a:schemeClr val="dk2"/>
                 </a:solidFill>
@@ -4016,7 +4117,7 @@
                 <a:sym typeface="Arial"/>
               </a:defRPr>
             </a:lvl5pPr>
-            <a:lvl6pPr indent="0" lvl="5" marL="0" marR="0" algn="r">
+            <a:lvl6pPr marL="0" marR="0" lvl="5" indent="0" algn="r">
               <a:lnSpc>
                 <a:spcPct val="100000"/>
               </a:lnSpc>
@@ -4032,7 +4133,7 @@
               <a:buSzPts val="1000"/>
               <a:buFont typeface="Arial"/>
               <a:buNone/>
-              <a:defRPr b="0" i="0" sz="1000" u="none" cap="none" strike="noStrike">
+              <a:defRPr sz="1000" b="0" i="0" u="none" strike="noStrike" cap="none">
                 <a:solidFill>
                   <a:schemeClr val="dk2"/>
                 </a:solidFill>
@@ -4042,7 +4143,7 @@
                 <a:sym typeface="Arial"/>
               </a:defRPr>
             </a:lvl6pPr>
-            <a:lvl7pPr indent="0" lvl="6" marL="0" marR="0" algn="r">
+            <a:lvl7pPr marL="0" marR="0" lvl="6" indent="0" algn="r">
               <a:lnSpc>
                 <a:spcPct val="100000"/>
               </a:lnSpc>
@@ -4058,7 +4159,7 @@
               <a:buSzPts val="1000"/>
               <a:buFont typeface="Arial"/>
               <a:buNone/>
-              <a:defRPr b="0" i="0" sz="1000" u="none" cap="none" strike="noStrike">
+              <a:defRPr sz="1000" b="0" i="0" u="none" strike="noStrike" cap="none">
                 <a:solidFill>
                   <a:schemeClr val="dk2"/>
                 </a:solidFill>
@@ -4068,7 +4169,7 @@
                 <a:sym typeface="Arial"/>
               </a:defRPr>
             </a:lvl7pPr>
-            <a:lvl8pPr indent="0" lvl="7" marL="0" marR="0" algn="r">
+            <a:lvl8pPr marL="0" marR="0" lvl="7" indent="0" algn="r">
               <a:lnSpc>
                 <a:spcPct val="100000"/>
               </a:lnSpc>
@@ -4084,7 +4185,7 @@
               <a:buSzPts val="1000"/>
               <a:buFont typeface="Arial"/>
               <a:buNone/>
-              <a:defRPr b="0" i="0" sz="1000" u="none" cap="none" strike="noStrike">
+              <a:defRPr sz="1000" b="0" i="0" u="none" strike="noStrike" cap="none">
                 <a:solidFill>
                   <a:schemeClr val="dk2"/>
                 </a:solidFill>
@@ -4094,7 +4195,7 @@
                 <a:sym typeface="Arial"/>
               </a:defRPr>
             </a:lvl8pPr>
-            <a:lvl9pPr indent="0" lvl="8" marL="0" marR="0" algn="r">
+            <a:lvl9pPr marL="0" marR="0" lvl="8" indent="0" algn="r">
               <a:lnSpc>
                 <a:spcPct val="100000"/>
               </a:lnSpc>
@@ -4110,7 +4211,7 @@
               <a:buSzPts val="1000"/>
               <a:buFont typeface="Arial"/>
               <a:buNone/>
-              <a:defRPr b="0" i="0" sz="1000" u="none" cap="none" strike="noStrike">
+              <a:defRPr sz="1000" b="0" i="0" u="none" strike="noStrike" cap="none">
                 <a:solidFill>
                   <a:schemeClr val="dk2"/>
                 </a:solidFill>
@@ -4122,7 +4223,7 @@
             </a:lvl9pPr>
           </a:lstStyle>
           <a:p>
-            <a:pPr indent="0" lvl="0" marL="0" rtl="0" algn="r">
+            <a:pPr marL="0" lvl="0" indent="0" algn="r" rtl="0">
               <a:spcBef>
                 <a:spcPts val="0"/>
               </a:spcBef>
@@ -4148,11 +4249,11 @@
 </file>
 
 <file path=ppt/slideLayouts/slideLayout2.xml><?xml version="1.0" encoding="utf-8"?>
-<p:sldLayout xmlns:a="http://schemas.openxmlformats.org/drawingml/2006/main" xmlns:r="http://schemas.openxmlformats.org/officeDocument/2006/relationships" xmlns:mc="http://schemas.openxmlformats.org/markup-compatibility/2006" xmlns:mv="urn:schemas-microsoft-com:mac:vml" xmlns:p="http://schemas.openxmlformats.org/presentationml/2006/main" xmlns:c="http://schemas.openxmlformats.org/drawingml/2006/chart" xmlns:dgm="http://schemas.openxmlformats.org/drawingml/2006/diagram" xmlns:o="urn:schemas-microsoft-com:office:office" xmlns:v="urn:schemas-microsoft-com:vml" xmlns:pvml="urn:schemas-microsoft-com:office:powerpoint" xmlns:com="http://schemas.openxmlformats.org/drawingml/2006/compatibility" xmlns:p14="http://schemas.microsoft.com/office/powerpoint/2010/main" xmlns:p15="http://schemas.microsoft.com/office/powerpoint/2012/main" xmlns:ahyp="http://schemas.microsoft.com/office/drawing/2018/hyperlinkcolor" matchingName="Title Only">
+<p:sldLayout xmlns:a="http://schemas.openxmlformats.org/drawingml/2006/main" xmlns:r="http://schemas.openxmlformats.org/officeDocument/2006/relationships" xmlns:p="http://schemas.openxmlformats.org/presentationml/2006/main" matchingName="Title Only">
   <p:cSld name="Title Only">
     <p:spTree>
       <p:nvGrpSpPr>
-        <p:cNvPr id="13" name="Shape 13"/>
+        <p:cNvPr id="1" name="Shape 13"/>
         <p:cNvGrpSpPr/>
         <p:nvPr/>
       </p:nvGrpSpPr>
@@ -4167,9 +4268,11 @@
       <p:sp>
         <p:nvSpPr>
           <p:cNvPr id="14" name="Google Shape;14;p3"/>
-          <p:cNvSpPr/>
+          <p:cNvSpPr>
+            <a:spLocks noGrp="1"/>
+          </p:cNvSpPr>
           <p:nvPr>
-            <p:ph idx="2" type="pic"/>
+            <p:ph type="pic" idx="2"/>
           </p:nvPr>
         </p:nvSpPr>
         <p:spPr>
@@ -4179,7 +4282,7 @@
           </a:xfrm>
           <a:prstGeom prst="roundRect">
             <a:avLst>
-              <a:gd fmla="val 50000" name="adj"/>
+              <a:gd name="adj" fmla="val 50000"/>
             </a:avLst>
           </a:prstGeom>
           <a:noFill/>
@@ -4197,11 +4300,11 @@
 </file>
 
 <file path=ppt/slideLayouts/slideLayout3.xml><?xml version="1.0" encoding="utf-8"?>
-<p:sldLayout xmlns:a="http://schemas.openxmlformats.org/drawingml/2006/main" xmlns:r="http://schemas.openxmlformats.org/officeDocument/2006/relationships" xmlns:mc="http://schemas.openxmlformats.org/markup-compatibility/2006" xmlns:mv="urn:schemas-microsoft-com:mac:vml" xmlns:p="http://schemas.openxmlformats.org/presentationml/2006/main" xmlns:c="http://schemas.openxmlformats.org/drawingml/2006/chart" xmlns:dgm="http://schemas.openxmlformats.org/drawingml/2006/diagram" xmlns:o="urn:schemas-microsoft-com:office:office" xmlns:v="urn:schemas-microsoft-com:vml" xmlns:pvml="urn:schemas-microsoft-com:office:powerpoint" xmlns:com="http://schemas.openxmlformats.org/drawingml/2006/compatibility" xmlns:p14="http://schemas.microsoft.com/office/powerpoint/2010/main" xmlns:p15="http://schemas.microsoft.com/office/powerpoint/2012/main" xmlns:ahyp="http://schemas.microsoft.com/office/drawing/2018/hyperlinkcolor" matchingName="Section header" type="secHead">
+<p:sldLayout xmlns:a="http://schemas.openxmlformats.org/drawingml/2006/main" xmlns:r="http://schemas.openxmlformats.org/officeDocument/2006/relationships" xmlns:p="http://schemas.openxmlformats.org/presentationml/2006/main" matchingName="Section header" type="secHead">
   <p:cSld name="SECTION_HEADER">
     <p:spTree>
       <p:nvGrpSpPr>
-        <p:cNvPr id="15" name="Shape 15"/>
+        <p:cNvPr id="1" name="Shape 15"/>
         <p:cNvGrpSpPr/>
         <p:nvPr/>
       </p:nvGrpSpPr>
@@ -4216,7 +4319,9 @@
       <p:sp>
         <p:nvSpPr>
           <p:cNvPr id="16" name="Google Shape;16;p4"/>
-          <p:cNvSpPr txBox="1"/>
+          <p:cNvSpPr txBox="1">
+            <a:spLocks noGrp="1"/>
+          </p:cNvSpPr>
           <p:nvPr>
             <p:ph type="title"/>
           </p:nvPr>
@@ -4235,7 +4340,7 @@
           </a:ln>
         </p:spPr>
         <p:txBody>
-          <a:bodyPr anchorCtr="0" anchor="ctr" bIns="91425" lIns="91425" spcFirstLastPara="1" rIns="91425" wrap="square" tIns="91425">
+          <a:bodyPr spcFirstLastPara="1" wrap="square" lIns="91425" tIns="91425" rIns="91425" bIns="91425" anchor="ctr" anchorCtr="0">
             <a:normAutofit/>
           </a:bodyPr>
           <a:lstStyle>
@@ -4366,15 +4471,19 @@
               <a:defRPr sz="3600"/>
             </a:lvl9pPr>
           </a:lstStyle>
-          <a:p/>
+          <a:p>
+            <a:endParaRPr/>
+          </a:p>
         </p:txBody>
       </p:sp>
       <p:sp>
         <p:nvSpPr>
           <p:cNvPr id="17" name="Google Shape;17;p4"/>
-          <p:cNvSpPr txBox="1"/>
+          <p:cNvSpPr txBox="1">
+            <a:spLocks noGrp="1"/>
+          </p:cNvSpPr>
           <p:nvPr>
-            <p:ph idx="12" type="sldNum"/>
+            <p:ph type="sldNum" idx="12"/>
           </p:nvPr>
         </p:nvSpPr>
         <p:spPr>
@@ -4391,11 +4500,11 @@
           </a:ln>
         </p:spPr>
         <p:txBody>
-          <a:bodyPr anchorCtr="0" anchor="ctr" bIns="91425" lIns="91425" spcFirstLastPara="1" rIns="91425" wrap="square" tIns="91425">
+          <a:bodyPr spcFirstLastPara="1" wrap="square" lIns="91425" tIns="91425" rIns="91425" bIns="91425" anchor="ctr" anchorCtr="0">
             <a:normAutofit/>
           </a:bodyPr>
           <a:lstStyle>
-            <a:lvl1pPr indent="0" lvl="0" marL="0" marR="0" algn="r">
+            <a:lvl1pPr marL="0" marR="0" lvl="0" indent="0" algn="r">
               <a:lnSpc>
                 <a:spcPct val="100000"/>
               </a:lnSpc>
@@ -4411,7 +4520,7 @@
               <a:buSzPts val="1000"/>
               <a:buFont typeface="Arial"/>
               <a:buNone/>
-              <a:defRPr b="0" i="0" sz="1000" u="none" cap="none" strike="noStrike">
+              <a:defRPr sz="1000" b="0" i="0" u="none" strike="noStrike" cap="none">
                 <a:solidFill>
                   <a:schemeClr val="dk2"/>
                 </a:solidFill>
@@ -4421,7 +4530,7 @@
                 <a:sym typeface="Arial"/>
               </a:defRPr>
             </a:lvl1pPr>
-            <a:lvl2pPr indent="0" lvl="1" marL="0" marR="0" algn="r">
+            <a:lvl2pPr marL="0" marR="0" lvl="1" indent="0" algn="r">
               <a:lnSpc>
                 <a:spcPct val="100000"/>
               </a:lnSpc>
@@ -4437,7 +4546,7 @@
               <a:buSzPts val="1000"/>
               <a:buFont typeface="Arial"/>
               <a:buNone/>
-              <a:defRPr b="0" i="0" sz="1000" u="none" cap="none" strike="noStrike">
+              <a:defRPr sz="1000" b="0" i="0" u="none" strike="noStrike" cap="none">
                 <a:solidFill>
                   <a:schemeClr val="dk2"/>
                 </a:solidFill>
@@ -4447,7 +4556,7 @@
                 <a:sym typeface="Arial"/>
               </a:defRPr>
             </a:lvl2pPr>
-            <a:lvl3pPr indent="0" lvl="2" marL="0" marR="0" algn="r">
+            <a:lvl3pPr marL="0" marR="0" lvl="2" indent="0" algn="r">
               <a:lnSpc>
                 <a:spcPct val="100000"/>
               </a:lnSpc>
@@ -4463,7 +4572,7 @@
               <a:buSzPts val="1000"/>
               <a:buFont typeface="Arial"/>
               <a:buNone/>
-              <a:defRPr b="0" i="0" sz="1000" u="none" cap="none" strike="noStrike">
+              <a:defRPr sz="1000" b="0" i="0" u="none" strike="noStrike" cap="none">
                 <a:solidFill>
                   <a:schemeClr val="dk2"/>
                 </a:solidFill>
@@ -4473,7 +4582,7 @@
                 <a:sym typeface="Arial"/>
               </a:defRPr>
             </a:lvl3pPr>
-            <a:lvl4pPr indent="0" lvl="3" marL="0" marR="0" algn="r">
+            <a:lvl4pPr marL="0" marR="0" lvl="3" indent="0" algn="r">
               <a:lnSpc>
                 <a:spcPct val="100000"/>
               </a:lnSpc>
@@ -4489,7 +4598,7 @@
               <a:buSzPts val="1000"/>
               <a:buFont typeface="Arial"/>
               <a:buNone/>
-              <a:defRPr b="0" i="0" sz="1000" u="none" cap="none" strike="noStrike">
+              <a:defRPr sz="1000" b="0" i="0" u="none" strike="noStrike" cap="none">
                 <a:solidFill>
                   <a:schemeClr val="dk2"/>
                 </a:solidFill>
@@ -4499,7 +4608,7 @@
                 <a:sym typeface="Arial"/>
               </a:defRPr>
             </a:lvl4pPr>
-            <a:lvl5pPr indent="0" lvl="4" marL="0" marR="0" algn="r">
+            <a:lvl5pPr marL="0" marR="0" lvl="4" indent="0" algn="r">
               <a:lnSpc>
                 <a:spcPct val="100000"/>
               </a:lnSpc>
@@ -4515,7 +4624,7 @@
               <a:buSzPts val="1000"/>
               <a:buFont typeface="Arial"/>
               <a:buNone/>
-              <a:defRPr b="0" i="0" sz="1000" u="none" cap="none" strike="noStrike">
+              <a:defRPr sz="1000" b="0" i="0" u="none" strike="noStrike" cap="none">
                 <a:solidFill>
                   <a:schemeClr val="dk2"/>
                 </a:solidFill>
@@ -4525,7 +4634,7 @@
                 <a:sym typeface="Arial"/>
               </a:defRPr>
             </a:lvl5pPr>
-            <a:lvl6pPr indent="0" lvl="5" marL="0" marR="0" algn="r">
+            <a:lvl6pPr marL="0" marR="0" lvl="5" indent="0" algn="r">
               <a:lnSpc>
                 <a:spcPct val="100000"/>
               </a:lnSpc>
@@ -4541,7 +4650,7 @@
               <a:buSzPts val="1000"/>
               <a:buFont typeface="Arial"/>
               <a:buNone/>
-              <a:defRPr b="0" i="0" sz="1000" u="none" cap="none" strike="noStrike">
+              <a:defRPr sz="1000" b="0" i="0" u="none" strike="noStrike" cap="none">
                 <a:solidFill>
                   <a:schemeClr val="dk2"/>
                 </a:solidFill>
@@ -4551,7 +4660,7 @@
                 <a:sym typeface="Arial"/>
               </a:defRPr>
             </a:lvl6pPr>
-            <a:lvl7pPr indent="0" lvl="6" marL="0" marR="0" algn="r">
+            <a:lvl7pPr marL="0" marR="0" lvl="6" indent="0" algn="r">
               <a:lnSpc>
                 <a:spcPct val="100000"/>
               </a:lnSpc>
@@ -4567,7 +4676,7 @@
               <a:buSzPts val="1000"/>
               <a:buFont typeface="Arial"/>
               <a:buNone/>
-              <a:defRPr b="0" i="0" sz="1000" u="none" cap="none" strike="noStrike">
+              <a:defRPr sz="1000" b="0" i="0" u="none" strike="noStrike" cap="none">
                 <a:solidFill>
                   <a:schemeClr val="dk2"/>
                 </a:solidFill>
@@ -4577,7 +4686,7 @@
                 <a:sym typeface="Arial"/>
               </a:defRPr>
             </a:lvl7pPr>
-            <a:lvl8pPr indent="0" lvl="7" marL="0" marR="0" algn="r">
+            <a:lvl8pPr marL="0" marR="0" lvl="7" indent="0" algn="r">
               <a:lnSpc>
                 <a:spcPct val="100000"/>
               </a:lnSpc>
@@ -4593,7 +4702,7 @@
               <a:buSzPts val="1000"/>
               <a:buFont typeface="Arial"/>
               <a:buNone/>
-              <a:defRPr b="0" i="0" sz="1000" u="none" cap="none" strike="noStrike">
+              <a:defRPr sz="1000" b="0" i="0" u="none" strike="noStrike" cap="none">
                 <a:solidFill>
                   <a:schemeClr val="dk2"/>
                 </a:solidFill>
@@ -4603,7 +4712,7 @@
                 <a:sym typeface="Arial"/>
               </a:defRPr>
             </a:lvl8pPr>
-            <a:lvl9pPr indent="0" lvl="8" marL="0" marR="0" algn="r">
+            <a:lvl9pPr marL="0" marR="0" lvl="8" indent="0" algn="r">
               <a:lnSpc>
                 <a:spcPct val="100000"/>
               </a:lnSpc>
@@ -4619,7 +4728,7 @@
               <a:buSzPts val="1000"/>
               <a:buFont typeface="Arial"/>
               <a:buNone/>
-              <a:defRPr b="0" i="0" sz="1000" u="none" cap="none" strike="noStrike">
+              <a:defRPr sz="1000" b="0" i="0" u="none" strike="noStrike" cap="none">
                 <a:solidFill>
                   <a:schemeClr val="dk2"/>
                 </a:solidFill>
@@ -4631,7 +4740,7 @@
             </a:lvl9pPr>
           </a:lstStyle>
           <a:p>
-            <a:pPr indent="0" lvl="0" marL="0" rtl="0" algn="r">
+            <a:pPr marL="0" lvl="0" indent="0" algn="r" rtl="0">
               <a:spcBef>
                 <a:spcPts val="0"/>
               </a:spcBef>
@@ -4657,11 +4766,11 @@
 </file>
 
 <file path=ppt/slideLayouts/slideLayout4.xml><?xml version="1.0" encoding="utf-8"?>
-<p:sldLayout xmlns:a="http://schemas.openxmlformats.org/drawingml/2006/main" xmlns:r="http://schemas.openxmlformats.org/officeDocument/2006/relationships" xmlns:mc="http://schemas.openxmlformats.org/markup-compatibility/2006" xmlns:mv="urn:schemas-microsoft-com:mac:vml" xmlns:p="http://schemas.openxmlformats.org/presentationml/2006/main" xmlns:c="http://schemas.openxmlformats.org/drawingml/2006/chart" xmlns:dgm="http://schemas.openxmlformats.org/drawingml/2006/diagram" xmlns:o="urn:schemas-microsoft-com:office:office" xmlns:v="urn:schemas-microsoft-com:vml" xmlns:pvml="urn:schemas-microsoft-com:office:powerpoint" xmlns:com="http://schemas.openxmlformats.org/drawingml/2006/compatibility" xmlns:p14="http://schemas.microsoft.com/office/powerpoint/2010/main" xmlns:p15="http://schemas.microsoft.com/office/powerpoint/2012/main" xmlns:ahyp="http://schemas.microsoft.com/office/drawing/2018/hyperlinkcolor" matchingName="Title and body" type="tx">
+<p:sldLayout xmlns:a="http://schemas.openxmlformats.org/drawingml/2006/main" xmlns:r="http://schemas.openxmlformats.org/officeDocument/2006/relationships" xmlns:p="http://schemas.openxmlformats.org/presentationml/2006/main" matchingName="Title and body" type="tx">
   <p:cSld name="TITLE_AND_BODY">
     <p:spTree>
       <p:nvGrpSpPr>
-        <p:cNvPr id="18" name="Shape 18"/>
+        <p:cNvPr id="1" name="Shape 18"/>
         <p:cNvGrpSpPr/>
         <p:nvPr/>
       </p:nvGrpSpPr>
@@ -4676,7 +4785,9 @@
       <p:sp>
         <p:nvSpPr>
           <p:cNvPr id="19" name="Google Shape;19;p5"/>
-          <p:cNvSpPr txBox="1"/>
+          <p:cNvSpPr txBox="1">
+            <a:spLocks noGrp="1"/>
+          </p:cNvSpPr>
           <p:nvPr>
             <p:ph type="title"/>
           </p:nvPr>
@@ -4695,7 +4806,7 @@
           </a:ln>
         </p:spPr>
         <p:txBody>
-          <a:bodyPr anchorCtr="0" anchor="t" bIns="91425" lIns="91425" spcFirstLastPara="1" rIns="91425" wrap="square" tIns="91425">
+          <a:bodyPr spcFirstLastPara="1" wrap="square" lIns="91425" tIns="91425" rIns="91425" bIns="91425" anchor="t" anchorCtr="0">
             <a:normAutofit/>
           </a:bodyPr>
           <a:lstStyle>
@@ -4826,15 +4937,19 @@
               <a:defRPr/>
             </a:lvl9pPr>
           </a:lstStyle>
-          <a:p/>
+          <a:p>
+            <a:endParaRPr/>
+          </a:p>
         </p:txBody>
       </p:sp>
       <p:sp>
         <p:nvSpPr>
           <p:cNvPr id="20" name="Google Shape;20;p5"/>
-          <p:cNvSpPr txBox="1"/>
+          <p:cNvSpPr txBox="1">
+            <a:spLocks noGrp="1"/>
+          </p:cNvSpPr>
           <p:nvPr>
-            <p:ph idx="1" type="body"/>
+            <p:ph type="body" idx="1"/>
           </p:nvPr>
         </p:nvSpPr>
         <p:spPr>
@@ -4851,11 +4966,11 @@
           </a:ln>
         </p:spPr>
         <p:txBody>
-          <a:bodyPr anchorCtr="0" anchor="t" bIns="91425" lIns="91425" spcFirstLastPara="1" rIns="91425" wrap="square" tIns="91425">
+          <a:bodyPr spcFirstLastPara="1" wrap="square" lIns="91425" tIns="91425" rIns="91425" bIns="91425" anchor="t" anchorCtr="0">
             <a:normAutofit/>
           </a:bodyPr>
           <a:lstStyle>
-            <a:lvl1pPr indent="-342900" lvl="0" marL="457200" algn="l">
+            <a:lvl1pPr marL="457200" lvl="0" indent="-342900" algn="l">
               <a:lnSpc>
                 <a:spcPct val="115000"/>
               </a:lnSpc>
@@ -4869,7 +4984,7 @@
               <a:buChar char="●"/>
               <a:defRPr/>
             </a:lvl1pPr>
-            <a:lvl2pPr indent="-317500" lvl="1" marL="914400" algn="l">
+            <a:lvl2pPr marL="914400" lvl="1" indent="-317500" algn="l">
               <a:lnSpc>
                 <a:spcPct val="115000"/>
               </a:lnSpc>
@@ -4883,7 +4998,7 @@
               <a:buChar char="○"/>
               <a:defRPr/>
             </a:lvl2pPr>
-            <a:lvl3pPr indent="-317500" lvl="2" marL="1371600" algn="l">
+            <a:lvl3pPr marL="1371600" lvl="2" indent="-317500" algn="l">
               <a:lnSpc>
                 <a:spcPct val="115000"/>
               </a:lnSpc>
@@ -4897,7 +5012,7 @@
               <a:buChar char="■"/>
               <a:defRPr/>
             </a:lvl3pPr>
-            <a:lvl4pPr indent="-317500" lvl="3" marL="1828800" algn="l">
+            <a:lvl4pPr marL="1828800" lvl="3" indent="-317500" algn="l">
               <a:lnSpc>
                 <a:spcPct val="115000"/>
               </a:lnSpc>
@@ -4911,7 +5026,7 @@
               <a:buChar char="●"/>
               <a:defRPr/>
             </a:lvl4pPr>
-            <a:lvl5pPr indent="-317500" lvl="4" marL="2286000" algn="l">
+            <a:lvl5pPr marL="2286000" lvl="4" indent="-317500" algn="l">
               <a:lnSpc>
                 <a:spcPct val="115000"/>
               </a:lnSpc>
@@ -4925,7 +5040,7 @@
               <a:buChar char="○"/>
               <a:defRPr/>
             </a:lvl5pPr>
-            <a:lvl6pPr indent="-317500" lvl="5" marL="2743200" algn="l">
+            <a:lvl6pPr marL="2743200" lvl="5" indent="-317500" algn="l">
               <a:lnSpc>
                 <a:spcPct val="115000"/>
               </a:lnSpc>
@@ -4939,7 +5054,7 @@
               <a:buChar char="■"/>
               <a:defRPr/>
             </a:lvl6pPr>
-            <a:lvl7pPr indent="-317500" lvl="6" marL="3200400" algn="l">
+            <a:lvl7pPr marL="3200400" lvl="6" indent="-317500" algn="l">
               <a:lnSpc>
                 <a:spcPct val="115000"/>
               </a:lnSpc>
@@ -4953,7 +5068,7 @@
               <a:buChar char="●"/>
               <a:defRPr/>
             </a:lvl7pPr>
-            <a:lvl8pPr indent="-317500" lvl="7" marL="3657600" algn="l">
+            <a:lvl8pPr marL="3657600" lvl="7" indent="-317500" algn="l">
               <a:lnSpc>
                 <a:spcPct val="115000"/>
               </a:lnSpc>
@@ -4967,7 +5082,7 @@
               <a:buChar char="○"/>
               <a:defRPr/>
             </a:lvl8pPr>
-            <a:lvl9pPr indent="-317500" lvl="8" marL="4114800" algn="l">
+            <a:lvl9pPr marL="4114800" lvl="8" indent="-317500" algn="l">
               <a:lnSpc>
                 <a:spcPct val="115000"/>
               </a:lnSpc>
@@ -4982,15 +5097,19 @@
               <a:defRPr/>
             </a:lvl9pPr>
           </a:lstStyle>
-          <a:p/>
+          <a:p>
+            <a:endParaRPr/>
+          </a:p>
         </p:txBody>
       </p:sp>
       <p:sp>
         <p:nvSpPr>
           <p:cNvPr id="21" name="Google Shape;21;p5"/>
-          <p:cNvSpPr txBox="1"/>
+          <p:cNvSpPr txBox="1">
+            <a:spLocks noGrp="1"/>
+          </p:cNvSpPr>
           <p:nvPr>
-            <p:ph idx="12" type="sldNum"/>
+            <p:ph type="sldNum" idx="12"/>
           </p:nvPr>
         </p:nvSpPr>
         <p:spPr>
@@ -5007,11 +5126,11 @@
           </a:ln>
         </p:spPr>
         <p:txBody>
-          <a:bodyPr anchorCtr="0" anchor="ctr" bIns="91425" lIns="91425" spcFirstLastPara="1" rIns="91425" wrap="square" tIns="91425">
+          <a:bodyPr spcFirstLastPara="1" wrap="square" lIns="91425" tIns="91425" rIns="91425" bIns="91425" anchor="ctr" anchorCtr="0">
             <a:normAutofit/>
           </a:bodyPr>
           <a:lstStyle>
-            <a:lvl1pPr indent="0" lvl="0" marL="0" marR="0" algn="r">
+            <a:lvl1pPr marL="0" marR="0" lvl="0" indent="0" algn="r">
               <a:lnSpc>
                 <a:spcPct val="100000"/>
               </a:lnSpc>
@@ -5027,7 +5146,7 @@
               <a:buSzPts val="1000"/>
               <a:buFont typeface="Arial"/>
               <a:buNone/>
-              <a:defRPr b="0" i="0" sz="1000" u="none" cap="none" strike="noStrike">
+              <a:defRPr sz="1000" b="0" i="0" u="none" strike="noStrike" cap="none">
                 <a:solidFill>
                   <a:schemeClr val="dk2"/>
                 </a:solidFill>
@@ -5037,7 +5156,7 @@
                 <a:sym typeface="Arial"/>
               </a:defRPr>
             </a:lvl1pPr>
-            <a:lvl2pPr indent="0" lvl="1" marL="0" marR="0" algn="r">
+            <a:lvl2pPr marL="0" marR="0" lvl="1" indent="0" algn="r">
               <a:lnSpc>
                 <a:spcPct val="100000"/>
               </a:lnSpc>
@@ -5053,7 +5172,7 @@
               <a:buSzPts val="1000"/>
               <a:buFont typeface="Arial"/>
               <a:buNone/>
-              <a:defRPr b="0" i="0" sz="1000" u="none" cap="none" strike="noStrike">
+              <a:defRPr sz="1000" b="0" i="0" u="none" strike="noStrike" cap="none">
                 <a:solidFill>
                   <a:schemeClr val="dk2"/>
                 </a:solidFill>
@@ -5063,7 +5182,7 @@
                 <a:sym typeface="Arial"/>
               </a:defRPr>
             </a:lvl2pPr>
-            <a:lvl3pPr indent="0" lvl="2" marL="0" marR="0" algn="r">
+            <a:lvl3pPr marL="0" marR="0" lvl="2" indent="0" algn="r">
               <a:lnSpc>
                 <a:spcPct val="100000"/>
               </a:lnSpc>
@@ -5079,7 +5198,7 @@
               <a:buSzPts val="1000"/>
               <a:buFont typeface="Arial"/>
               <a:buNone/>
-              <a:defRPr b="0" i="0" sz="1000" u="none" cap="none" strike="noStrike">
+              <a:defRPr sz="1000" b="0" i="0" u="none" strike="noStrike" cap="none">
                 <a:solidFill>
                   <a:schemeClr val="dk2"/>
                 </a:solidFill>
@@ -5089,7 +5208,7 @@
                 <a:sym typeface="Arial"/>
               </a:defRPr>
             </a:lvl3pPr>
-            <a:lvl4pPr indent="0" lvl="3" marL="0" marR="0" algn="r">
+            <a:lvl4pPr marL="0" marR="0" lvl="3" indent="0" algn="r">
               <a:lnSpc>
                 <a:spcPct val="100000"/>
               </a:lnSpc>
@@ -5105,7 +5224,7 @@
               <a:buSzPts val="1000"/>
               <a:buFont typeface="Arial"/>
               <a:buNone/>
-              <a:defRPr b="0" i="0" sz="1000" u="none" cap="none" strike="noStrike">
+              <a:defRPr sz="1000" b="0" i="0" u="none" strike="noStrike" cap="none">
                 <a:solidFill>
                   <a:schemeClr val="dk2"/>
                 </a:solidFill>
@@ -5115,7 +5234,7 @@
                 <a:sym typeface="Arial"/>
               </a:defRPr>
             </a:lvl4pPr>
-            <a:lvl5pPr indent="0" lvl="4" marL="0" marR="0" algn="r">
+            <a:lvl5pPr marL="0" marR="0" lvl="4" indent="0" algn="r">
               <a:lnSpc>
                 <a:spcPct val="100000"/>
               </a:lnSpc>
@@ -5131,7 +5250,7 @@
               <a:buSzPts val="1000"/>
               <a:buFont typeface="Arial"/>
               <a:buNone/>
-              <a:defRPr b="0" i="0" sz="1000" u="none" cap="none" strike="noStrike">
+              <a:defRPr sz="1000" b="0" i="0" u="none" strike="noStrike" cap="none">
                 <a:solidFill>
                   <a:schemeClr val="dk2"/>
                 </a:solidFill>
@@ -5141,7 +5260,7 @@
                 <a:sym typeface="Arial"/>
               </a:defRPr>
             </a:lvl5pPr>
-            <a:lvl6pPr indent="0" lvl="5" marL="0" marR="0" algn="r">
+            <a:lvl6pPr marL="0" marR="0" lvl="5" indent="0" algn="r">
               <a:lnSpc>
                 <a:spcPct val="100000"/>
               </a:lnSpc>
@@ -5157,7 +5276,7 @@
               <a:buSzPts val="1000"/>
               <a:buFont typeface="Arial"/>
               <a:buNone/>
-              <a:defRPr b="0" i="0" sz="1000" u="none" cap="none" strike="noStrike">
+              <a:defRPr sz="1000" b="0" i="0" u="none" strike="noStrike" cap="none">
                 <a:solidFill>
                   <a:schemeClr val="dk2"/>
                 </a:solidFill>
@@ -5167,7 +5286,7 @@
                 <a:sym typeface="Arial"/>
               </a:defRPr>
             </a:lvl6pPr>
-            <a:lvl7pPr indent="0" lvl="6" marL="0" marR="0" algn="r">
+            <a:lvl7pPr marL="0" marR="0" lvl="6" indent="0" algn="r">
               <a:lnSpc>
                 <a:spcPct val="100000"/>
               </a:lnSpc>
@@ -5183,7 +5302,7 @@
               <a:buSzPts val="1000"/>
               <a:buFont typeface="Arial"/>
               <a:buNone/>
-              <a:defRPr b="0" i="0" sz="1000" u="none" cap="none" strike="noStrike">
+              <a:defRPr sz="1000" b="0" i="0" u="none" strike="noStrike" cap="none">
                 <a:solidFill>
                   <a:schemeClr val="dk2"/>
                 </a:solidFill>
@@ -5193,7 +5312,7 @@
                 <a:sym typeface="Arial"/>
               </a:defRPr>
             </a:lvl7pPr>
-            <a:lvl8pPr indent="0" lvl="7" marL="0" marR="0" algn="r">
+            <a:lvl8pPr marL="0" marR="0" lvl="7" indent="0" algn="r">
               <a:lnSpc>
                 <a:spcPct val="100000"/>
               </a:lnSpc>
@@ -5209,7 +5328,7 @@
               <a:buSzPts val="1000"/>
               <a:buFont typeface="Arial"/>
               <a:buNone/>
-              <a:defRPr b="0" i="0" sz="1000" u="none" cap="none" strike="noStrike">
+              <a:defRPr sz="1000" b="0" i="0" u="none" strike="noStrike" cap="none">
                 <a:solidFill>
                   <a:schemeClr val="dk2"/>
                 </a:solidFill>
@@ -5219,7 +5338,7 @@
                 <a:sym typeface="Arial"/>
               </a:defRPr>
             </a:lvl8pPr>
-            <a:lvl9pPr indent="0" lvl="8" marL="0" marR="0" algn="r">
+            <a:lvl9pPr marL="0" marR="0" lvl="8" indent="0" algn="r">
               <a:lnSpc>
                 <a:spcPct val="100000"/>
               </a:lnSpc>
@@ -5235,7 +5354,7 @@
               <a:buSzPts val="1000"/>
               <a:buFont typeface="Arial"/>
               <a:buNone/>
-              <a:defRPr b="0" i="0" sz="1000" u="none" cap="none" strike="noStrike">
+              <a:defRPr sz="1000" b="0" i="0" u="none" strike="noStrike" cap="none">
                 <a:solidFill>
                   <a:schemeClr val="dk2"/>
                 </a:solidFill>
@@ -5247,7 +5366,7 @@
             </a:lvl9pPr>
           </a:lstStyle>
           <a:p>
-            <a:pPr indent="0" lvl="0" marL="0" rtl="0" algn="r">
+            <a:pPr marL="0" lvl="0" indent="0" algn="r" rtl="0">
               <a:spcBef>
                 <a:spcPts val="0"/>
               </a:spcBef>
@@ -5273,11 +5392,11 @@
 </file>
 
 <file path=ppt/slideLayouts/slideLayout5.xml><?xml version="1.0" encoding="utf-8"?>
-<p:sldLayout xmlns:a="http://schemas.openxmlformats.org/drawingml/2006/main" xmlns:r="http://schemas.openxmlformats.org/officeDocument/2006/relationships" xmlns:mc="http://schemas.openxmlformats.org/markup-compatibility/2006" xmlns:mv="urn:schemas-microsoft-com:mac:vml" xmlns:p="http://schemas.openxmlformats.org/presentationml/2006/main" xmlns:c="http://schemas.openxmlformats.org/drawingml/2006/chart" xmlns:dgm="http://schemas.openxmlformats.org/drawingml/2006/diagram" xmlns:o="urn:schemas-microsoft-com:office:office" xmlns:v="urn:schemas-microsoft-com:vml" xmlns:pvml="urn:schemas-microsoft-com:office:powerpoint" xmlns:com="http://schemas.openxmlformats.org/drawingml/2006/compatibility" xmlns:p14="http://schemas.microsoft.com/office/powerpoint/2010/main" xmlns:p15="http://schemas.microsoft.com/office/powerpoint/2012/main" xmlns:ahyp="http://schemas.microsoft.com/office/drawing/2018/hyperlinkcolor" matchingName="Title and two columns" type="twoColTx">
+<p:sldLayout xmlns:a="http://schemas.openxmlformats.org/drawingml/2006/main" xmlns:r="http://schemas.openxmlformats.org/officeDocument/2006/relationships" xmlns:p="http://schemas.openxmlformats.org/presentationml/2006/main" matchingName="Title and two columns" type="twoColTx">
   <p:cSld name="TITLE_AND_TWO_COLUMNS">
     <p:spTree>
       <p:nvGrpSpPr>
-        <p:cNvPr id="22" name="Shape 22"/>
+        <p:cNvPr id="1" name="Shape 22"/>
         <p:cNvGrpSpPr/>
         <p:nvPr/>
       </p:nvGrpSpPr>
@@ -5292,7 +5411,9 @@
       <p:sp>
         <p:nvSpPr>
           <p:cNvPr id="23" name="Google Shape;23;p6"/>
-          <p:cNvSpPr txBox="1"/>
+          <p:cNvSpPr txBox="1">
+            <a:spLocks noGrp="1"/>
+          </p:cNvSpPr>
           <p:nvPr>
             <p:ph type="title"/>
           </p:nvPr>
@@ -5311,7 +5432,7 @@
           </a:ln>
         </p:spPr>
         <p:txBody>
-          <a:bodyPr anchorCtr="0" anchor="t" bIns="91425" lIns="91425" spcFirstLastPara="1" rIns="91425" wrap="square" tIns="91425">
+          <a:bodyPr spcFirstLastPara="1" wrap="square" lIns="91425" tIns="91425" rIns="91425" bIns="91425" anchor="t" anchorCtr="0">
             <a:normAutofit/>
           </a:bodyPr>
           <a:lstStyle>
@@ -5442,15 +5563,19 @@
               <a:defRPr/>
             </a:lvl9pPr>
           </a:lstStyle>
-          <a:p/>
+          <a:p>
+            <a:endParaRPr/>
+          </a:p>
         </p:txBody>
       </p:sp>
       <p:sp>
         <p:nvSpPr>
           <p:cNvPr id="24" name="Google Shape;24;p6"/>
-          <p:cNvSpPr txBox="1"/>
+          <p:cNvSpPr txBox="1">
+            <a:spLocks noGrp="1"/>
+          </p:cNvSpPr>
           <p:nvPr>
-            <p:ph idx="1" type="body"/>
+            <p:ph type="body" idx="1"/>
           </p:nvPr>
         </p:nvSpPr>
         <p:spPr>
@@ -5467,11 +5592,11 @@
           </a:ln>
         </p:spPr>
         <p:txBody>
-          <a:bodyPr anchorCtr="0" anchor="t" bIns="91425" lIns="91425" spcFirstLastPara="1" rIns="91425" wrap="square" tIns="91425">
+          <a:bodyPr spcFirstLastPara="1" wrap="square" lIns="91425" tIns="91425" rIns="91425" bIns="91425" anchor="t" anchorCtr="0">
             <a:normAutofit/>
           </a:bodyPr>
           <a:lstStyle>
-            <a:lvl1pPr indent="-317500" lvl="0" marL="457200" algn="l">
+            <a:lvl1pPr marL="457200" lvl="0" indent="-317500" algn="l">
               <a:lnSpc>
                 <a:spcPct val="115000"/>
               </a:lnSpc>
@@ -5485,7 +5610,7 @@
               <a:buChar char="●"/>
               <a:defRPr sz="1400"/>
             </a:lvl1pPr>
-            <a:lvl2pPr indent="-304800" lvl="1" marL="914400" algn="l">
+            <a:lvl2pPr marL="914400" lvl="1" indent="-304800" algn="l">
               <a:lnSpc>
                 <a:spcPct val="115000"/>
               </a:lnSpc>
@@ -5499,7 +5624,7 @@
               <a:buChar char="○"/>
               <a:defRPr sz="1200"/>
             </a:lvl2pPr>
-            <a:lvl3pPr indent="-304800" lvl="2" marL="1371600" algn="l">
+            <a:lvl3pPr marL="1371600" lvl="2" indent="-304800" algn="l">
               <a:lnSpc>
                 <a:spcPct val="115000"/>
               </a:lnSpc>
@@ -5513,7 +5638,7 @@
               <a:buChar char="■"/>
               <a:defRPr sz="1200"/>
             </a:lvl3pPr>
-            <a:lvl4pPr indent="-304800" lvl="3" marL="1828800" algn="l">
+            <a:lvl4pPr marL="1828800" lvl="3" indent="-304800" algn="l">
               <a:lnSpc>
                 <a:spcPct val="115000"/>
               </a:lnSpc>
@@ -5527,7 +5652,7 @@
               <a:buChar char="●"/>
               <a:defRPr sz="1200"/>
             </a:lvl4pPr>
-            <a:lvl5pPr indent="-304800" lvl="4" marL="2286000" algn="l">
+            <a:lvl5pPr marL="2286000" lvl="4" indent="-304800" algn="l">
               <a:lnSpc>
                 <a:spcPct val="115000"/>
               </a:lnSpc>
@@ -5541,7 +5666,7 @@
               <a:buChar char="○"/>
               <a:defRPr sz="1200"/>
             </a:lvl5pPr>
-            <a:lvl6pPr indent="-304800" lvl="5" marL="2743200" algn="l">
+            <a:lvl6pPr marL="2743200" lvl="5" indent="-304800" algn="l">
               <a:lnSpc>
                 <a:spcPct val="115000"/>
               </a:lnSpc>
@@ -5555,7 +5680,7 @@
               <a:buChar char="■"/>
               <a:defRPr sz="1200"/>
             </a:lvl6pPr>
-            <a:lvl7pPr indent="-304800" lvl="6" marL="3200400" algn="l">
+            <a:lvl7pPr marL="3200400" lvl="6" indent="-304800" algn="l">
               <a:lnSpc>
                 <a:spcPct val="115000"/>
               </a:lnSpc>
@@ -5569,7 +5694,7 @@
               <a:buChar char="●"/>
               <a:defRPr sz="1200"/>
             </a:lvl7pPr>
-            <a:lvl8pPr indent="-304800" lvl="7" marL="3657600" algn="l">
+            <a:lvl8pPr marL="3657600" lvl="7" indent="-304800" algn="l">
               <a:lnSpc>
                 <a:spcPct val="115000"/>
               </a:lnSpc>
@@ -5583,7 +5708,7 @@
               <a:buChar char="○"/>
               <a:defRPr sz="1200"/>
             </a:lvl8pPr>
-            <a:lvl9pPr indent="-304800" lvl="8" marL="4114800" algn="l">
+            <a:lvl9pPr marL="4114800" lvl="8" indent="-304800" algn="l">
               <a:lnSpc>
                 <a:spcPct val="115000"/>
               </a:lnSpc>
@@ -5598,15 +5723,19 @@
               <a:defRPr sz="1200"/>
             </a:lvl9pPr>
           </a:lstStyle>
-          <a:p/>
+          <a:p>
+            <a:endParaRPr/>
+          </a:p>
         </p:txBody>
       </p:sp>
       <p:sp>
         <p:nvSpPr>
           <p:cNvPr id="25" name="Google Shape;25;p6"/>
-          <p:cNvSpPr txBox="1"/>
+          <p:cNvSpPr txBox="1">
+            <a:spLocks noGrp="1"/>
+          </p:cNvSpPr>
           <p:nvPr>
-            <p:ph idx="2" type="body"/>
+            <p:ph type="body" idx="2"/>
           </p:nvPr>
         </p:nvSpPr>
         <p:spPr>
@@ -5623,11 +5752,11 @@
           </a:ln>
         </p:spPr>
         <p:txBody>
-          <a:bodyPr anchorCtr="0" anchor="t" bIns="91425" lIns="91425" spcFirstLastPara="1" rIns="91425" wrap="square" tIns="91425">
+          <a:bodyPr spcFirstLastPara="1" wrap="square" lIns="91425" tIns="91425" rIns="91425" bIns="91425" anchor="t" anchorCtr="0">
             <a:normAutofit/>
           </a:bodyPr>
           <a:lstStyle>
-            <a:lvl1pPr indent="-317500" lvl="0" marL="457200" algn="l">
+            <a:lvl1pPr marL="457200" lvl="0" indent="-317500" algn="l">
               <a:lnSpc>
                 <a:spcPct val="115000"/>
               </a:lnSpc>
@@ -5641,7 +5770,7 @@
               <a:buChar char="●"/>
               <a:defRPr sz="1400"/>
             </a:lvl1pPr>
-            <a:lvl2pPr indent="-304800" lvl="1" marL="914400" algn="l">
+            <a:lvl2pPr marL="914400" lvl="1" indent="-304800" algn="l">
               <a:lnSpc>
                 <a:spcPct val="115000"/>
               </a:lnSpc>
@@ -5655,7 +5784,7 @@
               <a:buChar char="○"/>
               <a:defRPr sz="1200"/>
             </a:lvl2pPr>
-            <a:lvl3pPr indent="-304800" lvl="2" marL="1371600" algn="l">
+            <a:lvl3pPr marL="1371600" lvl="2" indent="-304800" algn="l">
               <a:lnSpc>
                 <a:spcPct val="115000"/>
               </a:lnSpc>
@@ -5669,7 +5798,7 @@
               <a:buChar char="■"/>
               <a:defRPr sz="1200"/>
             </a:lvl3pPr>
-            <a:lvl4pPr indent="-304800" lvl="3" marL="1828800" algn="l">
+            <a:lvl4pPr marL="1828800" lvl="3" indent="-304800" algn="l">
               <a:lnSpc>
                 <a:spcPct val="115000"/>
               </a:lnSpc>
@@ -5683,7 +5812,7 @@
               <a:buChar char="●"/>
               <a:defRPr sz="1200"/>
             </a:lvl4pPr>
-            <a:lvl5pPr indent="-304800" lvl="4" marL="2286000" algn="l">
+            <a:lvl5pPr marL="2286000" lvl="4" indent="-304800" algn="l">
               <a:lnSpc>
                 <a:spcPct val="115000"/>
               </a:lnSpc>
@@ -5697,7 +5826,7 @@
               <a:buChar char="○"/>
               <a:defRPr sz="1200"/>
             </a:lvl5pPr>
-            <a:lvl6pPr indent="-304800" lvl="5" marL="2743200" algn="l">
+            <a:lvl6pPr marL="2743200" lvl="5" indent="-304800" algn="l">
               <a:lnSpc>
                 <a:spcPct val="115000"/>
               </a:lnSpc>
@@ -5711,7 +5840,7 @@
               <a:buChar char="■"/>
               <a:defRPr sz="1200"/>
             </a:lvl6pPr>
-            <a:lvl7pPr indent="-304800" lvl="6" marL="3200400" algn="l">
+            <a:lvl7pPr marL="3200400" lvl="6" indent="-304800" algn="l">
               <a:lnSpc>
                 <a:spcPct val="115000"/>
               </a:lnSpc>
@@ -5725,7 +5854,7 @@
               <a:buChar char="●"/>
               <a:defRPr sz="1200"/>
             </a:lvl7pPr>
-            <a:lvl8pPr indent="-304800" lvl="7" marL="3657600" algn="l">
+            <a:lvl8pPr marL="3657600" lvl="7" indent="-304800" algn="l">
               <a:lnSpc>
                 <a:spcPct val="115000"/>
               </a:lnSpc>
@@ -5739,7 +5868,7 @@
               <a:buChar char="○"/>
               <a:defRPr sz="1200"/>
             </a:lvl8pPr>
-            <a:lvl9pPr indent="-304800" lvl="8" marL="4114800" algn="l">
+            <a:lvl9pPr marL="4114800" lvl="8" indent="-304800" algn="l">
               <a:lnSpc>
                 <a:spcPct val="115000"/>
               </a:lnSpc>
@@ -5754,15 +5883,19 @@
               <a:defRPr sz="1200"/>
             </a:lvl9pPr>
           </a:lstStyle>
-          <a:p/>
+          <a:p>
+            <a:endParaRPr/>
+          </a:p>
         </p:txBody>
       </p:sp>
       <p:sp>
         <p:nvSpPr>
           <p:cNvPr id="26" name="Google Shape;26;p6"/>
-          <p:cNvSpPr txBox="1"/>
+          <p:cNvSpPr txBox="1">
+            <a:spLocks noGrp="1"/>
+          </p:cNvSpPr>
           <p:nvPr>
-            <p:ph idx="12" type="sldNum"/>
+            <p:ph type="sldNum" idx="12"/>
           </p:nvPr>
         </p:nvSpPr>
         <p:spPr>
@@ -5779,11 +5912,11 @@
           </a:ln>
         </p:spPr>
         <p:txBody>
-          <a:bodyPr anchorCtr="0" anchor="ctr" bIns="91425" lIns="91425" spcFirstLastPara="1" rIns="91425" wrap="square" tIns="91425">
+          <a:bodyPr spcFirstLastPara="1" wrap="square" lIns="91425" tIns="91425" rIns="91425" bIns="91425" anchor="ctr" anchorCtr="0">
             <a:normAutofit/>
           </a:bodyPr>
           <a:lstStyle>
-            <a:lvl1pPr indent="0" lvl="0" marL="0" marR="0" algn="r">
+            <a:lvl1pPr marL="0" marR="0" lvl="0" indent="0" algn="r">
               <a:lnSpc>
                 <a:spcPct val="100000"/>
               </a:lnSpc>
@@ -5799,7 +5932,7 @@
               <a:buSzPts val="1000"/>
               <a:buFont typeface="Arial"/>
               <a:buNone/>
-              <a:defRPr b="0" i="0" sz="1000" u="none" cap="none" strike="noStrike">
+              <a:defRPr sz="1000" b="0" i="0" u="none" strike="noStrike" cap="none">
                 <a:solidFill>
                   <a:schemeClr val="dk2"/>
                 </a:solidFill>
@@ -5809,7 +5942,7 @@
                 <a:sym typeface="Arial"/>
               </a:defRPr>
             </a:lvl1pPr>
-            <a:lvl2pPr indent="0" lvl="1" marL="0" marR="0" algn="r">
+            <a:lvl2pPr marL="0" marR="0" lvl="1" indent="0" algn="r">
               <a:lnSpc>
                 <a:spcPct val="100000"/>
               </a:lnSpc>
@@ -5825,7 +5958,7 @@
               <a:buSzPts val="1000"/>
               <a:buFont typeface="Arial"/>
               <a:buNone/>
-              <a:defRPr b="0" i="0" sz="1000" u="none" cap="none" strike="noStrike">
+              <a:defRPr sz="1000" b="0" i="0" u="none" strike="noStrike" cap="none">
                 <a:solidFill>
                   <a:schemeClr val="dk2"/>
                 </a:solidFill>
@@ -5835,7 +5968,7 @@
                 <a:sym typeface="Arial"/>
               </a:defRPr>
             </a:lvl2pPr>
-            <a:lvl3pPr indent="0" lvl="2" marL="0" marR="0" algn="r">
+            <a:lvl3pPr marL="0" marR="0" lvl="2" indent="0" algn="r">
               <a:lnSpc>
                 <a:spcPct val="100000"/>
               </a:lnSpc>
@@ -5851,7 +5984,7 @@
               <a:buSzPts val="1000"/>
               <a:buFont typeface="Arial"/>
               <a:buNone/>
-              <a:defRPr b="0" i="0" sz="1000" u="none" cap="none" strike="noStrike">
+              <a:defRPr sz="1000" b="0" i="0" u="none" strike="noStrike" cap="none">
                 <a:solidFill>
                   <a:schemeClr val="dk2"/>
                 </a:solidFill>
@@ -5861,7 +5994,7 @@
                 <a:sym typeface="Arial"/>
               </a:defRPr>
             </a:lvl3pPr>
-            <a:lvl4pPr indent="0" lvl="3" marL="0" marR="0" algn="r">
+            <a:lvl4pPr marL="0" marR="0" lvl="3" indent="0" algn="r">
               <a:lnSpc>
                 <a:spcPct val="100000"/>
               </a:lnSpc>
@@ -5877,7 +6010,7 @@
               <a:buSzPts val="1000"/>
               <a:buFont typeface="Arial"/>
               <a:buNone/>
-              <a:defRPr b="0" i="0" sz="1000" u="none" cap="none" strike="noStrike">
+              <a:defRPr sz="1000" b="0" i="0" u="none" strike="noStrike" cap="none">
                 <a:solidFill>
                   <a:schemeClr val="dk2"/>
                 </a:solidFill>
@@ -5887,7 +6020,7 @@
                 <a:sym typeface="Arial"/>
               </a:defRPr>
             </a:lvl4pPr>
-            <a:lvl5pPr indent="0" lvl="4" marL="0" marR="0" algn="r">
+            <a:lvl5pPr marL="0" marR="0" lvl="4" indent="0" algn="r">
               <a:lnSpc>
                 <a:spcPct val="100000"/>
               </a:lnSpc>
@@ -5903,7 +6036,7 @@
               <a:buSzPts val="1000"/>
               <a:buFont typeface="Arial"/>
               <a:buNone/>
-              <a:defRPr b="0" i="0" sz="1000" u="none" cap="none" strike="noStrike">
+              <a:defRPr sz="1000" b="0" i="0" u="none" strike="noStrike" cap="none">
                 <a:solidFill>
                   <a:schemeClr val="dk2"/>
                 </a:solidFill>
@@ -5913,7 +6046,7 @@
                 <a:sym typeface="Arial"/>
               </a:defRPr>
             </a:lvl5pPr>
-            <a:lvl6pPr indent="0" lvl="5" marL="0" marR="0" algn="r">
+            <a:lvl6pPr marL="0" marR="0" lvl="5" indent="0" algn="r">
               <a:lnSpc>
                 <a:spcPct val="100000"/>
               </a:lnSpc>
@@ -5929,7 +6062,7 @@
               <a:buSzPts val="1000"/>
               <a:buFont typeface="Arial"/>
               <a:buNone/>
-              <a:defRPr b="0" i="0" sz="1000" u="none" cap="none" strike="noStrike">
+              <a:defRPr sz="1000" b="0" i="0" u="none" strike="noStrike" cap="none">
                 <a:solidFill>
                   <a:schemeClr val="dk2"/>
                 </a:solidFill>
@@ -5939,7 +6072,7 @@
                 <a:sym typeface="Arial"/>
               </a:defRPr>
             </a:lvl6pPr>
-            <a:lvl7pPr indent="0" lvl="6" marL="0" marR="0" algn="r">
+            <a:lvl7pPr marL="0" marR="0" lvl="6" indent="0" algn="r">
               <a:lnSpc>
                 <a:spcPct val="100000"/>
               </a:lnSpc>
@@ -5955,7 +6088,7 @@
               <a:buSzPts val="1000"/>
               <a:buFont typeface="Arial"/>
               <a:buNone/>
-              <a:defRPr b="0" i="0" sz="1000" u="none" cap="none" strike="noStrike">
+              <a:defRPr sz="1000" b="0" i="0" u="none" strike="noStrike" cap="none">
                 <a:solidFill>
                   <a:schemeClr val="dk2"/>
                 </a:solidFill>
@@ -5965,7 +6098,7 @@
                 <a:sym typeface="Arial"/>
               </a:defRPr>
             </a:lvl7pPr>
-            <a:lvl8pPr indent="0" lvl="7" marL="0" marR="0" algn="r">
+            <a:lvl8pPr marL="0" marR="0" lvl="7" indent="0" algn="r">
               <a:lnSpc>
                 <a:spcPct val="100000"/>
               </a:lnSpc>
@@ -5981,7 +6114,7 @@
               <a:buSzPts val="1000"/>
               <a:buFont typeface="Arial"/>
               <a:buNone/>
-              <a:defRPr b="0" i="0" sz="1000" u="none" cap="none" strike="noStrike">
+              <a:defRPr sz="1000" b="0" i="0" u="none" strike="noStrike" cap="none">
                 <a:solidFill>
                   <a:schemeClr val="dk2"/>
                 </a:solidFill>
@@ -5991,7 +6124,7 @@
                 <a:sym typeface="Arial"/>
               </a:defRPr>
             </a:lvl8pPr>
-            <a:lvl9pPr indent="0" lvl="8" marL="0" marR="0" algn="r">
+            <a:lvl9pPr marL="0" marR="0" lvl="8" indent="0" algn="r">
               <a:lnSpc>
                 <a:spcPct val="100000"/>
               </a:lnSpc>
@@ -6007,7 +6140,7 @@
               <a:buSzPts val="1000"/>
               <a:buFont typeface="Arial"/>
               <a:buNone/>
-              <a:defRPr b="0" i="0" sz="1000" u="none" cap="none" strike="noStrike">
+              <a:defRPr sz="1000" b="0" i="0" u="none" strike="noStrike" cap="none">
                 <a:solidFill>
                   <a:schemeClr val="dk2"/>
                 </a:solidFill>
@@ -6019,7 +6152,7 @@
             </a:lvl9pPr>
           </a:lstStyle>
           <a:p>
-            <a:pPr indent="0" lvl="0" marL="0" rtl="0" algn="r">
+            <a:pPr marL="0" lvl="0" indent="0" algn="r" rtl="0">
               <a:spcBef>
                 <a:spcPts val="0"/>
               </a:spcBef>
@@ -6045,11 +6178,11 @@
 </file>
 
 <file path=ppt/slideLayouts/slideLayout6.xml><?xml version="1.0" encoding="utf-8"?>
-<p:sldLayout xmlns:a="http://schemas.openxmlformats.org/drawingml/2006/main" xmlns:r="http://schemas.openxmlformats.org/officeDocument/2006/relationships" xmlns:mc="http://schemas.openxmlformats.org/markup-compatibility/2006" xmlns:mv="urn:schemas-microsoft-com:mac:vml" xmlns:p="http://schemas.openxmlformats.org/presentationml/2006/main" xmlns:c="http://schemas.openxmlformats.org/drawingml/2006/chart" xmlns:dgm="http://schemas.openxmlformats.org/drawingml/2006/diagram" xmlns:o="urn:schemas-microsoft-com:office:office" xmlns:v="urn:schemas-microsoft-com:vml" xmlns:pvml="urn:schemas-microsoft-com:office:powerpoint" xmlns:com="http://schemas.openxmlformats.org/drawingml/2006/compatibility" xmlns:p14="http://schemas.microsoft.com/office/powerpoint/2010/main" xmlns:p15="http://schemas.microsoft.com/office/powerpoint/2012/main" xmlns:ahyp="http://schemas.microsoft.com/office/drawing/2018/hyperlinkcolor" matchingName="Title only" type="titleOnly">
+<p:sldLayout xmlns:a="http://schemas.openxmlformats.org/drawingml/2006/main" xmlns:r="http://schemas.openxmlformats.org/officeDocument/2006/relationships" xmlns:p="http://schemas.openxmlformats.org/presentationml/2006/main" matchingName="Title only" type="titleOnly">
   <p:cSld name="TITLE_ONLY">
     <p:spTree>
       <p:nvGrpSpPr>
-        <p:cNvPr id="27" name="Shape 27"/>
+        <p:cNvPr id="1" name="Shape 27"/>
         <p:cNvGrpSpPr/>
         <p:nvPr/>
       </p:nvGrpSpPr>
@@ -6064,7 +6197,9 @@
       <p:sp>
         <p:nvSpPr>
           <p:cNvPr id="28" name="Google Shape;28;p7"/>
-          <p:cNvSpPr txBox="1"/>
+          <p:cNvSpPr txBox="1">
+            <a:spLocks noGrp="1"/>
+          </p:cNvSpPr>
           <p:nvPr>
             <p:ph type="title"/>
           </p:nvPr>
@@ -6083,7 +6218,7 @@
           </a:ln>
         </p:spPr>
         <p:txBody>
-          <a:bodyPr anchorCtr="0" anchor="t" bIns="91425" lIns="91425" spcFirstLastPara="1" rIns="91425" wrap="square" tIns="91425">
+          <a:bodyPr spcFirstLastPara="1" wrap="square" lIns="91425" tIns="91425" rIns="91425" bIns="91425" anchor="t" anchorCtr="0">
             <a:normAutofit/>
           </a:bodyPr>
           <a:lstStyle>
@@ -6214,15 +6349,19 @@
               <a:defRPr/>
             </a:lvl9pPr>
           </a:lstStyle>
-          <a:p/>
+          <a:p>
+            <a:endParaRPr/>
+          </a:p>
         </p:txBody>
       </p:sp>
       <p:sp>
         <p:nvSpPr>
           <p:cNvPr id="29" name="Google Shape;29;p7"/>
-          <p:cNvSpPr txBox="1"/>
+          <p:cNvSpPr txBox="1">
+            <a:spLocks noGrp="1"/>
+          </p:cNvSpPr>
           <p:nvPr>
-            <p:ph idx="12" type="sldNum"/>
+            <p:ph type="sldNum" idx="12"/>
           </p:nvPr>
         </p:nvSpPr>
         <p:spPr>
@@ -6239,11 +6378,11 @@
           </a:ln>
         </p:spPr>
         <p:txBody>
-          <a:bodyPr anchorCtr="0" anchor="ctr" bIns="91425" lIns="91425" spcFirstLastPara="1" rIns="91425" wrap="square" tIns="91425">
+          <a:bodyPr spcFirstLastPara="1" wrap="square" lIns="91425" tIns="91425" rIns="91425" bIns="91425" anchor="ctr" anchorCtr="0">
             <a:normAutofit/>
           </a:bodyPr>
           <a:lstStyle>
-            <a:lvl1pPr indent="0" lvl="0" marL="0" marR="0" algn="r">
+            <a:lvl1pPr marL="0" marR="0" lvl="0" indent="0" algn="r">
               <a:lnSpc>
                 <a:spcPct val="100000"/>
               </a:lnSpc>
@@ -6259,7 +6398,7 @@
               <a:buSzPts val="1000"/>
               <a:buFont typeface="Arial"/>
               <a:buNone/>
-              <a:defRPr b="0" i="0" sz="1000" u="none" cap="none" strike="noStrike">
+              <a:defRPr sz="1000" b="0" i="0" u="none" strike="noStrike" cap="none">
                 <a:solidFill>
                   <a:schemeClr val="dk2"/>
                 </a:solidFill>
@@ -6269,7 +6408,7 @@
                 <a:sym typeface="Arial"/>
               </a:defRPr>
             </a:lvl1pPr>
-            <a:lvl2pPr indent="0" lvl="1" marL="0" marR="0" algn="r">
+            <a:lvl2pPr marL="0" marR="0" lvl="1" indent="0" algn="r">
               <a:lnSpc>
                 <a:spcPct val="100000"/>
               </a:lnSpc>
@@ -6285,7 +6424,7 @@
               <a:buSzPts val="1000"/>
               <a:buFont typeface="Arial"/>
               <a:buNone/>
-              <a:defRPr b="0" i="0" sz="1000" u="none" cap="none" strike="noStrike">
+              <a:defRPr sz="1000" b="0" i="0" u="none" strike="noStrike" cap="none">
                 <a:solidFill>
                   <a:schemeClr val="dk2"/>
                 </a:solidFill>
@@ -6295,7 +6434,7 @@
                 <a:sym typeface="Arial"/>
               </a:defRPr>
             </a:lvl2pPr>
-            <a:lvl3pPr indent="0" lvl="2" marL="0" marR="0" algn="r">
+            <a:lvl3pPr marL="0" marR="0" lvl="2" indent="0" algn="r">
               <a:lnSpc>
                 <a:spcPct val="100000"/>
               </a:lnSpc>
@@ -6311,7 +6450,7 @@
               <a:buSzPts val="1000"/>
               <a:buFont typeface="Arial"/>
               <a:buNone/>
-              <a:defRPr b="0" i="0" sz="1000" u="none" cap="none" strike="noStrike">
+              <a:defRPr sz="1000" b="0" i="0" u="none" strike="noStrike" cap="none">
                 <a:solidFill>
                   <a:schemeClr val="dk2"/>
                 </a:solidFill>
@@ -6321,7 +6460,7 @@
                 <a:sym typeface="Arial"/>
               </a:defRPr>
             </a:lvl3pPr>
-            <a:lvl4pPr indent="0" lvl="3" marL="0" marR="0" algn="r">
+            <a:lvl4pPr marL="0" marR="0" lvl="3" indent="0" algn="r">
               <a:lnSpc>
                 <a:spcPct val="100000"/>
               </a:lnSpc>
@@ -6337,7 +6476,7 @@
               <a:buSzPts val="1000"/>
               <a:buFont typeface="Arial"/>
               <a:buNone/>
-              <a:defRPr b="0" i="0" sz="1000" u="none" cap="none" strike="noStrike">
+              <a:defRPr sz="1000" b="0" i="0" u="none" strike="noStrike" cap="none">
                 <a:solidFill>
                   <a:schemeClr val="dk2"/>
                 </a:solidFill>
@@ -6347,7 +6486,7 @@
                 <a:sym typeface="Arial"/>
               </a:defRPr>
             </a:lvl4pPr>
-            <a:lvl5pPr indent="0" lvl="4" marL="0" marR="0" algn="r">
+            <a:lvl5pPr marL="0" marR="0" lvl="4" indent="0" algn="r">
               <a:lnSpc>
                 <a:spcPct val="100000"/>
               </a:lnSpc>
@@ -6363,7 +6502,7 @@
               <a:buSzPts val="1000"/>
               <a:buFont typeface="Arial"/>
               <a:buNone/>
-              <a:defRPr b="0" i="0" sz="1000" u="none" cap="none" strike="noStrike">
+              <a:defRPr sz="1000" b="0" i="0" u="none" strike="noStrike" cap="none">
                 <a:solidFill>
                   <a:schemeClr val="dk2"/>
                 </a:solidFill>
@@ -6373,7 +6512,7 @@
                 <a:sym typeface="Arial"/>
               </a:defRPr>
             </a:lvl5pPr>
-            <a:lvl6pPr indent="0" lvl="5" marL="0" marR="0" algn="r">
+            <a:lvl6pPr marL="0" marR="0" lvl="5" indent="0" algn="r">
               <a:lnSpc>
                 <a:spcPct val="100000"/>
               </a:lnSpc>
@@ -6389,7 +6528,7 @@
               <a:buSzPts val="1000"/>
               <a:buFont typeface="Arial"/>
               <a:buNone/>
-              <a:defRPr b="0" i="0" sz="1000" u="none" cap="none" strike="noStrike">
+              <a:defRPr sz="1000" b="0" i="0" u="none" strike="noStrike" cap="none">
                 <a:solidFill>
                   <a:schemeClr val="dk2"/>
                 </a:solidFill>
@@ -6399,7 +6538,7 @@
                 <a:sym typeface="Arial"/>
               </a:defRPr>
             </a:lvl6pPr>
-            <a:lvl7pPr indent="0" lvl="6" marL="0" marR="0" algn="r">
+            <a:lvl7pPr marL="0" marR="0" lvl="6" indent="0" algn="r">
               <a:lnSpc>
                 <a:spcPct val="100000"/>
               </a:lnSpc>
@@ -6415,7 +6554,7 @@
               <a:buSzPts val="1000"/>
               <a:buFont typeface="Arial"/>
               <a:buNone/>
-              <a:defRPr b="0" i="0" sz="1000" u="none" cap="none" strike="noStrike">
+              <a:defRPr sz="1000" b="0" i="0" u="none" strike="noStrike" cap="none">
                 <a:solidFill>
                   <a:schemeClr val="dk2"/>
                 </a:solidFill>
@@ -6425,7 +6564,7 @@
                 <a:sym typeface="Arial"/>
               </a:defRPr>
             </a:lvl7pPr>
-            <a:lvl8pPr indent="0" lvl="7" marL="0" marR="0" algn="r">
+            <a:lvl8pPr marL="0" marR="0" lvl="7" indent="0" algn="r">
               <a:lnSpc>
                 <a:spcPct val="100000"/>
               </a:lnSpc>
@@ -6441,7 +6580,7 @@
               <a:buSzPts val="1000"/>
               <a:buFont typeface="Arial"/>
               <a:buNone/>
-              <a:defRPr b="0" i="0" sz="1000" u="none" cap="none" strike="noStrike">
+              <a:defRPr sz="1000" b="0" i="0" u="none" strike="noStrike" cap="none">
                 <a:solidFill>
                   <a:schemeClr val="dk2"/>
                 </a:solidFill>
@@ -6451,7 +6590,7 @@
                 <a:sym typeface="Arial"/>
               </a:defRPr>
             </a:lvl8pPr>
-            <a:lvl9pPr indent="0" lvl="8" marL="0" marR="0" algn="r">
+            <a:lvl9pPr marL="0" marR="0" lvl="8" indent="0" algn="r">
               <a:lnSpc>
                 <a:spcPct val="100000"/>
               </a:lnSpc>
@@ -6467,7 +6606,7 @@
               <a:buSzPts val="1000"/>
               <a:buFont typeface="Arial"/>
               <a:buNone/>
-              <a:defRPr b="0" i="0" sz="1000" u="none" cap="none" strike="noStrike">
+              <a:defRPr sz="1000" b="0" i="0" u="none" strike="noStrike" cap="none">
                 <a:solidFill>
                   <a:schemeClr val="dk2"/>
                 </a:solidFill>
@@ -6479,7 +6618,7 @@
             </a:lvl9pPr>
           </a:lstStyle>
           <a:p>
-            <a:pPr indent="0" lvl="0" marL="0" rtl="0" algn="r">
+            <a:pPr marL="0" lvl="0" indent="0" algn="r" rtl="0">
               <a:spcBef>
                 <a:spcPts val="0"/>
               </a:spcBef>
@@ -6505,11 +6644,11 @@
 </file>
 
 <file path=ppt/slideLayouts/slideLayout7.xml><?xml version="1.0" encoding="utf-8"?>
-<p:sldLayout xmlns:a="http://schemas.openxmlformats.org/drawingml/2006/main" xmlns:r="http://schemas.openxmlformats.org/officeDocument/2006/relationships" xmlns:mc="http://schemas.openxmlformats.org/markup-compatibility/2006" xmlns:mv="urn:schemas-microsoft-com:mac:vml" xmlns:p="http://schemas.openxmlformats.org/presentationml/2006/main" xmlns:c="http://schemas.openxmlformats.org/drawingml/2006/chart" xmlns:dgm="http://schemas.openxmlformats.org/drawingml/2006/diagram" xmlns:o="urn:schemas-microsoft-com:office:office" xmlns:v="urn:schemas-microsoft-com:vml" xmlns:pvml="urn:schemas-microsoft-com:office:powerpoint" xmlns:com="http://schemas.openxmlformats.org/drawingml/2006/compatibility" xmlns:p14="http://schemas.microsoft.com/office/powerpoint/2010/main" xmlns:p15="http://schemas.microsoft.com/office/powerpoint/2012/main" xmlns:ahyp="http://schemas.microsoft.com/office/drawing/2018/hyperlinkcolor" matchingName="One column text">
+<p:sldLayout xmlns:a="http://schemas.openxmlformats.org/drawingml/2006/main" xmlns:r="http://schemas.openxmlformats.org/officeDocument/2006/relationships" xmlns:p="http://schemas.openxmlformats.org/presentationml/2006/main" matchingName="One column text">
   <p:cSld name="ONE_COLUMN_TEXT">
     <p:spTree>
       <p:nvGrpSpPr>
-        <p:cNvPr id="30" name="Shape 30"/>
+        <p:cNvPr id="1" name="Shape 30"/>
         <p:cNvGrpSpPr/>
         <p:nvPr/>
       </p:nvGrpSpPr>
@@ -6524,7 +6663,9 @@
       <p:sp>
         <p:nvSpPr>
           <p:cNvPr id="31" name="Google Shape;31;p8"/>
-          <p:cNvSpPr txBox="1"/>
+          <p:cNvSpPr txBox="1">
+            <a:spLocks noGrp="1"/>
+          </p:cNvSpPr>
           <p:nvPr>
             <p:ph type="title"/>
           </p:nvPr>
@@ -6543,7 +6684,7 @@
           </a:ln>
         </p:spPr>
         <p:txBody>
-          <a:bodyPr anchorCtr="0" anchor="b" bIns="91425" lIns="91425" spcFirstLastPara="1" rIns="91425" wrap="square" tIns="91425">
+          <a:bodyPr spcFirstLastPara="1" wrap="square" lIns="91425" tIns="91425" rIns="91425" bIns="91425" anchor="b" anchorCtr="0">
             <a:normAutofit/>
           </a:bodyPr>
           <a:lstStyle>
@@ -6674,15 +6815,19 @@
               <a:defRPr sz="2400"/>
             </a:lvl9pPr>
           </a:lstStyle>
-          <a:p/>
+          <a:p>
+            <a:endParaRPr/>
+          </a:p>
         </p:txBody>
       </p:sp>
       <p:sp>
         <p:nvSpPr>
           <p:cNvPr id="32" name="Google Shape;32;p8"/>
-          <p:cNvSpPr txBox="1"/>
+          <p:cNvSpPr txBox="1">
+            <a:spLocks noGrp="1"/>
+          </p:cNvSpPr>
           <p:nvPr>
-            <p:ph idx="1" type="body"/>
+            <p:ph type="body" idx="1"/>
           </p:nvPr>
         </p:nvSpPr>
         <p:spPr>
@@ -6699,11 +6844,11 @@
           </a:ln>
         </p:spPr>
         <p:txBody>
-          <a:bodyPr anchorCtr="0" anchor="t" bIns="91425" lIns="91425" spcFirstLastPara="1" rIns="91425" wrap="square" tIns="91425">
+          <a:bodyPr spcFirstLastPara="1" wrap="square" lIns="91425" tIns="91425" rIns="91425" bIns="91425" anchor="t" anchorCtr="0">
             <a:normAutofit/>
           </a:bodyPr>
           <a:lstStyle>
-            <a:lvl1pPr indent="-304800" lvl="0" marL="457200" algn="l">
+            <a:lvl1pPr marL="457200" lvl="0" indent="-304800" algn="l">
               <a:lnSpc>
                 <a:spcPct val="115000"/>
               </a:lnSpc>
@@ -6717,7 +6862,7 @@
               <a:buChar char="●"/>
               <a:defRPr sz="1200"/>
             </a:lvl1pPr>
-            <a:lvl2pPr indent="-304800" lvl="1" marL="914400" algn="l">
+            <a:lvl2pPr marL="914400" lvl="1" indent="-304800" algn="l">
               <a:lnSpc>
                 <a:spcPct val="115000"/>
               </a:lnSpc>
@@ -6731,7 +6876,7 @@
               <a:buChar char="○"/>
               <a:defRPr sz="1200"/>
             </a:lvl2pPr>
-            <a:lvl3pPr indent="-304800" lvl="2" marL="1371600" algn="l">
+            <a:lvl3pPr marL="1371600" lvl="2" indent="-304800" algn="l">
               <a:lnSpc>
                 <a:spcPct val="115000"/>
               </a:lnSpc>
@@ -6745,7 +6890,7 @@
               <a:buChar char="■"/>
               <a:defRPr sz="1200"/>
             </a:lvl3pPr>
-            <a:lvl4pPr indent="-304800" lvl="3" marL="1828800" algn="l">
+            <a:lvl4pPr marL="1828800" lvl="3" indent="-304800" algn="l">
               <a:lnSpc>
                 <a:spcPct val="115000"/>
               </a:lnSpc>
@@ -6759,7 +6904,7 @@
               <a:buChar char="●"/>
               <a:defRPr sz="1200"/>
             </a:lvl4pPr>
-            <a:lvl5pPr indent="-304800" lvl="4" marL="2286000" algn="l">
+            <a:lvl5pPr marL="2286000" lvl="4" indent="-304800" algn="l">
               <a:lnSpc>
                 <a:spcPct val="115000"/>
               </a:lnSpc>
@@ -6773,7 +6918,7 @@
               <a:buChar char="○"/>
               <a:defRPr sz="1200"/>
             </a:lvl5pPr>
-            <a:lvl6pPr indent="-304800" lvl="5" marL="2743200" algn="l">
+            <a:lvl6pPr marL="2743200" lvl="5" indent="-304800" algn="l">
               <a:lnSpc>
                 <a:spcPct val="115000"/>
               </a:lnSpc>
@@ -6787,7 +6932,7 @@
               <a:buChar char="■"/>
               <a:defRPr sz="1200"/>
             </a:lvl6pPr>
-            <a:lvl7pPr indent="-304800" lvl="6" marL="3200400" algn="l">
+            <a:lvl7pPr marL="3200400" lvl="6" indent="-304800" algn="l">
               <a:lnSpc>
                 <a:spcPct val="115000"/>
               </a:lnSpc>
@@ -6801,7 +6946,7 @@
               <a:buChar char="●"/>
               <a:defRPr sz="1200"/>
             </a:lvl7pPr>
-            <a:lvl8pPr indent="-304800" lvl="7" marL="3657600" algn="l">
+            <a:lvl8pPr marL="3657600" lvl="7" indent="-304800" algn="l">
               <a:lnSpc>
                 <a:spcPct val="115000"/>
               </a:lnSpc>
@@ -6815,7 +6960,7 @@
               <a:buChar char="○"/>
               <a:defRPr sz="1200"/>
             </a:lvl8pPr>
-            <a:lvl9pPr indent="-304800" lvl="8" marL="4114800" algn="l">
+            <a:lvl9pPr marL="4114800" lvl="8" indent="-304800" algn="l">
               <a:lnSpc>
                 <a:spcPct val="115000"/>
               </a:lnSpc>
@@ -6830,15 +6975,19 @@
               <a:defRPr sz="1200"/>
             </a:lvl9pPr>
           </a:lstStyle>
-          <a:p/>
+          <a:p>
+            <a:endParaRPr/>
+          </a:p>
         </p:txBody>
       </p:sp>
       <p:sp>
         <p:nvSpPr>
           <p:cNvPr id="33" name="Google Shape;33;p8"/>
-          <p:cNvSpPr txBox="1"/>
+          <p:cNvSpPr txBox="1">
+            <a:spLocks noGrp="1"/>
+          </p:cNvSpPr>
           <p:nvPr>
-            <p:ph idx="12" type="sldNum"/>
+            <p:ph type="sldNum" idx="12"/>
           </p:nvPr>
         </p:nvSpPr>
         <p:spPr>
@@ -6855,11 +7004,11 @@
           </a:ln>
         </p:spPr>
         <p:txBody>
-          <a:bodyPr anchorCtr="0" anchor="ctr" bIns="91425" lIns="91425" spcFirstLastPara="1" rIns="91425" wrap="square" tIns="91425">
+          <a:bodyPr spcFirstLastPara="1" wrap="square" lIns="91425" tIns="91425" rIns="91425" bIns="91425" anchor="ctr" anchorCtr="0">
             <a:normAutofit/>
           </a:bodyPr>
           <a:lstStyle>
-            <a:lvl1pPr indent="0" lvl="0" marL="0" marR="0" algn="r">
+            <a:lvl1pPr marL="0" marR="0" lvl="0" indent="0" algn="r">
               <a:lnSpc>
                 <a:spcPct val="100000"/>
               </a:lnSpc>
@@ -6875,7 +7024,7 @@
               <a:buSzPts val="1000"/>
               <a:buFont typeface="Arial"/>
               <a:buNone/>
-              <a:defRPr b="0" i="0" sz="1000" u="none" cap="none" strike="noStrike">
+              <a:defRPr sz="1000" b="0" i="0" u="none" strike="noStrike" cap="none">
                 <a:solidFill>
                   <a:schemeClr val="dk2"/>
                 </a:solidFill>
@@ -6885,7 +7034,7 @@
                 <a:sym typeface="Arial"/>
               </a:defRPr>
             </a:lvl1pPr>
-            <a:lvl2pPr indent="0" lvl="1" marL="0" marR="0" algn="r">
+            <a:lvl2pPr marL="0" marR="0" lvl="1" indent="0" algn="r">
               <a:lnSpc>
                 <a:spcPct val="100000"/>
               </a:lnSpc>
@@ -6901,7 +7050,7 @@
               <a:buSzPts val="1000"/>
               <a:buFont typeface="Arial"/>
               <a:buNone/>
-              <a:defRPr b="0" i="0" sz="1000" u="none" cap="none" strike="noStrike">
+              <a:defRPr sz="1000" b="0" i="0" u="none" strike="noStrike" cap="none">
                 <a:solidFill>
                   <a:schemeClr val="dk2"/>
                 </a:solidFill>
@@ -6911,7 +7060,7 @@
                 <a:sym typeface="Arial"/>
               </a:defRPr>
             </a:lvl2pPr>
-            <a:lvl3pPr indent="0" lvl="2" marL="0" marR="0" algn="r">
+            <a:lvl3pPr marL="0" marR="0" lvl="2" indent="0" algn="r">
               <a:lnSpc>
                 <a:spcPct val="100000"/>
               </a:lnSpc>
@@ -6927,7 +7076,7 @@
               <a:buSzPts val="1000"/>
               <a:buFont typeface="Arial"/>
               <a:buNone/>
-              <a:defRPr b="0" i="0" sz="1000" u="none" cap="none" strike="noStrike">
+              <a:defRPr sz="1000" b="0" i="0" u="none" strike="noStrike" cap="none">
                 <a:solidFill>
                   <a:schemeClr val="dk2"/>
                 </a:solidFill>
@@ -6937,7 +7086,7 @@
                 <a:sym typeface="Arial"/>
               </a:defRPr>
             </a:lvl3pPr>
-            <a:lvl4pPr indent="0" lvl="3" marL="0" marR="0" algn="r">
+            <a:lvl4pPr marL="0" marR="0" lvl="3" indent="0" algn="r">
               <a:lnSpc>
                 <a:spcPct val="100000"/>
               </a:lnSpc>
@@ -6953,7 +7102,7 @@
               <a:buSzPts val="1000"/>
               <a:buFont typeface="Arial"/>
               <a:buNone/>
-              <a:defRPr b="0" i="0" sz="1000" u="none" cap="none" strike="noStrike">
+              <a:defRPr sz="1000" b="0" i="0" u="none" strike="noStrike" cap="none">
                 <a:solidFill>
                   <a:schemeClr val="dk2"/>
                 </a:solidFill>
@@ -6963,7 +7112,7 @@
                 <a:sym typeface="Arial"/>
               </a:defRPr>
             </a:lvl4pPr>
-            <a:lvl5pPr indent="0" lvl="4" marL="0" marR="0" algn="r">
+            <a:lvl5pPr marL="0" marR="0" lvl="4" indent="0" algn="r">
               <a:lnSpc>
                 <a:spcPct val="100000"/>
               </a:lnSpc>
@@ -6979,7 +7128,7 @@
               <a:buSzPts val="1000"/>
               <a:buFont typeface="Arial"/>
               <a:buNone/>
-              <a:defRPr b="0" i="0" sz="1000" u="none" cap="none" strike="noStrike">
+              <a:defRPr sz="1000" b="0" i="0" u="none" strike="noStrike" cap="none">
                 <a:solidFill>
                   <a:schemeClr val="dk2"/>
                 </a:solidFill>
@@ -6989,7 +7138,7 @@
                 <a:sym typeface="Arial"/>
               </a:defRPr>
             </a:lvl5pPr>
-            <a:lvl6pPr indent="0" lvl="5" marL="0" marR="0" algn="r">
+            <a:lvl6pPr marL="0" marR="0" lvl="5" indent="0" algn="r">
               <a:lnSpc>
                 <a:spcPct val="100000"/>
               </a:lnSpc>
@@ -7005,7 +7154,7 @@
               <a:buSzPts val="1000"/>
               <a:buFont typeface="Arial"/>
               <a:buNone/>
-              <a:defRPr b="0" i="0" sz="1000" u="none" cap="none" strike="noStrike">
+              <a:defRPr sz="1000" b="0" i="0" u="none" strike="noStrike" cap="none">
                 <a:solidFill>
                   <a:schemeClr val="dk2"/>
                 </a:solidFill>
@@ -7015,7 +7164,7 @@
                 <a:sym typeface="Arial"/>
               </a:defRPr>
             </a:lvl6pPr>
-            <a:lvl7pPr indent="0" lvl="6" marL="0" marR="0" algn="r">
+            <a:lvl7pPr marL="0" marR="0" lvl="6" indent="0" algn="r">
               <a:lnSpc>
                 <a:spcPct val="100000"/>
               </a:lnSpc>
@@ -7031,7 +7180,7 @@
               <a:buSzPts val="1000"/>
               <a:buFont typeface="Arial"/>
               <a:buNone/>
-              <a:defRPr b="0" i="0" sz="1000" u="none" cap="none" strike="noStrike">
+              <a:defRPr sz="1000" b="0" i="0" u="none" strike="noStrike" cap="none">
                 <a:solidFill>
                   <a:schemeClr val="dk2"/>
                 </a:solidFill>
@@ -7041,7 +7190,7 @@
                 <a:sym typeface="Arial"/>
               </a:defRPr>
             </a:lvl7pPr>
-            <a:lvl8pPr indent="0" lvl="7" marL="0" marR="0" algn="r">
+            <a:lvl8pPr marL="0" marR="0" lvl="7" indent="0" algn="r">
               <a:lnSpc>
                 <a:spcPct val="100000"/>
               </a:lnSpc>
@@ -7057,7 +7206,7 @@
               <a:buSzPts val="1000"/>
               <a:buFont typeface="Arial"/>
               <a:buNone/>
-              <a:defRPr b="0" i="0" sz="1000" u="none" cap="none" strike="noStrike">
+              <a:defRPr sz="1000" b="0" i="0" u="none" strike="noStrike" cap="none">
                 <a:solidFill>
                   <a:schemeClr val="dk2"/>
                 </a:solidFill>
@@ -7067,7 +7216,7 @@
                 <a:sym typeface="Arial"/>
               </a:defRPr>
             </a:lvl8pPr>
-            <a:lvl9pPr indent="0" lvl="8" marL="0" marR="0" algn="r">
+            <a:lvl9pPr marL="0" marR="0" lvl="8" indent="0" algn="r">
               <a:lnSpc>
                 <a:spcPct val="100000"/>
               </a:lnSpc>
@@ -7083,7 +7232,7 @@
               <a:buSzPts val="1000"/>
               <a:buFont typeface="Arial"/>
               <a:buNone/>
-              <a:defRPr b="0" i="0" sz="1000" u="none" cap="none" strike="noStrike">
+              <a:defRPr sz="1000" b="0" i="0" u="none" strike="noStrike" cap="none">
                 <a:solidFill>
                   <a:schemeClr val="dk2"/>
                 </a:solidFill>
@@ -7095,7 +7244,7 @@
             </a:lvl9pPr>
           </a:lstStyle>
           <a:p>
-            <a:pPr indent="0" lvl="0" marL="0" rtl="0" algn="r">
+            <a:pPr marL="0" lvl="0" indent="0" algn="r" rtl="0">
               <a:spcBef>
                 <a:spcPts val="0"/>
               </a:spcBef>
@@ -7121,11 +7270,11 @@
 </file>
 
 <file path=ppt/slideLayouts/slideLayout8.xml><?xml version="1.0" encoding="utf-8"?>
-<p:sldLayout xmlns:a="http://schemas.openxmlformats.org/drawingml/2006/main" xmlns:r="http://schemas.openxmlformats.org/officeDocument/2006/relationships" xmlns:mc="http://schemas.openxmlformats.org/markup-compatibility/2006" xmlns:mv="urn:schemas-microsoft-com:mac:vml" xmlns:p="http://schemas.openxmlformats.org/presentationml/2006/main" xmlns:c="http://schemas.openxmlformats.org/drawingml/2006/chart" xmlns:dgm="http://schemas.openxmlformats.org/drawingml/2006/diagram" xmlns:o="urn:schemas-microsoft-com:office:office" xmlns:v="urn:schemas-microsoft-com:vml" xmlns:pvml="urn:schemas-microsoft-com:office:powerpoint" xmlns:com="http://schemas.openxmlformats.org/drawingml/2006/compatibility" xmlns:p14="http://schemas.microsoft.com/office/powerpoint/2010/main" xmlns:p15="http://schemas.microsoft.com/office/powerpoint/2012/main" xmlns:ahyp="http://schemas.microsoft.com/office/drawing/2018/hyperlinkcolor" matchingName="Main point">
+<p:sldLayout xmlns:a="http://schemas.openxmlformats.org/drawingml/2006/main" xmlns:r="http://schemas.openxmlformats.org/officeDocument/2006/relationships" xmlns:p="http://schemas.openxmlformats.org/presentationml/2006/main" matchingName="Main point">
   <p:cSld name="MAIN_POINT">
     <p:spTree>
       <p:nvGrpSpPr>
-        <p:cNvPr id="34" name="Shape 34"/>
+        <p:cNvPr id="1" name="Shape 34"/>
         <p:cNvGrpSpPr/>
         <p:nvPr/>
       </p:nvGrpSpPr>
@@ -7140,7 +7289,9 @@
       <p:sp>
         <p:nvSpPr>
           <p:cNvPr id="35" name="Google Shape;35;p9"/>
-          <p:cNvSpPr txBox="1"/>
+          <p:cNvSpPr txBox="1">
+            <a:spLocks noGrp="1"/>
+          </p:cNvSpPr>
           <p:nvPr>
             <p:ph type="title"/>
           </p:nvPr>
@@ -7159,7 +7310,7 @@
           </a:ln>
         </p:spPr>
         <p:txBody>
-          <a:bodyPr anchorCtr="0" anchor="ctr" bIns="91425" lIns="91425" spcFirstLastPara="1" rIns="91425" wrap="square" tIns="91425">
+          <a:bodyPr spcFirstLastPara="1" wrap="square" lIns="91425" tIns="91425" rIns="91425" bIns="91425" anchor="ctr" anchorCtr="0">
             <a:normAutofit/>
           </a:bodyPr>
           <a:lstStyle>
@@ -7290,15 +7441,19 @@
               <a:defRPr sz="4800"/>
             </a:lvl9pPr>
           </a:lstStyle>
-          <a:p/>
+          <a:p>
+            <a:endParaRPr/>
+          </a:p>
         </p:txBody>
       </p:sp>
       <p:sp>
         <p:nvSpPr>
           <p:cNvPr id="36" name="Google Shape;36;p9"/>
-          <p:cNvSpPr txBox="1"/>
+          <p:cNvSpPr txBox="1">
+            <a:spLocks noGrp="1"/>
+          </p:cNvSpPr>
           <p:nvPr>
-            <p:ph idx="12" type="sldNum"/>
+            <p:ph type="sldNum" idx="12"/>
           </p:nvPr>
         </p:nvSpPr>
         <p:spPr>
@@ -7315,11 +7470,11 @@
           </a:ln>
         </p:spPr>
         <p:txBody>
-          <a:bodyPr anchorCtr="0" anchor="ctr" bIns="91425" lIns="91425" spcFirstLastPara="1" rIns="91425" wrap="square" tIns="91425">
+          <a:bodyPr spcFirstLastPara="1" wrap="square" lIns="91425" tIns="91425" rIns="91425" bIns="91425" anchor="ctr" anchorCtr="0">
             <a:normAutofit/>
           </a:bodyPr>
           <a:lstStyle>
-            <a:lvl1pPr indent="0" lvl="0" marL="0" marR="0" algn="r">
+            <a:lvl1pPr marL="0" marR="0" lvl="0" indent="0" algn="r">
               <a:lnSpc>
                 <a:spcPct val="100000"/>
               </a:lnSpc>
@@ -7335,7 +7490,7 @@
               <a:buSzPts val="1000"/>
               <a:buFont typeface="Arial"/>
               <a:buNone/>
-              <a:defRPr b="0" i="0" sz="1000" u="none" cap="none" strike="noStrike">
+              <a:defRPr sz="1000" b="0" i="0" u="none" strike="noStrike" cap="none">
                 <a:solidFill>
                   <a:schemeClr val="dk2"/>
                 </a:solidFill>
@@ -7345,7 +7500,7 @@
                 <a:sym typeface="Arial"/>
               </a:defRPr>
             </a:lvl1pPr>
-            <a:lvl2pPr indent="0" lvl="1" marL="0" marR="0" algn="r">
+            <a:lvl2pPr marL="0" marR="0" lvl="1" indent="0" algn="r">
               <a:lnSpc>
                 <a:spcPct val="100000"/>
               </a:lnSpc>
@@ -7361,7 +7516,7 @@
               <a:buSzPts val="1000"/>
               <a:buFont typeface="Arial"/>
               <a:buNone/>
-              <a:defRPr b="0" i="0" sz="1000" u="none" cap="none" strike="noStrike">
+              <a:defRPr sz="1000" b="0" i="0" u="none" strike="noStrike" cap="none">
                 <a:solidFill>
                   <a:schemeClr val="dk2"/>
                 </a:solidFill>
@@ -7371,7 +7526,7 @@
                 <a:sym typeface="Arial"/>
               </a:defRPr>
             </a:lvl2pPr>
-            <a:lvl3pPr indent="0" lvl="2" marL="0" marR="0" algn="r">
+            <a:lvl3pPr marL="0" marR="0" lvl="2" indent="0" algn="r">
               <a:lnSpc>
                 <a:spcPct val="100000"/>
               </a:lnSpc>
@@ -7387,7 +7542,7 @@
               <a:buSzPts val="1000"/>
               <a:buFont typeface="Arial"/>
               <a:buNone/>
-              <a:defRPr b="0" i="0" sz="1000" u="none" cap="none" strike="noStrike">
+              <a:defRPr sz="1000" b="0" i="0" u="none" strike="noStrike" cap="none">
                 <a:solidFill>
                   <a:schemeClr val="dk2"/>
                 </a:solidFill>
@@ -7397,7 +7552,7 @@
                 <a:sym typeface="Arial"/>
               </a:defRPr>
             </a:lvl3pPr>
-            <a:lvl4pPr indent="0" lvl="3" marL="0" marR="0" algn="r">
+            <a:lvl4pPr marL="0" marR="0" lvl="3" indent="0" algn="r">
               <a:lnSpc>
                 <a:spcPct val="100000"/>
               </a:lnSpc>
@@ -7413,7 +7568,7 @@
               <a:buSzPts val="1000"/>
               <a:buFont typeface="Arial"/>
               <a:buNone/>
-              <a:defRPr b="0" i="0" sz="1000" u="none" cap="none" strike="noStrike">
+              <a:defRPr sz="1000" b="0" i="0" u="none" strike="noStrike" cap="none">
                 <a:solidFill>
                   <a:schemeClr val="dk2"/>
                 </a:solidFill>
@@ -7423,7 +7578,7 @@
                 <a:sym typeface="Arial"/>
               </a:defRPr>
             </a:lvl4pPr>
-            <a:lvl5pPr indent="0" lvl="4" marL="0" marR="0" algn="r">
+            <a:lvl5pPr marL="0" marR="0" lvl="4" indent="0" algn="r">
               <a:lnSpc>
                 <a:spcPct val="100000"/>
               </a:lnSpc>
@@ -7439,7 +7594,7 @@
               <a:buSzPts val="1000"/>
               <a:buFont typeface="Arial"/>
               <a:buNone/>
-              <a:defRPr b="0" i="0" sz="1000" u="none" cap="none" strike="noStrike">
+              <a:defRPr sz="1000" b="0" i="0" u="none" strike="noStrike" cap="none">
                 <a:solidFill>
                   <a:schemeClr val="dk2"/>
                 </a:solidFill>
@@ -7449,7 +7604,7 @@
                 <a:sym typeface="Arial"/>
               </a:defRPr>
             </a:lvl5pPr>
-            <a:lvl6pPr indent="0" lvl="5" marL="0" marR="0" algn="r">
+            <a:lvl6pPr marL="0" marR="0" lvl="5" indent="0" algn="r">
               <a:lnSpc>
                 <a:spcPct val="100000"/>
               </a:lnSpc>
@@ -7465,7 +7620,7 @@
               <a:buSzPts val="1000"/>
               <a:buFont typeface="Arial"/>
               <a:buNone/>
-              <a:defRPr b="0" i="0" sz="1000" u="none" cap="none" strike="noStrike">
+              <a:defRPr sz="1000" b="0" i="0" u="none" strike="noStrike" cap="none">
                 <a:solidFill>
                   <a:schemeClr val="dk2"/>
                 </a:solidFill>
@@ -7475,7 +7630,7 @@
                 <a:sym typeface="Arial"/>
               </a:defRPr>
             </a:lvl6pPr>
-            <a:lvl7pPr indent="0" lvl="6" marL="0" marR="0" algn="r">
+            <a:lvl7pPr marL="0" marR="0" lvl="6" indent="0" algn="r">
               <a:lnSpc>
                 <a:spcPct val="100000"/>
               </a:lnSpc>
@@ -7491,7 +7646,7 @@
               <a:buSzPts val="1000"/>
               <a:buFont typeface="Arial"/>
               <a:buNone/>
-              <a:defRPr b="0" i="0" sz="1000" u="none" cap="none" strike="noStrike">
+              <a:defRPr sz="1000" b="0" i="0" u="none" strike="noStrike" cap="none">
                 <a:solidFill>
                   <a:schemeClr val="dk2"/>
                 </a:solidFill>
@@ -7501,7 +7656,7 @@
                 <a:sym typeface="Arial"/>
               </a:defRPr>
             </a:lvl7pPr>
-            <a:lvl8pPr indent="0" lvl="7" marL="0" marR="0" algn="r">
+            <a:lvl8pPr marL="0" marR="0" lvl="7" indent="0" algn="r">
               <a:lnSpc>
                 <a:spcPct val="100000"/>
               </a:lnSpc>
@@ -7517,7 +7672,7 @@
               <a:buSzPts val="1000"/>
               <a:buFont typeface="Arial"/>
               <a:buNone/>
-              <a:defRPr b="0" i="0" sz="1000" u="none" cap="none" strike="noStrike">
+              <a:defRPr sz="1000" b="0" i="0" u="none" strike="noStrike" cap="none">
                 <a:solidFill>
                   <a:schemeClr val="dk2"/>
                 </a:solidFill>
@@ -7527,7 +7682,7 @@
                 <a:sym typeface="Arial"/>
               </a:defRPr>
             </a:lvl8pPr>
-            <a:lvl9pPr indent="0" lvl="8" marL="0" marR="0" algn="r">
+            <a:lvl9pPr marL="0" marR="0" lvl="8" indent="0" algn="r">
               <a:lnSpc>
                 <a:spcPct val="100000"/>
               </a:lnSpc>
@@ -7543,7 +7698,7 @@
               <a:buSzPts val="1000"/>
               <a:buFont typeface="Arial"/>
               <a:buNone/>
-              <a:defRPr b="0" i="0" sz="1000" u="none" cap="none" strike="noStrike">
+              <a:defRPr sz="1000" b="0" i="0" u="none" strike="noStrike" cap="none">
                 <a:solidFill>
                   <a:schemeClr val="dk2"/>
                 </a:solidFill>
@@ -7555,7 +7710,7 @@
             </a:lvl9pPr>
           </a:lstStyle>
           <a:p>
-            <a:pPr indent="0" lvl="0" marL="0" rtl="0" algn="r">
+            <a:pPr marL="0" lvl="0" indent="0" algn="r" rtl="0">
               <a:spcBef>
                 <a:spcPts val="0"/>
               </a:spcBef>
@@ -7581,11 +7736,11 @@
 </file>
 
 <file path=ppt/slideLayouts/slideLayout9.xml><?xml version="1.0" encoding="utf-8"?>
-<p:sldLayout xmlns:a="http://schemas.openxmlformats.org/drawingml/2006/main" xmlns:r="http://schemas.openxmlformats.org/officeDocument/2006/relationships" xmlns:mc="http://schemas.openxmlformats.org/markup-compatibility/2006" xmlns:mv="urn:schemas-microsoft-com:mac:vml" xmlns:p="http://schemas.openxmlformats.org/presentationml/2006/main" xmlns:c="http://schemas.openxmlformats.org/drawingml/2006/chart" xmlns:dgm="http://schemas.openxmlformats.org/drawingml/2006/diagram" xmlns:o="urn:schemas-microsoft-com:office:office" xmlns:v="urn:schemas-microsoft-com:vml" xmlns:pvml="urn:schemas-microsoft-com:office:powerpoint" xmlns:com="http://schemas.openxmlformats.org/drawingml/2006/compatibility" xmlns:p14="http://schemas.microsoft.com/office/powerpoint/2010/main" xmlns:p15="http://schemas.microsoft.com/office/powerpoint/2012/main" xmlns:ahyp="http://schemas.microsoft.com/office/drawing/2018/hyperlinkcolor" matchingName="Section title and description">
+<p:sldLayout xmlns:a="http://schemas.openxmlformats.org/drawingml/2006/main" xmlns:r="http://schemas.openxmlformats.org/officeDocument/2006/relationships" xmlns:p="http://schemas.openxmlformats.org/presentationml/2006/main" matchingName="Section title and description">
   <p:cSld name="SECTION_TITLE_AND_DESCRIPTION">
     <p:spTree>
       <p:nvGrpSpPr>
-        <p:cNvPr id="37" name="Shape 37"/>
+        <p:cNvPr id="1" name="Shape 37"/>
         <p:cNvGrpSpPr/>
         <p:nvPr/>
       </p:nvGrpSpPr>
@@ -7619,12 +7774,12 @@
           </a:ln>
         </p:spPr>
         <p:txBody>
-          <a:bodyPr anchorCtr="0" anchor="ctr" bIns="91425" lIns="91425" spcFirstLastPara="1" rIns="91425" wrap="square" tIns="91425">
+          <a:bodyPr spcFirstLastPara="1" wrap="square" lIns="91425" tIns="91425" rIns="91425" bIns="91425" anchor="ctr" anchorCtr="0">
             <a:noAutofit/>
           </a:bodyPr>
           <a:lstStyle/>
           <a:p>
-            <a:pPr indent="0" lvl="0" marL="0" marR="0" rtl="0" algn="l">
+            <a:pPr marL="0" marR="0" lvl="0" indent="0" algn="l" rtl="0">
               <a:lnSpc>
                 <a:spcPct val="100000"/>
               </a:lnSpc>
@@ -7641,10 +7796,7 @@
               <a:buFont typeface="Arial"/>
               <a:buNone/>
             </a:pPr>
-            <a:r>
-              <a:t/>
-            </a:r>
-            <a:endParaRPr b="0" i="0" sz="1400" u="none" cap="none" strike="noStrike">
+            <a:endParaRPr sz="1400" b="0" i="0" u="none" strike="noStrike" cap="none">
               <a:solidFill>
                 <a:srgbClr val="000000"/>
               </a:solidFill>
@@ -7659,7 +7811,9 @@
       <p:sp>
         <p:nvSpPr>
           <p:cNvPr id="39" name="Google Shape;39;p10"/>
-          <p:cNvSpPr txBox="1"/>
+          <p:cNvSpPr txBox="1">
+            <a:spLocks noGrp="1"/>
+          </p:cNvSpPr>
           <p:nvPr>
             <p:ph type="title"/>
           </p:nvPr>
@@ -7678,7 +7832,7 @@
           </a:ln>
         </p:spPr>
         <p:txBody>
-          <a:bodyPr anchorCtr="0" anchor="b" bIns="91425" lIns="91425" spcFirstLastPara="1" rIns="91425" wrap="square" tIns="91425">
+          <a:bodyPr spcFirstLastPara="1" wrap="square" lIns="91425" tIns="91425" rIns="91425" bIns="91425" anchor="b" anchorCtr="0">
             <a:normAutofit/>
           </a:bodyPr>
           <a:lstStyle>
@@ -7809,15 +7963,19 @@
               <a:defRPr sz="4200"/>
             </a:lvl9pPr>
           </a:lstStyle>
-          <a:p/>
+          <a:p>
+            <a:endParaRPr/>
+          </a:p>
         </p:txBody>
       </p:sp>
       <p:sp>
         <p:nvSpPr>
           <p:cNvPr id="40" name="Google Shape;40;p10"/>
-          <p:cNvSpPr txBox="1"/>
+          <p:cNvSpPr txBox="1">
+            <a:spLocks noGrp="1"/>
+          </p:cNvSpPr>
           <p:nvPr>
-            <p:ph idx="1" type="subTitle"/>
+            <p:ph type="subTitle" idx="1"/>
           </p:nvPr>
         </p:nvSpPr>
         <p:spPr>
@@ -7834,7 +7992,7 @@
           </a:ln>
         </p:spPr>
         <p:txBody>
-          <a:bodyPr anchorCtr="0" anchor="t" bIns="91425" lIns="91425" spcFirstLastPara="1" rIns="91425" wrap="square" tIns="91425">
+          <a:bodyPr spcFirstLastPara="1" wrap="square" lIns="91425" tIns="91425" rIns="91425" bIns="91425" anchor="t" anchorCtr="0">
             <a:normAutofit/>
           </a:bodyPr>
           <a:lstStyle>
@@ -7965,15 +8123,19 @@
               <a:defRPr sz="2100"/>
             </a:lvl9pPr>
           </a:lstStyle>
-          <a:p/>
+          <a:p>
+            <a:endParaRPr/>
+          </a:p>
         </p:txBody>
       </p:sp>
       <p:sp>
         <p:nvSpPr>
           <p:cNvPr id="41" name="Google Shape;41;p10"/>
-          <p:cNvSpPr txBox="1"/>
+          <p:cNvSpPr txBox="1">
+            <a:spLocks noGrp="1"/>
+          </p:cNvSpPr>
           <p:nvPr>
-            <p:ph idx="2" type="body"/>
+            <p:ph type="body" idx="2"/>
           </p:nvPr>
         </p:nvSpPr>
         <p:spPr>
@@ -7990,11 +8152,11 @@
           </a:ln>
         </p:spPr>
         <p:txBody>
-          <a:bodyPr anchorCtr="0" anchor="ctr" bIns="91425" lIns="91425" spcFirstLastPara="1" rIns="91425" wrap="square" tIns="91425">
+          <a:bodyPr spcFirstLastPara="1" wrap="square" lIns="91425" tIns="91425" rIns="91425" bIns="91425" anchor="ctr" anchorCtr="0">
             <a:normAutofit/>
           </a:bodyPr>
           <a:lstStyle>
-            <a:lvl1pPr indent="-342900" lvl="0" marL="457200" algn="l">
+            <a:lvl1pPr marL="457200" lvl="0" indent="-342900" algn="l">
               <a:lnSpc>
                 <a:spcPct val="115000"/>
               </a:lnSpc>
@@ -8008,7 +8170,7 @@
               <a:buChar char="●"/>
               <a:defRPr/>
             </a:lvl1pPr>
-            <a:lvl2pPr indent="-317500" lvl="1" marL="914400" algn="l">
+            <a:lvl2pPr marL="914400" lvl="1" indent="-317500" algn="l">
               <a:lnSpc>
                 <a:spcPct val="115000"/>
               </a:lnSpc>
@@ -8022,7 +8184,7 @@
               <a:buChar char="○"/>
               <a:defRPr/>
             </a:lvl2pPr>
-            <a:lvl3pPr indent="-317500" lvl="2" marL="1371600" algn="l">
+            <a:lvl3pPr marL="1371600" lvl="2" indent="-317500" algn="l">
               <a:lnSpc>
                 <a:spcPct val="115000"/>
               </a:lnSpc>
@@ -8036,7 +8198,7 @@
               <a:buChar char="■"/>
               <a:defRPr/>
             </a:lvl3pPr>
-            <a:lvl4pPr indent="-317500" lvl="3" marL="1828800" algn="l">
+            <a:lvl4pPr marL="1828800" lvl="3" indent="-317500" algn="l">
               <a:lnSpc>
                 <a:spcPct val="115000"/>
               </a:lnSpc>
@@ -8050,7 +8212,7 @@
               <a:buChar char="●"/>
               <a:defRPr/>
             </a:lvl4pPr>
-            <a:lvl5pPr indent="-317500" lvl="4" marL="2286000" algn="l">
+            <a:lvl5pPr marL="2286000" lvl="4" indent="-317500" algn="l">
               <a:lnSpc>
                 <a:spcPct val="115000"/>
               </a:lnSpc>
@@ -8064,7 +8226,7 @@
               <a:buChar char="○"/>
               <a:defRPr/>
             </a:lvl5pPr>
-            <a:lvl6pPr indent="-317500" lvl="5" marL="2743200" algn="l">
+            <a:lvl6pPr marL="2743200" lvl="5" indent="-317500" algn="l">
               <a:lnSpc>
                 <a:spcPct val="115000"/>
               </a:lnSpc>
@@ -8078,7 +8240,7 @@
               <a:buChar char="■"/>
               <a:defRPr/>
             </a:lvl6pPr>
-            <a:lvl7pPr indent="-317500" lvl="6" marL="3200400" algn="l">
+            <a:lvl7pPr marL="3200400" lvl="6" indent="-317500" algn="l">
               <a:lnSpc>
                 <a:spcPct val="115000"/>
               </a:lnSpc>
@@ -8092,7 +8254,7 @@
               <a:buChar char="●"/>
               <a:defRPr/>
             </a:lvl7pPr>
-            <a:lvl8pPr indent="-317500" lvl="7" marL="3657600" algn="l">
+            <a:lvl8pPr marL="3657600" lvl="7" indent="-317500" algn="l">
               <a:lnSpc>
                 <a:spcPct val="115000"/>
               </a:lnSpc>
@@ -8106,7 +8268,7 @@
               <a:buChar char="○"/>
               <a:defRPr/>
             </a:lvl8pPr>
-            <a:lvl9pPr indent="-317500" lvl="8" marL="4114800" algn="l">
+            <a:lvl9pPr marL="4114800" lvl="8" indent="-317500" algn="l">
               <a:lnSpc>
                 <a:spcPct val="115000"/>
               </a:lnSpc>
@@ -8121,15 +8283,19 @@
               <a:defRPr/>
             </a:lvl9pPr>
           </a:lstStyle>
-          <a:p/>
+          <a:p>
+            <a:endParaRPr/>
+          </a:p>
         </p:txBody>
       </p:sp>
       <p:sp>
         <p:nvSpPr>
           <p:cNvPr id="42" name="Google Shape;42;p10"/>
-          <p:cNvSpPr txBox="1"/>
+          <p:cNvSpPr txBox="1">
+            <a:spLocks noGrp="1"/>
+          </p:cNvSpPr>
           <p:nvPr>
-            <p:ph idx="12" type="sldNum"/>
+            <p:ph type="sldNum" idx="12"/>
           </p:nvPr>
         </p:nvSpPr>
         <p:spPr>
@@ -8146,11 +8312,11 @@
           </a:ln>
         </p:spPr>
         <p:txBody>
-          <a:bodyPr anchorCtr="0" anchor="ctr" bIns="91425" lIns="91425" spcFirstLastPara="1" rIns="91425" wrap="square" tIns="91425">
+          <a:bodyPr spcFirstLastPara="1" wrap="square" lIns="91425" tIns="91425" rIns="91425" bIns="91425" anchor="ctr" anchorCtr="0">
             <a:normAutofit/>
           </a:bodyPr>
           <a:lstStyle>
-            <a:lvl1pPr indent="0" lvl="0" marL="0" marR="0" algn="r">
+            <a:lvl1pPr marL="0" marR="0" lvl="0" indent="0" algn="r">
               <a:lnSpc>
                 <a:spcPct val="100000"/>
               </a:lnSpc>
@@ -8166,7 +8332,7 @@
               <a:buSzPts val="1000"/>
               <a:buFont typeface="Arial"/>
               <a:buNone/>
-              <a:defRPr b="0" i="0" sz="1000" u="none" cap="none" strike="noStrike">
+              <a:defRPr sz="1000" b="0" i="0" u="none" strike="noStrike" cap="none">
                 <a:solidFill>
                   <a:schemeClr val="dk2"/>
                 </a:solidFill>
@@ -8176,7 +8342,7 @@
                 <a:sym typeface="Arial"/>
               </a:defRPr>
             </a:lvl1pPr>
-            <a:lvl2pPr indent="0" lvl="1" marL="0" marR="0" algn="r">
+            <a:lvl2pPr marL="0" marR="0" lvl="1" indent="0" algn="r">
               <a:lnSpc>
                 <a:spcPct val="100000"/>
               </a:lnSpc>
@@ -8192,7 +8358,7 @@
               <a:buSzPts val="1000"/>
               <a:buFont typeface="Arial"/>
               <a:buNone/>
-              <a:defRPr b="0" i="0" sz="1000" u="none" cap="none" strike="noStrike">
+              <a:defRPr sz="1000" b="0" i="0" u="none" strike="noStrike" cap="none">
                 <a:solidFill>
                   <a:schemeClr val="dk2"/>
                 </a:solidFill>
@@ -8202,7 +8368,7 @@
                 <a:sym typeface="Arial"/>
               </a:defRPr>
             </a:lvl2pPr>
-            <a:lvl3pPr indent="0" lvl="2" marL="0" marR="0" algn="r">
+            <a:lvl3pPr marL="0" marR="0" lvl="2" indent="0" algn="r">
               <a:lnSpc>
                 <a:spcPct val="100000"/>
               </a:lnSpc>
@@ -8218,7 +8384,7 @@
               <a:buSzPts val="1000"/>
               <a:buFont typeface="Arial"/>
               <a:buNone/>
-              <a:defRPr b="0" i="0" sz="1000" u="none" cap="none" strike="noStrike">
+              <a:defRPr sz="1000" b="0" i="0" u="none" strike="noStrike" cap="none">
                 <a:solidFill>
                   <a:schemeClr val="dk2"/>
                 </a:solidFill>
@@ -8228,7 +8394,7 @@
                 <a:sym typeface="Arial"/>
               </a:defRPr>
             </a:lvl3pPr>
-            <a:lvl4pPr indent="0" lvl="3" marL="0" marR="0" algn="r">
+            <a:lvl4pPr marL="0" marR="0" lvl="3" indent="0" algn="r">
               <a:lnSpc>
                 <a:spcPct val="100000"/>
               </a:lnSpc>
@@ -8244,7 +8410,7 @@
               <a:buSzPts val="1000"/>
               <a:buFont typeface="Arial"/>
               <a:buNone/>
-              <a:defRPr b="0" i="0" sz="1000" u="none" cap="none" strike="noStrike">
+              <a:defRPr sz="1000" b="0" i="0" u="none" strike="noStrike" cap="none">
                 <a:solidFill>
                   <a:schemeClr val="dk2"/>
                 </a:solidFill>
@@ -8254,7 +8420,7 @@
                 <a:sym typeface="Arial"/>
               </a:defRPr>
             </a:lvl4pPr>
-            <a:lvl5pPr indent="0" lvl="4" marL="0" marR="0" algn="r">
+            <a:lvl5pPr marL="0" marR="0" lvl="4" indent="0" algn="r">
               <a:lnSpc>
                 <a:spcPct val="100000"/>
               </a:lnSpc>
@@ -8270,7 +8436,7 @@
               <a:buSzPts val="1000"/>
               <a:buFont typeface="Arial"/>
               <a:buNone/>
-              <a:defRPr b="0" i="0" sz="1000" u="none" cap="none" strike="noStrike">
+              <a:defRPr sz="1000" b="0" i="0" u="none" strike="noStrike" cap="none">
                 <a:solidFill>
                   <a:schemeClr val="dk2"/>
                 </a:solidFill>
@@ -8280,7 +8446,7 @@
                 <a:sym typeface="Arial"/>
               </a:defRPr>
             </a:lvl5pPr>
-            <a:lvl6pPr indent="0" lvl="5" marL="0" marR="0" algn="r">
+            <a:lvl6pPr marL="0" marR="0" lvl="5" indent="0" algn="r">
               <a:lnSpc>
                 <a:spcPct val="100000"/>
               </a:lnSpc>
@@ -8296,7 +8462,7 @@
               <a:buSzPts val="1000"/>
               <a:buFont typeface="Arial"/>
               <a:buNone/>
-              <a:defRPr b="0" i="0" sz="1000" u="none" cap="none" strike="noStrike">
+              <a:defRPr sz="1000" b="0" i="0" u="none" strike="noStrike" cap="none">
                 <a:solidFill>
                   <a:schemeClr val="dk2"/>
                 </a:solidFill>
@@ -8306,7 +8472,7 @@
                 <a:sym typeface="Arial"/>
               </a:defRPr>
             </a:lvl6pPr>
-            <a:lvl7pPr indent="0" lvl="6" marL="0" marR="0" algn="r">
+            <a:lvl7pPr marL="0" marR="0" lvl="6" indent="0" algn="r">
               <a:lnSpc>
                 <a:spcPct val="100000"/>
               </a:lnSpc>
@@ -8322,7 +8488,7 @@
               <a:buSzPts val="1000"/>
               <a:buFont typeface="Arial"/>
               <a:buNone/>
-              <a:defRPr b="0" i="0" sz="1000" u="none" cap="none" strike="noStrike">
+              <a:defRPr sz="1000" b="0" i="0" u="none" strike="noStrike" cap="none">
                 <a:solidFill>
                   <a:schemeClr val="dk2"/>
                 </a:solidFill>
@@ -8332,7 +8498,7 @@
                 <a:sym typeface="Arial"/>
               </a:defRPr>
             </a:lvl7pPr>
-            <a:lvl8pPr indent="0" lvl="7" marL="0" marR="0" algn="r">
+            <a:lvl8pPr marL="0" marR="0" lvl="7" indent="0" algn="r">
               <a:lnSpc>
                 <a:spcPct val="100000"/>
               </a:lnSpc>
@@ -8348,7 +8514,7 @@
               <a:buSzPts val="1000"/>
               <a:buFont typeface="Arial"/>
               <a:buNone/>
-              <a:defRPr b="0" i="0" sz="1000" u="none" cap="none" strike="noStrike">
+              <a:defRPr sz="1000" b="0" i="0" u="none" strike="noStrike" cap="none">
                 <a:solidFill>
                   <a:schemeClr val="dk2"/>
                 </a:solidFill>
@@ -8358,7 +8524,7 @@
                 <a:sym typeface="Arial"/>
               </a:defRPr>
             </a:lvl8pPr>
-            <a:lvl9pPr indent="0" lvl="8" marL="0" marR="0" algn="r">
+            <a:lvl9pPr marL="0" marR="0" lvl="8" indent="0" algn="r">
               <a:lnSpc>
                 <a:spcPct val="100000"/>
               </a:lnSpc>
@@ -8374,7 +8540,7 @@
               <a:buSzPts val="1000"/>
               <a:buFont typeface="Arial"/>
               <a:buNone/>
-              <a:defRPr b="0" i="0" sz="1000" u="none" cap="none" strike="noStrike">
+              <a:defRPr sz="1000" b="0" i="0" u="none" strike="noStrike" cap="none">
                 <a:solidFill>
                   <a:schemeClr val="dk2"/>
                 </a:solidFill>
@@ -8386,7 +8552,7 @@
             </a:lvl9pPr>
           </a:lstStyle>
           <a:p>
-            <a:pPr indent="0" lvl="0" marL="0" rtl="0" algn="r">
+            <a:pPr marL="0" lvl="0" indent="0" algn="r" rtl="0">
               <a:spcBef>
                 <a:spcPts val="0"/>
               </a:spcBef>
@@ -8412,18 +8578,19 @@
 </file>
 
 <file path=ppt/slideMasters/slideMaster1.xml><?xml version="1.0" encoding="utf-8"?>
-<p:sldMaster xmlns:a="http://schemas.openxmlformats.org/drawingml/2006/main" xmlns:r="http://schemas.openxmlformats.org/officeDocument/2006/relationships" xmlns:mc="http://schemas.openxmlformats.org/markup-compatibility/2006" xmlns:mv="urn:schemas-microsoft-com:mac:vml" xmlns:p="http://schemas.openxmlformats.org/presentationml/2006/main" xmlns:c="http://schemas.openxmlformats.org/drawingml/2006/chart" xmlns:dgm="http://schemas.openxmlformats.org/drawingml/2006/diagram" xmlns:o="urn:schemas-microsoft-com:office:office" xmlns:v="urn:schemas-microsoft-com:vml" xmlns:pvml="urn:schemas-microsoft-com:office:powerpoint" xmlns:com="http://schemas.openxmlformats.org/drawingml/2006/compatibility" xmlns:p14="http://schemas.microsoft.com/office/powerpoint/2010/main" xmlns:p15="http://schemas.microsoft.com/office/powerpoint/2012/main" xmlns:ahyp="http://schemas.microsoft.com/office/drawing/2018/hyperlinkcolor">
+<p:sldMaster xmlns:a="http://schemas.openxmlformats.org/drawingml/2006/main" xmlns:r="http://schemas.openxmlformats.org/officeDocument/2006/relationships" xmlns:p="http://schemas.openxmlformats.org/presentationml/2006/main">
   <p:cSld name="simple-light-2">
     <p:bg>
       <p:bgPr>
         <a:solidFill>
           <a:schemeClr val="lt1"/>
         </a:solidFill>
+        <a:effectLst/>
       </p:bgPr>
     </p:bg>
     <p:spTree>
       <p:nvGrpSpPr>
-        <p:cNvPr id="5" name="Shape 5"/>
+        <p:cNvPr id="1" name="Shape 5"/>
         <p:cNvGrpSpPr/>
         <p:nvPr/>
       </p:nvGrpSpPr>
@@ -8438,7 +8605,9 @@
       <p:sp>
         <p:nvSpPr>
           <p:cNvPr id="6" name="Google Shape;6;p1"/>
-          <p:cNvSpPr txBox="1"/>
+          <p:cNvSpPr txBox="1">
+            <a:spLocks noGrp="1"/>
+          </p:cNvSpPr>
           <p:nvPr>
             <p:ph type="title"/>
           </p:nvPr>
@@ -8457,11 +8626,11 @@
           </a:ln>
         </p:spPr>
         <p:txBody>
-          <a:bodyPr anchorCtr="0" anchor="t" bIns="91425" lIns="91425" spcFirstLastPara="1" rIns="91425" wrap="square" tIns="91425">
+          <a:bodyPr spcFirstLastPara="1" wrap="square" lIns="91425" tIns="91425" rIns="91425" bIns="91425" anchor="t" anchorCtr="0">
             <a:normAutofit/>
           </a:bodyPr>
           <a:lstStyle>
-            <a:lvl1pPr lvl="0" marR="0" rtl="0" algn="l">
+            <a:lvl1pPr marR="0" lvl="0" algn="l" rtl="0">
               <a:lnSpc>
                 <a:spcPct val="100000"/>
               </a:lnSpc>
@@ -8477,7 +8646,7 @@
               <a:buSzPts val="2800"/>
               <a:buFont typeface="Arial"/>
               <a:buNone/>
-              <a:defRPr b="0" i="0" sz="2800" u="none" cap="none" strike="noStrike">
+              <a:defRPr sz="2800" b="0" i="0" u="none" strike="noStrike" cap="none">
                 <a:solidFill>
                   <a:schemeClr val="dk1"/>
                 </a:solidFill>
@@ -8487,7 +8656,7 @@
                 <a:sym typeface="Arial"/>
               </a:defRPr>
             </a:lvl1pPr>
-            <a:lvl2pPr lvl="1" marR="0" rtl="0" algn="l">
+            <a:lvl2pPr marR="0" lvl="1" algn="l" rtl="0">
               <a:lnSpc>
                 <a:spcPct val="100000"/>
               </a:lnSpc>
@@ -8503,7 +8672,7 @@
               <a:buSzPts val="2800"/>
               <a:buFont typeface="Arial"/>
               <a:buNone/>
-              <a:defRPr b="0" i="0" sz="2800" u="none" cap="none" strike="noStrike">
+              <a:defRPr sz="2800" b="0" i="0" u="none" strike="noStrike" cap="none">
                 <a:solidFill>
                   <a:schemeClr val="dk1"/>
                 </a:solidFill>
@@ -8513,7 +8682,7 @@
                 <a:sym typeface="Arial"/>
               </a:defRPr>
             </a:lvl2pPr>
-            <a:lvl3pPr lvl="2" marR="0" rtl="0" algn="l">
+            <a:lvl3pPr marR="0" lvl="2" algn="l" rtl="0">
               <a:lnSpc>
                 <a:spcPct val="100000"/>
               </a:lnSpc>
@@ -8529,7 +8698,7 @@
               <a:buSzPts val="2800"/>
               <a:buFont typeface="Arial"/>
               <a:buNone/>
-              <a:defRPr b="0" i="0" sz="2800" u="none" cap="none" strike="noStrike">
+              <a:defRPr sz="2800" b="0" i="0" u="none" strike="noStrike" cap="none">
                 <a:solidFill>
                   <a:schemeClr val="dk1"/>
                 </a:solidFill>
@@ -8539,7 +8708,7 @@
                 <a:sym typeface="Arial"/>
               </a:defRPr>
             </a:lvl3pPr>
-            <a:lvl4pPr lvl="3" marR="0" rtl="0" algn="l">
+            <a:lvl4pPr marR="0" lvl="3" algn="l" rtl="0">
               <a:lnSpc>
                 <a:spcPct val="100000"/>
               </a:lnSpc>
@@ -8555,7 +8724,7 @@
               <a:buSzPts val="2800"/>
               <a:buFont typeface="Arial"/>
               <a:buNone/>
-              <a:defRPr b="0" i="0" sz="2800" u="none" cap="none" strike="noStrike">
+              <a:defRPr sz="2800" b="0" i="0" u="none" strike="noStrike" cap="none">
                 <a:solidFill>
                   <a:schemeClr val="dk1"/>
                 </a:solidFill>
@@ -8565,7 +8734,7 @@
                 <a:sym typeface="Arial"/>
               </a:defRPr>
             </a:lvl4pPr>
-            <a:lvl5pPr lvl="4" marR="0" rtl="0" algn="l">
+            <a:lvl5pPr marR="0" lvl="4" algn="l" rtl="0">
               <a:lnSpc>
                 <a:spcPct val="100000"/>
               </a:lnSpc>
@@ -8581,7 +8750,7 @@
               <a:buSzPts val="2800"/>
               <a:buFont typeface="Arial"/>
               <a:buNone/>
-              <a:defRPr b="0" i="0" sz="2800" u="none" cap="none" strike="noStrike">
+              <a:defRPr sz="2800" b="0" i="0" u="none" strike="noStrike" cap="none">
                 <a:solidFill>
                   <a:schemeClr val="dk1"/>
                 </a:solidFill>
@@ -8591,7 +8760,7 @@
                 <a:sym typeface="Arial"/>
               </a:defRPr>
             </a:lvl5pPr>
-            <a:lvl6pPr lvl="5" marR="0" rtl="0" algn="l">
+            <a:lvl6pPr marR="0" lvl="5" algn="l" rtl="0">
               <a:lnSpc>
                 <a:spcPct val="100000"/>
               </a:lnSpc>
@@ -8607,7 +8776,7 @@
               <a:buSzPts val="2800"/>
               <a:buFont typeface="Arial"/>
               <a:buNone/>
-              <a:defRPr b="0" i="0" sz="2800" u="none" cap="none" strike="noStrike">
+              <a:defRPr sz="2800" b="0" i="0" u="none" strike="noStrike" cap="none">
                 <a:solidFill>
                   <a:schemeClr val="dk1"/>
                 </a:solidFill>
@@ -8617,7 +8786,7 @@
                 <a:sym typeface="Arial"/>
               </a:defRPr>
             </a:lvl6pPr>
-            <a:lvl7pPr lvl="6" marR="0" rtl="0" algn="l">
+            <a:lvl7pPr marR="0" lvl="6" algn="l" rtl="0">
               <a:lnSpc>
                 <a:spcPct val="100000"/>
               </a:lnSpc>
@@ -8633,7 +8802,7 @@
               <a:buSzPts val="2800"/>
               <a:buFont typeface="Arial"/>
               <a:buNone/>
-              <a:defRPr b="0" i="0" sz="2800" u="none" cap="none" strike="noStrike">
+              <a:defRPr sz="2800" b="0" i="0" u="none" strike="noStrike" cap="none">
                 <a:solidFill>
                   <a:schemeClr val="dk1"/>
                 </a:solidFill>
@@ -8643,7 +8812,7 @@
                 <a:sym typeface="Arial"/>
               </a:defRPr>
             </a:lvl7pPr>
-            <a:lvl8pPr lvl="7" marR="0" rtl="0" algn="l">
+            <a:lvl8pPr marR="0" lvl="7" algn="l" rtl="0">
               <a:lnSpc>
                 <a:spcPct val="100000"/>
               </a:lnSpc>
@@ -8659,7 +8828,7 @@
               <a:buSzPts val="2800"/>
               <a:buFont typeface="Arial"/>
               <a:buNone/>
-              <a:defRPr b="0" i="0" sz="2800" u="none" cap="none" strike="noStrike">
+              <a:defRPr sz="2800" b="0" i="0" u="none" strike="noStrike" cap="none">
                 <a:solidFill>
                   <a:schemeClr val="dk1"/>
                 </a:solidFill>
@@ -8669,7 +8838,7 @@
                 <a:sym typeface="Arial"/>
               </a:defRPr>
             </a:lvl8pPr>
-            <a:lvl9pPr lvl="8" marR="0" rtl="0" algn="l">
+            <a:lvl9pPr marR="0" lvl="8" algn="l" rtl="0">
               <a:lnSpc>
                 <a:spcPct val="100000"/>
               </a:lnSpc>
@@ -8685,7 +8854,7 @@
               <a:buSzPts val="2800"/>
               <a:buFont typeface="Arial"/>
               <a:buNone/>
-              <a:defRPr b="0" i="0" sz="2800" u="none" cap="none" strike="noStrike">
+              <a:defRPr sz="2800" b="0" i="0" u="none" strike="noStrike" cap="none">
                 <a:solidFill>
                   <a:schemeClr val="dk1"/>
                 </a:solidFill>
@@ -8696,15 +8865,19 @@
               </a:defRPr>
             </a:lvl9pPr>
           </a:lstStyle>
-          <a:p/>
+          <a:p>
+            <a:endParaRPr/>
+          </a:p>
         </p:txBody>
       </p:sp>
       <p:sp>
         <p:nvSpPr>
           <p:cNvPr id="7" name="Google Shape;7;p1"/>
-          <p:cNvSpPr txBox="1"/>
+          <p:cNvSpPr txBox="1">
+            <a:spLocks noGrp="1"/>
+          </p:cNvSpPr>
           <p:nvPr>
-            <p:ph idx="1" type="body"/>
+            <p:ph type="body" idx="1"/>
           </p:nvPr>
         </p:nvSpPr>
         <p:spPr>
@@ -8721,11 +8894,11 @@
           </a:ln>
         </p:spPr>
         <p:txBody>
-          <a:bodyPr anchorCtr="0" anchor="t" bIns="91425" lIns="91425" spcFirstLastPara="1" rIns="91425" wrap="square" tIns="91425">
+          <a:bodyPr spcFirstLastPara="1" wrap="square" lIns="91425" tIns="91425" rIns="91425" bIns="91425" anchor="t" anchorCtr="0">
             <a:normAutofit/>
           </a:bodyPr>
           <a:lstStyle>
-            <a:lvl1pPr indent="-342900" lvl="0" marL="457200" marR="0" rtl="0" algn="l">
+            <a:lvl1pPr marL="457200" marR="0" lvl="0" indent="-342900" algn="l" rtl="0">
               <a:lnSpc>
                 <a:spcPct val="115000"/>
               </a:lnSpc>
@@ -8741,7 +8914,7 @@
               <a:buSzPts val="1800"/>
               <a:buFont typeface="Arial"/>
               <a:buChar char="●"/>
-              <a:defRPr b="0" i="0" sz="1800" u="none" cap="none" strike="noStrike">
+              <a:defRPr sz="1800" b="0" i="0" u="none" strike="noStrike" cap="none">
                 <a:solidFill>
                   <a:schemeClr val="dk2"/>
                 </a:solidFill>
@@ -8751,7 +8924,7 @@
                 <a:sym typeface="Arial"/>
               </a:defRPr>
             </a:lvl1pPr>
-            <a:lvl2pPr indent="-317500" lvl="1" marL="914400" marR="0" rtl="0" algn="l">
+            <a:lvl2pPr marL="914400" marR="0" lvl="1" indent="-317500" algn="l" rtl="0">
               <a:lnSpc>
                 <a:spcPct val="115000"/>
               </a:lnSpc>
@@ -8767,7 +8940,7 @@
               <a:buSzPts val="1400"/>
               <a:buFont typeface="Arial"/>
               <a:buChar char="○"/>
-              <a:defRPr b="0" i="0" sz="1400" u="none" cap="none" strike="noStrike">
+              <a:defRPr sz="1400" b="0" i="0" u="none" strike="noStrike" cap="none">
                 <a:solidFill>
                   <a:schemeClr val="dk2"/>
                 </a:solidFill>
@@ -8777,7 +8950,7 @@
                 <a:sym typeface="Arial"/>
               </a:defRPr>
             </a:lvl2pPr>
-            <a:lvl3pPr indent="-317500" lvl="2" marL="1371600" marR="0" rtl="0" algn="l">
+            <a:lvl3pPr marL="1371600" marR="0" lvl="2" indent="-317500" algn="l" rtl="0">
               <a:lnSpc>
                 <a:spcPct val="115000"/>
               </a:lnSpc>
@@ -8793,7 +8966,7 @@
               <a:buSzPts val="1400"/>
               <a:buFont typeface="Arial"/>
               <a:buChar char="■"/>
-              <a:defRPr b="0" i="0" sz="1400" u="none" cap="none" strike="noStrike">
+              <a:defRPr sz="1400" b="0" i="0" u="none" strike="noStrike" cap="none">
                 <a:solidFill>
                   <a:schemeClr val="dk2"/>
                 </a:solidFill>
@@ -8803,7 +8976,7 @@
                 <a:sym typeface="Arial"/>
               </a:defRPr>
             </a:lvl3pPr>
-            <a:lvl4pPr indent="-317500" lvl="3" marL="1828800" marR="0" rtl="0" algn="l">
+            <a:lvl4pPr marL="1828800" marR="0" lvl="3" indent="-317500" algn="l" rtl="0">
               <a:lnSpc>
                 <a:spcPct val="115000"/>
               </a:lnSpc>
@@ -8819,7 +8992,7 @@
               <a:buSzPts val="1400"/>
               <a:buFont typeface="Arial"/>
               <a:buChar char="●"/>
-              <a:defRPr b="0" i="0" sz="1400" u="none" cap="none" strike="noStrike">
+              <a:defRPr sz="1400" b="0" i="0" u="none" strike="noStrike" cap="none">
                 <a:solidFill>
                   <a:schemeClr val="dk2"/>
                 </a:solidFill>
@@ -8829,7 +9002,7 @@
                 <a:sym typeface="Arial"/>
               </a:defRPr>
             </a:lvl4pPr>
-            <a:lvl5pPr indent="-317500" lvl="4" marL="2286000" marR="0" rtl="0" algn="l">
+            <a:lvl5pPr marL="2286000" marR="0" lvl="4" indent="-317500" algn="l" rtl="0">
               <a:lnSpc>
                 <a:spcPct val="115000"/>
               </a:lnSpc>
@@ -8845,7 +9018,7 @@
               <a:buSzPts val="1400"/>
               <a:buFont typeface="Arial"/>
               <a:buChar char="○"/>
-              <a:defRPr b="0" i="0" sz="1400" u="none" cap="none" strike="noStrike">
+              <a:defRPr sz="1400" b="0" i="0" u="none" strike="noStrike" cap="none">
                 <a:solidFill>
                   <a:schemeClr val="dk2"/>
                 </a:solidFill>
@@ -8855,7 +9028,7 @@
                 <a:sym typeface="Arial"/>
               </a:defRPr>
             </a:lvl5pPr>
-            <a:lvl6pPr indent="-317500" lvl="5" marL="2743200" marR="0" rtl="0" algn="l">
+            <a:lvl6pPr marL="2743200" marR="0" lvl="5" indent="-317500" algn="l" rtl="0">
               <a:lnSpc>
                 <a:spcPct val="115000"/>
               </a:lnSpc>
@@ -8871,7 +9044,7 @@
               <a:buSzPts val="1400"/>
               <a:buFont typeface="Arial"/>
               <a:buChar char="■"/>
-              <a:defRPr b="0" i="0" sz="1400" u="none" cap="none" strike="noStrike">
+              <a:defRPr sz="1400" b="0" i="0" u="none" strike="noStrike" cap="none">
                 <a:solidFill>
                   <a:schemeClr val="dk2"/>
                 </a:solidFill>
@@ -8881,7 +9054,7 @@
                 <a:sym typeface="Arial"/>
               </a:defRPr>
             </a:lvl6pPr>
-            <a:lvl7pPr indent="-317500" lvl="6" marL="3200400" marR="0" rtl="0" algn="l">
+            <a:lvl7pPr marL="3200400" marR="0" lvl="6" indent="-317500" algn="l" rtl="0">
               <a:lnSpc>
                 <a:spcPct val="115000"/>
               </a:lnSpc>
@@ -8897,7 +9070,7 @@
               <a:buSzPts val="1400"/>
               <a:buFont typeface="Arial"/>
               <a:buChar char="●"/>
-              <a:defRPr b="0" i="0" sz="1400" u="none" cap="none" strike="noStrike">
+              <a:defRPr sz="1400" b="0" i="0" u="none" strike="noStrike" cap="none">
                 <a:solidFill>
                   <a:schemeClr val="dk2"/>
                 </a:solidFill>
@@ -8907,7 +9080,7 @@
                 <a:sym typeface="Arial"/>
               </a:defRPr>
             </a:lvl7pPr>
-            <a:lvl8pPr indent="-317500" lvl="7" marL="3657600" marR="0" rtl="0" algn="l">
+            <a:lvl8pPr marL="3657600" marR="0" lvl="7" indent="-317500" algn="l" rtl="0">
               <a:lnSpc>
                 <a:spcPct val="115000"/>
               </a:lnSpc>
@@ -8923,7 +9096,7 @@
               <a:buSzPts val="1400"/>
               <a:buFont typeface="Arial"/>
               <a:buChar char="○"/>
-              <a:defRPr b="0" i="0" sz="1400" u="none" cap="none" strike="noStrike">
+              <a:defRPr sz="1400" b="0" i="0" u="none" strike="noStrike" cap="none">
                 <a:solidFill>
                   <a:schemeClr val="dk2"/>
                 </a:solidFill>
@@ -8933,7 +9106,7 @@
                 <a:sym typeface="Arial"/>
               </a:defRPr>
             </a:lvl8pPr>
-            <a:lvl9pPr indent="-317500" lvl="8" marL="4114800" marR="0" rtl="0" algn="l">
+            <a:lvl9pPr marL="4114800" marR="0" lvl="8" indent="-317500" algn="l" rtl="0">
               <a:lnSpc>
                 <a:spcPct val="115000"/>
               </a:lnSpc>
@@ -8949,7 +9122,7 @@
               <a:buSzPts val="1400"/>
               <a:buFont typeface="Arial"/>
               <a:buChar char="■"/>
-              <a:defRPr b="0" i="0" sz="1400" u="none" cap="none" strike="noStrike">
+              <a:defRPr sz="1400" b="0" i="0" u="none" strike="noStrike" cap="none">
                 <a:solidFill>
                   <a:schemeClr val="dk2"/>
                 </a:solidFill>
@@ -8960,15 +9133,19 @@
               </a:defRPr>
             </a:lvl9pPr>
           </a:lstStyle>
-          <a:p/>
+          <a:p>
+            <a:endParaRPr/>
+          </a:p>
         </p:txBody>
       </p:sp>
       <p:sp>
         <p:nvSpPr>
           <p:cNvPr id="8" name="Google Shape;8;p1"/>
-          <p:cNvSpPr txBox="1"/>
+          <p:cNvSpPr txBox="1">
+            <a:spLocks noGrp="1"/>
+          </p:cNvSpPr>
           <p:nvPr>
-            <p:ph idx="12" type="sldNum"/>
+            <p:ph type="sldNum" idx="12"/>
           </p:nvPr>
         </p:nvSpPr>
         <p:spPr>
@@ -8985,11 +9162,11 @@
           </a:ln>
         </p:spPr>
         <p:txBody>
-          <a:bodyPr anchorCtr="0" anchor="ctr" bIns="91425" lIns="91425" spcFirstLastPara="1" rIns="91425" wrap="square" tIns="91425">
+          <a:bodyPr spcFirstLastPara="1" wrap="square" lIns="91425" tIns="91425" rIns="91425" bIns="91425" anchor="ctr" anchorCtr="0">
             <a:normAutofit/>
           </a:bodyPr>
           <a:lstStyle>
-            <a:lvl1pPr indent="0" lvl="0" marL="0" marR="0" rtl="0" algn="r">
+            <a:lvl1pPr marL="0" marR="0" lvl="0" indent="0" algn="r" rtl="0">
               <a:lnSpc>
                 <a:spcPct val="100000"/>
               </a:lnSpc>
@@ -9005,7 +9182,7 @@
               <a:buSzPts val="1000"/>
               <a:buFont typeface="Arial"/>
               <a:buNone/>
-              <a:defRPr b="0" i="0" sz="1000" u="none" cap="none" strike="noStrike">
+              <a:defRPr sz="1000" b="0" i="0" u="none" strike="noStrike" cap="none">
                 <a:solidFill>
                   <a:schemeClr val="dk2"/>
                 </a:solidFill>
@@ -9015,7 +9192,7 @@
                 <a:sym typeface="Arial"/>
               </a:defRPr>
             </a:lvl1pPr>
-            <a:lvl2pPr indent="0" lvl="1" marL="0" marR="0" rtl="0" algn="r">
+            <a:lvl2pPr marL="0" marR="0" lvl="1" indent="0" algn="r" rtl="0">
               <a:lnSpc>
                 <a:spcPct val="100000"/>
               </a:lnSpc>
@@ -9031,7 +9208,7 @@
               <a:buSzPts val="1000"/>
               <a:buFont typeface="Arial"/>
               <a:buNone/>
-              <a:defRPr b="0" i="0" sz="1000" u="none" cap="none" strike="noStrike">
+              <a:defRPr sz="1000" b="0" i="0" u="none" strike="noStrike" cap="none">
                 <a:solidFill>
                   <a:schemeClr val="dk2"/>
                 </a:solidFill>
@@ -9041,7 +9218,7 @@
                 <a:sym typeface="Arial"/>
               </a:defRPr>
             </a:lvl2pPr>
-            <a:lvl3pPr indent="0" lvl="2" marL="0" marR="0" rtl="0" algn="r">
+            <a:lvl3pPr marL="0" marR="0" lvl="2" indent="0" algn="r" rtl="0">
               <a:lnSpc>
                 <a:spcPct val="100000"/>
               </a:lnSpc>
@@ -9057,7 +9234,7 @@
               <a:buSzPts val="1000"/>
               <a:buFont typeface="Arial"/>
               <a:buNone/>
-              <a:defRPr b="0" i="0" sz="1000" u="none" cap="none" strike="noStrike">
+              <a:defRPr sz="1000" b="0" i="0" u="none" strike="noStrike" cap="none">
                 <a:solidFill>
                   <a:schemeClr val="dk2"/>
                 </a:solidFill>
@@ -9067,7 +9244,7 @@
                 <a:sym typeface="Arial"/>
               </a:defRPr>
             </a:lvl3pPr>
-            <a:lvl4pPr indent="0" lvl="3" marL="0" marR="0" rtl="0" algn="r">
+            <a:lvl4pPr marL="0" marR="0" lvl="3" indent="0" algn="r" rtl="0">
               <a:lnSpc>
                 <a:spcPct val="100000"/>
               </a:lnSpc>
@@ -9083,7 +9260,7 @@
               <a:buSzPts val="1000"/>
               <a:buFont typeface="Arial"/>
               <a:buNone/>
-              <a:defRPr b="0" i="0" sz="1000" u="none" cap="none" strike="noStrike">
+              <a:defRPr sz="1000" b="0" i="0" u="none" strike="noStrike" cap="none">
                 <a:solidFill>
                   <a:schemeClr val="dk2"/>
                 </a:solidFill>
@@ -9093,7 +9270,7 @@
                 <a:sym typeface="Arial"/>
               </a:defRPr>
             </a:lvl4pPr>
-            <a:lvl5pPr indent="0" lvl="4" marL="0" marR="0" rtl="0" algn="r">
+            <a:lvl5pPr marL="0" marR="0" lvl="4" indent="0" algn="r" rtl="0">
               <a:lnSpc>
                 <a:spcPct val="100000"/>
               </a:lnSpc>
@@ -9109,7 +9286,7 @@
               <a:buSzPts val="1000"/>
               <a:buFont typeface="Arial"/>
               <a:buNone/>
-              <a:defRPr b="0" i="0" sz="1000" u="none" cap="none" strike="noStrike">
+              <a:defRPr sz="1000" b="0" i="0" u="none" strike="noStrike" cap="none">
                 <a:solidFill>
                   <a:schemeClr val="dk2"/>
                 </a:solidFill>
@@ -9119,7 +9296,7 @@
                 <a:sym typeface="Arial"/>
               </a:defRPr>
             </a:lvl5pPr>
-            <a:lvl6pPr indent="0" lvl="5" marL="0" marR="0" rtl="0" algn="r">
+            <a:lvl6pPr marL="0" marR="0" lvl="5" indent="0" algn="r" rtl="0">
               <a:lnSpc>
                 <a:spcPct val="100000"/>
               </a:lnSpc>
@@ -9135,7 +9312,7 @@
               <a:buSzPts val="1000"/>
               <a:buFont typeface="Arial"/>
               <a:buNone/>
-              <a:defRPr b="0" i="0" sz="1000" u="none" cap="none" strike="noStrike">
+              <a:defRPr sz="1000" b="0" i="0" u="none" strike="noStrike" cap="none">
                 <a:solidFill>
                   <a:schemeClr val="dk2"/>
                 </a:solidFill>
@@ -9145,7 +9322,7 @@
                 <a:sym typeface="Arial"/>
               </a:defRPr>
             </a:lvl6pPr>
-            <a:lvl7pPr indent="0" lvl="6" marL="0" marR="0" rtl="0" algn="r">
+            <a:lvl7pPr marL="0" marR="0" lvl="6" indent="0" algn="r" rtl="0">
               <a:lnSpc>
                 <a:spcPct val="100000"/>
               </a:lnSpc>
@@ -9161,7 +9338,7 @@
               <a:buSzPts val="1000"/>
               <a:buFont typeface="Arial"/>
               <a:buNone/>
-              <a:defRPr b="0" i="0" sz="1000" u="none" cap="none" strike="noStrike">
+              <a:defRPr sz="1000" b="0" i="0" u="none" strike="noStrike" cap="none">
                 <a:solidFill>
                   <a:schemeClr val="dk2"/>
                 </a:solidFill>
@@ -9171,7 +9348,7 @@
                 <a:sym typeface="Arial"/>
               </a:defRPr>
             </a:lvl7pPr>
-            <a:lvl8pPr indent="0" lvl="7" marL="0" marR="0" rtl="0" algn="r">
+            <a:lvl8pPr marL="0" marR="0" lvl="7" indent="0" algn="r" rtl="0">
               <a:lnSpc>
                 <a:spcPct val="100000"/>
               </a:lnSpc>
@@ -9187,7 +9364,7 @@
               <a:buSzPts val="1000"/>
               <a:buFont typeface="Arial"/>
               <a:buNone/>
-              <a:defRPr b="0" i="0" sz="1000" u="none" cap="none" strike="noStrike">
+              <a:defRPr sz="1000" b="0" i="0" u="none" strike="noStrike" cap="none">
                 <a:solidFill>
                   <a:schemeClr val="dk2"/>
                 </a:solidFill>
@@ -9197,7 +9374,7 @@
                 <a:sym typeface="Arial"/>
               </a:defRPr>
             </a:lvl8pPr>
-            <a:lvl9pPr indent="0" lvl="8" marL="0" marR="0" rtl="0" algn="r">
+            <a:lvl9pPr marL="0" marR="0" lvl="8" indent="0" algn="r" rtl="0">
               <a:lnSpc>
                 <a:spcPct val="100000"/>
               </a:lnSpc>
@@ -9213,7 +9390,7 @@
               <a:buSzPts val="1000"/>
               <a:buFont typeface="Arial"/>
               <a:buNone/>
-              <a:defRPr b="0" i="0" sz="1000" u="none" cap="none" strike="noStrike">
+              <a:defRPr sz="1000" b="0" i="0" u="none" strike="noStrike" cap="none">
                 <a:solidFill>
                   <a:schemeClr val="dk2"/>
                 </a:solidFill>
@@ -9225,7 +9402,7 @@
             </a:lvl9pPr>
           </a:lstStyle>
           <a:p>
-            <a:pPr indent="0" lvl="0" marL="0" rtl="0" algn="r">
+            <a:pPr marL="0" lvl="0" indent="0" algn="r" rtl="0">
               <a:spcBef>
                 <a:spcPts val="0"/>
               </a:spcBef>
@@ -9244,7 +9421,7 @@
       </p:sp>
     </p:spTree>
   </p:cSld>
-  <p:clrMap accent1="accent1" accent2="accent2" accent3="accent3" accent4="accent4" accent5="accent5" accent6="accent6" bg1="lt1" bg2="dk2" tx1="dk1" tx2="lt2" folHlink="folHlink" hlink="hlink"/>
+  <p:clrMap bg1="lt1" tx1="dk1" bg2="dk2" tx2="lt2" accent1="accent1" accent2="accent2" accent3="accent3" accent4="accent4" accent5="accent5" accent6="accent6" hlink="hlink" folHlink="folHlink"/>
   <p:sldLayoutIdLst>
     <p:sldLayoutId id="2147483648" r:id="rId1"/>
     <p:sldLayoutId id="2147483649" r:id="rId2"/>
@@ -9259,10 +9436,10 @@
     <p:sldLayoutId id="2147483658" r:id="rId11"/>
     <p:sldLayoutId id="2147483659" r:id="rId12"/>
   </p:sldLayoutIdLst>
-  <p:hf dt="0" ftr="0" hdr="0" sldNum="0"/>
+  <p:hf sldNum="0" hdr="0" ftr="0" dt="0"/>
   <p:txStyles>
     <p:titleStyle>
-      <a:defPPr lvl="0" marR="0" rtl="0" algn="l">
+      <a:defPPr marR="0" lvl="0" algn="l" rtl="0">
         <a:lnSpc>
           <a:spcPct val="100000"/>
         </a:lnSpc>
@@ -9273,7 +9450,7 @@
           <a:spcPts val="0"/>
         </a:spcAft>
       </a:defPPr>
-      <a:lvl1pPr lvl="0" marR="0" rtl="0" algn="l">
+      <a:lvl1pPr marR="0" lvl="0" algn="l" rtl="0">
         <a:lnSpc>
           <a:spcPct val="100000"/>
         </a:lnSpc>
@@ -9287,7 +9464,7 @@
           <a:srgbClr val="000000"/>
         </a:buClr>
         <a:buFont typeface="Arial"/>
-        <a:defRPr b="0" i="0" sz="1400" u="none" cap="none" strike="noStrike">
+        <a:defRPr sz="1400" b="0" i="0" u="none" strike="noStrike" cap="none">
           <a:solidFill>
             <a:srgbClr val="000000"/>
           </a:solidFill>
@@ -9297,7 +9474,7 @@
           <a:sym typeface="Arial"/>
         </a:defRPr>
       </a:lvl1pPr>
-      <a:lvl2pPr lvl="1" marR="0" rtl="0" algn="l">
+      <a:lvl2pPr marR="0" lvl="1" algn="l" rtl="0">
         <a:lnSpc>
           <a:spcPct val="100000"/>
         </a:lnSpc>
@@ -9311,7 +9488,7 @@
           <a:srgbClr val="000000"/>
         </a:buClr>
         <a:buFont typeface="Arial"/>
-        <a:defRPr b="0" i="0" sz="1400" u="none" cap="none" strike="noStrike">
+        <a:defRPr sz="1400" b="0" i="0" u="none" strike="noStrike" cap="none">
           <a:solidFill>
             <a:srgbClr val="000000"/>
           </a:solidFill>
@@ -9321,7 +9498,7 @@
           <a:sym typeface="Arial"/>
         </a:defRPr>
       </a:lvl2pPr>
-      <a:lvl3pPr lvl="2" marR="0" rtl="0" algn="l">
+      <a:lvl3pPr marR="0" lvl="2" algn="l" rtl="0">
         <a:lnSpc>
           <a:spcPct val="100000"/>
         </a:lnSpc>
@@ -9335,7 +9512,7 @@
           <a:srgbClr val="000000"/>
         </a:buClr>
         <a:buFont typeface="Arial"/>
-        <a:defRPr b="0" i="0" sz="1400" u="none" cap="none" strike="noStrike">
+        <a:defRPr sz="1400" b="0" i="0" u="none" strike="noStrike" cap="none">
           <a:solidFill>
             <a:srgbClr val="000000"/>
           </a:solidFill>
@@ -9345,7 +9522,7 @@
           <a:sym typeface="Arial"/>
         </a:defRPr>
       </a:lvl3pPr>
-      <a:lvl4pPr lvl="3" marR="0" rtl="0" algn="l">
+      <a:lvl4pPr marR="0" lvl="3" algn="l" rtl="0">
         <a:lnSpc>
           <a:spcPct val="100000"/>
         </a:lnSpc>
@@ -9359,7 +9536,7 @@
           <a:srgbClr val="000000"/>
         </a:buClr>
         <a:buFont typeface="Arial"/>
-        <a:defRPr b="0" i="0" sz="1400" u="none" cap="none" strike="noStrike">
+        <a:defRPr sz="1400" b="0" i="0" u="none" strike="noStrike" cap="none">
           <a:solidFill>
             <a:srgbClr val="000000"/>
           </a:solidFill>
@@ -9369,7 +9546,7 @@
           <a:sym typeface="Arial"/>
         </a:defRPr>
       </a:lvl4pPr>
-      <a:lvl5pPr lvl="4" marR="0" rtl="0" algn="l">
+      <a:lvl5pPr marR="0" lvl="4" algn="l" rtl="0">
         <a:lnSpc>
           <a:spcPct val="100000"/>
         </a:lnSpc>
@@ -9383,7 +9560,7 @@
           <a:srgbClr val="000000"/>
         </a:buClr>
         <a:buFont typeface="Arial"/>
-        <a:defRPr b="0" i="0" sz="1400" u="none" cap="none" strike="noStrike">
+        <a:defRPr sz="1400" b="0" i="0" u="none" strike="noStrike" cap="none">
           <a:solidFill>
             <a:srgbClr val="000000"/>
           </a:solidFill>
@@ -9393,7 +9570,7 @@
           <a:sym typeface="Arial"/>
         </a:defRPr>
       </a:lvl5pPr>
-      <a:lvl6pPr lvl="5" marR="0" rtl="0" algn="l">
+      <a:lvl6pPr marR="0" lvl="5" algn="l" rtl="0">
         <a:lnSpc>
           <a:spcPct val="100000"/>
         </a:lnSpc>
@@ -9407,7 +9584,7 @@
           <a:srgbClr val="000000"/>
         </a:buClr>
         <a:buFont typeface="Arial"/>
-        <a:defRPr b="0" i="0" sz="1400" u="none" cap="none" strike="noStrike">
+        <a:defRPr sz="1400" b="0" i="0" u="none" strike="noStrike" cap="none">
           <a:solidFill>
             <a:srgbClr val="000000"/>
           </a:solidFill>
@@ -9417,7 +9594,7 @@
           <a:sym typeface="Arial"/>
         </a:defRPr>
       </a:lvl6pPr>
-      <a:lvl7pPr lvl="6" marR="0" rtl="0" algn="l">
+      <a:lvl7pPr marR="0" lvl="6" algn="l" rtl="0">
         <a:lnSpc>
           <a:spcPct val="100000"/>
         </a:lnSpc>
@@ -9431,7 +9608,7 @@
           <a:srgbClr val="000000"/>
         </a:buClr>
         <a:buFont typeface="Arial"/>
-        <a:defRPr b="0" i="0" sz="1400" u="none" cap="none" strike="noStrike">
+        <a:defRPr sz="1400" b="0" i="0" u="none" strike="noStrike" cap="none">
           <a:solidFill>
             <a:srgbClr val="000000"/>
           </a:solidFill>
@@ -9441,7 +9618,7 @@
           <a:sym typeface="Arial"/>
         </a:defRPr>
       </a:lvl7pPr>
-      <a:lvl8pPr lvl="7" marR="0" rtl="0" algn="l">
+      <a:lvl8pPr marR="0" lvl="7" algn="l" rtl="0">
         <a:lnSpc>
           <a:spcPct val="100000"/>
         </a:lnSpc>
@@ -9455,7 +9632,7 @@
           <a:srgbClr val="000000"/>
         </a:buClr>
         <a:buFont typeface="Arial"/>
-        <a:defRPr b="0" i="0" sz="1400" u="none" cap="none" strike="noStrike">
+        <a:defRPr sz="1400" b="0" i="0" u="none" strike="noStrike" cap="none">
           <a:solidFill>
             <a:srgbClr val="000000"/>
           </a:solidFill>
@@ -9465,7 +9642,7 @@
           <a:sym typeface="Arial"/>
         </a:defRPr>
       </a:lvl8pPr>
-      <a:lvl9pPr lvl="8" marR="0" rtl="0" algn="l">
+      <a:lvl9pPr marR="0" lvl="8" algn="l" rtl="0">
         <a:lnSpc>
           <a:spcPct val="100000"/>
         </a:lnSpc>
@@ -9479,7 +9656,7 @@
           <a:srgbClr val="000000"/>
         </a:buClr>
         <a:buFont typeface="Arial"/>
-        <a:defRPr b="0" i="0" sz="1400" u="none" cap="none" strike="noStrike">
+        <a:defRPr sz="1400" b="0" i="0" u="none" strike="noStrike" cap="none">
           <a:solidFill>
             <a:srgbClr val="000000"/>
           </a:solidFill>
@@ -9491,7 +9668,7 @@
       </a:lvl9pPr>
     </p:titleStyle>
     <p:bodyStyle>
-      <a:defPPr lvl="0" marR="0" rtl="0" algn="l">
+      <a:defPPr marR="0" lvl="0" algn="l" rtl="0">
         <a:lnSpc>
           <a:spcPct val="100000"/>
         </a:lnSpc>
@@ -9502,7 +9679,7 @@
           <a:spcPts val="0"/>
         </a:spcAft>
       </a:defPPr>
-      <a:lvl1pPr lvl="0" marR="0" rtl="0" algn="l">
+      <a:lvl1pPr marR="0" lvl="0" algn="l" rtl="0">
         <a:lnSpc>
           <a:spcPct val="100000"/>
         </a:lnSpc>
@@ -9516,7 +9693,7 @@
           <a:srgbClr val="000000"/>
         </a:buClr>
         <a:buFont typeface="Arial"/>
-        <a:defRPr b="0" i="0" sz="1400" u="none" cap="none" strike="noStrike">
+        <a:defRPr sz="1400" b="0" i="0" u="none" strike="noStrike" cap="none">
           <a:solidFill>
             <a:srgbClr val="000000"/>
           </a:solidFill>
@@ -9526,7 +9703,7 @@
           <a:sym typeface="Arial"/>
         </a:defRPr>
       </a:lvl1pPr>
-      <a:lvl2pPr lvl="1" marR="0" rtl="0" algn="l">
+      <a:lvl2pPr marR="0" lvl="1" algn="l" rtl="0">
         <a:lnSpc>
           <a:spcPct val="100000"/>
         </a:lnSpc>
@@ -9540,7 +9717,7 @@
           <a:srgbClr val="000000"/>
         </a:buClr>
         <a:buFont typeface="Arial"/>
-        <a:defRPr b="0" i="0" sz="1400" u="none" cap="none" strike="noStrike">
+        <a:defRPr sz="1400" b="0" i="0" u="none" strike="noStrike" cap="none">
           <a:solidFill>
             <a:srgbClr val="000000"/>
           </a:solidFill>
@@ -9550,7 +9727,7 @@
           <a:sym typeface="Arial"/>
         </a:defRPr>
       </a:lvl2pPr>
-      <a:lvl3pPr lvl="2" marR="0" rtl="0" algn="l">
+      <a:lvl3pPr marR="0" lvl="2" algn="l" rtl="0">
         <a:lnSpc>
           <a:spcPct val="100000"/>
         </a:lnSpc>
@@ -9564,7 +9741,7 @@
           <a:srgbClr val="000000"/>
         </a:buClr>
         <a:buFont typeface="Arial"/>
-        <a:defRPr b="0" i="0" sz="1400" u="none" cap="none" strike="noStrike">
+        <a:defRPr sz="1400" b="0" i="0" u="none" strike="noStrike" cap="none">
           <a:solidFill>
             <a:srgbClr val="000000"/>
           </a:solidFill>
@@ -9574,7 +9751,7 @@
           <a:sym typeface="Arial"/>
         </a:defRPr>
       </a:lvl3pPr>
-      <a:lvl4pPr lvl="3" marR="0" rtl="0" algn="l">
+      <a:lvl4pPr marR="0" lvl="3" algn="l" rtl="0">
         <a:lnSpc>
           <a:spcPct val="100000"/>
         </a:lnSpc>
@@ -9588,7 +9765,7 @@
           <a:srgbClr val="000000"/>
         </a:buClr>
         <a:buFont typeface="Arial"/>
-        <a:defRPr b="0" i="0" sz="1400" u="none" cap="none" strike="noStrike">
+        <a:defRPr sz="1400" b="0" i="0" u="none" strike="noStrike" cap="none">
           <a:solidFill>
             <a:srgbClr val="000000"/>
           </a:solidFill>
@@ -9598,7 +9775,7 @@
           <a:sym typeface="Arial"/>
         </a:defRPr>
       </a:lvl4pPr>
-      <a:lvl5pPr lvl="4" marR="0" rtl="0" algn="l">
+      <a:lvl5pPr marR="0" lvl="4" algn="l" rtl="0">
         <a:lnSpc>
           <a:spcPct val="100000"/>
         </a:lnSpc>
@@ -9612,7 +9789,7 @@
           <a:srgbClr val="000000"/>
         </a:buClr>
         <a:buFont typeface="Arial"/>
-        <a:defRPr b="0" i="0" sz="1400" u="none" cap="none" strike="noStrike">
+        <a:defRPr sz="1400" b="0" i="0" u="none" strike="noStrike" cap="none">
           <a:solidFill>
             <a:srgbClr val="000000"/>
           </a:solidFill>
@@ -9622,7 +9799,7 @@
           <a:sym typeface="Arial"/>
         </a:defRPr>
       </a:lvl5pPr>
-      <a:lvl6pPr lvl="5" marR="0" rtl="0" algn="l">
+      <a:lvl6pPr marR="0" lvl="5" algn="l" rtl="0">
         <a:lnSpc>
           <a:spcPct val="100000"/>
         </a:lnSpc>
@@ -9636,7 +9813,7 @@
           <a:srgbClr val="000000"/>
         </a:buClr>
         <a:buFont typeface="Arial"/>
-        <a:defRPr b="0" i="0" sz="1400" u="none" cap="none" strike="noStrike">
+        <a:defRPr sz="1400" b="0" i="0" u="none" strike="noStrike" cap="none">
           <a:solidFill>
             <a:srgbClr val="000000"/>
           </a:solidFill>
@@ -9646,7 +9823,7 @@
           <a:sym typeface="Arial"/>
         </a:defRPr>
       </a:lvl6pPr>
-      <a:lvl7pPr lvl="6" marR="0" rtl="0" algn="l">
+      <a:lvl7pPr marR="0" lvl="6" algn="l" rtl="0">
         <a:lnSpc>
           <a:spcPct val="100000"/>
         </a:lnSpc>
@@ -9660,7 +9837,7 @@
           <a:srgbClr val="000000"/>
         </a:buClr>
         <a:buFont typeface="Arial"/>
-        <a:defRPr b="0" i="0" sz="1400" u="none" cap="none" strike="noStrike">
+        <a:defRPr sz="1400" b="0" i="0" u="none" strike="noStrike" cap="none">
           <a:solidFill>
             <a:srgbClr val="000000"/>
           </a:solidFill>
@@ -9670,7 +9847,7 @@
           <a:sym typeface="Arial"/>
         </a:defRPr>
       </a:lvl7pPr>
-      <a:lvl8pPr lvl="7" marR="0" rtl="0" algn="l">
+      <a:lvl8pPr marR="0" lvl="7" algn="l" rtl="0">
         <a:lnSpc>
           <a:spcPct val="100000"/>
         </a:lnSpc>
@@ -9684,7 +9861,7 @@
           <a:srgbClr val="000000"/>
         </a:buClr>
         <a:buFont typeface="Arial"/>
-        <a:defRPr b="0" i="0" sz="1400" u="none" cap="none" strike="noStrike">
+        <a:defRPr sz="1400" b="0" i="0" u="none" strike="noStrike" cap="none">
           <a:solidFill>
             <a:srgbClr val="000000"/>
           </a:solidFill>
@@ -9694,7 +9871,7 @@
           <a:sym typeface="Arial"/>
         </a:defRPr>
       </a:lvl8pPr>
-      <a:lvl9pPr lvl="8" marR="0" rtl="0" algn="l">
+      <a:lvl9pPr marR="0" lvl="8" algn="l" rtl="0">
         <a:lnSpc>
           <a:spcPct val="100000"/>
         </a:lnSpc>
@@ -9708,7 +9885,7 @@
           <a:srgbClr val="000000"/>
         </a:buClr>
         <a:buFont typeface="Arial"/>
-        <a:defRPr b="0" i="0" sz="1400" u="none" cap="none" strike="noStrike">
+        <a:defRPr sz="1400" b="0" i="0" u="none" strike="noStrike" cap="none">
           <a:solidFill>
             <a:srgbClr val="000000"/>
           </a:solidFill>
@@ -9720,7 +9897,7 @@
       </a:lvl9pPr>
     </p:bodyStyle>
     <p:otherStyle>
-      <a:defPPr lvl="0" marR="0" rtl="0" algn="l">
+      <a:defPPr marR="0" lvl="0" algn="l" rtl="0">
         <a:lnSpc>
           <a:spcPct val="100000"/>
         </a:lnSpc>
@@ -9731,7 +9908,7 @@
           <a:spcPts val="0"/>
         </a:spcAft>
       </a:defPPr>
-      <a:lvl1pPr lvl="0" marR="0" rtl="0" algn="l">
+      <a:lvl1pPr marR="0" lvl="0" algn="l" rtl="0">
         <a:lnSpc>
           <a:spcPct val="100000"/>
         </a:lnSpc>
@@ -9745,7 +9922,7 @@
           <a:srgbClr val="000000"/>
         </a:buClr>
         <a:buFont typeface="Arial"/>
-        <a:defRPr b="0" i="0" sz="1400" u="none" cap="none" strike="noStrike">
+        <a:defRPr sz="1400" b="0" i="0" u="none" strike="noStrike" cap="none">
           <a:solidFill>
             <a:srgbClr val="000000"/>
           </a:solidFill>
@@ -9755,7 +9932,7 @@
           <a:sym typeface="Arial"/>
         </a:defRPr>
       </a:lvl1pPr>
-      <a:lvl2pPr lvl="1" marR="0" rtl="0" algn="l">
+      <a:lvl2pPr marR="0" lvl="1" algn="l" rtl="0">
         <a:lnSpc>
           <a:spcPct val="100000"/>
         </a:lnSpc>
@@ -9769,7 +9946,7 @@
           <a:srgbClr val="000000"/>
         </a:buClr>
         <a:buFont typeface="Arial"/>
-        <a:defRPr b="0" i="0" sz="1400" u="none" cap="none" strike="noStrike">
+        <a:defRPr sz="1400" b="0" i="0" u="none" strike="noStrike" cap="none">
           <a:solidFill>
             <a:srgbClr val="000000"/>
           </a:solidFill>
@@ -9779,7 +9956,7 @@
           <a:sym typeface="Arial"/>
         </a:defRPr>
       </a:lvl2pPr>
-      <a:lvl3pPr lvl="2" marR="0" rtl="0" algn="l">
+      <a:lvl3pPr marR="0" lvl="2" algn="l" rtl="0">
         <a:lnSpc>
           <a:spcPct val="100000"/>
         </a:lnSpc>
@@ -9793,7 +9970,7 @@
           <a:srgbClr val="000000"/>
         </a:buClr>
         <a:buFont typeface="Arial"/>
-        <a:defRPr b="0" i="0" sz="1400" u="none" cap="none" strike="noStrike">
+        <a:defRPr sz="1400" b="0" i="0" u="none" strike="noStrike" cap="none">
           <a:solidFill>
             <a:srgbClr val="000000"/>
           </a:solidFill>
@@ -9803,7 +9980,7 @@
           <a:sym typeface="Arial"/>
         </a:defRPr>
       </a:lvl3pPr>
-      <a:lvl4pPr lvl="3" marR="0" rtl="0" algn="l">
+      <a:lvl4pPr marR="0" lvl="3" algn="l" rtl="0">
         <a:lnSpc>
           <a:spcPct val="100000"/>
         </a:lnSpc>
@@ -9817,7 +9994,7 @@
           <a:srgbClr val="000000"/>
         </a:buClr>
         <a:buFont typeface="Arial"/>
-        <a:defRPr b="0" i="0" sz="1400" u="none" cap="none" strike="noStrike">
+        <a:defRPr sz="1400" b="0" i="0" u="none" strike="noStrike" cap="none">
           <a:solidFill>
             <a:srgbClr val="000000"/>
           </a:solidFill>
@@ -9827,7 +10004,7 @@
           <a:sym typeface="Arial"/>
         </a:defRPr>
       </a:lvl4pPr>
-      <a:lvl5pPr lvl="4" marR="0" rtl="0" algn="l">
+      <a:lvl5pPr marR="0" lvl="4" algn="l" rtl="0">
         <a:lnSpc>
           <a:spcPct val="100000"/>
         </a:lnSpc>
@@ -9841,7 +10018,7 @@
           <a:srgbClr val="000000"/>
         </a:buClr>
         <a:buFont typeface="Arial"/>
-        <a:defRPr b="0" i="0" sz="1400" u="none" cap="none" strike="noStrike">
+        <a:defRPr sz="1400" b="0" i="0" u="none" strike="noStrike" cap="none">
           <a:solidFill>
             <a:srgbClr val="000000"/>
           </a:solidFill>
@@ -9851,7 +10028,7 @@
           <a:sym typeface="Arial"/>
         </a:defRPr>
       </a:lvl5pPr>
-      <a:lvl6pPr lvl="5" marR="0" rtl="0" algn="l">
+      <a:lvl6pPr marR="0" lvl="5" algn="l" rtl="0">
         <a:lnSpc>
           <a:spcPct val="100000"/>
         </a:lnSpc>
@@ -9865,7 +10042,7 @@
           <a:srgbClr val="000000"/>
         </a:buClr>
         <a:buFont typeface="Arial"/>
-        <a:defRPr b="0" i="0" sz="1400" u="none" cap="none" strike="noStrike">
+        <a:defRPr sz="1400" b="0" i="0" u="none" strike="noStrike" cap="none">
           <a:solidFill>
             <a:srgbClr val="000000"/>
           </a:solidFill>
@@ -9875,7 +10052,7 @@
           <a:sym typeface="Arial"/>
         </a:defRPr>
       </a:lvl6pPr>
-      <a:lvl7pPr lvl="6" marR="0" rtl="0" algn="l">
+      <a:lvl7pPr marR="0" lvl="6" algn="l" rtl="0">
         <a:lnSpc>
           <a:spcPct val="100000"/>
         </a:lnSpc>
@@ -9889,7 +10066,7 @@
           <a:srgbClr val="000000"/>
         </a:buClr>
         <a:buFont typeface="Arial"/>
-        <a:defRPr b="0" i="0" sz="1400" u="none" cap="none" strike="noStrike">
+        <a:defRPr sz="1400" b="0" i="0" u="none" strike="noStrike" cap="none">
           <a:solidFill>
             <a:srgbClr val="000000"/>
           </a:solidFill>
@@ -9899,7 +10076,7 @@
           <a:sym typeface="Arial"/>
         </a:defRPr>
       </a:lvl7pPr>
-      <a:lvl8pPr lvl="7" marR="0" rtl="0" algn="l">
+      <a:lvl8pPr marR="0" lvl="7" algn="l" rtl="0">
         <a:lnSpc>
           <a:spcPct val="100000"/>
         </a:lnSpc>
@@ -9913,7 +10090,7 @@
           <a:srgbClr val="000000"/>
         </a:buClr>
         <a:buFont typeface="Arial"/>
-        <a:defRPr b="0" i="0" sz="1400" u="none" cap="none" strike="noStrike">
+        <a:defRPr sz="1400" b="0" i="0" u="none" strike="noStrike" cap="none">
           <a:solidFill>
             <a:srgbClr val="000000"/>
           </a:solidFill>
@@ -9923,7 +10100,7 @@
           <a:sym typeface="Arial"/>
         </a:defRPr>
       </a:lvl8pPr>
-      <a:lvl9pPr lvl="8" marR="0" rtl="0" algn="l">
+      <a:lvl9pPr marR="0" lvl="8" algn="l" rtl="0">
         <a:lnSpc>
           <a:spcPct val="100000"/>
         </a:lnSpc>
@@ -9937,7 +10114,7 @@
           <a:srgbClr val="000000"/>
         </a:buClr>
         <a:buFont typeface="Arial"/>
-        <a:defRPr b="0" i="0" sz="1400" u="none" cap="none" strike="noStrike">
+        <a:defRPr sz="1400" b="0" i="0" u="none" strike="noStrike" cap="none">
           <a:solidFill>
             <a:srgbClr val="000000"/>
           </a:solidFill>
@@ -9953,11 +10130,11 @@
 </file>
 
 <file path=ppt/slides/slide1.xml><?xml version="1.0" encoding="utf-8"?>
-<p:sld xmlns:a="http://schemas.openxmlformats.org/drawingml/2006/main" xmlns:r="http://schemas.openxmlformats.org/officeDocument/2006/relationships" xmlns:mc="http://schemas.openxmlformats.org/markup-compatibility/2006" xmlns:mv="urn:schemas-microsoft-com:mac:vml" xmlns:p="http://schemas.openxmlformats.org/presentationml/2006/main" xmlns:c="http://schemas.openxmlformats.org/drawingml/2006/chart" xmlns:dgm="http://schemas.openxmlformats.org/drawingml/2006/diagram" xmlns:o="urn:schemas-microsoft-com:office:office" xmlns:v="urn:schemas-microsoft-com:vml" xmlns:pvml="urn:schemas-microsoft-com:office:powerpoint" xmlns:com="http://schemas.openxmlformats.org/drawingml/2006/compatibility" xmlns:p14="http://schemas.microsoft.com/office/powerpoint/2010/main" xmlns:p15="http://schemas.microsoft.com/office/powerpoint/2012/main" xmlns:ahyp="http://schemas.microsoft.com/office/drawing/2018/hyperlinkcolor">
+<p:sld xmlns:a="http://schemas.openxmlformats.org/drawingml/2006/main" xmlns:r="http://schemas.openxmlformats.org/officeDocument/2006/relationships" xmlns:p="http://schemas.openxmlformats.org/presentationml/2006/main">
   <p:cSld>
     <p:spTree>
       <p:nvGrpSpPr>
-        <p:cNvPr id="55" name="Shape 55"/>
+        <p:cNvPr id="1" name="Shape 55"/>
         <p:cNvGrpSpPr/>
         <p:nvPr/>
       </p:nvGrpSpPr>
@@ -9989,12 +10166,12 @@
           </a:ln>
         </p:spPr>
         <p:txBody>
-          <a:bodyPr anchorCtr="0" anchor="t" bIns="91425" lIns="91425" spcFirstLastPara="1" rIns="91425" wrap="square" tIns="91425">
+          <a:bodyPr spcFirstLastPara="1" wrap="square" lIns="91425" tIns="91425" rIns="91425" bIns="91425" anchor="t" anchorCtr="0">
             <a:spAutoFit/>
           </a:bodyPr>
           <a:lstStyle/>
           <a:p>
-            <a:pPr indent="0" lvl="0" marL="0" marR="0" rtl="0" algn="l">
+            <a:pPr marL="0" marR="0" lvl="0" indent="0" algn="l" rtl="0">
               <a:lnSpc>
                 <a:spcPct val="100000"/>
               </a:lnSpc>
@@ -10012,7 +10189,7 @@
               <a:buNone/>
             </a:pPr>
             <a:r>
-              <a:rPr b="0" i="0" lang="en-GB" sz="1800" u="none" cap="none" strike="noStrike">
+              <a:rPr lang="en-GB" sz="1800" b="0" i="0" u="none" strike="noStrike" cap="none">
                 <a:solidFill>
                   <a:srgbClr val="9EED6B"/>
                 </a:solidFill>
@@ -10023,7 +10200,7 @@
               </a:rPr>
               <a:t>Green Pathways</a:t>
             </a:r>
-            <a:endParaRPr b="0" i="0" sz="1800" u="none" cap="none" strike="noStrike">
+            <a:endParaRPr sz="1800" b="0" i="0" u="none" strike="noStrike" cap="none">
               <a:solidFill>
                 <a:srgbClr val="9EED6B"/>
               </a:solidFill>
@@ -10055,12 +10232,12 @@
           </a:ln>
         </p:spPr>
         <p:txBody>
-          <a:bodyPr anchorCtr="0" anchor="t" bIns="91425" lIns="91425" spcFirstLastPara="1" rIns="91425" wrap="square" tIns="91425">
+          <a:bodyPr spcFirstLastPara="1" wrap="square" lIns="91425" tIns="91425" rIns="91425" bIns="91425" anchor="t" anchorCtr="0">
             <a:spAutoFit/>
           </a:bodyPr>
           <a:lstStyle/>
           <a:p>
-            <a:pPr indent="0" lvl="0" marL="0" marR="0" rtl="0" algn="l">
+            <a:pPr marL="0" marR="0" lvl="0" indent="0" algn="l" rtl="0">
               <a:lnSpc>
                 <a:spcPct val="100000"/>
               </a:lnSpc>
@@ -10078,7 +10255,7 @@
               <a:buNone/>
             </a:pPr>
             <a:r>
-              <a:rPr b="0" i="0" lang="en-GB" sz="4700" u="none" cap="none" strike="noStrike">
+              <a:rPr lang="en-GB" sz="4700" b="0" i="0" u="none" strike="noStrike" cap="none">
                 <a:solidFill>
                   <a:srgbClr val="153988"/>
                 </a:solidFill>
@@ -10090,7 +10267,7 @@
               <a:t>Green Pathways </a:t>
             </a:r>
             <a:br>
-              <a:rPr b="0" i="0" lang="en-GB" sz="4700" u="none" cap="none" strike="noStrike">
+              <a:rPr lang="en-GB" sz="4700" b="0" i="0" u="none" strike="noStrike" cap="none">
                 <a:solidFill>
                   <a:srgbClr val="153988"/>
                 </a:solidFill>
@@ -10101,7 +10278,7 @@
               </a:rPr>
             </a:br>
             <a:r>
-              <a:rPr b="0" i="0" lang="en-GB" sz="4700" u="none" cap="none" strike="noStrike">
+              <a:rPr lang="en-GB" sz="4700" b="0" i="0" u="none" strike="noStrike" cap="none">
                 <a:solidFill>
                   <a:srgbClr val="153988"/>
                 </a:solidFill>
@@ -10112,7 +10289,7 @@
               </a:rPr>
               <a:t>Capstone Presentation</a:t>
             </a:r>
-            <a:endParaRPr b="0" i="0" sz="4700" u="none" cap="none" strike="noStrike">
+            <a:endParaRPr sz="4700" b="0" i="0" u="none" strike="noStrike" cap="none" dirty="0">
               <a:solidFill>
                 <a:srgbClr val="153988"/>
               </a:solidFill>
@@ -10123,7 +10300,7 @@
             </a:endParaRPr>
           </a:p>
           <a:p>
-            <a:pPr indent="0" lvl="0" marL="0" marR="0" rtl="0" algn="l">
+            <a:pPr marL="0" marR="0" lvl="0" indent="0" algn="l" rtl="0">
               <a:lnSpc>
                 <a:spcPct val="100000"/>
               </a:lnSpc>
@@ -10140,10 +10317,7 @@
               <a:buFont typeface="Arial"/>
               <a:buNone/>
             </a:pPr>
-            <a:r>
-              <a:t/>
-            </a:r>
-            <a:endParaRPr b="0" i="0" sz="3000" u="none" cap="none" strike="noStrike">
+            <a:endParaRPr sz="3000" b="0" i="0" u="none" strike="noStrike" cap="none" dirty="0">
               <a:solidFill>
                 <a:srgbClr val="153988"/>
               </a:solidFill>
@@ -10154,7 +10328,7 @@
             </a:endParaRPr>
           </a:p>
           <a:p>
-            <a:pPr indent="0" lvl="0" marL="0" marR="0" rtl="0" algn="l">
+            <a:pPr marL="0" marR="0" lvl="0" indent="0" algn="l" rtl="0">
               <a:lnSpc>
                 <a:spcPct val="100000"/>
               </a:lnSpc>
@@ -10172,7 +10346,7 @@
               <a:buNone/>
             </a:pPr>
             <a:r>
-              <a:rPr b="0" i="0" lang="en-GB" sz="3000" u="none" cap="none" strike="noStrike">
+              <a:rPr lang="en-GB" sz="3000" b="0" i="0" u="none" strike="noStrike" cap="none" dirty="0">
                 <a:solidFill>
                   <a:srgbClr val="153988"/>
                 </a:solidFill>
@@ -10183,7 +10357,7 @@
               </a:rPr>
               <a:t>Name</a:t>
             </a:r>
-            <a:endParaRPr b="0" i="0" sz="3000" u="none" cap="none" strike="noStrike">
+            <a:endParaRPr sz="3000" b="0" i="0" u="none" strike="noStrike" cap="none" dirty="0">
               <a:solidFill>
                 <a:srgbClr val="153988"/>
               </a:solidFill>
@@ -10194,7 +10368,7 @@
             </a:endParaRPr>
           </a:p>
           <a:p>
-            <a:pPr indent="0" lvl="0" marL="0" marR="0" rtl="0" algn="l">
+            <a:pPr marL="0" marR="0" lvl="0" indent="0" algn="l" rtl="0">
               <a:lnSpc>
                 <a:spcPct val="100000"/>
               </a:lnSpc>
@@ -10211,10 +10385,7 @@
               <a:buFont typeface="Arial"/>
               <a:buNone/>
             </a:pPr>
-            <a:r>
-              <a:t/>
-            </a:r>
-            <a:endParaRPr b="0" i="0" sz="3000" u="none" cap="none" strike="noStrike">
+            <a:endParaRPr sz="3000" b="0" i="0" u="none" strike="noStrike" cap="none" dirty="0">
               <a:solidFill>
                 <a:srgbClr val="153988"/>
               </a:solidFill>
@@ -10225,7 +10396,7 @@
             </a:endParaRPr>
           </a:p>
           <a:p>
-            <a:pPr indent="0" lvl="0" marL="0" marR="0" rtl="0" algn="l">
+            <a:pPr marL="0" marR="0" lvl="0" indent="0" algn="l" rtl="0">
               <a:lnSpc>
                 <a:spcPct val="100000"/>
               </a:lnSpc>
@@ -10243,7 +10414,7 @@
               <a:buNone/>
             </a:pPr>
             <a:r>
-              <a:rPr b="0" i="0" lang="en-GB" sz="3000" u="none" cap="none" strike="noStrike">
+              <a:rPr lang="en-GB" sz="3000" b="0" i="0" u="none" strike="noStrike" cap="none" dirty="0">
                 <a:solidFill>
                   <a:srgbClr val="153988"/>
                 </a:solidFill>
@@ -10254,135 +10425,9 @@
               </a:rPr>
               <a:t>Date</a:t>
             </a:r>
-            <a:endParaRPr b="0" i="0" sz="3000" u="none" cap="none" strike="noStrike">
+            <a:endParaRPr sz="3000" b="0" i="0" u="none" strike="noStrike" cap="none" dirty="0">
               <a:solidFill>
                 <a:srgbClr val="153988"/>
-              </a:solidFill>
-              <a:latin typeface="Sora"/>
-              <a:ea typeface="Sora"/>
-              <a:cs typeface="Sora"/>
-              <a:sym typeface="Sora"/>
-            </a:endParaRPr>
-          </a:p>
-        </p:txBody>
-      </p:sp>
-      <p:sp>
-        <p:nvSpPr>
-          <p:cNvPr id="58" name="Google Shape;58;p14"/>
-          <p:cNvSpPr txBox="1"/>
-          <p:nvPr/>
-        </p:nvSpPr>
-        <p:spPr>
-          <a:xfrm>
-            <a:off x="5827350" y="111500"/>
-            <a:ext cx="3222300" cy="1448400"/>
-          </a:xfrm>
-          <a:prstGeom prst="rect">
-            <a:avLst/>
-          </a:prstGeom>
-          <a:solidFill>
-            <a:srgbClr val="FDFDA0"/>
-          </a:solidFill>
-          <a:ln cap="flat" cmpd="sng" w="19050">
-            <a:solidFill>
-              <a:srgbClr val="9EED6B"/>
-            </a:solidFill>
-            <a:prstDash val="solid"/>
-            <a:round/>
-            <a:headEnd len="sm" w="sm" type="none"/>
-            <a:tailEnd len="sm" w="sm" type="none"/>
-          </a:ln>
-        </p:spPr>
-        <p:txBody>
-          <a:bodyPr anchorCtr="0" anchor="t" bIns="91425" lIns="91425" spcFirstLastPara="1" rIns="91425" wrap="square" tIns="91425">
-            <a:noAutofit/>
-          </a:bodyPr>
-          <a:lstStyle/>
-          <a:p>
-            <a:pPr indent="-311150" lvl="0" marL="457200" marR="0" rtl="0" algn="l">
-              <a:lnSpc>
-                <a:spcPct val="100000"/>
-              </a:lnSpc>
-              <a:spcBef>
-                <a:spcPts val="0"/>
-              </a:spcBef>
-              <a:spcAft>
-                <a:spcPts val="0"/>
-              </a:spcAft>
-              <a:buClr>
-                <a:schemeClr val="dk2"/>
-              </a:buClr>
-              <a:buSzPts val="1300"/>
-              <a:buFont typeface="Sora"/>
-              <a:buAutoNum type="arabicPeriod"/>
-            </a:pPr>
-            <a:r>
-              <a:rPr b="1" i="0" lang="en-GB" sz="1300" u="none" cap="none" strike="noStrike">
-                <a:solidFill>
-                  <a:schemeClr val="dk2"/>
-                </a:solidFill>
-                <a:latin typeface="Sora"/>
-                <a:ea typeface="Sora"/>
-                <a:cs typeface="Sora"/>
-                <a:sym typeface="Sora"/>
-              </a:rPr>
-              <a:t>Make a copy of this document</a:t>
-            </a:r>
-            <a:r>
-              <a:rPr b="0" i="0" lang="en-GB" sz="1300" u="none" cap="none" strike="noStrike">
-                <a:solidFill>
-                  <a:schemeClr val="dk2"/>
-                </a:solidFill>
-                <a:latin typeface="Sora"/>
-                <a:ea typeface="Sora"/>
-                <a:cs typeface="Sora"/>
-                <a:sym typeface="Sora"/>
-              </a:rPr>
-              <a:t> (File &gt; Make a copy &gt; Entire Presentation) or download to edit (File &gt; Download &gt; choose file type).</a:t>
-            </a:r>
-            <a:endParaRPr b="0" i="0" sz="1300" u="none" cap="none" strike="noStrike">
-              <a:solidFill>
-                <a:schemeClr val="dk2"/>
-              </a:solidFill>
-              <a:latin typeface="Sora"/>
-              <a:ea typeface="Sora"/>
-              <a:cs typeface="Sora"/>
-              <a:sym typeface="Sora"/>
-            </a:endParaRPr>
-          </a:p>
-          <a:p>
-            <a:pPr indent="-311150" lvl="0" marL="457200" marR="0" rtl="0" algn="l">
-              <a:lnSpc>
-                <a:spcPct val="100000"/>
-              </a:lnSpc>
-              <a:spcBef>
-                <a:spcPts val="0"/>
-              </a:spcBef>
-              <a:spcAft>
-                <a:spcPts val="0"/>
-              </a:spcAft>
-              <a:buClr>
-                <a:schemeClr val="dk2"/>
-              </a:buClr>
-              <a:buSzPts val="1300"/>
-              <a:buFont typeface="Sora"/>
-              <a:buAutoNum type="arabicPeriod"/>
-            </a:pPr>
-            <a:r>
-              <a:rPr b="0" i="0" lang="en-GB" sz="1300" u="none" cap="none" strike="noStrike">
-                <a:solidFill>
-                  <a:schemeClr val="dk2"/>
-                </a:solidFill>
-                <a:latin typeface="Sora"/>
-                <a:ea typeface="Sora"/>
-                <a:cs typeface="Sora"/>
-                <a:sym typeface="Sora"/>
-              </a:rPr>
-              <a:t>Delete this text box.</a:t>
-            </a:r>
-            <a:endParaRPr b="0" i="0" sz="1300" u="none" cap="none" strike="noStrike">
-              <a:solidFill>
-                <a:schemeClr val="dk2"/>
               </a:solidFill>
               <a:latin typeface="Sora"/>
               <a:ea typeface="Sora"/>
@@ -10401,11 +10446,11 @@
 </file>
 
 <file path=ppt/slides/slide10.xml><?xml version="1.0" encoding="utf-8"?>
-<p:sld xmlns:a="http://schemas.openxmlformats.org/drawingml/2006/main" xmlns:r="http://schemas.openxmlformats.org/officeDocument/2006/relationships" xmlns:mc="http://schemas.openxmlformats.org/markup-compatibility/2006" xmlns:mv="urn:schemas-microsoft-com:mac:vml" xmlns:p="http://schemas.openxmlformats.org/presentationml/2006/main" xmlns:c="http://schemas.openxmlformats.org/drawingml/2006/chart" xmlns:dgm="http://schemas.openxmlformats.org/drawingml/2006/diagram" xmlns:o="urn:schemas-microsoft-com:office:office" xmlns:v="urn:schemas-microsoft-com:vml" xmlns:pvml="urn:schemas-microsoft-com:office:powerpoint" xmlns:com="http://schemas.openxmlformats.org/drawingml/2006/compatibility" xmlns:p14="http://schemas.microsoft.com/office/powerpoint/2010/main" xmlns:p15="http://schemas.microsoft.com/office/powerpoint/2012/main" xmlns:ahyp="http://schemas.microsoft.com/office/drawing/2018/hyperlinkcolor">
+<p:sld xmlns:a="http://schemas.openxmlformats.org/drawingml/2006/main" xmlns:r="http://schemas.openxmlformats.org/officeDocument/2006/relationships" xmlns:p="http://schemas.openxmlformats.org/presentationml/2006/main">
   <p:cSld>
     <p:spTree>
       <p:nvGrpSpPr>
-        <p:cNvPr id="118" name="Shape 118"/>
+        <p:cNvPr id="1" name="Shape 118"/>
         <p:cNvGrpSpPr/>
         <p:nvPr/>
       </p:nvGrpSpPr>
@@ -10437,12 +10482,12 @@
           </a:ln>
         </p:spPr>
         <p:txBody>
-          <a:bodyPr anchorCtr="0" anchor="t" bIns="91425" lIns="91425" spcFirstLastPara="1" rIns="91425" wrap="square" tIns="91425">
+          <a:bodyPr spcFirstLastPara="1" wrap="square" lIns="91425" tIns="91425" rIns="91425" bIns="91425" anchor="t" anchorCtr="0">
             <a:spAutoFit/>
           </a:bodyPr>
           <a:lstStyle/>
           <a:p>
-            <a:pPr indent="0" lvl="0" marL="0" marR="0" rtl="0" algn="l">
+            <a:pPr marL="0" marR="0" lvl="0" indent="0" algn="l" rtl="0">
               <a:lnSpc>
                 <a:spcPct val="100000"/>
               </a:lnSpc>
@@ -10460,7 +10505,7 @@
               <a:buNone/>
             </a:pPr>
             <a:r>
-              <a:rPr b="0" i="0" lang="en-GB" sz="8000" u="none" cap="none" strike="noStrike">
+              <a:rPr lang="en-GB" sz="8000" b="0" i="0" u="none" strike="noStrike" cap="none">
                 <a:solidFill>
                   <a:srgbClr val="153988"/>
                 </a:solidFill>
@@ -10472,7 +10517,7 @@
               <a:t>04</a:t>
             </a:r>
             <a:br>
-              <a:rPr b="0" i="0" lang="en-GB" sz="4000" u="none" cap="none" strike="noStrike">
+              <a:rPr lang="en-GB" sz="4000" b="0" i="0" u="none" strike="noStrike" cap="none">
                 <a:solidFill>
                   <a:srgbClr val="153988"/>
                 </a:solidFill>
@@ -10483,7 +10528,7 @@
               </a:rPr>
             </a:br>
             <a:r>
-              <a:rPr b="0" i="0" lang="en-GB" sz="4000" u="none" cap="none" strike="noStrike">
+              <a:rPr lang="en-GB" sz="4000" b="0" i="0" u="none" strike="noStrike" cap="none">
                 <a:solidFill>
                   <a:srgbClr val="153988"/>
                 </a:solidFill>
@@ -10494,7 +10539,7 @@
               </a:rPr>
               <a:t>Next Steps</a:t>
             </a:r>
-            <a:endParaRPr b="0" i="0" sz="4000" u="none" cap="none" strike="noStrike">
+            <a:endParaRPr sz="4000" b="0" i="0" u="none" strike="noStrike" cap="none">
               <a:solidFill>
                 <a:srgbClr val="153988"/>
               </a:solidFill>
@@ -10505,7 +10550,7 @@
             </a:endParaRPr>
           </a:p>
           <a:p>
-            <a:pPr indent="0" lvl="0" marL="0" marR="0" rtl="0" algn="l">
+            <a:pPr marL="0" marR="0" lvl="0" indent="0" algn="l" rtl="0">
               <a:lnSpc>
                 <a:spcPct val="100000"/>
               </a:lnSpc>
@@ -10522,10 +10567,7 @@
               <a:buFont typeface="Arial"/>
               <a:buNone/>
             </a:pPr>
-            <a:r>
-              <a:t/>
-            </a:r>
-            <a:endParaRPr b="0" i="0" sz="3000" u="none" cap="none" strike="noStrike">
+            <a:endParaRPr sz="3000" b="0" i="0" u="none" strike="noStrike" cap="none">
               <a:solidFill>
                 <a:srgbClr val="153988"/>
               </a:solidFill>
@@ -10536,7 +10578,7 @@
             </a:endParaRPr>
           </a:p>
           <a:p>
-            <a:pPr indent="0" lvl="0" marL="0" marR="0" rtl="0" algn="l">
+            <a:pPr marL="0" marR="0" lvl="0" indent="0" algn="l" rtl="0">
               <a:lnSpc>
                 <a:spcPct val="100000"/>
               </a:lnSpc>
@@ -10554,7 +10596,7 @@
               <a:buNone/>
             </a:pPr>
             <a:r>
-              <a:rPr b="0" i="0" lang="en-GB" sz="1800" u="none" cap="none" strike="noStrike">
+              <a:rPr lang="en-GB" sz="1800" b="0" i="0" u="none" strike="noStrike" cap="none">
                 <a:solidFill>
                   <a:srgbClr val="153988"/>
                 </a:solidFill>
@@ -10565,7 +10607,7 @@
               </a:rPr>
               <a:t>What actions do you need to take to give yourself the best chance of success in pursuing your chosen career path?</a:t>
             </a:r>
-            <a:endParaRPr b="0" i="0" sz="1800" u="none" cap="none" strike="noStrike">
+            <a:endParaRPr sz="1800" b="0" i="0" u="none" strike="noStrike" cap="none">
               <a:solidFill>
                 <a:srgbClr val="153988"/>
               </a:solidFill>
@@ -10597,12 +10639,12 @@
           </a:ln>
         </p:spPr>
         <p:txBody>
-          <a:bodyPr anchorCtr="0" anchor="t" bIns="91425" lIns="91425" spcFirstLastPara="1" rIns="91425" wrap="square" tIns="91425">
+          <a:bodyPr spcFirstLastPara="1" wrap="square" lIns="91425" tIns="91425" rIns="91425" bIns="91425" anchor="t" anchorCtr="0">
             <a:spAutoFit/>
           </a:bodyPr>
           <a:lstStyle/>
           <a:p>
-            <a:pPr indent="0" lvl="0" marL="0" marR="0" rtl="0" algn="l">
+            <a:pPr marL="0" marR="0" lvl="0" indent="0" algn="l" rtl="0">
               <a:lnSpc>
                 <a:spcPct val="100000"/>
               </a:lnSpc>
@@ -10620,7 +10662,7 @@
               <a:buNone/>
             </a:pPr>
             <a:r>
-              <a:rPr b="0" i="0" lang="en-GB" sz="1800" u="none" cap="none" strike="noStrike">
+              <a:rPr lang="en-GB" sz="1800" b="0" i="0" u="none" strike="noStrike" cap="none">
                 <a:solidFill>
                   <a:srgbClr val="9EED6B"/>
                 </a:solidFill>
@@ -10631,7 +10673,7 @@
               </a:rPr>
               <a:t>Green Pathways</a:t>
             </a:r>
-            <a:endParaRPr b="0" i="0" sz="1800" u="none" cap="none" strike="noStrike">
+            <a:endParaRPr sz="1800" b="0" i="0" u="none" strike="noStrike" cap="none">
               <a:solidFill>
                 <a:srgbClr val="9EED6B"/>
               </a:solidFill>
@@ -10652,11 +10694,11 @@
 </file>
 
 <file path=ppt/slides/slide11.xml><?xml version="1.0" encoding="utf-8"?>
-<p:sld xmlns:a="http://schemas.openxmlformats.org/drawingml/2006/main" xmlns:r="http://schemas.openxmlformats.org/officeDocument/2006/relationships" xmlns:mc="http://schemas.openxmlformats.org/markup-compatibility/2006" xmlns:mv="urn:schemas-microsoft-com:mac:vml" xmlns:p="http://schemas.openxmlformats.org/presentationml/2006/main" xmlns:c="http://schemas.openxmlformats.org/drawingml/2006/chart" xmlns:dgm="http://schemas.openxmlformats.org/drawingml/2006/diagram" xmlns:o="urn:schemas-microsoft-com:office:office" xmlns:v="urn:schemas-microsoft-com:vml" xmlns:pvml="urn:schemas-microsoft-com:office:powerpoint" xmlns:com="http://schemas.openxmlformats.org/drawingml/2006/compatibility" xmlns:p14="http://schemas.microsoft.com/office/powerpoint/2010/main" xmlns:p15="http://schemas.microsoft.com/office/powerpoint/2012/main" xmlns:ahyp="http://schemas.microsoft.com/office/drawing/2018/hyperlinkcolor">
+<p:sld xmlns:a="http://schemas.openxmlformats.org/drawingml/2006/main" xmlns:r="http://schemas.openxmlformats.org/officeDocument/2006/relationships" xmlns:p="http://schemas.openxmlformats.org/presentationml/2006/main">
   <p:cSld>
     <p:spTree>
       <p:nvGrpSpPr>
-        <p:cNvPr id="124" name="Shape 124"/>
+        <p:cNvPr id="1" name="Shape 124"/>
         <p:cNvGrpSpPr/>
         <p:nvPr/>
       </p:nvGrpSpPr>
@@ -10671,9 +10713,11 @@
       <p:sp>
         <p:nvSpPr>
           <p:cNvPr id="125" name="Google Shape;125;p24"/>
-          <p:cNvSpPr txBox="1"/>
+          <p:cNvSpPr txBox="1">
+            <a:spLocks noGrp="1"/>
+          </p:cNvSpPr>
           <p:nvPr>
-            <p:ph idx="4294967295" type="title"/>
+            <p:ph type="title" idx="4294967295"/>
           </p:nvPr>
         </p:nvSpPr>
         <p:spPr>
@@ -10690,12 +10734,12 @@
           </a:ln>
         </p:spPr>
         <p:txBody>
-          <a:bodyPr anchorCtr="0" anchor="t" bIns="91425" lIns="91425" spcFirstLastPara="1" rIns="91425" wrap="square" tIns="91425">
+          <a:bodyPr spcFirstLastPara="1" wrap="square" lIns="91425" tIns="91425" rIns="91425" bIns="91425" anchor="t" anchorCtr="0">
             <a:normAutofit fontScale="90000"/>
           </a:bodyPr>
           <a:lstStyle/>
           <a:p>
-            <a:pPr indent="0" lvl="0" marL="0" rtl="0" algn="l">
+            <a:pPr marL="0" lvl="0" indent="0" algn="l" rtl="0">
               <a:lnSpc>
                 <a:spcPct val="100000"/>
               </a:lnSpc>
@@ -10708,9 +10752,6 @@
               <a:buSzPct val="111111"/>
               <a:buNone/>
             </a:pPr>
-            <a:r>
-              <a:t/>
-            </a:r>
             <a:endParaRPr/>
           </a:p>
         </p:txBody>
@@ -10718,9 +10759,11 @@
       <p:sp>
         <p:nvSpPr>
           <p:cNvPr id="126" name="Google Shape;126;p24"/>
-          <p:cNvSpPr txBox="1"/>
+          <p:cNvSpPr txBox="1">
+            <a:spLocks noGrp="1"/>
+          </p:cNvSpPr>
           <p:nvPr>
-            <p:ph idx="4294967295" type="body"/>
+            <p:ph type="body" idx="4294967295"/>
           </p:nvPr>
         </p:nvSpPr>
         <p:spPr>
@@ -10737,12 +10780,12 @@
           </a:ln>
         </p:spPr>
         <p:txBody>
-          <a:bodyPr anchorCtr="0" anchor="t" bIns="91425" lIns="91425" spcFirstLastPara="1" rIns="91425" wrap="square" tIns="91425">
+          <a:bodyPr spcFirstLastPara="1" wrap="square" lIns="91425" tIns="91425" rIns="91425" bIns="91425" anchor="t" anchorCtr="0">
             <a:normAutofit/>
           </a:bodyPr>
           <a:lstStyle/>
           <a:p>
-            <a:pPr indent="0" lvl="0" marL="0" rtl="0" algn="l">
+            <a:pPr marL="0" lvl="0" indent="0" algn="l" rtl="0">
               <a:lnSpc>
                 <a:spcPct val="115000"/>
               </a:lnSpc>
@@ -10755,9 +10798,6 @@
               <a:buSzPts val="1800"/>
               <a:buNone/>
             </a:pPr>
-            <a:r>
-              <a:t/>
-            </a:r>
             <a:endParaRPr/>
           </a:p>
         </p:txBody>
@@ -10765,9 +10805,11 @@
       <p:sp>
         <p:nvSpPr>
           <p:cNvPr id="127" name="Google Shape;127;p24"/>
-          <p:cNvSpPr txBox="1"/>
+          <p:cNvSpPr txBox="1">
+            <a:spLocks noGrp="1"/>
+          </p:cNvSpPr>
           <p:nvPr>
-            <p:ph idx="4294967295" type="body"/>
+            <p:ph type="body" idx="4294967295"/>
           </p:nvPr>
         </p:nvSpPr>
         <p:spPr>
@@ -10784,12 +10826,12 @@
           </a:ln>
         </p:spPr>
         <p:txBody>
-          <a:bodyPr anchorCtr="0" anchor="t" bIns="91425" lIns="91425" spcFirstLastPara="1" rIns="91425" wrap="square" tIns="91425">
+          <a:bodyPr spcFirstLastPara="1" wrap="square" lIns="91425" tIns="91425" rIns="91425" bIns="91425" anchor="t" anchorCtr="0">
             <a:normAutofit/>
           </a:bodyPr>
           <a:lstStyle/>
           <a:p>
-            <a:pPr indent="0" lvl="0" marL="0" rtl="0" algn="l">
+            <a:pPr marL="0" lvl="0" indent="0" algn="l" rtl="0">
               <a:lnSpc>
                 <a:spcPct val="115000"/>
               </a:lnSpc>
@@ -10802,9 +10844,6 @@
               <a:buSzPts val="1800"/>
               <a:buNone/>
             </a:pPr>
-            <a:r>
-              <a:t/>
-            </a:r>
             <a:endParaRPr/>
           </a:p>
         </p:txBody>
@@ -10829,12 +10868,12 @@
           </a:ln>
         </p:spPr>
         <p:txBody>
-          <a:bodyPr anchorCtr="0" anchor="t" bIns="91425" lIns="91425" spcFirstLastPara="1" rIns="91425" wrap="square" tIns="91425">
+          <a:bodyPr spcFirstLastPara="1" wrap="square" lIns="91425" tIns="91425" rIns="91425" bIns="91425" anchor="t" anchorCtr="0">
             <a:spAutoFit/>
           </a:bodyPr>
           <a:lstStyle/>
           <a:p>
-            <a:pPr indent="0" lvl="0" marL="0" marR="0" rtl="0" algn="l">
+            <a:pPr marL="0" marR="0" lvl="0" indent="0" algn="l" rtl="0">
               <a:lnSpc>
                 <a:spcPct val="100000"/>
               </a:lnSpc>
@@ -10852,7 +10891,7 @@
               <a:buNone/>
             </a:pPr>
             <a:r>
-              <a:rPr b="0" i="0" lang="en-GB" sz="1800" u="none" cap="none" strike="noStrike">
+              <a:rPr lang="en-GB" sz="1800" b="0" i="0" u="none" strike="noStrike" cap="none">
                 <a:solidFill>
                   <a:srgbClr val="9EED6B"/>
                 </a:solidFill>
@@ -10863,7 +10902,7 @@
               </a:rPr>
               <a:t>Green Pathways</a:t>
             </a:r>
-            <a:endParaRPr b="0" i="0" sz="1800" u="none" cap="none" strike="noStrike">
+            <a:endParaRPr sz="1800" b="0" i="0" u="none" strike="noStrike" cap="none">
               <a:solidFill>
                 <a:srgbClr val="9EED6B"/>
               </a:solidFill>
@@ -10884,11 +10923,11 @@
 </file>
 
 <file path=ppt/slides/slide12.xml><?xml version="1.0" encoding="utf-8"?>
-<p:sld xmlns:a="http://schemas.openxmlformats.org/drawingml/2006/main" xmlns:r="http://schemas.openxmlformats.org/officeDocument/2006/relationships" xmlns:mc="http://schemas.openxmlformats.org/markup-compatibility/2006" xmlns:mv="urn:schemas-microsoft-com:mac:vml" xmlns:p="http://schemas.openxmlformats.org/presentationml/2006/main" xmlns:c="http://schemas.openxmlformats.org/drawingml/2006/chart" xmlns:dgm="http://schemas.openxmlformats.org/drawingml/2006/diagram" xmlns:o="urn:schemas-microsoft-com:office:office" xmlns:v="urn:schemas-microsoft-com:vml" xmlns:pvml="urn:schemas-microsoft-com:office:powerpoint" xmlns:com="http://schemas.openxmlformats.org/drawingml/2006/compatibility" xmlns:p14="http://schemas.microsoft.com/office/powerpoint/2010/main" xmlns:p15="http://schemas.microsoft.com/office/powerpoint/2012/main" xmlns:ahyp="http://schemas.microsoft.com/office/drawing/2018/hyperlinkcolor">
+<p:sld xmlns:a="http://schemas.openxmlformats.org/drawingml/2006/main" xmlns:r="http://schemas.openxmlformats.org/officeDocument/2006/relationships" xmlns:p="http://schemas.openxmlformats.org/presentationml/2006/main">
   <p:cSld>
     <p:spTree>
       <p:nvGrpSpPr>
-        <p:cNvPr id="132" name="Shape 132"/>
+        <p:cNvPr id="1" name="Shape 132"/>
         <p:cNvGrpSpPr/>
         <p:nvPr/>
       </p:nvGrpSpPr>
@@ -10920,12 +10959,12 @@
           </a:ln>
         </p:spPr>
         <p:txBody>
-          <a:bodyPr anchorCtr="0" anchor="t" bIns="91425" lIns="91425" spcFirstLastPara="1" rIns="91425" wrap="square" tIns="91425">
+          <a:bodyPr spcFirstLastPara="1" wrap="square" lIns="91425" tIns="91425" rIns="91425" bIns="91425" anchor="t" anchorCtr="0">
             <a:spAutoFit/>
           </a:bodyPr>
           <a:lstStyle/>
           <a:p>
-            <a:pPr indent="0" lvl="0" marL="0" marR="0" rtl="0" algn="l">
+            <a:pPr marL="0" marR="0" lvl="0" indent="0" algn="l" rtl="0">
               <a:lnSpc>
                 <a:spcPct val="100000"/>
               </a:lnSpc>
@@ -10943,7 +10982,7 @@
               <a:buNone/>
             </a:pPr>
             <a:br>
-              <a:rPr b="0" i="0" lang="en-GB" sz="4000" u="none" cap="none" strike="noStrike">
+              <a:rPr lang="en-GB" sz="4000" b="0" i="0" u="none" strike="noStrike" cap="none">
                 <a:solidFill>
                   <a:srgbClr val="153988"/>
                 </a:solidFill>
@@ -10954,7 +10993,7 @@
               </a:rPr>
             </a:br>
             <a:r>
-              <a:rPr b="0" i="0" lang="en-GB" sz="4000" u="none" cap="none" strike="noStrike">
+              <a:rPr lang="en-GB" sz="4000" b="0" i="0" u="none" strike="noStrike" cap="none">
                 <a:solidFill>
                   <a:srgbClr val="153988"/>
                 </a:solidFill>
@@ -10965,7 +11004,7 @@
               </a:rPr>
               <a:t>Thank you!</a:t>
             </a:r>
-            <a:endParaRPr b="0" i="0" sz="4000" u="none" cap="none" strike="noStrike">
+            <a:endParaRPr sz="4000" b="0" i="0" u="none" strike="noStrike" cap="none">
               <a:solidFill>
                 <a:srgbClr val="153988"/>
               </a:solidFill>
@@ -10976,7 +11015,7 @@
             </a:endParaRPr>
           </a:p>
           <a:p>
-            <a:pPr indent="0" lvl="0" marL="0" marR="0" rtl="0" algn="l">
+            <a:pPr marL="0" marR="0" lvl="0" indent="0" algn="l" rtl="0">
               <a:lnSpc>
                 <a:spcPct val="100000"/>
               </a:lnSpc>
@@ -10993,10 +11032,7 @@
               <a:buFont typeface="Arial"/>
               <a:buNone/>
             </a:pPr>
-            <a:r>
-              <a:t/>
-            </a:r>
-            <a:endParaRPr b="0" i="0" sz="3000" u="none" cap="none" strike="noStrike">
+            <a:endParaRPr sz="3000" b="0" i="0" u="none" strike="noStrike" cap="none">
               <a:solidFill>
                 <a:srgbClr val="153988"/>
               </a:solidFill>
@@ -11007,7 +11043,7 @@
             </a:endParaRPr>
           </a:p>
           <a:p>
-            <a:pPr indent="0" lvl="0" marL="0" marR="0" rtl="0" algn="l">
+            <a:pPr marL="0" marR="0" lvl="0" indent="0" algn="l" rtl="0">
               <a:lnSpc>
                 <a:spcPct val="100000"/>
               </a:lnSpc>
@@ -11024,10 +11060,7 @@
               <a:buFont typeface="Arial"/>
               <a:buNone/>
             </a:pPr>
-            <a:r>
-              <a:t/>
-            </a:r>
-            <a:endParaRPr b="0" i="0" sz="1800" u="none" cap="none" strike="noStrike">
+            <a:endParaRPr sz="1800" b="0" i="0" u="none" strike="noStrike" cap="none">
               <a:solidFill>
                 <a:srgbClr val="153988"/>
               </a:solidFill>
@@ -11059,12 +11092,12 @@
           </a:ln>
         </p:spPr>
         <p:txBody>
-          <a:bodyPr anchorCtr="0" anchor="t" bIns="91425" lIns="91425" spcFirstLastPara="1" rIns="91425" wrap="square" tIns="91425">
+          <a:bodyPr spcFirstLastPara="1" wrap="square" lIns="91425" tIns="91425" rIns="91425" bIns="91425" anchor="t" anchorCtr="0">
             <a:spAutoFit/>
           </a:bodyPr>
           <a:lstStyle/>
           <a:p>
-            <a:pPr indent="0" lvl="0" marL="0" marR="0" rtl="0" algn="l">
+            <a:pPr marL="0" marR="0" lvl="0" indent="0" algn="l" rtl="0">
               <a:lnSpc>
                 <a:spcPct val="100000"/>
               </a:lnSpc>
@@ -11082,7 +11115,7 @@
               <a:buNone/>
             </a:pPr>
             <a:r>
-              <a:rPr b="0" i="0" lang="en-GB" sz="1800" u="none" cap="none" strike="noStrike">
+              <a:rPr lang="en-GB" sz="1800" b="0" i="0" u="none" strike="noStrike" cap="none">
                 <a:solidFill>
                   <a:srgbClr val="9EED6B"/>
                 </a:solidFill>
@@ -11093,7 +11126,7 @@
               </a:rPr>
               <a:t>Green Pathways</a:t>
             </a:r>
-            <a:endParaRPr b="0" i="0" sz="1800" u="none" cap="none" strike="noStrike">
+            <a:endParaRPr sz="1800" b="0" i="0" u="none" strike="noStrike" cap="none">
               <a:solidFill>
                 <a:srgbClr val="9EED6B"/>
               </a:solidFill>
@@ -11114,11 +11147,11 @@
 </file>
 
 <file path=ppt/slides/slide2.xml><?xml version="1.0" encoding="utf-8"?>
-<p:sld xmlns:a="http://schemas.openxmlformats.org/drawingml/2006/main" xmlns:r="http://schemas.openxmlformats.org/officeDocument/2006/relationships" xmlns:mc="http://schemas.openxmlformats.org/markup-compatibility/2006" xmlns:mv="urn:schemas-microsoft-com:mac:vml" xmlns:p="http://schemas.openxmlformats.org/presentationml/2006/main" xmlns:c="http://schemas.openxmlformats.org/drawingml/2006/chart" xmlns:dgm="http://schemas.openxmlformats.org/drawingml/2006/diagram" xmlns:o="urn:schemas-microsoft-com:office:office" xmlns:v="urn:schemas-microsoft-com:vml" xmlns:pvml="urn:schemas-microsoft-com:office:powerpoint" xmlns:com="http://schemas.openxmlformats.org/drawingml/2006/compatibility" xmlns:p14="http://schemas.microsoft.com/office/powerpoint/2010/main" xmlns:p15="http://schemas.microsoft.com/office/powerpoint/2012/main" xmlns:ahyp="http://schemas.microsoft.com/office/drawing/2018/hyperlinkcolor">
+<p:sld xmlns:a="http://schemas.openxmlformats.org/drawingml/2006/main" xmlns:r="http://schemas.openxmlformats.org/officeDocument/2006/relationships" xmlns:p="http://schemas.openxmlformats.org/presentationml/2006/main">
   <p:cSld>
     <p:spTree>
       <p:nvGrpSpPr>
-        <p:cNvPr id="62" name="Shape 62"/>
+        <p:cNvPr id="1" name="Shape 62"/>
         <p:cNvGrpSpPr/>
         <p:nvPr/>
       </p:nvGrpSpPr>
@@ -11150,12 +11183,12 @@
           </a:ln>
         </p:spPr>
         <p:txBody>
-          <a:bodyPr anchorCtr="0" anchor="t" bIns="91425" lIns="91425" spcFirstLastPara="1" rIns="91425" wrap="square" tIns="91425">
+          <a:bodyPr spcFirstLastPara="1" wrap="square" lIns="91425" tIns="91425" rIns="91425" bIns="91425" anchor="t" anchorCtr="0">
             <a:spAutoFit/>
           </a:bodyPr>
           <a:lstStyle/>
           <a:p>
-            <a:pPr indent="0" lvl="0" marL="0" marR="0" rtl="0" algn="l">
+            <a:pPr marL="0" marR="0" lvl="0" indent="0" algn="l" rtl="0">
               <a:lnSpc>
                 <a:spcPct val="100000"/>
               </a:lnSpc>
@@ -11173,7 +11206,7 @@
               <a:buNone/>
             </a:pPr>
             <a:r>
-              <a:rPr b="0" i="0" lang="en-GB" sz="4000" u="none" cap="none" strike="noStrike">
+              <a:rPr lang="en-GB" sz="4000" b="0" i="0" u="none" strike="noStrike" cap="none">
                 <a:solidFill>
                   <a:srgbClr val="153988"/>
                 </a:solidFill>
@@ -11184,7 +11217,7 @@
               </a:rPr>
               <a:t>Executive Summary</a:t>
             </a:r>
-            <a:endParaRPr b="0" i="0" sz="4000" u="none" cap="none" strike="noStrike">
+            <a:endParaRPr sz="4000" b="0" i="0" u="none" strike="noStrike" cap="none">
               <a:solidFill>
                 <a:srgbClr val="153988"/>
               </a:solidFill>
@@ -11195,7 +11228,7 @@
             </a:endParaRPr>
           </a:p>
           <a:p>
-            <a:pPr indent="0" lvl="0" marL="0" marR="0" rtl="0" algn="l">
+            <a:pPr marL="0" marR="0" lvl="0" indent="0" algn="l" rtl="0">
               <a:lnSpc>
                 <a:spcPct val="100000"/>
               </a:lnSpc>
@@ -11212,10 +11245,7 @@
               <a:buFont typeface="Arial"/>
               <a:buNone/>
             </a:pPr>
-            <a:r>
-              <a:t/>
-            </a:r>
-            <a:endParaRPr b="0" i="0" sz="3000" u="none" cap="none" strike="noStrike">
+            <a:endParaRPr sz="3000" b="0" i="0" u="none" strike="noStrike" cap="none">
               <a:solidFill>
                 <a:srgbClr val="153988"/>
               </a:solidFill>
@@ -11226,7 +11256,7 @@
             </a:endParaRPr>
           </a:p>
           <a:p>
-            <a:pPr indent="0" lvl="0" marL="0" marR="0" rtl="0" algn="l">
+            <a:pPr marL="0" marR="0" lvl="0" indent="0" algn="l" rtl="0">
               <a:lnSpc>
                 <a:spcPct val="100000"/>
               </a:lnSpc>
@@ -11244,7 +11274,7 @@
               <a:buNone/>
             </a:pPr>
             <a:r>
-              <a:rPr b="0" i="0" lang="en-GB" sz="1800" u="none" cap="none" strike="noStrike">
+              <a:rPr lang="en-GB" sz="1800" b="0" i="0" u="none" strike="noStrike" cap="none">
                 <a:solidFill>
                   <a:srgbClr val="153988"/>
                 </a:solidFill>
@@ -11255,7 +11285,7 @@
               </a:rPr>
               <a:t>In 100 words or less, outline your next steps for a career in your chosen field within sustainability. (Summarise main points of this presentation.)</a:t>
             </a:r>
-            <a:endParaRPr b="0" i="0" sz="1800" u="none" cap="none" strike="noStrike">
+            <a:endParaRPr sz="1800" b="0" i="0" u="none" strike="noStrike" cap="none">
               <a:solidFill>
                 <a:srgbClr val="153988"/>
               </a:solidFill>
@@ -11287,12 +11317,12 @@
           </a:ln>
         </p:spPr>
         <p:txBody>
-          <a:bodyPr anchorCtr="0" anchor="t" bIns="91425" lIns="91425" spcFirstLastPara="1" rIns="91425" wrap="square" tIns="91425">
+          <a:bodyPr spcFirstLastPara="1" wrap="square" lIns="91425" tIns="91425" rIns="91425" bIns="91425" anchor="t" anchorCtr="0">
             <a:spAutoFit/>
           </a:bodyPr>
           <a:lstStyle/>
           <a:p>
-            <a:pPr indent="0" lvl="0" marL="0" marR="0" rtl="0" algn="l">
+            <a:pPr marL="0" marR="0" lvl="0" indent="0" algn="l" rtl="0">
               <a:lnSpc>
                 <a:spcPct val="100000"/>
               </a:lnSpc>
@@ -11310,7 +11340,7 @@
               <a:buNone/>
             </a:pPr>
             <a:r>
-              <a:rPr b="0" i="0" lang="en-GB" sz="1800" u="none" cap="none" strike="noStrike">
+              <a:rPr lang="en-GB" sz="1800" b="0" i="0" u="none" strike="noStrike" cap="none">
                 <a:solidFill>
                   <a:srgbClr val="9EED6B"/>
                 </a:solidFill>
@@ -11321,7 +11351,7 @@
               </a:rPr>
               <a:t>Green Pathways</a:t>
             </a:r>
-            <a:endParaRPr b="0" i="0" sz="1800" u="none" cap="none" strike="noStrike">
+            <a:endParaRPr sz="1800" b="0" i="0" u="none" strike="noStrike" cap="none">
               <a:solidFill>
                 <a:srgbClr val="9EED6B"/>
               </a:solidFill>
@@ -11342,18 +11372,19 @@
 </file>
 
 <file path=ppt/slides/slide3.xml><?xml version="1.0" encoding="utf-8"?>
-<p:sld xmlns:a="http://schemas.openxmlformats.org/drawingml/2006/main" xmlns:r="http://schemas.openxmlformats.org/officeDocument/2006/relationships" xmlns:mc="http://schemas.openxmlformats.org/markup-compatibility/2006" xmlns:mv="urn:schemas-microsoft-com:mac:vml" xmlns:p="http://schemas.openxmlformats.org/presentationml/2006/main" xmlns:c="http://schemas.openxmlformats.org/drawingml/2006/chart" xmlns:dgm="http://schemas.openxmlformats.org/drawingml/2006/diagram" xmlns:o="urn:schemas-microsoft-com:office:office" xmlns:v="urn:schemas-microsoft-com:vml" xmlns:pvml="urn:schemas-microsoft-com:office:powerpoint" xmlns:com="http://schemas.openxmlformats.org/drawingml/2006/compatibility" xmlns:p14="http://schemas.microsoft.com/office/powerpoint/2010/main" xmlns:p15="http://schemas.microsoft.com/office/powerpoint/2012/main" xmlns:ahyp="http://schemas.microsoft.com/office/drawing/2018/hyperlinkcolor">
+<p:sld xmlns:a="http://schemas.openxmlformats.org/drawingml/2006/main" xmlns:r="http://schemas.openxmlformats.org/officeDocument/2006/relationships" xmlns:p="http://schemas.openxmlformats.org/presentationml/2006/main">
   <p:cSld>
     <p:bg>
       <p:bgPr>
         <a:solidFill>
           <a:srgbClr val="9EED6B"/>
         </a:solidFill>
+        <a:effectLst/>
       </p:bgPr>
     </p:bg>
     <p:spTree>
       <p:nvGrpSpPr>
-        <p:cNvPr id="68" name="Shape 68"/>
+        <p:cNvPr id="1" name="Shape 68"/>
         <p:cNvGrpSpPr/>
         <p:nvPr/>
       </p:nvGrpSpPr>
@@ -11387,12 +11418,12 @@
           </a:ln>
         </p:spPr>
         <p:txBody>
-          <a:bodyPr anchorCtr="0" anchor="ctr" bIns="45700" lIns="91425" spcFirstLastPara="1" rIns="91425" wrap="square" tIns="45700">
+          <a:bodyPr spcFirstLastPara="1" wrap="square" lIns="91425" tIns="45700" rIns="91425" bIns="45700" anchor="ctr" anchorCtr="0">
             <a:noAutofit/>
           </a:bodyPr>
           <a:lstStyle/>
           <a:p>
-            <a:pPr indent="0" lvl="0" marL="0" marR="0" rtl="0" algn="l">
+            <a:pPr marL="0" marR="0" lvl="0" indent="0" algn="l" rtl="0">
               <a:lnSpc>
                 <a:spcPct val="90000"/>
               </a:lnSpc>
@@ -11409,10 +11440,7 @@
               <a:buFont typeface="Arial"/>
               <a:buNone/>
             </a:pPr>
-            <a:r>
-              <a:t/>
-            </a:r>
-            <a:endParaRPr b="1" i="0" sz="4000" u="none" cap="none" strike="noStrike">
+            <a:endParaRPr sz="4000" b="1" i="0" u="none" strike="noStrike" cap="none">
               <a:solidFill>
                 <a:schemeClr val="lt1"/>
               </a:solidFill>
@@ -11423,7 +11451,7 @@
             </a:endParaRPr>
           </a:p>
           <a:p>
-            <a:pPr indent="0" lvl="0" marL="0" marR="0" rtl="0" algn="l">
+            <a:pPr marL="0" marR="0" lvl="0" indent="0" algn="l" rtl="0">
               <a:lnSpc>
                 <a:spcPct val="90000"/>
               </a:lnSpc>
@@ -11440,10 +11468,7 @@
               <a:buFont typeface="Arial"/>
               <a:buNone/>
             </a:pPr>
-            <a:r>
-              <a:t/>
-            </a:r>
-            <a:endParaRPr b="1" i="0" sz="4000" u="none" cap="none" strike="noStrike">
+            <a:endParaRPr sz="4000" b="1" i="0" u="none" strike="noStrike" cap="none">
               <a:solidFill>
                 <a:schemeClr val="lt1"/>
               </a:solidFill>
@@ -11454,7 +11479,7 @@
             </a:endParaRPr>
           </a:p>
           <a:p>
-            <a:pPr indent="0" lvl="0" marL="0" marR="0" rtl="0" algn="l">
+            <a:pPr marL="0" marR="0" lvl="0" indent="0" algn="l" rtl="0">
               <a:lnSpc>
                 <a:spcPct val="90000"/>
               </a:lnSpc>
@@ -11471,10 +11496,7 @@
               <a:buFont typeface="Montserrat"/>
               <a:buNone/>
             </a:pPr>
-            <a:r>
-              <a:t/>
-            </a:r>
-            <a:endParaRPr b="0" i="1" sz="1600" u="none" cap="none" strike="noStrike">
+            <a:endParaRPr sz="1600" b="0" i="1" u="none" strike="noStrike" cap="none">
               <a:solidFill>
                 <a:schemeClr val="lt1"/>
               </a:solidFill>
@@ -11506,12 +11528,12 @@
           </a:ln>
         </p:spPr>
         <p:txBody>
-          <a:bodyPr anchorCtr="0" anchor="t" bIns="17150" lIns="34300" spcFirstLastPara="1" rIns="34300" wrap="square" tIns="17150">
+          <a:bodyPr spcFirstLastPara="1" wrap="square" lIns="34300" tIns="17150" rIns="34300" bIns="17150" anchor="t" anchorCtr="0">
             <a:noAutofit/>
           </a:bodyPr>
           <a:lstStyle/>
           <a:p>
-            <a:pPr indent="0" lvl="0" marL="0" marR="0" rtl="0" algn="l">
+            <a:pPr marL="0" marR="0" lvl="0" indent="0" algn="l" rtl="0">
               <a:lnSpc>
                 <a:spcPct val="100000"/>
               </a:lnSpc>
@@ -11528,10 +11550,7 @@
               <a:buFont typeface="Arial"/>
               <a:buNone/>
             </a:pPr>
-            <a:r>
-              <a:t/>
-            </a:r>
-            <a:endParaRPr b="1" i="0" sz="1800" u="none" cap="none" strike="noStrike">
+            <a:endParaRPr sz="1800" b="1" i="0" u="none" strike="noStrike" cap="none">
               <a:solidFill>
                 <a:srgbClr val="153988"/>
               </a:solidFill>
@@ -11542,7 +11561,7 @@
             </a:endParaRPr>
           </a:p>
           <a:p>
-            <a:pPr indent="0" lvl="0" marL="0" marR="0" rtl="0" algn="l">
+            <a:pPr marL="0" marR="0" lvl="0" indent="0" algn="l" rtl="0">
               <a:lnSpc>
                 <a:spcPct val="100000"/>
               </a:lnSpc>
@@ -11560,7 +11579,7 @@
               <a:buNone/>
             </a:pPr>
             <a:r>
-              <a:rPr b="0" i="0" lang="en-GB" sz="1800" u="none" cap="none" strike="noStrike">
+              <a:rPr lang="en-GB" sz="1800" b="0" i="0" u="none" strike="noStrike" cap="none">
                 <a:solidFill>
                   <a:srgbClr val="153988"/>
                 </a:solidFill>
@@ -11571,7 +11590,7 @@
               </a:rPr>
               <a:t>Part 1</a:t>
             </a:r>
-            <a:endParaRPr b="0" i="0" sz="1800" u="none" cap="none" strike="noStrike">
+            <a:endParaRPr sz="1800" b="0" i="0" u="none" strike="noStrike" cap="none">
               <a:solidFill>
                 <a:srgbClr val="153988"/>
               </a:solidFill>
@@ -11582,7 +11601,7 @@
             </a:endParaRPr>
           </a:p>
           <a:p>
-            <a:pPr indent="0" lvl="0" marL="0" marR="0" rtl="0" algn="l">
+            <a:pPr marL="0" marR="0" lvl="0" indent="0" algn="l" rtl="0">
               <a:lnSpc>
                 <a:spcPct val="100000"/>
               </a:lnSpc>
@@ -11600,7 +11619,7 @@
               <a:buNone/>
             </a:pPr>
             <a:r>
-              <a:rPr b="1" i="0" lang="en-GB" sz="1800" u="none" cap="none" strike="noStrike">
+              <a:rPr lang="en-GB" sz="1800" b="1" i="0" u="none" strike="noStrike" cap="none">
                 <a:solidFill>
                   <a:srgbClr val="153988"/>
                 </a:solidFill>
@@ -11611,7 +11630,7 @@
               </a:rPr>
               <a:t>Opportunities</a:t>
             </a:r>
-            <a:endParaRPr b="1" i="0" sz="1800" u="none" cap="none" strike="noStrike">
+            <a:endParaRPr sz="1800" b="1" i="0" u="none" strike="noStrike" cap="none">
               <a:solidFill>
                 <a:srgbClr val="153988"/>
               </a:solidFill>
@@ -11622,7 +11641,7 @@
             </a:endParaRPr>
           </a:p>
           <a:p>
-            <a:pPr indent="0" lvl="0" marL="0" marR="0" rtl="0" algn="l">
+            <a:pPr marL="0" marR="0" lvl="0" indent="0" algn="l" rtl="0">
               <a:lnSpc>
                 <a:spcPct val="100000"/>
               </a:lnSpc>
@@ -11639,10 +11658,7 @@
               <a:buFont typeface="Arial"/>
               <a:buNone/>
             </a:pPr>
-            <a:r>
-              <a:t/>
-            </a:r>
-            <a:endParaRPr b="1" i="0" sz="1800" u="none" cap="none" strike="noStrike">
+            <a:endParaRPr sz="1800" b="1" i="0" u="none" strike="noStrike" cap="none">
               <a:solidFill>
                 <a:srgbClr val="153988"/>
               </a:solidFill>
@@ -11653,7 +11669,7 @@
             </a:endParaRPr>
           </a:p>
           <a:p>
-            <a:pPr indent="0" lvl="0" marL="0" marR="0" rtl="0" algn="l">
+            <a:pPr marL="0" marR="0" lvl="0" indent="0" algn="l" rtl="0">
               <a:lnSpc>
                 <a:spcPct val="100000"/>
               </a:lnSpc>
@@ -11671,7 +11687,7 @@
               <a:buNone/>
             </a:pPr>
             <a:r>
-              <a:rPr b="0" i="0" lang="en-GB" sz="1800" u="none" cap="none" strike="noStrike">
+              <a:rPr lang="en-GB" sz="1800" b="0" i="0" u="none" strike="noStrike" cap="none">
                 <a:solidFill>
                   <a:srgbClr val="153988"/>
                 </a:solidFill>
@@ -11682,7 +11698,7 @@
               </a:rPr>
               <a:t>Part 2</a:t>
             </a:r>
-            <a:endParaRPr b="0" i="0" sz="1800" u="none" cap="none" strike="noStrike">
+            <a:endParaRPr sz="1800" b="0" i="0" u="none" strike="noStrike" cap="none">
               <a:solidFill>
                 <a:srgbClr val="153988"/>
               </a:solidFill>
@@ -11693,7 +11709,7 @@
             </a:endParaRPr>
           </a:p>
           <a:p>
-            <a:pPr indent="0" lvl="0" marL="0" marR="0" rtl="0" algn="l">
+            <a:pPr marL="0" marR="0" lvl="0" indent="0" algn="l" rtl="0">
               <a:lnSpc>
                 <a:spcPct val="100000"/>
               </a:lnSpc>
@@ -11711,7 +11727,7 @@
               <a:buNone/>
             </a:pPr>
             <a:r>
-              <a:rPr b="1" i="0" lang="en-GB" sz="1800" u="none" cap="none" strike="noStrike">
+              <a:rPr lang="en-GB" sz="1800" b="1" i="0" u="none" strike="noStrike" cap="none">
                 <a:solidFill>
                   <a:srgbClr val="153988"/>
                 </a:solidFill>
@@ -11722,7 +11738,7 @@
               </a:rPr>
               <a:t>Skills &amp; Education</a:t>
             </a:r>
-            <a:endParaRPr b="1" i="0" sz="1800" u="none" cap="none" strike="noStrike">
+            <a:endParaRPr sz="1800" b="1" i="0" u="none" strike="noStrike" cap="none">
               <a:solidFill>
                 <a:srgbClr val="153988"/>
               </a:solidFill>
@@ -11733,7 +11749,7 @@
             </a:endParaRPr>
           </a:p>
           <a:p>
-            <a:pPr indent="0" lvl="0" marL="0" marR="0" rtl="0" algn="l">
+            <a:pPr marL="0" marR="0" lvl="0" indent="0" algn="l" rtl="0">
               <a:lnSpc>
                 <a:spcPct val="100000"/>
               </a:lnSpc>
@@ -11750,10 +11766,7 @@
               <a:buFont typeface="Arial"/>
               <a:buNone/>
             </a:pPr>
-            <a:r>
-              <a:t/>
-            </a:r>
-            <a:endParaRPr b="1" i="0" sz="1800" u="none" cap="none" strike="noStrike">
+            <a:endParaRPr sz="1800" b="1" i="0" u="none" strike="noStrike" cap="none">
               <a:solidFill>
                 <a:srgbClr val="153988"/>
               </a:solidFill>
@@ -11764,7 +11777,7 @@
             </a:endParaRPr>
           </a:p>
           <a:p>
-            <a:pPr indent="0" lvl="0" marL="0" marR="0" rtl="0" algn="l">
+            <a:pPr marL="0" marR="0" lvl="0" indent="0" algn="l" rtl="0">
               <a:lnSpc>
                 <a:spcPct val="100000"/>
               </a:lnSpc>
@@ -11782,7 +11795,7 @@
               <a:buNone/>
             </a:pPr>
             <a:r>
-              <a:rPr b="0" i="0" lang="en-GB" sz="1800" u="none" cap="none" strike="noStrike">
+              <a:rPr lang="en-GB" sz="1800" b="0" i="0" u="none" strike="noStrike" cap="none">
                 <a:solidFill>
                   <a:srgbClr val="153988"/>
                 </a:solidFill>
@@ -11793,7 +11806,7 @@
               </a:rPr>
               <a:t>Part 3</a:t>
             </a:r>
-            <a:endParaRPr b="0" i="0" sz="1800" u="none" cap="none" strike="noStrike">
+            <a:endParaRPr sz="1800" b="0" i="0" u="none" strike="noStrike" cap="none">
               <a:solidFill>
                 <a:srgbClr val="153988"/>
               </a:solidFill>
@@ -11804,7 +11817,7 @@
             </a:endParaRPr>
           </a:p>
           <a:p>
-            <a:pPr indent="0" lvl="0" marL="0" marR="0" rtl="0" algn="l">
+            <a:pPr marL="0" marR="0" lvl="0" indent="0" algn="l" rtl="0">
               <a:lnSpc>
                 <a:spcPct val="100000"/>
               </a:lnSpc>
@@ -11822,7 +11835,7 @@
               <a:buNone/>
             </a:pPr>
             <a:r>
-              <a:rPr b="1" i="0" lang="en-GB" sz="1800" u="none" cap="none" strike="noStrike">
+              <a:rPr lang="en-GB" sz="1800" b="1" i="0" u="none" strike="noStrike" cap="none">
                 <a:solidFill>
                   <a:srgbClr val="153988"/>
                 </a:solidFill>
@@ -11833,7 +11846,7 @@
               </a:rPr>
               <a:t>Experience</a:t>
             </a:r>
-            <a:endParaRPr b="1" i="0" sz="1800" u="none" cap="none" strike="noStrike">
+            <a:endParaRPr sz="1800" b="1" i="0" u="none" strike="noStrike" cap="none">
               <a:solidFill>
                 <a:srgbClr val="153988"/>
               </a:solidFill>
@@ -11844,7 +11857,7 @@
             </a:endParaRPr>
           </a:p>
           <a:p>
-            <a:pPr indent="0" lvl="0" marL="0" marR="0" rtl="0" algn="l">
+            <a:pPr marL="0" marR="0" lvl="0" indent="0" algn="l" rtl="0">
               <a:lnSpc>
                 <a:spcPct val="100000"/>
               </a:lnSpc>
@@ -11861,10 +11874,7 @@
               <a:buFont typeface="Arial"/>
               <a:buNone/>
             </a:pPr>
-            <a:r>
-              <a:t/>
-            </a:r>
-            <a:endParaRPr b="1" i="0" sz="1800" u="none" cap="none" strike="noStrike">
+            <a:endParaRPr sz="1800" b="1" i="0" u="none" strike="noStrike" cap="none">
               <a:solidFill>
                 <a:srgbClr val="153988"/>
               </a:solidFill>
@@ -11875,7 +11885,7 @@
             </a:endParaRPr>
           </a:p>
           <a:p>
-            <a:pPr indent="0" lvl="0" marL="0" marR="0" rtl="0" algn="l">
+            <a:pPr marL="0" marR="0" lvl="0" indent="0" algn="l" rtl="0">
               <a:lnSpc>
                 <a:spcPct val="100000"/>
               </a:lnSpc>
@@ -11893,7 +11903,7 @@
               <a:buNone/>
             </a:pPr>
             <a:r>
-              <a:rPr b="0" i="0" lang="en-GB" sz="1800" u="none" cap="none" strike="noStrike">
+              <a:rPr lang="en-GB" sz="1800" b="0" i="0" u="none" strike="noStrike" cap="none">
                 <a:solidFill>
                   <a:srgbClr val="153988"/>
                 </a:solidFill>
@@ -11905,7 +11915,7 @@
               <a:t>Part 4</a:t>
             </a:r>
             <a:br>
-              <a:rPr b="1" i="0" lang="en-GB" sz="1800" u="none" cap="none" strike="noStrike">
+              <a:rPr lang="en-GB" sz="1800" b="1" i="0" u="none" strike="noStrike" cap="none">
                 <a:solidFill>
                   <a:srgbClr val="153988"/>
                 </a:solidFill>
@@ -11916,7 +11926,7 @@
               </a:rPr>
             </a:br>
             <a:r>
-              <a:rPr b="1" i="0" lang="en-GB" sz="1800" u="none" cap="none" strike="noStrike">
+              <a:rPr lang="en-GB" sz="1800" b="1" i="0" u="none" strike="noStrike" cap="none">
                 <a:solidFill>
                   <a:srgbClr val="153988"/>
                 </a:solidFill>
@@ -11927,7 +11937,7 @@
               </a:rPr>
               <a:t>Next Steps</a:t>
             </a:r>
-            <a:endParaRPr b="1" i="0" sz="1800" u="none" cap="none" strike="noStrike">
+            <a:endParaRPr sz="1800" b="1" i="0" u="none" strike="noStrike" cap="none">
               <a:solidFill>
                 <a:srgbClr val="153988"/>
               </a:solidFill>
@@ -11938,7 +11948,7 @@
             </a:endParaRPr>
           </a:p>
           <a:p>
-            <a:pPr indent="0" lvl="0" marL="0" marR="0" rtl="0" algn="l">
+            <a:pPr marL="0" marR="0" lvl="0" indent="0" algn="l" rtl="0">
               <a:lnSpc>
                 <a:spcPct val="100000"/>
               </a:lnSpc>
@@ -11956,7 +11966,7 @@
               <a:buNone/>
             </a:pPr>
             <a:br>
-              <a:rPr b="0" i="0" lang="en-GB" sz="1800" u="none" cap="none" strike="noStrike">
+              <a:rPr lang="en-GB" sz="1800" b="0" i="0" u="none" strike="noStrike" cap="none">
                 <a:solidFill>
                   <a:srgbClr val="153988"/>
                 </a:solidFill>
@@ -11966,7 +11976,7 @@
                 <a:sym typeface="Sora"/>
               </a:rPr>
             </a:br>
-            <a:endParaRPr b="0" i="0" sz="1800" u="none" cap="none" strike="noStrike">
+            <a:endParaRPr sz="1800" b="0" i="0" u="none" strike="noStrike" cap="none">
               <a:solidFill>
                 <a:srgbClr val="153988"/>
               </a:solidFill>
@@ -11977,7 +11987,7 @@
             </a:endParaRPr>
           </a:p>
           <a:p>
-            <a:pPr indent="0" lvl="0" marL="0" marR="0" rtl="0" algn="l">
+            <a:pPr marL="0" marR="0" lvl="0" indent="0" algn="l" rtl="0">
               <a:lnSpc>
                 <a:spcPct val="100000"/>
               </a:lnSpc>
@@ -11994,10 +12004,7 @@
               <a:buFont typeface="Arial"/>
               <a:buNone/>
             </a:pPr>
-            <a:r>
-              <a:t/>
-            </a:r>
-            <a:endParaRPr b="0" i="0" sz="1800" u="none" cap="none" strike="noStrike">
+            <a:endParaRPr sz="1800" b="0" i="0" u="none" strike="noStrike" cap="none">
               <a:solidFill>
                 <a:srgbClr val="153988"/>
               </a:solidFill>
@@ -12029,12 +12036,12 @@
           </a:ln>
         </p:spPr>
         <p:txBody>
-          <a:bodyPr anchorCtr="0" anchor="t" bIns="91425" lIns="91425" spcFirstLastPara="1" rIns="91425" wrap="square" tIns="91425">
+          <a:bodyPr spcFirstLastPara="1" wrap="square" lIns="91425" tIns="91425" rIns="91425" bIns="91425" anchor="t" anchorCtr="0">
             <a:spAutoFit/>
           </a:bodyPr>
           <a:lstStyle/>
           <a:p>
-            <a:pPr indent="0" lvl="0" marL="0" marR="0" rtl="0" algn="l">
+            <a:pPr marL="0" marR="0" lvl="0" indent="0" algn="l" rtl="0">
               <a:lnSpc>
                 <a:spcPct val="115000"/>
               </a:lnSpc>
@@ -12052,7 +12059,7 @@
               <a:buNone/>
             </a:pPr>
             <a:r>
-              <a:rPr b="0" i="0" lang="en-GB" sz="3000" u="none" cap="none" strike="noStrike">
+              <a:rPr lang="en-GB" sz="3000" b="0" i="0" u="none" strike="noStrike" cap="none">
                 <a:solidFill>
                   <a:srgbClr val="FFFFFF"/>
                 </a:solidFill>
@@ -12063,7 +12070,7 @@
               </a:rPr>
               <a:t>Contents</a:t>
             </a:r>
-            <a:endParaRPr b="0" i="0" sz="3000" u="none" cap="none" strike="noStrike">
+            <a:endParaRPr sz="3000" b="0" i="0" u="none" strike="noStrike" cap="none">
               <a:solidFill>
                 <a:srgbClr val="FFFFFF"/>
               </a:solidFill>
@@ -12095,12 +12102,12 @@
           </a:ln>
         </p:spPr>
         <p:txBody>
-          <a:bodyPr anchorCtr="0" anchor="t" bIns="91425" lIns="91425" spcFirstLastPara="1" rIns="91425" wrap="square" tIns="91425">
+          <a:bodyPr spcFirstLastPara="1" wrap="square" lIns="91425" tIns="91425" rIns="91425" bIns="91425" anchor="t" anchorCtr="0">
             <a:spAutoFit/>
           </a:bodyPr>
           <a:lstStyle/>
           <a:p>
-            <a:pPr indent="0" lvl="0" marL="0" marR="0" rtl="0" algn="l">
+            <a:pPr marL="0" marR="0" lvl="0" indent="0" algn="l" rtl="0">
               <a:lnSpc>
                 <a:spcPct val="100000"/>
               </a:lnSpc>
@@ -12118,7 +12125,7 @@
               <a:buNone/>
             </a:pPr>
             <a:r>
-              <a:rPr b="0" i="0" lang="en-GB" sz="1800" u="none" cap="none" strike="noStrike">
+              <a:rPr lang="en-GB" sz="1800" b="0" i="0" u="none" strike="noStrike" cap="none">
                 <a:solidFill>
                   <a:srgbClr val="FDFDA0"/>
                 </a:solidFill>
@@ -12129,7 +12136,7 @@
               </a:rPr>
               <a:t>Green Pathways</a:t>
             </a:r>
-            <a:endParaRPr b="0" i="0" sz="1800" u="none" cap="none" strike="noStrike">
+            <a:endParaRPr sz="1800" b="0" i="0" u="none" strike="noStrike" cap="none">
               <a:solidFill>
                 <a:srgbClr val="FDFDA0"/>
               </a:solidFill>
@@ -12150,11 +12157,11 @@
 </file>
 
 <file path=ppt/slides/slide4.xml><?xml version="1.0" encoding="utf-8"?>
-<p:sld xmlns:a="http://schemas.openxmlformats.org/drawingml/2006/main" xmlns:r="http://schemas.openxmlformats.org/officeDocument/2006/relationships" xmlns:mc="http://schemas.openxmlformats.org/markup-compatibility/2006" xmlns:mv="urn:schemas-microsoft-com:mac:vml" xmlns:p="http://schemas.openxmlformats.org/presentationml/2006/main" xmlns:c="http://schemas.openxmlformats.org/drawingml/2006/chart" xmlns:dgm="http://schemas.openxmlformats.org/drawingml/2006/diagram" xmlns:o="urn:schemas-microsoft-com:office:office" xmlns:v="urn:schemas-microsoft-com:vml" xmlns:pvml="urn:schemas-microsoft-com:office:powerpoint" xmlns:com="http://schemas.openxmlformats.org/drawingml/2006/compatibility" xmlns:p14="http://schemas.microsoft.com/office/powerpoint/2010/main" xmlns:p15="http://schemas.microsoft.com/office/powerpoint/2012/main" xmlns:ahyp="http://schemas.microsoft.com/office/drawing/2018/hyperlinkcolor">
+<p:sld xmlns:a="http://schemas.openxmlformats.org/drawingml/2006/main" xmlns:r="http://schemas.openxmlformats.org/officeDocument/2006/relationships" xmlns:p="http://schemas.openxmlformats.org/presentationml/2006/main">
   <p:cSld>
     <p:spTree>
       <p:nvGrpSpPr>
-        <p:cNvPr id="76" name="Shape 76"/>
+        <p:cNvPr id="1" name="Shape 76"/>
         <p:cNvGrpSpPr/>
         <p:nvPr/>
       </p:nvGrpSpPr>
@@ -12186,12 +12193,12 @@
           </a:ln>
         </p:spPr>
         <p:txBody>
-          <a:bodyPr anchorCtr="0" anchor="t" bIns="91425" lIns="91425" spcFirstLastPara="1" rIns="91425" wrap="square" tIns="91425">
+          <a:bodyPr spcFirstLastPara="1" wrap="square" lIns="91425" tIns="91425" rIns="91425" bIns="91425" anchor="t" anchorCtr="0">
             <a:spAutoFit/>
           </a:bodyPr>
           <a:lstStyle/>
           <a:p>
-            <a:pPr indent="0" lvl="0" marL="0" marR="0" rtl="0" algn="l">
+            <a:pPr marL="0" marR="0" lvl="0" indent="0" algn="l" rtl="0">
               <a:lnSpc>
                 <a:spcPct val="100000"/>
               </a:lnSpc>
@@ -12209,7 +12216,7 @@
               <a:buNone/>
             </a:pPr>
             <a:r>
-              <a:rPr b="0" i="0" lang="en-GB" sz="8000" u="none" cap="none" strike="noStrike">
+              <a:rPr lang="en-GB" sz="8000" b="0" i="0" u="none" strike="noStrike" cap="none">
                 <a:solidFill>
                   <a:srgbClr val="153988"/>
                 </a:solidFill>
@@ -12221,7 +12228,7 @@
               <a:t>01</a:t>
             </a:r>
             <a:br>
-              <a:rPr b="0" i="0" lang="en-GB" sz="4000" u="none" cap="none" strike="noStrike">
+              <a:rPr lang="en-GB" sz="4000" b="0" i="0" u="none" strike="noStrike" cap="none">
                 <a:solidFill>
                   <a:srgbClr val="153988"/>
                 </a:solidFill>
@@ -12232,7 +12239,7 @@
               </a:rPr>
             </a:br>
             <a:r>
-              <a:rPr b="0" i="0" lang="en-GB" sz="4000" u="none" cap="none" strike="noStrike">
+              <a:rPr lang="en-GB" sz="4000" b="0" i="0" u="none" strike="noStrike" cap="none">
                 <a:solidFill>
                   <a:srgbClr val="153988"/>
                 </a:solidFill>
@@ -12243,7 +12250,7 @@
               </a:rPr>
               <a:t>Opportunities</a:t>
             </a:r>
-            <a:endParaRPr b="0" i="0" sz="4000" u="none" cap="none" strike="noStrike">
+            <a:endParaRPr sz="4000" b="0" i="0" u="none" strike="noStrike" cap="none">
               <a:solidFill>
                 <a:srgbClr val="153988"/>
               </a:solidFill>
@@ -12254,7 +12261,7 @@
             </a:endParaRPr>
           </a:p>
           <a:p>
-            <a:pPr indent="0" lvl="0" marL="0" marR="0" rtl="0" algn="l">
+            <a:pPr marL="0" marR="0" lvl="0" indent="0" algn="l" rtl="0">
               <a:lnSpc>
                 <a:spcPct val="100000"/>
               </a:lnSpc>
@@ -12271,10 +12278,7 @@
               <a:buFont typeface="Arial"/>
               <a:buNone/>
             </a:pPr>
-            <a:r>
-              <a:t/>
-            </a:r>
-            <a:endParaRPr b="0" i="0" sz="3000" u="none" cap="none" strike="noStrike">
+            <a:endParaRPr sz="3000" b="0" i="0" u="none" strike="noStrike" cap="none">
               <a:solidFill>
                 <a:srgbClr val="153988"/>
               </a:solidFill>
@@ -12285,7 +12289,7 @@
             </a:endParaRPr>
           </a:p>
           <a:p>
-            <a:pPr indent="0" lvl="0" marL="0" marR="0" rtl="0" algn="l">
+            <a:pPr marL="0" marR="0" lvl="0" indent="0" algn="l" rtl="0">
               <a:lnSpc>
                 <a:spcPct val="100000"/>
               </a:lnSpc>
@@ -12303,7 +12307,7 @@
               <a:buNone/>
             </a:pPr>
             <a:r>
-              <a:rPr b="0" i="0" lang="en-GB" sz="1800" u="none" cap="none" strike="noStrike">
+              <a:rPr lang="en-GB" sz="1800" b="0" i="0" u="none" strike="noStrike" cap="none">
                 <a:solidFill>
                   <a:srgbClr val="153988"/>
                 </a:solidFill>
@@ -12314,7 +12318,7 @@
               </a:rPr>
               <a:t>What opportunity for employment have you found that aligns with your interests and transferable skills? What is the specific role or career path you will pursue?</a:t>
             </a:r>
-            <a:endParaRPr b="0" i="0" sz="1800" u="none" cap="none" strike="noStrike">
+            <a:endParaRPr sz="1800" b="0" i="0" u="none" strike="noStrike" cap="none">
               <a:solidFill>
                 <a:srgbClr val="153988"/>
               </a:solidFill>
@@ -12346,12 +12350,12 @@
           </a:ln>
         </p:spPr>
         <p:txBody>
-          <a:bodyPr anchorCtr="0" anchor="t" bIns="91425" lIns="91425" spcFirstLastPara="1" rIns="91425" wrap="square" tIns="91425">
+          <a:bodyPr spcFirstLastPara="1" wrap="square" lIns="91425" tIns="91425" rIns="91425" bIns="91425" anchor="t" anchorCtr="0">
             <a:spAutoFit/>
           </a:bodyPr>
           <a:lstStyle/>
           <a:p>
-            <a:pPr indent="0" lvl="0" marL="0" marR="0" rtl="0" algn="l">
+            <a:pPr marL="0" marR="0" lvl="0" indent="0" algn="l" rtl="0">
               <a:lnSpc>
                 <a:spcPct val="100000"/>
               </a:lnSpc>
@@ -12369,7 +12373,7 @@
               <a:buNone/>
             </a:pPr>
             <a:r>
-              <a:rPr b="0" i="0" lang="en-GB" sz="1800" u="none" cap="none" strike="noStrike">
+              <a:rPr lang="en-GB" sz="1800" b="0" i="0" u="none" strike="noStrike" cap="none">
                 <a:solidFill>
                   <a:srgbClr val="9EED6B"/>
                 </a:solidFill>
@@ -12380,7 +12384,7 @@
               </a:rPr>
               <a:t>Green Pathways</a:t>
             </a:r>
-            <a:endParaRPr b="0" i="0" sz="1800" u="none" cap="none" strike="noStrike">
+            <a:endParaRPr sz="1800" b="0" i="0" u="none" strike="noStrike" cap="none">
               <a:solidFill>
                 <a:srgbClr val="9EED6B"/>
               </a:solidFill>
@@ -12401,11 +12405,11 @@
 </file>
 
 <file path=ppt/slides/slide5.xml><?xml version="1.0" encoding="utf-8"?>
-<p:sld xmlns:a="http://schemas.openxmlformats.org/drawingml/2006/main" xmlns:r="http://schemas.openxmlformats.org/officeDocument/2006/relationships" xmlns:mc="http://schemas.openxmlformats.org/markup-compatibility/2006" xmlns:mv="urn:schemas-microsoft-com:mac:vml" xmlns:p="http://schemas.openxmlformats.org/presentationml/2006/main" xmlns:c="http://schemas.openxmlformats.org/drawingml/2006/chart" xmlns:dgm="http://schemas.openxmlformats.org/drawingml/2006/diagram" xmlns:o="urn:schemas-microsoft-com:office:office" xmlns:v="urn:schemas-microsoft-com:vml" xmlns:pvml="urn:schemas-microsoft-com:office:powerpoint" xmlns:com="http://schemas.openxmlformats.org/drawingml/2006/compatibility" xmlns:p14="http://schemas.microsoft.com/office/powerpoint/2010/main" xmlns:p15="http://schemas.microsoft.com/office/powerpoint/2012/main" xmlns:ahyp="http://schemas.microsoft.com/office/drawing/2018/hyperlinkcolor">
+<p:sld xmlns:a="http://schemas.openxmlformats.org/drawingml/2006/main" xmlns:r="http://schemas.openxmlformats.org/officeDocument/2006/relationships" xmlns:p="http://schemas.openxmlformats.org/presentationml/2006/main">
   <p:cSld>
     <p:spTree>
       <p:nvGrpSpPr>
-        <p:cNvPr id="82" name="Shape 82"/>
+        <p:cNvPr id="1" name="Shape 82"/>
         <p:cNvGrpSpPr/>
         <p:nvPr/>
       </p:nvGrpSpPr>
@@ -12420,9 +12424,11 @@
       <p:sp>
         <p:nvSpPr>
           <p:cNvPr id="83" name="Google Shape;83;p18"/>
-          <p:cNvSpPr txBox="1"/>
+          <p:cNvSpPr txBox="1">
+            <a:spLocks noGrp="1"/>
+          </p:cNvSpPr>
           <p:nvPr>
-            <p:ph idx="4294967295" type="title"/>
+            <p:ph type="title" idx="4294967295"/>
           </p:nvPr>
         </p:nvSpPr>
         <p:spPr>
@@ -12439,12 +12445,12 @@
           </a:ln>
         </p:spPr>
         <p:txBody>
-          <a:bodyPr anchorCtr="0" anchor="t" bIns="91425" lIns="91425" spcFirstLastPara="1" rIns="91425" wrap="square" tIns="91425">
+          <a:bodyPr spcFirstLastPara="1" wrap="square" lIns="91425" tIns="91425" rIns="91425" bIns="91425" anchor="t" anchorCtr="0">
             <a:normAutofit fontScale="90000"/>
           </a:bodyPr>
           <a:lstStyle/>
           <a:p>
-            <a:pPr indent="0" lvl="0" marL="0" rtl="0" algn="l">
+            <a:pPr marL="0" lvl="0" indent="0" algn="l" rtl="0">
               <a:lnSpc>
                 <a:spcPct val="100000"/>
               </a:lnSpc>
@@ -12457,9 +12463,6 @@
               <a:buSzPct val="111111"/>
               <a:buNone/>
             </a:pPr>
-            <a:r>
-              <a:t/>
-            </a:r>
             <a:endParaRPr/>
           </a:p>
         </p:txBody>
@@ -12467,9 +12470,11 @@
       <p:sp>
         <p:nvSpPr>
           <p:cNvPr id="84" name="Google Shape;84;p18"/>
-          <p:cNvSpPr txBox="1"/>
+          <p:cNvSpPr txBox="1">
+            <a:spLocks noGrp="1"/>
+          </p:cNvSpPr>
           <p:nvPr>
-            <p:ph idx="4294967295" type="body"/>
+            <p:ph type="body" idx="4294967295"/>
           </p:nvPr>
         </p:nvSpPr>
         <p:spPr>
@@ -12486,12 +12491,12 @@
           </a:ln>
         </p:spPr>
         <p:txBody>
-          <a:bodyPr anchorCtr="0" anchor="t" bIns="91425" lIns="91425" spcFirstLastPara="1" rIns="91425" wrap="square" tIns="91425">
+          <a:bodyPr spcFirstLastPara="1" wrap="square" lIns="91425" tIns="91425" rIns="91425" bIns="91425" anchor="t" anchorCtr="0">
             <a:normAutofit/>
           </a:bodyPr>
           <a:lstStyle/>
           <a:p>
-            <a:pPr indent="0" lvl="0" marL="0" rtl="0" algn="l">
+            <a:pPr marL="0" lvl="0" indent="0" algn="l" rtl="0">
               <a:lnSpc>
                 <a:spcPct val="115000"/>
               </a:lnSpc>
@@ -12504,9 +12509,6 @@
               <a:buSzPts val="1800"/>
               <a:buNone/>
             </a:pPr>
-            <a:r>
-              <a:t/>
-            </a:r>
             <a:endParaRPr/>
           </a:p>
         </p:txBody>
@@ -12514,9 +12516,11 @@
       <p:sp>
         <p:nvSpPr>
           <p:cNvPr id="85" name="Google Shape;85;p18"/>
-          <p:cNvSpPr txBox="1"/>
+          <p:cNvSpPr txBox="1">
+            <a:spLocks noGrp="1"/>
+          </p:cNvSpPr>
           <p:nvPr>
-            <p:ph idx="4294967295" type="body"/>
+            <p:ph type="body" idx="4294967295"/>
           </p:nvPr>
         </p:nvSpPr>
         <p:spPr>
@@ -12533,12 +12537,12 @@
           </a:ln>
         </p:spPr>
         <p:txBody>
-          <a:bodyPr anchorCtr="0" anchor="t" bIns="91425" lIns="91425" spcFirstLastPara="1" rIns="91425" wrap="square" tIns="91425">
+          <a:bodyPr spcFirstLastPara="1" wrap="square" lIns="91425" tIns="91425" rIns="91425" bIns="91425" anchor="t" anchorCtr="0">
             <a:normAutofit/>
           </a:bodyPr>
           <a:lstStyle/>
           <a:p>
-            <a:pPr indent="0" lvl="0" marL="0" rtl="0" algn="l">
+            <a:pPr marL="0" lvl="0" indent="0" algn="l" rtl="0">
               <a:lnSpc>
                 <a:spcPct val="115000"/>
               </a:lnSpc>
@@ -12551,9 +12555,6 @@
               <a:buSzPts val="1800"/>
               <a:buNone/>
             </a:pPr>
-            <a:r>
-              <a:t/>
-            </a:r>
             <a:endParaRPr/>
           </a:p>
         </p:txBody>
@@ -12578,12 +12579,12 @@
           </a:ln>
         </p:spPr>
         <p:txBody>
-          <a:bodyPr anchorCtr="0" anchor="t" bIns="91425" lIns="91425" spcFirstLastPara="1" rIns="91425" wrap="square" tIns="91425">
+          <a:bodyPr spcFirstLastPara="1" wrap="square" lIns="91425" tIns="91425" rIns="91425" bIns="91425" anchor="t" anchorCtr="0">
             <a:spAutoFit/>
           </a:bodyPr>
           <a:lstStyle/>
           <a:p>
-            <a:pPr indent="0" lvl="0" marL="0" marR="0" rtl="0" algn="l">
+            <a:pPr marL="0" marR="0" lvl="0" indent="0" algn="l" rtl="0">
               <a:lnSpc>
                 <a:spcPct val="100000"/>
               </a:lnSpc>
@@ -12601,7 +12602,7 @@
               <a:buNone/>
             </a:pPr>
             <a:r>
-              <a:rPr b="0" i="0" lang="en-GB" sz="1800" u="none" cap="none" strike="noStrike">
+              <a:rPr lang="en-GB" sz="1800" b="0" i="0" u="none" strike="noStrike" cap="none">
                 <a:solidFill>
                   <a:srgbClr val="9EED6B"/>
                 </a:solidFill>
@@ -12612,7 +12613,7 @@
               </a:rPr>
               <a:t>Green Pathways</a:t>
             </a:r>
-            <a:endParaRPr b="0" i="0" sz="1800" u="none" cap="none" strike="noStrike">
+            <a:endParaRPr sz="1800" b="0" i="0" u="none" strike="noStrike" cap="none">
               <a:solidFill>
                 <a:srgbClr val="9EED6B"/>
               </a:solidFill>
@@ -12633,11 +12634,11 @@
 </file>
 
 <file path=ppt/slides/slide6.xml><?xml version="1.0" encoding="utf-8"?>
-<p:sld xmlns:a="http://schemas.openxmlformats.org/drawingml/2006/main" xmlns:r="http://schemas.openxmlformats.org/officeDocument/2006/relationships" xmlns:mc="http://schemas.openxmlformats.org/markup-compatibility/2006" xmlns:mv="urn:schemas-microsoft-com:mac:vml" xmlns:p="http://schemas.openxmlformats.org/presentationml/2006/main" xmlns:c="http://schemas.openxmlformats.org/drawingml/2006/chart" xmlns:dgm="http://schemas.openxmlformats.org/drawingml/2006/diagram" xmlns:o="urn:schemas-microsoft-com:office:office" xmlns:v="urn:schemas-microsoft-com:vml" xmlns:pvml="urn:schemas-microsoft-com:office:powerpoint" xmlns:com="http://schemas.openxmlformats.org/drawingml/2006/compatibility" xmlns:p14="http://schemas.microsoft.com/office/powerpoint/2010/main" xmlns:p15="http://schemas.microsoft.com/office/powerpoint/2012/main" xmlns:ahyp="http://schemas.microsoft.com/office/drawing/2018/hyperlinkcolor">
+<p:sld xmlns:a="http://schemas.openxmlformats.org/drawingml/2006/main" xmlns:r="http://schemas.openxmlformats.org/officeDocument/2006/relationships" xmlns:p="http://schemas.openxmlformats.org/presentationml/2006/main">
   <p:cSld>
     <p:spTree>
       <p:nvGrpSpPr>
-        <p:cNvPr id="90" name="Shape 90"/>
+        <p:cNvPr id="1" name="Shape 90"/>
         <p:cNvGrpSpPr/>
         <p:nvPr/>
       </p:nvGrpSpPr>
@@ -12669,12 +12670,12 @@
           </a:ln>
         </p:spPr>
         <p:txBody>
-          <a:bodyPr anchorCtr="0" anchor="t" bIns="91425" lIns="91425" spcFirstLastPara="1" rIns="91425" wrap="square" tIns="91425">
+          <a:bodyPr spcFirstLastPara="1" wrap="square" lIns="91425" tIns="91425" rIns="91425" bIns="91425" anchor="t" anchorCtr="0">
             <a:spAutoFit/>
           </a:bodyPr>
           <a:lstStyle/>
           <a:p>
-            <a:pPr indent="0" lvl="0" marL="0" marR="0" rtl="0" algn="l">
+            <a:pPr marL="0" marR="0" lvl="0" indent="0" algn="l" rtl="0">
               <a:lnSpc>
                 <a:spcPct val="100000"/>
               </a:lnSpc>
@@ -12692,7 +12693,7 @@
               <a:buNone/>
             </a:pPr>
             <a:r>
-              <a:rPr b="0" i="0" lang="en-GB" sz="8000" u="none" cap="none" strike="noStrike">
+              <a:rPr lang="en-GB" sz="8000" b="0" i="0" u="none" strike="noStrike" cap="none">
                 <a:solidFill>
                   <a:srgbClr val="153988"/>
                 </a:solidFill>
@@ -12704,7 +12705,7 @@
               <a:t>02</a:t>
             </a:r>
             <a:br>
-              <a:rPr b="0" i="0" lang="en-GB" sz="4000" u="none" cap="none" strike="noStrike">
+              <a:rPr lang="en-GB" sz="4000" b="0" i="0" u="none" strike="noStrike" cap="none">
                 <a:solidFill>
                   <a:srgbClr val="153988"/>
                 </a:solidFill>
@@ -12715,7 +12716,7 @@
               </a:rPr>
             </a:br>
             <a:r>
-              <a:rPr b="0" i="0" lang="en-GB" sz="4000" u="none" cap="none" strike="noStrike">
+              <a:rPr lang="en-GB" sz="4000" b="0" i="0" u="none" strike="noStrike" cap="none">
                 <a:solidFill>
                   <a:srgbClr val="153988"/>
                 </a:solidFill>
@@ -12726,7 +12727,7 @@
               </a:rPr>
               <a:t>Skills &amp; Education</a:t>
             </a:r>
-            <a:endParaRPr b="0" i="0" sz="4000" u="none" cap="none" strike="noStrike">
+            <a:endParaRPr sz="4000" b="0" i="0" u="none" strike="noStrike" cap="none">
               <a:solidFill>
                 <a:srgbClr val="153988"/>
               </a:solidFill>
@@ -12737,7 +12738,7 @@
             </a:endParaRPr>
           </a:p>
           <a:p>
-            <a:pPr indent="0" lvl="0" marL="0" marR="0" rtl="0" algn="l">
+            <a:pPr marL="0" marR="0" lvl="0" indent="0" algn="l" rtl="0">
               <a:lnSpc>
                 <a:spcPct val="100000"/>
               </a:lnSpc>
@@ -12754,10 +12755,7 @@
               <a:buFont typeface="Arial"/>
               <a:buNone/>
             </a:pPr>
-            <a:r>
-              <a:t/>
-            </a:r>
-            <a:endParaRPr b="0" i="0" sz="3000" u="none" cap="none" strike="noStrike">
+            <a:endParaRPr sz="3000" b="0" i="0" u="none" strike="noStrike" cap="none">
               <a:solidFill>
                 <a:srgbClr val="153988"/>
               </a:solidFill>
@@ -12768,7 +12766,7 @@
             </a:endParaRPr>
           </a:p>
           <a:p>
-            <a:pPr indent="0" lvl="0" marL="0" marR="0" rtl="0" algn="l">
+            <a:pPr marL="0" marR="0" lvl="0" indent="0" algn="l" rtl="0">
               <a:lnSpc>
                 <a:spcPct val="100000"/>
               </a:lnSpc>
@@ -12786,7 +12784,7 @@
               <a:buNone/>
             </a:pPr>
             <a:r>
-              <a:rPr b="0" i="0" lang="en-GB" sz="1800" u="none" cap="none" strike="noStrike">
+              <a:rPr lang="en-GB" sz="1800" b="0" i="0" u="none" strike="noStrike" cap="none">
                 <a:solidFill>
                   <a:srgbClr val="153988"/>
                 </a:solidFill>
@@ -12797,7 +12795,7 @@
               </a:rPr>
               <a:t>What skills, education, and/or training are required for the role(s) you’ve found? What attributes will you need to acquire to apply for the opportunity identified in Part 1 (Opportunities)?</a:t>
             </a:r>
-            <a:endParaRPr b="0" i="0" sz="1800" u="none" cap="none" strike="noStrike">
+            <a:endParaRPr sz="1800" b="0" i="0" u="none" strike="noStrike" cap="none">
               <a:solidFill>
                 <a:srgbClr val="153988"/>
               </a:solidFill>
@@ -12829,12 +12827,12 @@
           </a:ln>
         </p:spPr>
         <p:txBody>
-          <a:bodyPr anchorCtr="0" anchor="t" bIns="91425" lIns="91425" spcFirstLastPara="1" rIns="91425" wrap="square" tIns="91425">
+          <a:bodyPr spcFirstLastPara="1" wrap="square" lIns="91425" tIns="91425" rIns="91425" bIns="91425" anchor="t" anchorCtr="0">
             <a:spAutoFit/>
           </a:bodyPr>
           <a:lstStyle/>
           <a:p>
-            <a:pPr indent="0" lvl="0" marL="0" marR="0" rtl="0" algn="l">
+            <a:pPr marL="0" marR="0" lvl="0" indent="0" algn="l" rtl="0">
               <a:lnSpc>
                 <a:spcPct val="100000"/>
               </a:lnSpc>
@@ -12852,7 +12850,7 @@
               <a:buNone/>
             </a:pPr>
             <a:r>
-              <a:rPr b="0" i="0" lang="en-GB" sz="1800" u="none" cap="none" strike="noStrike">
+              <a:rPr lang="en-GB" sz="1800" b="0" i="0" u="none" strike="noStrike" cap="none">
                 <a:solidFill>
                   <a:srgbClr val="9EED6B"/>
                 </a:solidFill>
@@ -12863,7 +12861,7 @@
               </a:rPr>
               <a:t>Green Pathways</a:t>
             </a:r>
-            <a:endParaRPr b="0" i="0" sz="1800" u="none" cap="none" strike="noStrike">
+            <a:endParaRPr sz="1800" b="0" i="0" u="none" strike="noStrike" cap="none">
               <a:solidFill>
                 <a:srgbClr val="9EED6B"/>
               </a:solidFill>
@@ -12884,11 +12882,11 @@
 </file>
 
 <file path=ppt/slides/slide7.xml><?xml version="1.0" encoding="utf-8"?>
-<p:sld xmlns:a="http://schemas.openxmlformats.org/drawingml/2006/main" xmlns:r="http://schemas.openxmlformats.org/officeDocument/2006/relationships" xmlns:mc="http://schemas.openxmlformats.org/markup-compatibility/2006" xmlns:mv="urn:schemas-microsoft-com:mac:vml" xmlns:p="http://schemas.openxmlformats.org/presentationml/2006/main" xmlns:c="http://schemas.openxmlformats.org/drawingml/2006/chart" xmlns:dgm="http://schemas.openxmlformats.org/drawingml/2006/diagram" xmlns:o="urn:schemas-microsoft-com:office:office" xmlns:v="urn:schemas-microsoft-com:vml" xmlns:pvml="urn:schemas-microsoft-com:office:powerpoint" xmlns:com="http://schemas.openxmlformats.org/drawingml/2006/compatibility" xmlns:p14="http://schemas.microsoft.com/office/powerpoint/2010/main" xmlns:p15="http://schemas.microsoft.com/office/powerpoint/2012/main" xmlns:ahyp="http://schemas.microsoft.com/office/drawing/2018/hyperlinkcolor">
+<p:sld xmlns:a="http://schemas.openxmlformats.org/drawingml/2006/main" xmlns:r="http://schemas.openxmlformats.org/officeDocument/2006/relationships" xmlns:p="http://schemas.openxmlformats.org/presentationml/2006/main">
   <p:cSld>
     <p:spTree>
       <p:nvGrpSpPr>
-        <p:cNvPr id="96" name="Shape 96"/>
+        <p:cNvPr id="1" name="Shape 96"/>
         <p:cNvGrpSpPr/>
         <p:nvPr/>
       </p:nvGrpSpPr>
@@ -12903,9 +12901,11 @@
       <p:sp>
         <p:nvSpPr>
           <p:cNvPr id="97" name="Google Shape;97;p20"/>
-          <p:cNvSpPr txBox="1"/>
+          <p:cNvSpPr txBox="1">
+            <a:spLocks noGrp="1"/>
+          </p:cNvSpPr>
           <p:nvPr>
-            <p:ph idx="4294967295" type="title"/>
+            <p:ph type="title" idx="4294967295"/>
           </p:nvPr>
         </p:nvSpPr>
         <p:spPr>
@@ -12922,12 +12922,12 @@
           </a:ln>
         </p:spPr>
         <p:txBody>
-          <a:bodyPr anchorCtr="0" anchor="t" bIns="91425" lIns="91425" spcFirstLastPara="1" rIns="91425" wrap="square" tIns="91425">
+          <a:bodyPr spcFirstLastPara="1" wrap="square" lIns="91425" tIns="91425" rIns="91425" bIns="91425" anchor="t" anchorCtr="0">
             <a:normAutofit fontScale="90000"/>
           </a:bodyPr>
           <a:lstStyle/>
           <a:p>
-            <a:pPr indent="0" lvl="0" marL="0" rtl="0" algn="l">
+            <a:pPr marL="0" lvl="0" indent="0" algn="l" rtl="0">
               <a:lnSpc>
                 <a:spcPct val="100000"/>
               </a:lnSpc>
@@ -12940,9 +12940,6 @@
               <a:buSzPct val="111111"/>
               <a:buNone/>
             </a:pPr>
-            <a:r>
-              <a:t/>
-            </a:r>
             <a:endParaRPr/>
           </a:p>
         </p:txBody>
@@ -12950,9 +12947,11 @@
       <p:sp>
         <p:nvSpPr>
           <p:cNvPr id="98" name="Google Shape;98;p20"/>
-          <p:cNvSpPr txBox="1"/>
+          <p:cNvSpPr txBox="1">
+            <a:spLocks noGrp="1"/>
+          </p:cNvSpPr>
           <p:nvPr>
-            <p:ph idx="4294967295" type="body"/>
+            <p:ph type="body" idx="4294967295"/>
           </p:nvPr>
         </p:nvSpPr>
         <p:spPr>
@@ -12969,12 +12968,12 @@
           </a:ln>
         </p:spPr>
         <p:txBody>
-          <a:bodyPr anchorCtr="0" anchor="t" bIns="91425" lIns="91425" spcFirstLastPara="1" rIns="91425" wrap="square" tIns="91425">
+          <a:bodyPr spcFirstLastPara="1" wrap="square" lIns="91425" tIns="91425" rIns="91425" bIns="91425" anchor="t" anchorCtr="0">
             <a:normAutofit/>
           </a:bodyPr>
           <a:lstStyle/>
           <a:p>
-            <a:pPr indent="0" lvl="0" marL="0" rtl="0" algn="l">
+            <a:pPr marL="0" lvl="0" indent="0" algn="l" rtl="0">
               <a:lnSpc>
                 <a:spcPct val="115000"/>
               </a:lnSpc>
@@ -12987,9 +12986,6 @@
               <a:buSzPts val="1800"/>
               <a:buNone/>
             </a:pPr>
-            <a:r>
-              <a:t/>
-            </a:r>
             <a:endParaRPr/>
           </a:p>
         </p:txBody>
@@ -12997,9 +12993,11 @@
       <p:sp>
         <p:nvSpPr>
           <p:cNvPr id="99" name="Google Shape;99;p20"/>
-          <p:cNvSpPr txBox="1"/>
+          <p:cNvSpPr txBox="1">
+            <a:spLocks noGrp="1"/>
+          </p:cNvSpPr>
           <p:nvPr>
-            <p:ph idx="4294967295" type="body"/>
+            <p:ph type="body" idx="4294967295"/>
           </p:nvPr>
         </p:nvSpPr>
         <p:spPr>
@@ -13016,12 +13014,12 @@
           </a:ln>
         </p:spPr>
         <p:txBody>
-          <a:bodyPr anchorCtr="0" anchor="t" bIns="91425" lIns="91425" spcFirstLastPara="1" rIns="91425" wrap="square" tIns="91425">
+          <a:bodyPr spcFirstLastPara="1" wrap="square" lIns="91425" tIns="91425" rIns="91425" bIns="91425" anchor="t" anchorCtr="0">
             <a:normAutofit/>
           </a:bodyPr>
           <a:lstStyle/>
           <a:p>
-            <a:pPr indent="0" lvl="0" marL="0" rtl="0" algn="l">
+            <a:pPr marL="0" lvl="0" indent="0" algn="l" rtl="0">
               <a:lnSpc>
                 <a:spcPct val="115000"/>
               </a:lnSpc>
@@ -13034,9 +13032,6 @@
               <a:buSzPts val="1800"/>
               <a:buNone/>
             </a:pPr>
-            <a:r>
-              <a:t/>
-            </a:r>
             <a:endParaRPr/>
           </a:p>
         </p:txBody>
@@ -13061,12 +13056,12 @@
           </a:ln>
         </p:spPr>
         <p:txBody>
-          <a:bodyPr anchorCtr="0" anchor="t" bIns="91425" lIns="91425" spcFirstLastPara="1" rIns="91425" wrap="square" tIns="91425">
+          <a:bodyPr spcFirstLastPara="1" wrap="square" lIns="91425" tIns="91425" rIns="91425" bIns="91425" anchor="t" anchorCtr="0">
             <a:spAutoFit/>
           </a:bodyPr>
           <a:lstStyle/>
           <a:p>
-            <a:pPr indent="0" lvl="0" marL="0" marR="0" rtl="0" algn="l">
+            <a:pPr marL="0" marR="0" lvl="0" indent="0" algn="l" rtl="0">
               <a:lnSpc>
                 <a:spcPct val="100000"/>
               </a:lnSpc>
@@ -13084,7 +13079,7 @@
               <a:buNone/>
             </a:pPr>
             <a:r>
-              <a:rPr b="0" i="0" lang="en-GB" sz="1800" u="none" cap="none" strike="noStrike">
+              <a:rPr lang="en-GB" sz="1800" b="0" i="0" u="none" strike="noStrike" cap="none">
                 <a:solidFill>
                   <a:srgbClr val="9EED6B"/>
                 </a:solidFill>
@@ -13095,7 +13090,7 @@
               </a:rPr>
               <a:t>Green Pathways</a:t>
             </a:r>
-            <a:endParaRPr b="0" i="0" sz="1800" u="none" cap="none" strike="noStrike">
+            <a:endParaRPr sz="1800" b="0" i="0" u="none" strike="noStrike" cap="none">
               <a:solidFill>
                 <a:srgbClr val="9EED6B"/>
               </a:solidFill>
@@ -13116,11 +13111,11 @@
 </file>
 
 <file path=ppt/slides/slide8.xml><?xml version="1.0" encoding="utf-8"?>
-<p:sld xmlns:a="http://schemas.openxmlformats.org/drawingml/2006/main" xmlns:r="http://schemas.openxmlformats.org/officeDocument/2006/relationships" xmlns:mc="http://schemas.openxmlformats.org/markup-compatibility/2006" xmlns:mv="urn:schemas-microsoft-com:mac:vml" xmlns:p="http://schemas.openxmlformats.org/presentationml/2006/main" xmlns:c="http://schemas.openxmlformats.org/drawingml/2006/chart" xmlns:dgm="http://schemas.openxmlformats.org/drawingml/2006/diagram" xmlns:o="urn:schemas-microsoft-com:office:office" xmlns:v="urn:schemas-microsoft-com:vml" xmlns:pvml="urn:schemas-microsoft-com:office:powerpoint" xmlns:com="http://schemas.openxmlformats.org/drawingml/2006/compatibility" xmlns:p14="http://schemas.microsoft.com/office/powerpoint/2010/main" xmlns:p15="http://schemas.microsoft.com/office/powerpoint/2012/main" xmlns:ahyp="http://schemas.microsoft.com/office/drawing/2018/hyperlinkcolor">
+<p:sld xmlns:a="http://schemas.openxmlformats.org/drawingml/2006/main" xmlns:r="http://schemas.openxmlformats.org/officeDocument/2006/relationships" xmlns:p="http://schemas.openxmlformats.org/presentationml/2006/main">
   <p:cSld>
     <p:spTree>
       <p:nvGrpSpPr>
-        <p:cNvPr id="104" name="Shape 104"/>
+        <p:cNvPr id="1" name="Shape 104"/>
         <p:cNvGrpSpPr/>
         <p:nvPr/>
       </p:nvGrpSpPr>
@@ -13152,12 +13147,12 @@
           </a:ln>
         </p:spPr>
         <p:txBody>
-          <a:bodyPr anchorCtr="0" anchor="t" bIns="91425" lIns="91425" spcFirstLastPara="1" rIns="91425" wrap="square" tIns="91425">
+          <a:bodyPr spcFirstLastPara="1" wrap="square" lIns="91425" tIns="91425" rIns="91425" bIns="91425" anchor="t" anchorCtr="0">
             <a:spAutoFit/>
           </a:bodyPr>
           <a:lstStyle/>
           <a:p>
-            <a:pPr indent="0" lvl="0" marL="0" marR="0" rtl="0" algn="l">
+            <a:pPr marL="0" marR="0" lvl="0" indent="0" algn="l" rtl="0">
               <a:lnSpc>
                 <a:spcPct val="100000"/>
               </a:lnSpc>
@@ -13175,7 +13170,7 @@
               <a:buNone/>
             </a:pPr>
             <a:r>
-              <a:rPr b="0" i="0" lang="en-GB" sz="8000" u="none" cap="none" strike="noStrike">
+              <a:rPr lang="en-GB" sz="8000" b="0" i="0" u="none" strike="noStrike" cap="none">
                 <a:solidFill>
                   <a:srgbClr val="153988"/>
                 </a:solidFill>
@@ -13187,7 +13182,7 @@
               <a:t>03</a:t>
             </a:r>
             <a:br>
-              <a:rPr b="0" i="0" lang="en-GB" sz="4000" u="none" cap="none" strike="noStrike">
+              <a:rPr lang="en-GB" sz="4000" b="0" i="0" u="none" strike="noStrike" cap="none">
                 <a:solidFill>
                   <a:srgbClr val="153988"/>
                 </a:solidFill>
@@ -13198,7 +13193,7 @@
               </a:rPr>
             </a:br>
             <a:r>
-              <a:rPr b="0" i="0" lang="en-GB" sz="4000" u="none" cap="none" strike="noStrike">
+              <a:rPr lang="en-GB" sz="4000" b="0" i="0" u="none" strike="noStrike" cap="none">
                 <a:solidFill>
                   <a:srgbClr val="153988"/>
                 </a:solidFill>
@@ -13209,7 +13204,7 @@
               </a:rPr>
               <a:t>Experience</a:t>
             </a:r>
-            <a:endParaRPr b="0" i="0" sz="4000" u="none" cap="none" strike="noStrike">
+            <a:endParaRPr sz="4000" b="0" i="0" u="none" strike="noStrike" cap="none">
               <a:solidFill>
                 <a:srgbClr val="153988"/>
               </a:solidFill>
@@ -13220,7 +13215,7 @@
             </a:endParaRPr>
           </a:p>
           <a:p>
-            <a:pPr indent="0" lvl="0" marL="0" marR="0" rtl="0" algn="l">
+            <a:pPr marL="0" marR="0" lvl="0" indent="0" algn="l" rtl="0">
               <a:lnSpc>
                 <a:spcPct val="100000"/>
               </a:lnSpc>
@@ -13237,10 +13232,7 @@
               <a:buFont typeface="Arial"/>
               <a:buNone/>
             </a:pPr>
-            <a:r>
-              <a:t/>
-            </a:r>
-            <a:endParaRPr b="0" i="0" sz="3000" u="none" cap="none" strike="noStrike">
+            <a:endParaRPr sz="3000" b="0" i="0" u="none" strike="noStrike" cap="none">
               <a:solidFill>
                 <a:srgbClr val="153988"/>
               </a:solidFill>
@@ -13251,7 +13243,7 @@
             </a:endParaRPr>
           </a:p>
           <a:p>
-            <a:pPr indent="0" lvl="0" marL="0" marR="0" rtl="0" algn="l">
+            <a:pPr marL="0" marR="0" lvl="0" indent="0" algn="l" rtl="0">
               <a:lnSpc>
                 <a:spcPct val="100000"/>
               </a:lnSpc>
@@ -13269,7 +13261,7 @@
               <a:buNone/>
             </a:pPr>
             <a:r>
-              <a:rPr b="0" i="0" lang="en-GB" sz="1800" u="none" cap="none" strike="noStrike">
+              <a:rPr lang="en-GB" sz="1800" b="0" i="0" u="none" strike="noStrike" cap="none">
                 <a:solidFill>
                   <a:srgbClr val="153988"/>
                 </a:solidFill>
@@ -13280,7 +13272,7 @@
               </a:rPr>
               <a:t>How can you demonstrate your own readiness to apply for the opportunity you’ve found? Do you have any transferable skills? Can you present real-life or hypothetical examples of the requirements identified in Part 2 (Skills &amp; Education)?</a:t>
             </a:r>
-            <a:endParaRPr b="0" i="0" sz="1800" u="none" cap="none" strike="noStrike">
+            <a:endParaRPr sz="1800" b="0" i="0" u="none" strike="noStrike" cap="none">
               <a:solidFill>
                 <a:srgbClr val="153988"/>
               </a:solidFill>
@@ -13312,12 +13304,12 @@
           </a:ln>
         </p:spPr>
         <p:txBody>
-          <a:bodyPr anchorCtr="0" anchor="t" bIns="91425" lIns="91425" spcFirstLastPara="1" rIns="91425" wrap="square" tIns="91425">
+          <a:bodyPr spcFirstLastPara="1" wrap="square" lIns="91425" tIns="91425" rIns="91425" bIns="91425" anchor="t" anchorCtr="0">
             <a:spAutoFit/>
           </a:bodyPr>
           <a:lstStyle/>
           <a:p>
-            <a:pPr indent="0" lvl="0" marL="0" marR="0" rtl="0" algn="l">
+            <a:pPr marL="0" marR="0" lvl="0" indent="0" algn="l" rtl="0">
               <a:lnSpc>
                 <a:spcPct val="100000"/>
               </a:lnSpc>
@@ -13335,7 +13327,7 @@
               <a:buNone/>
             </a:pPr>
             <a:r>
-              <a:rPr b="0" i="0" lang="en-GB" sz="1800" u="none" cap="none" strike="noStrike">
+              <a:rPr lang="en-GB" sz="1800" b="0" i="0" u="none" strike="noStrike" cap="none">
                 <a:solidFill>
                   <a:srgbClr val="9EED6B"/>
                 </a:solidFill>
@@ -13346,7 +13338,7 @@
               </a:rPr>
               <a:t>Green Pathways</a:t>
             </a:r>
-            <a:endParaRPr b="0" i="0" sz="1800" u="none" cap="none" strike="noStrike">
+            <a:endParaRPr sz="1800" b="0" i="0" u="none" strike="noStrike" cap="none">
               <a:solidFill>
                 <a:srgbClr val="9EED6B"/>
               </a:solidFill>
@@ -13367,11 +13359,11 @@
 </file>
 
 <file path=ppt/slides/slide9.xml><?xml version="1.0" encoding="utf-8"?>
-<p:sld xmlns:a="http://schemas.openxmlformats.org/drawingml/2006/main" xmlns:r="http://schemas.openxmlformats.org/officeDocument/2006/relationships" xmlns:mc="http://schemas.openxmlformats.org/markup-compatibility/2006" xmlns:mv="urn:schemas-microsoft-com:mac:vml" xmlns:p="http://schemas.openxmlformats.org/presentationml/2006/main" xmlns:c="http://schemas.openxmlformats.org/drawingml/2006/chart" xmlns:dgm="http://schemas.openxmlformats.org/drawingml/2006/diagram" xmlns:o="urn:schemas-microsoft-com:office:office" xmlns:v="urn:schemas-microsoft-com:vml" xmlns:pvml="urn:schemas-microsoft-com:office:powerpoint" xmlns:com="http://schemas.openxmlformats.org/drawingml/2006/compatibility" xmlns:p14="http://schemas.microsoft.com/office/powerpoint/2010/main" xmlns:p15="http://schemas.microsoft.com/office/powerpoint/2012/main" xmlns:ahyp="http://schemas.microsoft.com/office/drawing/2018/hyperlinkcolor">
+<p:sld xmlns:a="http://schemas.openxmlformats.org/drawingml/2006/main" xmlns:r="http://schemas.openxmlformats.org/officeDocument/2006/relationships" xmlns:p="http://schemas.openxmlformats.org/presentationml/2006/main">
   <p:cSld>
     <p:spTree>
       <p:nvGrpSpPr>
-        <p:cNvPr id="110" name="Shape 110"/>
+        <p:cNvPr id="1" name="Shape 110"/>
         <p:cNvGrpSpPr/>
         <p:nvPr/>
       </p:nvGrpSpPr>
@@ -13386,9 +13378,11 @@
       <p:sp>
         <p:nvSpPr>
           <p:cNvPr id="111" name="Google Shape;111;p22"/>
-          <p:cNvSpPr txBox="1"/>
+          <p:cNvSpPr txBox="1">
+            <a:spLocks noGrp="1"/>
+          </p:cNvSpPr>
           <p:nvPr>
-            <p:ph idx="4294967295" type="title"/>
+            <p:ph type="title" idx="4294967295"/>
           </p:nvPr>
         </p:nvSpPr>
         <p:spPr>
@@ -13405,12 +13399,12 @@
           </a:ln>
         </p:spPr>
         <p:txBody>
-          <a:bodyPr anchorCtr="0" anchor="t" bIns="91425" lIns="91425" spcFirstLastPara="1" rIns="91425" wrap="square" tIns="91425">
+          <a:bodyPr spcFirstLastPara="1" wrap="square" lIns="91425" tIns="91425" rIns="91425" bIns="91425" anchor="t" anchorCtr="0">
             <a:normAutofit fontScale="90000"/>
           </a:bodyPr>
           <a:lstStyle/>
           <a:p>
-            <a:pPr indent="0" lvl="0" marL="0" rtl="0" algn="l">
+            <a:pPr marL="0" lvl="0" indent="0" algn="l" rtl="0">
               <a:lnSpc>
                 <a:spcPct val="100000"/>
               </a:lnSpc>
@@ -13423,9 +13417,6 @@
               <a:buSzPct val="111111"/>
               <a:buNone/>
             </a:pPr>
-            <a:r>
-              <a:t/>
-            </a:r>
             <a:endParaRPr/>
           </a:p>
         </p:txBody>
@@ -13433,9 +13424,11 @@
       <p:sp>
         <p:nvSpPr>
           <p:cNvPr id="112" name="Google Shape;112;p22"/>
-          <p:cNvSpPr txBox="1"/>
+          <p:cNvSpPr txBox="1">
+            <a:spLocks noGrp="1"/>
+          </p:cNvSpPr>
           <p:nvPr>
-            <p:ph idx="4294967295" type="body"/>
+            <p:ph type="body" idx="4294967295"/>
           </p:nvPr>
         </p:nvSpPr>
         <p:spPr>
@@ -13452,12 +13445,12 @@
           </a:ln>
         </p:spPr>
         <p:txBody>
-          <a:bodyPr anchorCtr="0" anchor="t" bIns="91425" lIns="91425" spcFirstLastPara="1" rIns="91425" wrap="square" tIns="91425">
+          <a:bodyPr spcFirstLastPara="1" wrap="square" lIns="91425" tIns="91425" rIns="91425" bIns="91425" anchor="t" anchorCtr="0">
             <a:normAutofit/>
           </a:bodyPr>
           <a:lstStyle/>
           <a:p>
-            <a:pPr indent="0" lvl="0" marL="0" rtl="0" algn="l">
+            <a:pPr marL="0" lvl="0" indent="0" algn="l" rtl="0">
               <a:lnSpc>
                 <a:spcPct val="115000"/>
               </a:lnSpc>
@@ -13470,9 +13463,6 @@
               <a:buSzPts val="1800"/>
               <a:buNone/>
             </a:pPr>
-            <a:r>
-              <a:t/>
-            </a:r>
             <a:endParaRPr/>
           </a:p>
         </p:txBody>
@@ -13480,9 +13470,11 @@
       <p:sp>
         <p:nvSpPr>
           <p:cNvPr id="113" name="Google Shape;113;p22"/>
-          <p:cNvSpPr txBox="1"/>
+          <p:cNvSpPr txBox="1">
+            <a:spLocks noGrp="1"/>
+          </p:cNvSpPr>
           <p:nvPr>
-            <p:ph idx="4294967295" type="body"/>
+            <p:ph type="body" idx="4294967295"/>
           </p:nvPr>
         </p:nvSpPr>
         <p:spPr>
@@ -13499,12 +13491,12 @@
           </a:ln>
         </p:spPr>
         <p:txBody>
-          <a:bodyPr anchorCtr="0" anchor="t" bIns="91425" lIns="91425" spcFirstLastPara="1" rIns="91425" wrap="square" tIns="91425">
+          <a:bodyPr spcFirstLastPara="1" wrap="square" lIns="91425" tIns="91425" rIns="91425" bIns="91425" anchor="t" anchorCtr="0">
             <a:normAutofit/>
           </a:bodyPr>
           <a:lstStyle/>
           <a:p>
-            <a:pPr indent="0" lvl="0" marL="0" rtl="0" algn="l">
+            <a:pPr marL="0" lvl="0" indent="0" algn="l" rtl="0">
               <a:lnSpc>
                 <a:spcPct val="115000"/>
               </a:lnSpc>
@@ -13517,9 +13509,6 @@
               <a:buSzPts val="1800"/>
               <a:buNone/>
             </a:pPr>
-            <a:r>
-              <a:t/>
-            </a:r>
             <a:endParaRPr/>
           </a:p>
         </p:txBody>
@@ -13544,12 +13533,12 @@
           </a:ln>
         </p:spPr>
         <p:txBody>
-          <a:bodyPr anchorCtr="0" anchor="t" bIns="91425" lIns="91425" spcFirstLastPara="1" rIns="91425" wrap="square" tIns="91425">
+          <a:bodyPr spcFirstLastPara="1" wrap="square" lIns="91425" tIns="91425" rIns="91425" bIns="91425" anchor="t" anchorCtr="0">
             <a:spAutoFit/>
           </a:bodyPr>
           <a:lstStyle/>
           <a:p>
-            <a:pPr indent="0" lvl="0" marL="0" marR="0" rtl="0" algn="l">
+            <a:pPr marL="0" marR="0" lvl="0" indent="0" algn="l" rtl="0">
               <a:lnSpc>
                 <a:spcPct val="100000"/>
               </a:lnSpc>
@@ -13567,7 +13556,7 @@
               <a:buNone/>
             </a:pPr>
             <a:r>
-              <a:rPr b="0" i="0" lang="en-GB" sz="1800" u="none" cap="none" strike="noStrike">
+              <a:rPr lang="en-GB" sz="1800" b="0" i="0" u="none" strike="noStrike" cap="none">
                 <a:solidFill>
                   <a:srgbClr val="9EED6B"/>
                 </a:solidFill>
@@ -13578,7 +13567,7 @@
               </a:rPr>
               <a:t>Green Pathways</a:t>
             </a:r>
-            <a:endParaRPr b="0" i="0" sz="1800" u="none" cap="none" strike="noStrike">
+            <a:endParaRPr sz="1800" b="0" i="0" u="none" strike="noStrike" cap="none">
               <a:solidFill>
                 <a:srgbClr val="9EED6B"/>
               </a:solidFill>
@@ -13599,7 +13588,7 @@
 </file>
 
 <file path=ppt/theme/theme1.xml><?xml version="1.0" encoding="utf-8"?>
-<a:theme xmlns:a="http://schemas.openxmlformats.org/drawingml/2006/main" xmlns:r="http://schemas.openxmlformats.org/officeDocument/2006/relationships" name="Simple Light">
+<a:theme xmlns:a="http://schemas.openxmlformats.org/drawingml/2006/main" name="Simple Light">
   <a:themeElements>
     <a:clrScheme name="Simple Light">
       <a:dk1>
@@ -13874,11 +13863,13 @@
       </a:bgFillStyleLst>
     </a:fmtScheme>
   </a:themeElements>
+  <a:objectDefaults/>
+  <a:extraClrSchemeLst/>
 </a:theme>
 </file>
 
 <file path=ppt/theme/theme2.xml><?xml version="1.0" encoding="utf-8"?>
-<a:theme xmlns:a="http://schemas.openxmlformats.org/drawingml/2006/main" xmlns:r="http://schemas.openxmlformats.org/officeDocument/2006/relationships">
+<a:theme xmlns:a="http://schemas.openxmlformats.org/drawingml/2006/main">
   <a:themeElements>
     <a:clrScheme name="Default">
       <a:dk1>
@@ -14153,5 +14144,7 @@
       </a:bgFillStyleLst>
     </a:fmtScheme>
   </a:themeElements>
+  <a:objectDefaults/>
+  <a:extraClrSchemeLst/>
 </a:theme>
 </file>
--- a/templates/presentation_template_en.pptx
+++ b/templates/presentation_template_en.pptx
@@ -32,7 +32,7 @@
       <p:boldItalic r:id="rId18"/>
     </p:embeddedFont>
     <p:embeddedFont>
-      <p:font typeface="Sora" pitchFamily="2" charset="0"/>
+      <p:font typeface="Sora"/>
       <p:regular r:id="rId19"/>
       <p:bold r:id="rId20"/>
     </p:embeddedFont>
@@ -1143,7 +1143,7 @@
         </p:nvSpPr>
         <p:spPr>
           <a:xfrm>
-            <a:off x="381300" y="685800"/>
+            <a:off x="381000" y="685800"/>
             <a:ext cx="6096000" cy="3429000"/>
           </a:xfrm>
           <a:custGeom>
@@ -1753,7 +1753,7 @@
         </p:nvSpPr>
         <p:spPr>
           <a:xfrm>
-            <a:off x="381300" y="685800"/>
+            <a:off x="381000" y="685800"/>
             <a:ext cx="6096000" cy="3429000"/>
           </a:xfrm>
           <a:custGeom>
@@ -1997,7 +1997,7 @@
         </p:nvSpPr>
         <p:spPr>
           <a:xfrm>
-            <a:off x="381300" y="685800"/>
+            <a:off x="381000" y="685800"/>
             <a:ext cx="6096000" cy="3429000"/>
           </a:xfrm>
           <a:custGeom>
@@ -2241,7 +2241,7 @@
         </p:nvSpPr>
         <p:spPr>
           <a:xfrm>
-            <a:off x="381300" y="685800"/>
+            <a:off x="381000" y="685800"/>
             <a:ext cx="6096000" cy="3429000"/>
           </a:xfrm>
           <a:custGeom>
@@ -4290,6 +4290,13 @@
             <a:noFill/>
           </a:ln>
         </p:spPr>
+        <p:txBody>
+          <a:bodyPr/>
+          <a:lstStyle/>
+          <a:p>
+            <a:endParaRPr lang="en-US"/>
+          </a:p>
+        </p:txBody>
       </p:sp>
     </p:spTree>
   </p:cSld>
@@ -10752,7 +10759,7 @@
               <a:buSzPct val="111111"/>
               <a:buNone/>
             </a:pPr>
-            <a:endParaRPr/>
+            <a:endParaRPr dirty="0"/>
           </a:p>
         </p:txBody>
       </p:sp>
@@ -10844,7 +10851,7 @@
               <a:buSzPts val="1800"/>
               <a:buNone/>
             </a:pPr>
-            <a:endParaRPr/>
+            <a:endParaRPr dirty="0"/>
           </a:p>
         </p:txBody>
       </p:sp>
@@ -12463,7 +12470,7 @@
               <a:buSzPct val="111111"/>
               <a:buNone/>
             </a:pPr>
-            <a:endParaRPr/>
+            <a:endParaRPr dirty="0"/>
           </a:p>
         </p:txBody>
       </p:sp>
@@ -12509,7 +12516,7 @@
               <a:buSzPts val="1800"/>
               <a:buNone/>
             </a:pPr>
-            <a:endParaRPr/>
+            <a:endParaRPr dirty="0"/>
           </a:p>
         </p:txBody>
       </p:sp>
@@ -12555,7 +12562,7 @@
               <a:buSzPts val="1800"/>
               <a:buNone/>
             </a:pPr>
-            <a:endParaRPr/>
+            <a:endParaRPr dirty="0"/>
           </a:p>
         </p:txBody>
       </p:sp>
@@ -12693,7 +12700,7 @@
               <a:buNone/>
             </a:pPr>
             <a:r>
-              <a:rPr lang="en-GB" sz="8000" b="0" i="0" u="none" strike="noStrike" cap="none">
+              <a:rPr lang="en-GB" sz="8000" b="0" i="0" u="none" strike="noStrike" cap="none" dirty="0">
                 <a:solidFill>
                   <a:srgbClr val="153988"/>
                 </a:solidFill>
@@ -12705,7 +12712,7 @@
               <a:t>02</a:t>
             </a:r>
             <a:br>
-              <a:rPr lang="en-GB" sz="4000" b="0" i="0" u="none" strike="noStrike" cap="none">
+              <a:rPr lang="en-GB" sz="4000" b="0" i="0" u="none" strike="noStrike" cap="none" dirty="0">
                 <a:solidFill>
                   <a:srgbClr val="153988"/>
                 </a:solidFill>
@@ -12716,7 +12723,7 @@
               </a:rPr>
             </a:br>
             <a:r>
-              <a:rPr lang="en-GB" sz="4000" b="0" i="0" u="none" strike="noStrike" cap="none">
+              <a:rPr lang="en-GB" sz="4000" b="0" i="0" u="none" strike="noStrike" cap="none" dirty="0">
                 <a:solidFill>
                   <a:srgbClr val="153988"/>
                 </a:solidFill>
@@ -12727,7 +12734,7 @@
               </a:rPr>
               <a:t>Skills &amp; Education</a:t>
             </a:r>
-            <a:endParaRPr sz="4000" b="0" i="0" u="none" strike="noStrike" cap="none">
+            <a:endParaRPr sz="4000" b="0" i="0" u="none" strike="noStrike" cap="none" dirty="0">
               <a:solidFill>
                 <a:srgbClr val="153988"/>
               </a:solidFill>
@@ -12755,7 +12762,7 @@
               <a:buFont typeface="Arial"/>
               <a:buNone/>
             </a:pPr>
-            <a:endParaRPr sz="3000" b="0" i="0" u="none" strike="noStrike" cap="none">
+            <a:endParaRPr sz="3000" b="0" i="0" u="none" strike="noStrike" cap="none" dirty="0">
               <a:solidFill>
                 <a:srgbClr val="153988"/>
               </a:solidFill>
@@ -12784,7 +12791,7 @@
               <a:buNone/>
             </a:pPr>
             <a:r>
-              <a:rPr lang="en-GB" sz="1800" b="0" i="0" u="none" strike="noStrike" cap="none">
+              <a:rPr lang="en-GB" sz="1800" b="0" i="0" u="none" strike="noStrike" cap="none" dirty="0">
                 <a:solidFill>
                   <a:srgbClr val="153988"/>
                 </a:solidFill>
@@ -12795,7 +12802,7 @@
               </a:rPr>
               <a:t>What skills, education, and/or training are required for the role(s) you’ve found? What attributes will you need to acquire to apply for the opportunity identified in Part 1 (Opportunities)?</a:t>
             </a:r>
-            <a:endParaRPr sz="1800" b="0" i="0" u="none" strike="noStrike" cap="none">
+            <a:endParaRPr sz="1800" b="0" i="0" u="none" strike="noStrike" cap="none" dirty="0">
               <a:solidFill>
                 <a:srgbClr val="153988"/>
               </a:solidFill>
@@ -12940,7 +12947,7 @@
               <a:buSzPct val="111111"/>
               <a:buNone/>
             </a:pPr>
-            <a:endParaRPr/>
+            <a:endParaRPr dirty="0"/>
           </a:p>
         </p:txBody>
       </p:sp>
@@ -12986,7 +12993,7 @@
               <a:buSzPts val="1800"/>
               <a:buNone/>
             </a:pPr>
-            <a:endParaRPr/>
+            <a:endParaRPr dirty="0"/>
           </a:p>
         </p:txBody>
       </p:sp>
@@ -13032,7 +13039,7 @@
               <a:buSzPts val="1800"/>
               <a:buNone/>
             </a:pPr>
-            <a:endParaRPr/>
+            <a:endParaRPr dirty="0"/>
           </a:p>
         </p:txBody>
       </p:sp>
@@ -13417,7 +13424,7 @@
               <a:buSzPct val="111111"/>
               <a:buNone/>
             </a:pPr>
-            <a:endParaRPr/>
+            <a:endParaRPr dirty="0"/>
           </a:p>
         </p:txBody>
       </p:sp>
@@ -13463,7 +13470,7 @@
               <a:buSzPts val="1800"/>
               <a:buNone/>
             </a:pPr>
-            <a:endParaRPr/>
+            <a:endParaRPr dirty="0"/>
           </a:p>
         </p:txBody>
       </p:sp>
@@ -13509,7 +13516,7 @@
               <a:buSzPts val="1800"/>
               <a:buNone/>
             </a:pPr>
-            <a:endParaRPr/>
+            <a:endParaRPr dirty="0"/>
           </a:p>
         </p:txBody>
       </p:sp>
